--- a/w3_Vectors_and_Linear_Transformations.pptx
+++ b/w3_Vectors_and_Linear_Transformations.pptx
@@ -5,10 +5,10 @@
     <p:sldMasterId id="2147483660" r:id="rId1"/>
   </p:sldMasterIdLst>
   <p:notesMasterIdLst>
-    <p:notesMasterId r:id="rId65"/>
+    <p:notesMasterId r:id="rId66"/>
   </p:notesMasterIdLst>
   <p:handoutMasterIdLst>
-    <p:handoutMasterId r:id="rId66"/>
+    <p:handoutMasterId r:id="rId67"/>
   </p:handoutMasterIdLst>
   <p:sldIdLst>
     <p:sldId id="256" r:id="rId2"/>
@@ -40,40 +40,41 @@
     <p:sldId id="311" r:id="rId28"/>
     <p:sldId id="312" r:id="rId29"/>
     <p:sldId id="313" r:id="rId30"/>
-    <p:sldId id="352" r:id="rId31"/>
-    <p:sldId id="318" r:id="rId32"/>
-    <p:sldId id="319" r:id="rId33"/>
-    <p:sldId id="325" r:id="rId34"/>
-    <p:sldId id="933" r:id="rId35"/>
-    <p:sldId id="320" r:id="rId36"/>
-    <p:sldId id="326" r:id="rId37"/>
-    <p:sldId id="321" r:id="rId38"/>
-    <p:sldId id="354" r:id="rId39"/>
-    <p:sldId id="322" r:id="rId40"/>
-    <p:sldId id="323" r:id="rId41"/>
-    <p:sldId id="355" r:id="rId42"/>
-    <p:sldId id="345" r:id="rId43"/>
-    <p:sldId id="337" r:id="rId44"/>
-    <p:sldId id="344" r:id="rId45"/>
-    <p:sldId id="343" r:id="rId46"/>
-    <p:sldId id="356" r:id="rId47"/>
-    <p:sldId id="338" r:id="rId48"/>
-    <p:sldId id="339" r:id="rId49"/>
-    <p:sldId id="340" r:id="rId50"/>
-    <p:sldId id="341" r:id="rId51"/>
-    <p:sldId id="342" r:id="rId52"/>
-    <p:sldId id="347" r:id="rId53"/>
-    <p:sldId id="348" r:id="rId54"/>
-    <p:sldId id="263" r:id="rId55"/>
-    <p:sldId id="815" r:id="rId56"/>
-    <p:sldId id="816" r:id="rId57"/>
-    <p:sldId id="817" r:id="rId58"/>
-    <p:sldId id="821" r:id="rId59"/>
-    <p:sldId id="357" r:id="rId60"/>
-    <p:sldId id="811" r:id="rId61"/>
-    <p:sldId id="812" r:id="rId62"/>
-    <p:sldId id="909" r:id="rId63"/>
-    <p:sldId id="930" r:id="rId64"/>
+    <p:sldId id="917" r:id="rId31"/>
+    <p:sldId id="352" r:id="rId32"/>
+    <p:sldId id="318" r:id="rId33"/>
+    <p:sldId id="319" r:id="rId34"/>
+    <p:sldId id="325" r:id="rId35"/>
+    <p:sldId id="933" r:id="rId36"/>
+    <p:sldId id="320" r:id="rId37"/>
+    <p:sldId id="326" r:id="rId38"/>
+    <p:sldId id="321" r:id="rId39"/>
+    <p:sldId id="354" r:id="rId40"/>
+    <p:sldId id="322" r:id="rId41"/>
+    <p:sldId id="323" r:id="rId42"/>
+    <p:sldId id="355" r:id="rId43"/>
+    <p:sldId id="345" r:id="rId44"/>
+    <p:sldId id="337" r:id="rId45"/>
+    <p:sldId id="344" r:id="rId46"/>
+    <p:sldId id="343" r:id="rId47"/>
+    <p:sldId id="356" r:id="rId48"/>
+    <p:sldId id="338" r:id="rId49"/>
+    <p:sldId id="339" r:id="rId50"/>
+    <p:sldId id="340" r:id="rId51"/>
+    <p:sldId id="341" r:id="rId52"/>
+    <p:sldId id="342" r:id="rId53"/>
+    <p:sldId id="347" r:id="rId54"/>
+    <p:sldId id="348" r:id="rId55"/>
+    <p:sldId id="263" r:id="rId56"/>
+    <p:sldId id="815" r:id="rId57"/>
+    <p:sldId id="816" r:id="rId58"/>
+    <p:sldId id="817" r:id="rId59"/>
+    <p:sldId id="821" r:id="rId60"/>
+    <p:sldId id="357" r:id="rId61"/>
+    <p:sldId id="811" r:id="rId62"/>
+    <p:sldId id="812" r:id="rId63"/>
+    <p:sldId id="909" r:id="rId64"/>
+    <p:sldId id="930" r:id="rId65"/>
   </p:sldIdLst>
   <p:sldSz cx="12192000" cy="6858000"/>
   <p:notesSz cx="6858000" cy="9144000"/>
@@ -210,6 +211,7 @@
             <p14:sldId id="311"/>
             <p14:sldId id="312"/>
             <p14:sldId id="313"/>
+            <p14:sldId id="917"/>
             <p14:sldId id="352"/>
             <p14:sldId id="318"/>
             <p14:sldId id="319"/>
@@ -3602,7 +3604,7 @@
                 <a:latin typeface="맑은 고딕" panose="020B0503020000020004" pitchFamily="50" charset="-127"/>
                 <a:ea typeface="맑은 고딕" panose="020B0503020000020004" pitchFamily="50" charset="-127"/>
               </a:rPr>
-              <a:t>30</a:t>
+              <a:t>31</a:t>
             </a:fld>
             <a:endParaRPr lang="ko-KR" altLang="en-US">
               <a:latin typeface="맑은 고딕" panose="020B0503020000020004" pitchFamily="50" charset="-127"/>
@@ -3720,7 +3722,7 @@
                 <a:latin typeface="맑은 고딕" panose="020B0503020000020004" pitchFamily="50" charset="-127"/>
                 <a:ea typeface="맑은 고딕" panose="020B0503020000020004" pitchFamily="50" charset="-127"/>
               </a:rPr>
-              <a:t>31</a:t>
+              <a:t>32</a:t>
             </a:fld>
             <a:endParaRPr lang="ko-KR" altLang="en-US">
               <a:latin typeface="맑은 고딕" panose="020B0503020000020004" pitchFamily="50" charset="-127"/>
@@ -3838,7 +3840,7 @@
                 <a:latin typeface="맑은 고딕" panose="020B0503020000020004" pitchFamily="50" charset="-127"/>
                 <a:ea typeface="맑은 고딕" panose="020B0503020000020004" pitchFamily="50" charset="-127"/>
               </a:rPr>
-              <a:t>32</a:t>
+              <a:t>33</a:t>
             </a:fld>
             <a:endParaRPr lang="ko-KR" altLang="en-US">
               <a:latin typeface="맑은 고딕" panose="020B0503020000020004" pitchFamily="50" charset="-127"/>
@@ -3956,7 +3958,7 @@
                 <a:latin typeface="맑은 고딕" panose="020B0503020000020004" pitchFamily="50" charset="-127"/>
                 <a:ea typeface="맑은 고딕" panose="020B0503020000020004" pitchFamily="50" charset="-127"/>
               </a:rPr>
-              <a:t>33</a:t>
+              <a:t>34</a:t>
             </a:fld>
             <a:endParaRPr lang="ko-KR" altLang="en-US">
               <a:latin typeface="맑은 고딕" panose="020B0503020000020004" pitchFamily="50" charset="-127"/>
@@ -4074,7 +4076,7 @@
                 <a:latin typeface="맑은 고딕" panose="020B0503020000020004" pitchFamily="50" charset="-127"/>
                 <a:ea typeface="맑은 고딕" panose="020B0503020000020004" pitchFamily="50" charset="-127"/>
               </a:rPr>
-              <a:t>34</a:t>
+              <a:t>35</a:t>
             </a:fld>
             <a:endParaRPr lang="ko-KR" altLang="en-US">
               <a:latin typeface="맑은 고딕" panose="020B0503020000020004" pitchFamily="50" charset="-127"/>
@@ -4192,7 +4194,7 @@
                 <a:latin typeface="맑은 고딕" panose="020B0503020000020004" pitchFamily="50" charset="-127"/>
                 <a:ea typeface="맑은 고딕" panose="020B0503020000020004" pitchFamily="50" charset="-127"/>
               </a:rPr>
-              <a:t>35</a:t>
+              <a:t>36</a:t>
             </a:fld>
             <a:endParaRPr lang="ko-KR" altLang="en-US">
               <a:latin typeface="맑은 고딕" panose="020B0503020000020004" pitchFamily="50" charset="-127"/>
@@ -4310,7 +4312,7 @@
                 <a:latin typeface="맑은 고딕" panose="020B0503020000020004" pitchFamily="50" charset="-127"/>
                 <a:ea typeface="맑은 고딕" panose="020B0503020000020004" pitchFamily="50" charset="-127"/>
               </a:rPr>
-              <a:t>36</a:t>
+              <a:t>37</a:t>
             </a:fld>
             <a:endParaRPr lang="ko-KR" altLang="en-US">
               <a:latin typeface="맑은 고딕" panose="020B0503020000020004" pitchFamily="50" charset="-127"/>
@@ -4428,7 +4430,7 @@
                 <a:latin typeface="맑은 고딕" panose="020B0503020000020004" pitchFamily="50" charset="-127"/>
                 <a:ea typeface="맑은 고딕" panose="020B0503020000020004" pitchFamily="50" charset="-127"/>
               </a:rPr>
-              <a:t>37</a:t>
+              <a:t>38</a:t>
             </a:fld>
             <a:endParaRPr lang="ko-KR" altLang="en-US">
               <a:latin typeface="맑은 고딕" panose="020B0503020000020004" pitchFamily="50" charset="-127"/>
@@ -4546,7 +4548,7 @@
                 <a:latin typeface="맑은 고딕" panose="020B0503020000020004" pitchFamily="50" charset="-127"/>
                 <a:ea typeface="맑은 고딕" panose="020B0503020000020004" pitchFamily="50" charset="-127"/>
               </a:rPr>
-              <a:t>38</a:t>
+              <a:t>39</a:t>
             </a:fld>
             <a:endParaRPr lang="ko-KR" altLang="en-US">
               <a:latin typeface="맑은 고딕" panose="020B0503020000020004" pitchFamily="50" charset="-127"/>
@@ -4664,7 +4666,7 @@
                 <a:latin typeface="맑은 고딕" panose="020B0503020000020004" pitchFamily="50" charset="-127"/>
                 <a:ea typeface="맑은 고딕" panose="020B0503020000020004" pitchFamily="50" charset="-127"/>
               </a:rPr>
-              <a:t>39</a:t>
+              <a:t>40</a:t>
             </a:fld>
             <a:endParaRPr lang="ko-KR" altLang="en-US">
               <a:latin typeface="맑은 고딕" panose="020B0503020000020004" pitchFamily="50" charset="-127"/>
@@ -4900,7 +4902,7 @@
                 <a:latin typeface="맑은 고딕" panose="020B0503020000020004" pitchFamily="50" charset="-127"/>
                 <a:ea typeface="맑은 고딕" panose="020B0503020000020004" pitchFamily="50" charset="-127"/>
               </a:rPr>
-              <a:t>40</a:t>
+              <a:t>41</a:t>
             </a:fld>
             <a:endParaRPr lang="ko-KR" altLang="en-US">
               <a:latin typeface="맑은 고딕" panose="020B0503020000020004" pitchFamily="50" charset="-127"/>
@@ -5018,7 +5020,7 @@
                 <a:latin typeface="맑은 고딕" panose="020B0503020000020004" pitchFamily="50" charset="-127"/>
                 <a:ea typeface="맑은 고딕" panose="020B0503020000020004" pitchFamily="50" charset="-127"/>
               </a:rPr>
-              <a:t>41</a:t>
+              <a:t>42</a:t>
             </a:fld>
             <a:endParaRPr lang="ko-KR" altLang="en-US">
               <a:latin typeface="맑은 고딕" panose="020B0503020000020004" pitchFamily="50" charset="-127"/>
@@ -5136,7 +5138,7 @@
                 <a:latin typeface="맑은 고딕" panose="020B0503020000020004" pitchFamily="50" charset="-127"/>
                 <a:ea typeface="맑은 고딕" panose="020B0503020000020004" pitchFamily="50" charset="-127"/>
               </a:rPr>
-              <a:t>42</a:t>
+              <a:t>43</a:t>
             </a:fld>
             <a:endParaRPr lang="ko-KR" altLang="en-US">
               <a:latin typeface="맑은 고딕" panose="020B0503020000020004" pitchFamily="50" charset="-127"/>
@@ -5254,7 +5256,7 @@
                 <a:latin typeface="맑은 고딕" panose="020B0503020000020004" pitchFamily="50" charset="-127"/>
                 <a:ea typeface="맑은 고딕" panose="020B0503020000020004" pitchFamily="50" charset="-127"/>
               </a:rPr>
-              <a:t>43</a:t>
+              <a:t>44</a:t>
             </a:fld>
             <a:endParaRPr lang="ko-KR" altLang="en-US">
               <a:latin typeface="맑은 고딕" panose="020B0503020000020004" pitchFamily="50" charset="-127"/>
@@ -5372,7 +5374,7 @@
                 <a:latin typeface="맑은 고딕" panose="020B0503020000020004" pitchFamily="50" charset="-127"/>
                 <a:ea typeface="맑은 고딕" panose="020B0503020000020004" pitchFamily="50" charset="-127"/>
               </a:rPr>
-              <a:t>44</a:t>
+              <a:t>45</a:t>
             </a:fld>
             <a:endParaRPr lang="ko-KR" altLang="en-US">
               <a:latin typeface="맑은 고딕" panose="020B0503020000020004" pitchFamily="50" charset="-127"/>
@@ -5490,7 +5492,7 @@
                 <a:latin typeface="맑은 고딕" panose="020B0503020000020004" pitchFamily="50" charset="-127"/>
                 <a:ea typeface="맑은 고딕" panose="020B0503020000020004" pitchFamily="50" charset="-127"/>
               </a:rPr>
-              <a:t>45</a:t>
+              <a:t>46</a:t>
             </a:fld>
             <a:endParaRPr lang="ko-KR" altLang="en-US">
               <a:latin typeface="맑은 고딕" panose="020B0503020000020004" pitchFamily="50" charset="-127"/>
@@ -5608,7 +5610,7 @@
                 <a:latin typeface="맑은 고딕" panose="020B0503020000020004" pitchFamily="50" charset="-127"/>
                 <a:ea typeface="맑은 고딕" panose="020B0503020000020004" pitchFamily="50" charset="-127"/>
               </a:rPr>
-              <a:t>46</a:t>
+              <a:t>47</a:t>
             </a:fld>
             <a:endParaRPr lang="ko-KR" altLang="en-US">
               <a:latin typeface="맑은 고딕" panose="020B0503020000020004" pitchFamily="50" charset="-127"/>
@@ -5726,7 +5728,7 @@
                 <a:latin typeface="맑은 고딕" panose="020B0503020000020004" pitchFamily="50" charset="-127"/>
                 <a:ea typeface="맑은 고딕" panose="020B0503020000020004" pitchFamily="50" charset="-127"/>
               </a:rPr>
-              <a:t>47</a:t>
+              <a:t>48</a:t>
             </a:fld>
             <a:endParaRPr lang="ko-KR" altLang="en-US">
               <a:latin typeface="맑은 고딕" panose="020B0503020000020004" pitchFamily="50" charset="-127"/>
@@ -5844,7 +5846,7 @@
                 <a:latin typeface="맑은 고딕" panose="020B0503020000020004" pitchFamily="50" charset="-127"/>
                 <a:ea typeface="맑은 고딕" panose="020B0503020000020004" pitchFamily="50" charset="-127"/>
               </a:rPr>
-              <a:t>48</a:t>
+              <a:t>49</a:t>
             </a:fld>
             <a:endParaRPr lang="ko-KR" altLang="en-US">
               <a:latin typeface="맑은 고딕" panose="020B0503020000020004" pitchFamily="50" charset="-127"/>
@@ -5962,7 +5964,7 @@
                 <a:latin typeface="맑은 고딕" panose="020B0503020000020004" pitchFamily="50" charset="-127"/>
                 <a:ea typeface="맑은 고딕" panose="020B0503020000020004" pitchFamily="50" charset="-127"/>
               </a:rPr>
-              <a:t>49</a:t>
+              <a:t>50</a:t>
             </a:fld>
             <a:endParaRPr lang="ko-KR" altLang="en-US">
               <a:latin typeface="맑은 고딕" panose="020B0503020000020004" pitchFamily="50" charset="-127"/>
@@ -6198,7 +6200,7 @@
                 <a:latin typeface="맑은 고딕" panose="020B0503020000020004" pitchFamily="50" charset="-127"/>
                 <a:ea typeface="맑은 고딕" panose="020B0503020000020004" pitchFamily="50" charset="-127"/>
               </a:rPr>
-              <a:t>50</a:t>
+              <a:t>51</a:t>
             </a:fld>
             <a:endParaRPr lang="ko-KR" altLang="en-US">
               <a:latin typeface="맑은 고딕" panose="020B0503020000020004" pitchFamily="50" charset="-127"/>
@@ -6316,7 +6318,7 @@
                 <a:latin typeface="맑은 고딕" panose="020B0503020000020004" pitchFamily="50" charset="-127"/>
                 <a:ea typeface="맑은 고딕" panose="020B0503020000020004" pitchFamily="50" charset="-127"/>
               </a:rPr>
-              <a:t>51</a:t>
+              <a:t>52</a:t>
             </a:fld>
             <a:endParaRPr lang="ko-KR" altLang="en-US">
               <a:latin typeface="맑은 고딕" panose="020B0503020000020004" pitchFamily="50" charset="-127"/>
@@ -6434,7 +6436,7 @@
                 <a:latin typeface="맑은 고딕" panose="020B0503020000020004" pitchFamily="50" charset="-127"/>
                 <a:ea typeface="맑은 고딕" panose="020B0503020000020004" pitchFamily="50" charset="-127"/>
               </a:rPr>
-              <a:t>52</a:t>
+              <a:t>53</a:t>
             </a:fld>
             <a:endParaRPr lang="ko-KR" altLang="en-US">
               <a:latin typeface="맑은 고딕" panose="020B0503020000020004" pitchFamily="50" charset="-127"/>
@@ -6552,7 +6554,7 @@
                 <a:latin typeface="맑은 고딕" panose="020B0503020000020004" pitchFamily="50" charset="-127"/>
                 <a:ea typeface="맑은 고딕" panose="020B0503020000020004" pitchFamily="50" charset="-127"/>
               </a:rPr>
-              <a:t>53</a:t>
+              <a:t>54</a:t>
             </a:fld>
             <a:endParaRPr lang="ko-KR" altLang="en-US">
               <a:latin typeface="맑은 고딕" panose="020B0503020000020004" pitchFamily="50" charset="-127"/>
@@ -15976,6 +15978,463 @@
         <p:cNvPr id="1" name="">
           <a:extLst>
             <a:ext uri="{FF2B5EF4-FFF2-40B4-BE49-F238E27FC236}">
+              <a16:creationId xmlns:a16="http://schemas.microsoft.com/office/drawing/2014/main" id="{6C9DF1D5-A05D-AEED-E98C-0554BDE9B268}"/>
+            </a:ext>
+          </a:extLst>
+        </p:cNvPr>
+        <p:cNvGrpSpPr/>
+        <p:nvPr/>
+      </p:nvGrpSpPr>
+      <p:grpSpPr>
+        <a:xfrm>
+          <a:off x="0" y="0"/>
+          <a:ext cx="0" cy="0"/>
+          <a:chOff x="0" y="0"/>
+          <a:chExt cx="0" cy="0"/>
+        </a:xfrm>
+      </p:grpSpPr>
+      <p:sp>
+        <p:nvSpPr>
+          <p:cNvPr id="16" name="슬라이드 번호 개체 틀 3">
+            <a:extLst>
+              <a:ext uri="{FF2B5EF4-FFF2-40B4-BE49-F238E27FC236}">
+                <a16:creationId xmlns:a16="http://schemas.microsoft.com/office/drawing/2014/main" id="{6DE98D62-C4CA-D083-42E1-7177B6991FB9}"/>
+              </a:ext>
+            </a:extLst>
+          </p:cNvPr>
+          <p:cNvSpPr>
+            <a:spLocks noGrp="1"/>
+          </p:cNvSpPr>
+          <p:nvPr>
+            <p:ph type="sldNum" sz="quarter" idx="12"/>
+          </p:nvPr>
+        </p:nvSpPr>
+        <p:spPr>
+          <a:xfrm>
+            <a:off x="10884337" y="6273707"/>
+            <a:ext cx="753349" cy="365030"/>
+          </a:xfrm>
+        </p:spPr>
+        <p:txBody>
+          <a:bodyPr/>
+          <a:lstStyle/>
+          <a:p>
+            <a:fld id="{D57F1E4F-1CFF-5643-939E-217C01CDF565}" type="slidenum">
+              <a:rPr lang="en-US" sz="2000" smtClean="0"/>
+              <a:pPr/>
+              <a:t>30</a:t>
+            </a:fld>
+            <a:endParaRPr lang="en-US" sz="2000" dirty="0"/>
+          </a:p>
+        </p:txBody>
+      </p:sp>
+      <p:pic>
+        <p:nvPicPr>
+          <p:cNvPr id="20" name="그림 19">
+            <a:extLst>
+              <a:ext uri="{FF2B5EF4-FFF2-40B4-BE49-F238E27FC236}">
+                <a16:creationId xmlns:a16="http://schemas.microsoft.com/office/drawing/2014/main" id="{367647D6-E586-4953-AC23-D502780608AB}"/>
+              </a:ext>
+            </a:extLst>
+          </p:cNvPr>
+          <p:cNvPicPr>
+            <a:picLocks noChangeAspect="1"/>
+          </p:cNvPicPr>
+          <p:nvPr/>
+        </p:nvPicPr>
+        <p:blipFill>
+          <a:blip r:embed="rId2">
+            <a:duotone>
+              <a:prstClr val="black"/>
+              <a:schemeClr val="bg1">
+                <a:lumMod val="85000"/>
+                <a:tint val="45000"/>
+                <a:satMod val="400000"/>
+              </a:schemeClr>
+            </a:duotone>
+            <a:extLst>
+              <a:ext uri="{BEBA8EAE-BF5A-486C-A8C5-ECC9F3942E4B}">
+                <a14:imgProps xmlns:a14="http://schemas.microsoft.com/office/drawing/2010/main">
+                  <a14:imgLayer r:embed="rId3">
+                    <a14:imgEffect>
+                      <a14:brightnessContrast contrast="-20000"/>
+                    </a14:imgEffect>
+                  </a14:imgLayer>
+                </a14:imgProps>
+              </a:ext>
+            </a:extLst>
+          </a:blip>
+          <a:stretch>
+            <a:fillRect/>
+          </a:stretch>
+        </p:blipFill>
+        <p:spPr>
+          <a:xfrm>
+            <a:off x="704851" y="2193801"/>
+            <a:ext cx="3493480" cy="1690394"/>
+          </a:xfrm>
+          <a:prstGeom prst="rect">
+            <a:avLst/>
+          </a:prstGeom>
+        </p:spPr>
+      </p:pic>
+      <p:pic>
+        <p:nvPicPr>
+          <p:cNvPr id="22" name="그림 21">
+            <a:extLst>
+              <a:ext uri="{FF2B5EF4-FFF2-40B4-BE49-F238E27FC236}">
+                <a16:creationId xmlns:a16="http://schemas.microsoft.com/office/drawing/2014/main" id="{1CCCE8E2-148B-F3D0-98EB-9A973DD2A5AA}"/>
+              </a:ext>
+            </a:extLst>
+          </p:cNvPr>
+          <p:cNvPicPr>
+            <a:picLocks noChangeAspect="1"/>
+          </p:cNvPicPr>
+          <p:nvPr/>
+        </p:nvPicPr>
+        <p:blipFill>
+          <a:blip r:embed="rId4">
+            <a:duotone>
+              <a:prstClr val="black"/>
+              <a:schemeClr val="bg1">
+                <a:lumMod val="85000"/>
+                <a:tint val="45000"/>
+                <a:satMod val="400000"/>
+              </a:schemeClr>
+            </a:duotone>
+          </a:blip>
+          <a:stretch>
+            <a:fillRect/>
+          </a:stretch>
+        </p:blipFill>
+        <p:spPr>
+          <a:xfrm>
+            <a:off x="6492101" y="2253348"/>
+            <a:ext cx="3852049" cy="1505987"/>
+          </a:xfrm>
+          <a:prstGeom prst="rect">
+            <a:avLst/>
+          </a:prstGeom>
+        </p:spPr>
+      </p:pic>
+      <p:pic>
+        <p:nvPicPr>
+          <p:cNvPr id="24" name="그림 23">
+            <a:extLst>
+              <a:ext uri="{FF2B5EF4-FFF2-40B4-BE49-F238E27FC236}">
+                <a16:creationId xmlns:a16="http://schemas.microsoft.com/office/drawing/2014/main" id="{1555B3B8-885E-712C-52AB-4FCF7DF05CE6}"/>
+              </a:ext>
+            </a:extLst>
+          </p:cNvPr>
+          <p:cNvPicPr>
+            <a:picLocks noChangeAspect="1"/>
+          </p:cNvPicPr>
+          <p:nvPr/>
+        </p:nvPicPr>
+        <p:blipFill>
+          <a:blip r:embed="rId5">
+            <a:duotone>
+              <a:prstClr val="black"/>
+              <a:schemeClr val="bg1">
+                <a:lumMod val="85000"/>
+                <a:tint val="45000"/>
+                <a:satMod val="400000"/>
+              </a:schemeClr>
+            </a:duotone>
+          </a:blip>
+          <a:stretch>
+            <a:fillRect/>
+          </a:stretch>
+        </p:blipFill>
+        <p:spPr>
+          <a:xfrm>
+            <a:off x="6492101" y="4503381"/>
+            <a:ext cx="3299599" cy="924829"/>
+          </a:xfrm>
+          <a:prstGeom prst="rect">
+            <a:avLst/>
+          </a:prstGeom>
+        </p:spPr>
+      </p:pic>
+      <p:sp>
+        <p:nvSpPr>
+          <p:cNvPr id="26" name="TextBox 25">
+            <a:extLst>
+              <a:ext uri="{FF2B5EF4-FFF2-40B4-BE49-F238E27FC236}">
+                <a16:creationId xmlns:a16="http://schemas.microsoft.com/office/drawing/2014/main" id="{4825F1F7-D7B1-B08D-29F3-0FD4E2185785}"/>
+              </a:ext>
+            </a:extLst>
+          </p:cNvPr>
+          <p:cNvSpPr txBox="1"/>
+          <p:nvPr/>
+        </p:nvSpPr>
+        <p:spPr>
+          <a:xfrm>
+            <a:off x="581025" y="1723384"/>
+            <a:ext cx="4724400" cy="369332"/>
+          </a:xfrm>
+          <a:prstGeom prst="rect">
+            <a:avLst/>
+          </a:prstGeom>
+          <a:noFill/>
+        </p:spPr>
+        <p:txBody>
+          <a:bodyPr wrap="square">
+            <a:spAutoFit/>
+          </a:bodyPr>
+          <a:lstStyle/>
+          <a:p>
+            <a:pPr>
+              <a:buNone/>
+            </a:pPr>
+            <a:r>
+              <a:rPr lang="ko-KR" altLang="en-US" dirty="0">
+                <a:latin typeface="맑은 고딕 Semilight" panose="020B0502040204020203" pitchFamily="50" charset="-127"/>
+                <a:ea typeface="맑은 고딕 Semilight" panose="020B0502040204020203" pitchFamily="50" charset="-127"/>
+                <a:cs typeface="맑은 고딕 Semilight" panose="020B0502040204020203" pitchFamily="50" charset="-127"/>
+              </a:rPr>
+              <a:t>연립선형방정식</a:t>
+            </a:r>
+            <a:r>
+              <a:rPr lang="en-US" altLang="ko-KR" dirty="0">
+                <a:latin typeface="맑은 고딕 Semilight" panose="020B0502040204020203" pitchFamily="50" charset="-127"/>
+                <a:ea typeface="맑은 고딕 Semilight" panose="020B0502040204020203" pitchFamily="50" charset="-127"/>
+                <a:cs typeface="맑은 고딕 Semilight" panose="020B0502040204020203" pitchFamily="50" charset="-127"/>
+              </a:rPr>
+              <a:t>(System of Linear Equations)</a:t>
+            </a:r>
+          </a:p>
+        </p:txBody>
+      </p:sp>
+      <p:sp>
+        <p:nvSpPr>
+          <p:cNvPr id="30" name="TextBox 29">
+            <a:extLst>
+              <a:ext uri="{FF2B5EF4-FFF2-40B4-BE49-F238E27FC236}">
+                <a16:creationId xmlns:a16="http://schemas.microsoft.com/office/drawing/2014/main" id="{69336A03-1E2E-2809-4249-9EFC05E6C4E5}"/>
+              </a:ext>
+            </a:extLst>
+          </p:cNvPr>
+          <p:cNvSpPr txBox="1"/>
+          <p:nvPr/>
+        </p:nvSpPr>
+        <p:spPr>
+          <a:xfrm>
+            <a:off x="6372225" y="1759253"/>
+            <a:ext cx="4724400" cy="369332"/>
+          </a:xfrm>
+          <a:prstGeom prst="rect">
+            <a:avLst/>
+          </a:prstGeom>
+          <a:noFill/>
+        </p:spPr>
+        <p:txBody>
+          <a:bodyPr wrap="square">
+            <a:spAutoFit/>
+          </a:bodyPr>
+          <a:lstStyle/>
+          <a:p>
+            <a:pPr>
+              <a:buNone/>
+            </a:pPr>
+            <a:r>
+              <a:rPr lang="ko-KR" altLang="en-US" dirty="0">
+                <a:latin typeface="맑은 고딕 Semilight" panose="020B0502040204020203" pitchFamily="50" charset="-127"/>
+                <a:ea typeface="맑은 고딕 Semilight" panose="020B0502040204020203" pitchFamily="50" charset="-127"/>
+                <a:cs typeface="맑은 고딕 Semilight" panose="020B0502040204020203" pitchFamily="50" charset="-127"/>
+              </a:rPr>
+              <a:t>행렬 형태 </a:t>
+            </a:r>
+            <a:r>
+              <a:rPr lang="en-US" altLang="ko-KR" dirty="0">
+                <a:latin typeface="맑은 고딕 Semilight" panose="020B0502040204020203" pitchFamily="50" charset="-127"/>
+                <a:ea typeface="맑은 고딕 Semilight" panose="020B0502040204020203" pitchFamily="50" charset="-127"/>
+                <a:cs typeface="맑은 고딕 Semilight" panose="020B0502040204020203" pitchFamily="50" charset="-127"/>
+              </a:rPr>
+              <a:t>(Matrix Form)</a:t>
+            </a:r>
+          </a:p>
+        </p:txBody>
+      </p:sp>
+      <mc:AlternateContent xmlns:mc="http://schemas.openxmlformats.org/markup-compatibility/2006" xmlns:a14="http://schemas.microsoft.com/office/drawing/2010/main">
+        <mc:Choice Requires="a14">
+          <p:sp>
+            <p:nvSpPr>
+              <p:cNvPr id="32" name="TextBox 31">
+                <a:extLst>
+                  <a:ext uri="{FF2B5EF4-FFF2-40B4-BE49-F238E27FC236}">
+                    <a16:creationId xmlns:a16="http://schemas.microsoft.com/office/drawing/2014/main" id="{01AAC71A-5047-7A37-F9D5-0326B3C078B1}"/>
+                  </a:ext>
+                </a:extLst>
+              </p:cNvPr>
+              <p:cNvSpPr txBox="1"/>
+              <p:nvPr/>
+            </p:nvSpPr>
+            <p:spPr>
+              <a:xfrm>
+                <a:off x="8725814" y="1723384"/>
+                <a:ext cx="2158523" cy="400110"/>
+              </a:xfrm>
+              <a:prstGeom prst="rect">
+                <a:avLst/>
+              </a:prstGeom>
+              <a:noFill/>
+            </p:spPr>
+            <p:txBody>
+              <a:bodyPr wrap="square">
+                <a:spAutoFit/>
+              </a:bodyPr>
+              <a:lstStyle/>
+              <a:p>
+                <a:pPr/>
+                <a14:m>
+                  <m:oMathPara xmlns:m="http://schemas.openxmlformats.org/officeDocument/2006/math">
+                    <m:oMathParaPr>
+                      <m:jc m:val="centerGroup"/>
+                    </m:oMathParaPr>
+                    <m:oMath xmlns:m="http://schemas.openxmlformats.org/officeDocument/2006/math">
+                      <m:r>
+                        <a:rPr lang="en-US" altLang="ko-KR" sz="2000" smtClean="0">
+                          <a:latin typeface="Cambria Math" panose="02040503050406030204" pitchFamily="18" charset="0"/>
+                        </a:rPr>
+                        <m:t>𝑦</m:t>
+                      </m:r>
+                      <m:r>
+                        <a:rPr lang="en-US" altLang="ko-KR" sz="2000" smtClean="0">
+                          <a:latin typeface="Cambria Math" panose="02040503050406030204" pitchFamily="18" charset="0"/>
+                        </a:rPr>
+                        <m:t>=</m:t>
+                      </m:r>
+                      <m:r>
+                        <a:rPr lang="en-US" altLang="ko-KR" sz="2000" smtClean="0">
+                          <a:latin typeface="Cambria Math" panose="02040503050406030204" pitchFamily="18" charset="0"/>
+                        </a:rPr>
+                        <m:t>𝐴𝑥</m:t>
+                      </m:r>
+                    </m:oMath>
+                  </m:oMathPara>
+                </a14:m>
+                <a:endParaRPr lang="ko-KR" altLang="en-US" sz="2000" dirty="0"/>
+              </a:p>
+            </p:txBody>
+          </p:sp>
+        </mc:Choice>
+        <mc:Fallback xmlns="">
+          <p:sp>
+            <p:nvSpPr>
+              <p:cNvPr id="32" name="TextBox 31">
+                <a:extLst>
+                  <a:ext uri="{FF2B5EF4-FFF2-40B4-BE49-F238E27FC236}">
+                    <a16:creationId xmlns:a16="http://schemas.microsoft.com/office/drawing/2014/main" id="{01AAC71A-5047-7A37-F9D5-0326B3C078B1}"/>
+                  </a:ext>
+                </a:extLst>
+              </p:cNvPr>
+              <p:cNvSpPr txBox="1">
+                <a:spLocks noRot="1" noChangeAspect="1" noMove="1" noResize="1" noEditPoints="1" noAdjustHandles="1" noChangeArrowheads="1" noChangeShapeType="1" noTextEdit="1"/>
+              </p:cNvSpPr>
+              <p:nvPr/>
+            </p:nvSpPr>
+            <p:spPr>
+              <a:xfrm>
+                <a:off x="8725814" y="1723384"/>
+                <a:ext cx="2158523" cy="400110"/>
+              </a:xfrm>
+              <a:prstGeom prst="rect">
+                <a:avLst/>
+              </a:prstGeom>
+              <a:blipFill>
+                <a:blip r:embed="rId6"/>
+                <a:stretch>
+                  <a:fillRect b="-7692"/>
+                </a:stretch>
+              </a:blipFill>
+            </p:spPr>
+            <p:txBody>
+              <a:bodyPr/>
+              <a:lstStyle/>
+              <a:p>
+                <a:r>
+                  <a:rPr lang="ko-KR" altLang="en-US">
+                    <a:noFill/>
+                  </a:rPr>
+                  <a:t> </a:t>
+                </a:r>
+              </a:p>
+            </p:txBody>
+          </p:sp>
+        </mc:Fallback>
+      </mc:AlternateContent>
+      <p:sp>
+        <p:nvSpPr>
+          <p:cNvPr id="2" name="제목 1">
+            <a:extLst>
+              <a:ext uri="{FF2B5EF4-FFF2-40B4-BE49-F238E27FC236}">
+                <a16:creationId xmlns:a16="http://schemas.microsoft.com/office/drawing/2014/main" id="{67F56509-EA45-5AA7-1053-C90C622BE098}"/>
+              </a:ext>
+            </a:extLst>
+          </p:cNvPr>
+          <p:cNvSpPr>
+            <a:spLocks noGrp="1"/>
+          </p:cNvSpPr>
+          <p:nvPr>
+            <p:ph type="title"/>
+          </p:nvPr>
+        </p:nvSpPr>
+        <p:spPr>
+          <a:xfrm>
+            <a:off x="913774" y="610390"/>
+            <a:ext cx="10364451" cy="514958"/>
+          </a:xfrm>
+        </p:spPr>
+        <p:txBody>
+          <a:bodyPr>
+            <a:normAutofit fontScale="90000"/>
+          </a:bodyPr>
+          <a:lstStyle/>
+          <a:p>
+            <a:r>
+              <a:rPr lang="en-US" altLang="ko-KR" dirty="0">
+                <a:solidFill>
+                  <a:schemeClr val="bg2">
+                    <a:lumMod val="25000"/>
+                  </a:schemeClr>
+                </a:solidFill>
+                <a:cs typeface="Segoe UI Light" panose="020B0502040204020203" pitchFamily="34" charset="0"/>
+              </a:rPr>
+              <a:t>System of Linear Equations </a:t>
+            </a:r>
+            <a:endParaRPr lang="ko-KR" altLang="en-US" dirty="0">
+              <a:solidFill>
+                <a:schemeClr val="bg2">
+                  <a:lumMod val="25000"/>
+                </a:schemeClr>
+              </a:solidFill>
+              <a:cs typeface="Segoe UI Light" panose="020B0502040204020203" pitchFamily="34" charset="0"/>
+            </a:endParaRPr>
+          </a:p>
+        </p:txBody>
+      </p:sp>
+    </p:spTree>
+    <p:extLst>
+      <p:ext uri="{BB962C8B-B14F-4D97-AF65-F5344CB8AC3E}">
+        <p14:creationId xmlns:p14="http://schemas.microsoft.com/office/powerpoint/2010/main" val="493831590"/>
+      </p:ext>
+    </p:extLst>
+  </p:cSld>
+  <p:clrMapOvr>
+    <a:masterClrMapping/>
+  </p:clrMapOvr>
+</p:sld>
+</file>
+
+<file path=ppt/slides/slide31.xml><?xml version="1.0" encoding="utf-8"?>
+<p:sld xmlns:a="http://schemas.openxmlformats.org/drawingml/2006/main" xmlns:r="http://schemas.openxmlformats.org/officeDocument/2006/relationships" xmlns:p="http://schemas.openxmlformats.org/presentationml/2006/main">
+  <p:cSld>
+    <p:spTree>
+      <p:nvGrpSpPr>
+        <p:cNvPr id="1" name="">
+          <a:extLst>
+            <a:ext uri="{FF2B5EF4-FFF2-40B4-BE49-F238E27FC236}">
               <a16:creationId xmlns:a16="http://schemas.microsoft.com/office/drawing/2014/main" id="{5EC13DF1-6E03-4F16-9134-C864D23A7460}"/>
             </a:ext>
           </a:extLst>
@@ -16110,7 +16569,7 @@
             <a:fld id="{9860EDB8-5305-433F-BE41-D7A86D811DB3}" type="slidenum">
               <a:rPr lang="en-US" altLang="ko-KR" noProof="0" smtClean="0"/>
               <a:pPr/>
-              <a:t>30</a:t>
+              <a:t>31</a:t>
             </a:fld>
             <a:endParaRPr lang="ko-KR" altLang="en-US" noProof="0"/>
           </a:p>
@@ -16319,7 +16778,7 @@
 </p:sld>
 </file>
 
-<file path=ppt/slides/slide31.xml><?xml version="1.0" encoding="utf-8"?>
+<file path=ppt/slides/slide32.xml><?xml version="1.0" encoding="utf-8"?>
 <p:sld xmlns:a="http://schemas.openxmlformats.org/drawingml/2006/main" xmlns:r="http://schemas.openxmlformats.org/officeDocument/2006/relationships" xmlns:p="http://schemas.openxmlformats.org/presentationml/2006/main">
   <p:cSld>
     <p:spTree>
@@ -16404,7 +16863,7 @@
             <a:fld id="{9860EDB8-5305-433F-BE41-D7A86D811DB3}" type="slidenum">
               <a:rPr lang="en-US" altLang="ko-KR" noProof="0" smtClean="0"/>
               <a:pPr/>
-              <a:t>31</a:t>
+              <a:t>32</a:t>
             </a:fld>
             <a:endParaRPr lang="ko-KR" altLang="en-US" noProof="0"/>
           </a:p>
@@ -16566,7 +17025,7 @@
 </p:sld>
 </file>
 
-<file path=ppt/slides/slide32.xml><?xml version="1.0" encoding="utf-8"?>
+<file path=ppt/slides/slide33.xml><?xml version="1.0" encoding="utf-8"?>
 <p:sld xmlns:a="http://schemas.openxmlformats.org/drawingml/2006/main" xmlns:r="http://schemas.openxmlformats.org/officeDocument/2006/relationships" xmlns:p="http://schemas.openxmlformats.org/presentationml/2006/main">
   <p:cSld>
     <p:spTree>
@@ -16651,7 +17110,7 @@
             <a:fld id="{9860EDB8-5305-433F-BE41-D7A86D811DB3}" type="slidenum">
               <a:rPr lang="en-US" altLang="ko-KR" noProof="0" smtClean="0"/>
               <a:pPr/>
-              <a:t>32</a:t>
+              <a:t>33</a:t>
             </a:fld>
             <a:endParaRPr lang="ko-KR" altLang="en-US" noProof="0"/>
           </a:p>
@@ -16708,7 +17167,7 @@
 </p:sld>
 </file>
 
-<file path=ppt/slides/slide33.xml><?xml version="1.0" encoding="utf-8"?>
+<file path=ppt/slides/slide34.xml><?xml version="1.0" encoding="utf-8"?>
 <p:sld xmlns:a="http://schemas.openxmlformats.org/drawingml/2006/main" xmlns:r="http://schemas.openxmlformats.org/officeDocument/2006/relationships" xmlns:p="http://schemas.openxmlformats.org/presentationml/2006/main">
   <p:cSld>
     <p:spTree>
@@ -16793,7 +17252,7 @@
             <a:fld id="{9860EDB8-5305-433F-BE41-D7A86D811DB3}" type="slidenum">
               <a:rPr lang="en-US" altLang="ko-KR" noProof="0" smtClean="0"/>
               <a:pPr/>
-              <a:t>33</a:t>
+              <a:t>34</a:t>
             </a:fld>
             <a:endParaRPr lang="ko-KR" altLang="en-US" noProof="0"/>
           </a:p>
@@ -17174,7 +17633,7 @@
 </p:sld>
 </file>
 
-<file path=ppt/slides/slide34.xml><?xml version="1.0" encoding="utf-8"?>
+<file path=ppt/slides/slide35.xml><?xml version="1.0" encoding="utf-8"?>
 <p:sld xmlns:a="http://schemas.openxmlformats.org/drawingml/2006/main" xmlns:r="http://schemas.openxmlformats.org/officeDocument/2006/relationships" xmlns:p="http://schemas.openxmlformats.org/presentationml/2006/main">
   <p:cSld>
     <p:spTree>
@@ -17259,7 +17718,7 @@
             <a:fld id="{9860EDB8-5305-433F-BE41-D7A86D811DB3}" type="slidenum">
               <a:rPr lang="en-US" altLang="ko-KR" noProof="0" smtClean="0"/>
               <a:pPr/>
-              <a:t>34</a:t>
+              <a:t>35</a:t>
             </a:fld>
             <a:endParaRPr lang="ko-KR" altLang="en-US" noProof="0"/>
           </a:p>
@@ -18166,7 +18625,7 @@
 </p:sld>
 </file>
 
-<file path=ppt/slides/slide35.xml><?xml version="1.0" encoding="utf-8"?>
+<file path=ppt/slides/slide36.xml><?xml version="1.0" encoding="utf-8"?>
 <p:sld xmlns:a="http://schemas.openxmlformats.org/drawingml/2006/main" xmlns:r="http://schemas.openxmlformats.org/officeDocument/2006/relationships" xmlns:p="http://schemas.openxmlformats.org/presentationml/2006/main">
   <p:cSld>
     <p:spTree>
@@ -18251,7 +18710,7 @@
             <a:fld id="{9860EDB8-5305-433F-BE41-D7A86D811DB3}" type="slidenum">
               <a:rPr lang="en-US" altLang="ko-KR" noProof="0" smtClean="0"/>
               <a:pPr/>
-              <a:t>35</a:t>
+              <a:t>36</a:t>
             </a:fld>
             <a:endParaRPr lang="ko-KR" altLang="en-US" noProof="0"/>
           </a:p>
@@ -18308,7 +18767,7 @@
 </p:sld>
 </file>
 
-<file path=ppt/slides/slide36.xml><?xml version="1.0" encoding="utf-8"?>
+<file path=ppt/slides/slide37.xml><?xml version="1.0" encoding="utf-8"?>
 <p:sld xmlns:a="http://schemas.openxmlformats.org/drawingml/2006/main" xmlns:r="http://schemas.openxmlformats.org/officeDocument/2006/relationships" xmlns:p="http://schemas.openxmlformats.org/presentationml/2006/main">
   <p:cSld>
     <p:spTree>
@@ -18393,7 +18852,7 @@
             <a:fld id="{9860EDB8-5305-433F-BE41-D7A86D811DB3}" type="slidenum">
               <a:rPr lang="en-US" altLang="ko-KR" noProof="0" smtClean="0"/>
               <a:pPr/>
-              <a:t>36</a:t>
+              <a:t>37</a:t>
             </a:fld>
             <a:endParaRPr lang="ko-KR" altLang="en-US" noProof="0"/>
           </a:p>
@@ -18509,7 +18968,7 @@
 </p:sld>
 </file>
 
-<file path=ppt/slides/slide37.xml><?xml version="1.0" encoding="utf-8"?>
+<file path=ppt/slides/slide38.xml><?xml version="1.0" encoding="utf-8"?>
 <p:sld xmlns:a="http://schemas.openxmlformats.org/drawingml/2006/main" xmlns:r="http://schemas.openxmlformats.org/officeDocument/2006/relationships" xmlns:p="http://schemas.openxmlformats.org/presentationml/2006/main">
   <p:cSld>
     <p:spTree>
@@ -18594,7 +19053,7 @@
             <a:fld id="{9860EDB8-5305-433F-BE41-D7A86D811DB3}" type="slidenum">
               <a:rPr lang="en-US" altLang="ko-KR" noProof="0" smtClean="0"/>
               <a:pPr/>
-              <a:t>37</a:t>
+              <a:t>38</a:t>
             </a:fld>
             <a:endParaRPr lang="ko-KR" altLang="en-US" noProof="0"/>
           </a:p>
@@ -18745,7 +19204,7 @@
 </p:sld>
 </file>
 
-<file path=ppt/slides/slide38.xml><?xml version="1.0" encoding="utf-8"?>
+<file path=ppt/slides/slide39.xml><?xml version="1.0" encoding="utf-8"?>
 <p:sld xmlns:a="http://schemas.openxmlformats.org/drawingml/2006/main" xmlns:r="http://schemas.openxmlformats.org/officeDocument/2006/relationships" xmlns:p="http://schemas.openxmlformats.org/presentationml/2006/main">
   <p:cSld>
     <p:spTree>
@@ -18887,7 +19346,7 @@
             <a:fld id="{9860EDB8-5305-433F-BE41-D7A86D811DB3}" type="slidenum">
               <a:rPr lang="en-US" altLang="ko-KR" noProof="0" smtClean="0"/>
               <a:pPr/>
-              <a:t>38</a:t>
+              <a:t>39</a:t>
             </a:fld>
             <a:endParaRPr lang="ko-KR" altLang="en-US" noProof="0"/>
           </a:p>
@@ -19096,7 +19555,236 @@
 </p:sld>
 </file>
 
-<file path=ppt/slides/slide39.xml><?xml version="1.0" encoding="utf-8"?>
+<file path=ppt/slides/slide4.xml><?xml version="1.0" encoding="utf-8"?>
+<p:sld xmlns:a="http://schemas.openxmlformats.org/drawingml/2006/main" xmlns:r="http://schemas.openxmlformats.org/officeDocument/2006/relationships" xmlns:p="http://schemas.openxmlformats.org/presentationml/2006/main">
+  <p:cSld>
+    <p:spTree>
+      <p:nvGrpSpPr>
+        <p:cNvPr id="1" name="">
+          <a:extLst>
+            <a:ext uri="{FF2B5EF4-FFF2-40B4-BE49-F238E27FC236}">
+              <a16:creationId xmlns:a16="http://schemas.microsoft.com/office/drawing/2014/main" id="{7D5DC8FC-1345-873F-A6C3-D2B0CCFB6086}"/>
+            </a:ext>
+          </a:extLst>
+        </p:cNvPr>
+        <p:cNvGrpSpPr/>
+        <p:nvPr/>
+      </p:nvGrpSpPr>
+      <p:grpSpPr>
+        <a:xfrm>
+          <a:off x="0" y="0"/>
+          <a:ext cx="0" cy="0"/>
+          <a:chOff x="0" y="0"/>
+          <a:chExt cx="0" cy="0"/>
+        </a:xfrm>
+      </p:grpSpPr>
+      <p:sp>
+        <p:nvSpPr>
+          <p:cNvPr id="8" name="제목 7">
+            <a:extLst>
+              <a:ext uri="{FF2B5EF4-FFF2-40B4-BE49-F238E27FC236}">
+                <a16:creationId xmlns:a16="http://schemas.microsoft.com/office/drawing/2014/main" id="{22FC3679-5A6F-B565-1054-5E0280FB97D2}"/>
+              </a:ext>
+            </a:extLst>
+          </p:cNvPr>
+          <p:cNvSpPr>
+            <a:spLocks noGrp="1"/>
+          </p:cNvSpPr>
+          <p:nvPr>
+            <p:ph type="title"/>
+          </p:nvPr>
+        </p:nvSpPr>
+        <p:spPr>
+          <a:xfrm>
+            <a:off x="521207" y="448056"/>
+            <a:ext cx="8135613" cy="640080"/>
+          </a:xfrm>
+        </p:spPr>
+        <p:txBody>
+          <a:bodyPr rtlCol="0">
+            <a:noAutofit/>
+          </a:bodyPr>
+          <a:lstStyle/>
+          <a:p>
+            <a:pPr rtl="0"/>
+            <a:r>
+              <a:rPr lang="en-US" altLang="ko-KR" dirty="0">
+                <a:cs typeface="Segoe UI Light" panose="020B0502040204020203" pitchFamily="34" charset="0"/>
+              </a:rPr>
+              <a:t>Math for Machine Learning</a:t>
+            </a:r>
+            <a:endParaRPr lang="ko-KR" altLang="en-US" dirty="0">
+              <a:cs typeface="Segoe UI Light" panose="020B0502040204020203" pitchFamily="34" charset="0"/>
+            </a:endParaRPr>
+          </a:p>
+        </p:txBody>
+      </p:sp>
+      <p:sp>
+        <p:nvSpPr>
+          <p:cNvPr id="12" name="슬라이드 번호 개체 틀 11">
+            <a:extLst>
+              <a:ext uri="{FF2B5EF4-FFF2-40B4-BE49-F238E27FC236}">
+                <a16:creationId xmlns:a16="http://schemas.microsoft.com/office/drawing/2014/main" id="{841241FB-BBA8-80A9-657D-4E4C0970905D}"/>
+              </a:ext>
+            </a:extLst>
+          </p:cNvPr>
+          <p:cNvSpPr>
+            <a:spLocks noGrp="1"/>
+          </p:cNvSpPr>
+          <p:nvPr>
+            <p:ph type="sldNum" sz="quarter" idx="4"/>
+          </p:nvPr>
+        </p:nvSpPr>
+        <p:spPr/>
+        <p:txBody>
+          <a:bodyPr/>
+          <a:lstStyle/>
+          <a:p>
+            <a:fld id="{9860EDB8-5305-433F-BE41-D7A86D811DB3}" type="slidenum">
+              <a:rPr lang="en-US" altLang="ko-KR" noProof="0" smtClean="0"/>
+              <a:pPr/>
+              <a:t>4</a:t>
+            </a:fld>
+            <a:endParaRPr lang="ko-KR" altLang="en-US" noProof="0"/>
+          </a:p>
+        </p:txBody>
+      </p:sp>
+      <p:sp>
+        <p:nvSpPr>
+          <p:cNvPr id="5" name="TextBox 4">
+            <a:extLst>
+              <a:ext uri="{FF2B5EF4-FFF2-40B4-BE49-F238E27FC236}">
+                <a16:creationId xmlns:a16="http://schemas.microsoft.com/office/drawing/2014/main" id="{68758DD3-2217-BA8B-05B1-F405206F1A26}"/>
+              </a:ext>
+            </a:extLst>
+          </p:cNvPr>
+          <p:cNvSpPr txBox="1"/>
+          <p:nvPr/>
+        </p:nvSpPr>
+        <p:spPr>
+          <a:xfrm>
+            <a:off x="2530763" y="2023997"/>
+            <a:ext cx="6126057" cy="3244093"/>
+          </a:xfrm>
+          <a:prstGeom prst="rect">
+            <a:avLst/>
+          </a:prstGeom>
+          <a:noFill/>
+        </p:spPr>
+        <p:txBody>
+          <a:bodyPr wrap="square">
+            <a:spAutoFit/>
+          </a:bodyPr>
+          <a:lstStyle/>
+          <a:p>
+            <a:pPr algn="ctr">
+              <a:lnSpc>
+                <a:spcPct val="150000"/>
+              </a:lnSpc>
+            </a:pPr>
+            <a:r>
+              <a:rPr lang="en-US" altLang="ko-KR" sz="2800" b="0" i="0" u="none" strike="noStrike" baseline="0" dirty="0">
+                <a:solidFill>
+                  <a:srgbClr val="595959"/>
+                </a:solidFill>
+                <a:latin typeface="Helvetica" panose="020B0604020202020204" pitchFamily="34" charset="0"/>
+              </a:rPr>
+              <a:t>Vectors</a:t>
+            </a:r>
+          </a:p>
+          <a:p>
+            <a:pPr algn="ctr">
+              <a:lnSpc>
+                <a:spcPct val="150000"/>
+              </a:lnSpc>
+            </a:pPr>
+            <a:r>
+              <a:rPr lang="en-US" altLang="ko-KR" sz="2800" b="0" i="0" u="none" strike="noStrike" baseline="0" dirty="0">
+                <a:solidFill>
+                  <a:srgbClr val="595959"/>
+                </a:solidFill>
+                <a:latin typeface="Helvetica" panose="020B0604020202020204" pitchFamily="34" charset="0"/>
+              </a:rPr>
+              <a:t>Matrices</a:t>
+            </a:r>
+          </a:p>
+          <a:p>
+            <a:pPr algn="ctr">
+              <a:lnSpc>
+                <a:spcPct val="150000"/>
+              </a:lnSpc>
+            </a:pPr>
+            <a:r>
+              <a:rPr lang="en-US" altLang="ko-KR" sz="2800" b="0" i="0" u="none" strike="noStrike" baseline="0" dirty="0">
+                <a:solidFill>
+                  <a:srgbClr val="595959"/>
+                </a:solidFill>
+                <a:latin typeface="Helvetica" panose="020B0604020202020204" pitchFamily="34" charset="0"/>
+              </a:rPr>
+              <a:t>Dot product</a:t>
+            </a:r>
+          </a:p>
+          <a:p>
+            <a:pPr algn="ctr">
+              <a:lnSpc>
+                <a:spcPct val="150000"/>
+              </a:lnSpc>
+            </a:pPr>
+            <a:r>
+              <a:rPr lang="en-US" altLang="ko-KR" sz="2800" b="0" i="0" u="none" strike="noStrike" baseline="0" dirty="0">
+                <a:solidFill>
+                  <a:srgbClr val="595959"/>
+                </a:solidFill>
+                <a:latin typeface="Helvetica" panose="020B0604020202020204" pitchFamily="34" charset="0"/>
+              </a:rPr>
+              <a:t>Matrix multiplication</a:t>
+            </a:r>
+          </a:p>
+          <a:p>
+            <a:pPr algn="ctr">
+              <a:lnSpc>
+                <a:spcPct val="150000"/>
+              </a:lnSpc>
+            </a:pPr>
+            <a:r>
+              <a:rPr lang="en-US" altLang="ko-KR" sz="2800" b="0" i="0" u="none" strike="noStrike" baseline="0" dirty="0">
+                <a:solidFill>
+                  <a:srgbClr val="595959"/>
+                </a:solidFill>
+                <a:latin typeface="Helvetica" panose="020B0604020202020204" pitchFamily="34" charset="0"/>
+              </a:rPr>
+              <a:t>Linear transformations</a:t>
+            </a:r>
+            <a:endParaRPr lang="ko-KR" altLang="en-US" sz="2800" dirty="0"/>
+          </a:p>
+        </p:txBody>
+      </p:sp>
+    </p:spTree>
+    <p:extLst>
+      <p:ext uri="{BB962C8B-B14F-4D97-AF65-F5344CB8AC3E}">
+        <p14:creationId xmlns:p14="http://schemas.microsoft.com/office/powerpoint/2010/main" val="936156201"/>
+      </p:ext>
+    </p:extLst>
+  </p:cSld>
+  <p:clrMapOvr>
+    <a:masterClrMapping/>
+  </p:clrMapOvr>
+  <mc:AlternateContent xmlns:mc="http://schemas.openxmlformats.org/markup-compatibility/2006" xmlns:p159="http://schemas.microsoft.com/office/powerpoint/2015/09/main">
+    <mc:Choice Requires="p159">
+      <p:transition xmlns:p14="http://schemas.microsoft.com/office/powerpoint/2010/main" spd="slow" p14:dur="2000">
+        <p159:morph option="byObject"/>
+      </p:transition>
+    </mc:Choice>
+    <mc:Fallback xmlns="">
+      <p:transition spd="slow">
+        <p:fade/>
+      </p:transition>
+    </mc:Fallback>
+  </mc:AlternateContent>
+</p:sld>
+</file>
+
+<file path=ppt/slides/slide40.xml><?xml version="1.0" encoding="utf-8"?>
 <p:sld xmlns:a="http://schemas.openxmlformats.org/drawingml/2006/main" xmlns:r="http://schemas.openxmlformats.org/officeDocument/2006/relationships" xmlns:p="http://schemas.openxmlformats.org/presentationml/2006/main">
   <p:cSld>
     <p:spTree>
@@ -19181,7 +19869,7 @@
             <a:fld id="{9860EDB8-5305-433F-BE41-D7A86D811DB3}" type="slidenum">
               <a:rPr lang="en-US" altLang="ko-KR" noProof="0" smtClean="0"/>
               <a:pPr/>
-              <a:t>39</a:t>
+              <a:t>40</a:t>
             </a:fld>
             <a:endParaRPr lang="ko-KR" altLang="en-US" noProof="0"/>
           </a:p>
@@ -19238,236 +19926,7 @@
 </p:sld>
 </file>
 
-<file path=ppt/slides/slide4.xml><?xml version="1.0" encoding="utf-8"?>
-<p:sld xmlns:a="http://schemas.openxmlformats.org/drawingml/2006/main" xmlns:r="http://schemas.openxmlformats.org/officeDocument/2006/relationships" xmlns:p="http://schemas.openxmlformats.org/presentationml/2006/main">
-  <p:cSld>
-    <p:spTree>
-      <p:nvGrpSpPr>
-        <p:cNvPr id="1" name="">
-          <a:extLst>
-            <a:ext uri="{FF2B5EF4-FFF2-40B4-BE49-F238E27FC236}">
-              <a16:creationId xmlns:a16="http://schemas.microsoft.com/office/drawing/2014/main" id="{7D5DC8FC-1345-873F-A6C3-D2B0CCFB6086}"/>
-            </a:ext>
-          </a:extLst>
-        </p:cNvPr>
-        <p:cNvGrpSpPr/>
-        <p:nvPr/>
-      </p:nvGrpSpPr>
-      <p:grpSpPr>
-        <a:xfrm>
-          <a:off x="0" y="0"/>
-          <a:ext cx="0" cy="0"/>
-          <a:chOff x="0" y="0"/>
-          <a:chExt cx="0" cy="0"/>
-        </a:xfrm>
-      </p:grpSpPr>
-      <p:sp>
-        <p:nvSpPr>
-          <p:cNvPr id="8" name="제목 7">
-            <a:extLst>
-              <a:ext uri="{FF2B5EF4-FFF2-40B4-BE49-F238E27FC236}">
-                <a16:creationId xmlns:a16="http://schemas.microsoft.com/office/drawing/2014/main" id="{22FC3679-5A6F-B565-1054-5E0280FB97D2}"/>
-              </a:ext>
-            </a:extLst>
-          </p:cNvPr>
-          <p:cNvSpPr>
-            <a:spLocks noGrp="1"/>
-          </p:cNvSpPr>
-          <p:nvPr>
-            <p:ph type="title"/>
-          </p:nvPr>
-        </p:nvSpPr>
-        <p:spPr>
-          <a:xfrm>
-            <a:off x="521207" y="448056"/>
-            <a:ext cx="8135613" cy="640080"/>
-          </a:xfrm>
-        </p:spPr>
-        <p:txBody>
-          <a:bodyPr rtlCol="0">
-            <a:noAutofit/>
-          </a:bodyPr>
-          <a:lstStyle/>
-          <a:p>
-            <a:pPr rtl="0"/>
-            <a:r>
-              <a:rPr lang="en-US" altLang="ko-KR" dirty="0">
-                <a:cs typeface="Segoe UI Light" panose="020B0502040204020203" pitchFamily="34" charset="0"/>
-              </a:rPr>
-              <a:t>Math for Machine Learning</a:t>
-            </a:r>
-            <a:endParaRPr lang="ko-KR" altLang="en-US" dirty="0">
-              <a:cs typeface="Segoe UI Light" panose="020B0502040204020203" pitchFamily="34" charset="0"/>
-            </a:endParaRPr>
-          </a:p>
-        </p:txBody>
-      </p:sp>
-      <p:sp>
-        <p:nvSpPr>
-          <p:cNvPr id="12" name="슬라이드 번호 개체 틀 11">
-            <a:extLst>
-              <a:ext uri="{FF2B5EF4-FFF2-40B4-BE49-F238E27FC236}">
-                <a16:creationId xmlns:a16="http://schemas.microsoft.com/office/drawing/2014/main" id="{841241FB-BBA8-80A9-657D-4E4C0970905D}"/>
-              </a:ext>
-            </a:extLst>
-          </p:cNvPr>
-          <p:cNvSpPr>
-            <a:spLocks noGrp="1"/>
-          </p:cNvSpPr>
-          <p:nvPr>
-            <p:ph type="sldNum" sz="quarter" idx="4"/>
-          </p:nvPr>
-        </p:nvSpPr>
-        <p:spPr/>
-        <p:txBody>
-          <a:bodyPr/>
-          <a:lstStyle/>
-          <a:p>
-            <a:fld id="{9860EDB8-5305-433F-BE41-D7A86D811DB3}" type="slidenum">
-              <a:rPr lang="en-US" altLang="ko-KR" noProof="0" smtClean="0"/>
-              <a:pPr/>
-              <a:t>4</a:t>
-            </a:fld>
-            <a:endParaRPr lang="ko-KR" altLang="en-US" noProof="0"/>
-          </a:p>
-        </p:txBody>
-      </p:sp>
-      <p:sp>
-        <p:nvSpPr>
-          <p:cNvPr id="5" name="TextBox 4">
-            <a:extLst>
-              <a:ext uri="{FF2B5EF4-FFF2-40B4-BE49-F238E27FC236}">
-                <a16:creationId xmlns:a16="http://schemas.microsoft.com/office/drawing/2014/main" id="{68758DD3-2217-BA8B-05B1-F405206F1A26}"/>
-              </a:ext>
-            </a:extLst>
-          </p:cNvPr>
-          <p:cNvSpPr txBox="1"/>
-          <p:nvPr/>
-        </p:nvSpPr>
-        <p:spPr>
-          <a:xfrm>
-            <a:off x="2530763" y="2023997"/>
-            <a:ext cx="6126057" cy="3244093"/>
-          </a:xfrm>
-          <a:prstGeom prst="rect">
-            <a:avLst/>
-          </a:prstGeom>
-          <a:noFill/>
-        </p:spPr>
-        <p:txBody>
-          <a:bodyPr wrap="square">
-            <a:spAutoFit/>
-          </a:bodyPr>
-          <a:lstStyle/>
-          <a:p>
-            <a:pPr algn="ctr">
-              <a:lnSpc>
-                <a:spcPct val="150000"/>
-              </a:lnSpc>
-            </a:pPr>
-            <a:r>
-              <a:rPr lang="en-US" altLang="ko-KR" sz="2800" b="0" i="0" u="none" strike="noStrike" baseline="0" dirty="0">
-                <a:solidFill>
-                  <a:srgbClr val="595959"/>
-                </a:solidFill>
-                <a:latin typeface="Helvetica" panose="020B0604020202020204" pitchFamily="34" charset="0"/>
-              </a:rPr>
-              <a:t>Vectors</a:t>
-            </a:r>
-          </a:p>
-          <a:p>
-            <a:pPr algn="ctr">
-              <a:lnSpc>
-                <a:spcPct val="150000"/>
-              </a:lnSpc>
-            </a:pPr>
-            <a:r>
-              <a:rPr lang="en-US" altLang="ko-KR" sz="2800" b="0" i="0" u="none" strike="noStrike" baseline="0" dirty="0">
-                <a:solidFill>
-                  <a:srgbClr val="595959"/>
-                </a:solidFill>
-                <a:latin typeface="Helvetica" panose="020B0604020202020204" pitchFamily="34" charset="0"/>
-              </a:rPr>
-              <a:t>Matrices</a:t>
-            </a:r>
-          </a:p>
-          <a:p>
-            <a:pPr algn="ctr">
-              <a:lnSpc>
-                <a:spcPct val="150000"/>
-              </a:lnSpc>
-            </a:pPr>
-            <a:r>
-              <a:rPr lang="en-US" altLang="ko-KR" sz="2800" b="0" i="0" u="none" strike="noStrike" baseline="0" dirty="0">
-                <a:solidFill>
-                  <a:srgbClr val="595959"/>
-                </a:solidFill>
-                <a:latin typeface="Helvetica" panose="020B0604020202020204" pitchFamily="34" charset="0"/>
-              </a:rPr>
-              <a:t>Dot product</a:t>
-            </a:r>
-          </a:p>
-          <a:p>
-            <a:pPr algn="ctr">
-              <a:lnSpc>
-                <a:spcPct val="150000"/>
-              </a:lnSpc>
-            </a:pPr>
-            <a:r>
-              <a:rPr lang="en-US" altLang="ko-KR" sz="2800" b="0" i="0" u="none" strike="noStrike" baseline="0" dirty="0">
-                <a:solidFill>
-                  <a:srgbClr val="595959"/>
-                </a:solidFill>
-                <a:latin typeface="Helvetica" panose="020B0604020202020204" pitchFamily="34" charset="0"/>
-              </a:rPr>
-              <a:t>Matrix multiplication</a:t>
-            </a:r>
-          </a:p>
-          <a:p>
-            <a:pPr algn="ctr">
-              <a:lnSpc>
-                <a:spcPct val="150000"/>
-              </a:lnSpc>
-            </a:pPr>
-            <a:r>
-              <a:rPr lang="en-US" altLang="ko-KR" sz="2800" b="0" i="0" u="none" strike="noStrike" baseline="0" dirty="0">
-                <a:solidFill>
-                  <a:srgbClr val="595959"/>
-                </a:solidFill>
-                <a:latin typeface="Helvetica" panose="020B0604020202020204" pitchFamily="34" charset="0"/>
-              </a:rPr>
-              <a:t>Linear transformations</a:t>
-            </a:r>
-            <a:endParaRPr lang="ko-KR" altLang="en-US" sz="2800" dirty="0"/>
-          </a:p>
-        </p:txBody>
-      </p:sp>
-    </p:spTree>
-    <p:extLst>
-      <p:ext uri="{BB962C8B-B14F-4D97-AF65-F5344CB8AC3E}">
-        <p14:creationId xmlns:p14="http://schemas.microsoft.com/office/powerpoint/2010/main" val="936156201"/>
-      </p:ext>
-    </p:extLst>
-  </p:cSld>
-  <p:clrMapOvr>
-    <a:masterClrMapping/>
-  </p:clrMapOvr>
-  <mc:AlternateContent xmlns:mc="http://schemas.openxmlformats.org/markup-compatibility/2006" xmlns:p159="http://schemas.microsoft.com/office/powerpoint/2015/09/main">
-    <mc:Choice Requires="p159">
-      <p:transition xmlns:p14="http://schemas.microsoft.com/office/powerpoint/2010/main" spd="slow" p14:dur="2000">
-        <p159:morph option="byObject"/>
-      </p:transition>
-    </mc:Choice>
-    <mc:Fallback xmlns="">
-      <p:transition spd="slow">
-        <p:fade/>
-      </p:transition>
-    </mc:Fallback>
-  </mc:AlternateContent>
-</p:sld>
-</file>
-
-<file path=ppt/slides/slide40.xml><?xml version="1.0" encoding="utf-8"?>
+<file path=ppt/slides/slide41.xml><?xml version="1.0" encoding="utf-8"?>
 <p:sld xmlns:a="http://schemas.openxmlformats.org/drawingml/2006/main" xmlns:r="http://schemas.openxmlformats.org/officeDocument/2006/relationships" xmlns:p="http://schemas.openxmlformats.org/presentationml/2006/main">
   <p:cSld>
     <p:spTree>
@@ -19552,7 +20011,7 @@
             <a:fld id="{9860EDB8-5305-433F-BE41-D7A86D811DB3}" type="slidenum">
               <a:rPr lang="en-US" altLang="ko-KR" noProof="0" smtClean="0"/>
               <a:pPr/>
-              <a:t>40</a:t>
+              <a:t>41</a:t>
             </a:fld>
             <a:endParaRPr lang="ko-KR" altLang="en-US" noProof="0"/>
           </a:p>
@@ -19714,7 +20173,7 @@
 </p:sld>
 </file>
 
-<file path=ppt/slides/slide41.xml><?xml version="1.0" encoding="utf-8"?>
+<file path=ppt/slides/slide42.xml><?xml version="1.0" encoding="utf-8"?>
 <p:sld xmlns:a="http://schemas.openxmlformats.org/drawingml/2006/main" xmlns:r="http://schemas.openxmlformats.org/officeDocument/2006/relationships" xmlns:p="http://schemas.openxmlformats.org/presentationml/2006/main">
   <p:cSld>
     <p:spTree>
@@ -19856,7 +20315,7 @@
             <a:fld id="{9860EDB8-5305-433F-BE41-D7A86D811DB3}" type="slidenum">
               <a:rPr lang="en-US" altLang="ko-KR" noProof="0" smtClean="0"/>
               <a:pPr/>
-              <a:t>41</a:t>
+              <a:t>42</a:t>
             </a:fld>
             <a:endParaRPr lang="ko-KR" altLang="en-US" noProof="0"/>
           </a:p>
@@ -20065,7 +20524,7 @@
 </p:sld>
 </file>
 
-<file path=ppt/slides/slide42.xml><?xml version="1.0" encoding="utf-8"?>
+<file path=ppt/slides/slide43.xml><?xml version="1.0" encoding="utf-8"?>
 <p:sld xmlns:a="http://schemas.openxmlformats.org/drawingml/2006/main" xmlns:r="http://schemas.openxmlformats.org/officeDocument/2006/relationships" xmlns:p="http://schemas.openxmlformats.org/presentationml/2006/main">
   <p:cSld>
     <p:spTree>
@@ -20210,7 +20669,7 @@
             <a:fld id="{9860EDB8-5305-433F-BE41-D7A86D811DB3}" type="slidenum">
               <a:rPr lang="en-US" altLang="ko-KR" noProof="0" smtClean="0"/>
               <a:pPr/>
-              <a:t>42</a:t>
+              <a:t>43</a:t>
             </a:fld>
             <a:endParaRPr lang="ko-KR" altLang="en-US" noProof="0"/>
           </a:p>
@@ -20612,7 +21071,7 @@
 </p:sld>
 </file>
 
-<file path=ppt/slides/slide43.xml><?xml version="1.0" encoding="utf-8"?>
+<file path=ppt/slides/slide44.xml><?xml version="1.0" encoding="utf-8"?>
 <p:sld xmlns:a="http://schemas.openxmlformats.org/drawingml/2006/main" xmlns:r="http://schemas.openxmlformats.org/officeDocument/2006/relationships" xmlns:p="http://schemas.openxmlformats.org/presentationml/2006/main">
   <p:cSld>
     <p:spTree>
@@ -20697,7 +21156,7 @@
             <a:fld id="{9860EDB8-5305-433F-BE41-D7A86D811DB3}" type="slidenum">
               <a:rPr lang="en-US" altLang="ko-KR" noProof="0" smtClean="0"/>
               <a:pPr/>
-              <a:t>43</a:t>
+              <a:t>44</a:t>
             </a:fld>
             <a:endParaRPr lang="ko-KR" altLang="en-US" noProof="0"/>
           </a:p>
@@ -20859,7 +21318,7 @@
 </p:sld>
 </file>
 
-<file path=ppt/slides/slide44.xml><?xml version="1.0" encoding="utf-8"?>
+<file path=ppt/slides/slide45.xml><?xml version="1.0" encoding="utf-8"?>
 <p:sld xmlns:a="http://schemas.openxmlformats.org/drawingml/2006/main" xmlns:r="http://schemas.openxmlformats.org/officeDocument/2006/relationships" xmlns:p="http://schemas.openxmlformats.org/presentationml/2006/main">
   <p:cSld>
     <p:spTree>
@@ -20944,7 +21403,7 @@
             <a:fld id="{9860EDB8-5305-433F-BE41-D7A86D811DB3}" type="slidenum">
               <a:rPr lang="en-US" altLang="ko-KR" noProof="0" smtClean="0"/>
               <a:pPr/>
-              <a:t>44</a:t>
+              <a:t>45</a:t>
             </a:fld>
             <a:endParaRPr lang="ko-KR" altLang="en-US" noProof="0"/>
           </a:p>
@@ -21001,7 +21460,7 @@
 </p:sld>
 </file>
 
-<file path=ppt/slides/slide45.xml><?xml version="1.0" encoding="utf-8"?>
+<file path=ppt/slides/slide46.xml><?xml version="1.0" encoding="utf-8"?>
 <p:sld xmlns:a="http://schemas.openxmlformats.org/drawingml/2006/main" xmlns:r="http://schemas.openxmlformats.org/officeDocument/2006/relationships" xmlns:p="http://schemas.openxmlformats.org/presentationml/2006/main">
   <p:cSld>
     <p:spTree>
@@ -21086,7 +21545,7 @@
             <a:fld id="{9860EDB8-5305-433F-BE41-D7A86D811DB3}" type="slidenum">
               <a:rPr lang="en-US" altLang="ko-KR" noProof="0" smtClean="0"/>
               <a:pPr/>
-              <a:t>45</a:t>
+              <a:t>46</a:t>
             </a:fld>
             <a:endParaRPr lang="ko-KR" altLang="en-US" noProof="0"/>
           </a:p>
@@ -21143,7 +21602,7 @@
 </p:sld>
 </file>
 
-<file path=ppt/slides/slide46.xml><?xml version="1.0" encoding="utf-8"?>
+<file path=ppt/slides/slide47.xml><?xml version="1.0" encoding="utf-8"?>
 <p:sld xmlns:a="http://schemas.openxmlformats.org/drawingml/2006/main" xmlns:r="http://schemas.openxmlformats.org/officeDocument/2006/relationships" xmlns:p="http://schemas.openxmlformats.org/presentationml/2006/main">
   <p:cSld>
     <p:spTree>
@@ -21285,7 +21744,7 @@
             <a:fld id="{9860EDB8-5305-433F-BE41-D7A86D811DB3}" type="slidenum">
               <a:rPr lang="en-US" altLang="ko-KR" noProof="0" smtClean="0"/>
               <a:pPr/>
-              <a:t>46</a:t>
+              <a:t>47</a:t>
             </a:fld>
             <a:endParaRPr lang="ko-KR" altLang="en-US" noProof="0"/>
           </a:p>
@@ -21494,7 +21953,7 @@
 </p:sld>
 </file>
 
-<file path=ppt/slides/slide47.xml><?xml version="1.0" encoding="utf-8"?>
+<file path=ppt/slides/slide48.xml><?xml version="1.0" encoding="utf-8"?>
 <p:sld xmlns:a="http://schemas.openxmlformats.org/drawingml/2006/main" xmlns:r="http://schemas.openxmlformats.org/officeDocument/2006/relationships" xmlns:p="http://schemas.openxmlformats.org/presentationml/2006/main">
   <p:cSld>
     <p:spTree>
@@ -21579,7 +22038,7 @@
             <a:fld id="{9860EDB8-5305-433F-BE41-D7A86D811DB3}" type="slidenum">
               <a:rPr lang="en-US" altLang="ko-KR" noProof="0" smtClean="0"/>
               <a:pPr/>
-              <a:t>47</a:t>
+              <a:t>48</a:t>
             </a:fld>
             <a:endParaRPr lang="ko-KR" altLang="en-US" noProof="0"/>
           </a:p>
@@ -21636,7 +22095,7 @@
 </p:sld>
 </file>
 
-<file path=ppt/slides/slide48.xml><?xml version="1.0" encoding="utf-8"?>
+<file path=ppt/slides/slide49.xml><?xml version="1.0" encoding="utf-8"?>
 <p:sld xmlns:a="http://schemas.openxmlformats.org/drawingml/2006/main" xmlns:r="http://schemas.openxmlformats.org/officeDocument/2006/relationships" xmlns:p="http://schemas.openxmlformats.org/presentationml/2006/main">
   <p:cSld>
     <p:spTree>
@@ -21721,7 +22180,7 @@
             <a:fld id="{9860EDB8-5305-433F-BE41-D7A86D811DB3}" type="slidenum">
               <a:rPr lang="en-US" altLang="ko-KR" noProof="0" smtClean="0"/>
               <a:pPr/>
-              <a:t>48</a:t>
+              <a:t>49</a:t>
             </a:fld>
             <a:endParaRPr lang="ko-KR" altLang="en-US" noProof="0"/>
           </a:p>
@@ -21778,7 +22237,358 @@
 </p:sld>
 </file>
 
-<file path=ppt/slides/slide49.xml><?xml version="1.0" encoding="utf-8"?>
+<file path=ppt/slides/slide5.xml><?xml version="1.0" encoding="utf-8"?>
+<p:sld xmlns:a="http://schemas.openxmlformats.org/drawingml/2006/main" xmlns:r="http://schemas.openxmlformats.org/officeDocument/2006/relationships" xmlns:p="http://schemas.openxmlformats.org/presentationml/2006/main">
+  <p:cSld>
+    <p:spTree>
+      <p:nvGrpSpPr>
+        <p:cNvPr id="1" name="">
+          <a:extLst>
+            <a:ext uri="{FF2B5EF4-FFF2-40B4-BE49-F238E27FC236}">
+              <a16:creationId xmlns:a16="http://schemas.microsoft.com/office/drawing/2014/main" id="{FD0D3AE7-002F-94A0-DA15-81A1CE310A3F}"/>
+            </a:ext>
+          </a:extLst>
+        </p:cNvPr>
+        <p:cNvGrpSpPr/>
+        <p:nvPr/>
+      </p:nvGrpSpPr>
+      <p:grpSpPr>
+        <a:xfrm>
+          <a:off x="0" y="0"/>
+          <a:ext cx="0" cy="0"/>
+          <a:chOff x="0" y="0"/>
+          <a:chExt cx="0" cy="0"/>
+        </a:xfrm>
+      </p:grpSpPr>
+      <p:sp>
+        <p:nvSpPr>
+          <p:cNvPr id="3" name="직사각형 2">
+            <a:extLst>
+              <a:ext uri="{FF2B5EF4-FFF2-40B4-BE49-F238E27FC236}">
+                <a16:creationId xmlns:a16="http://schemas.microsoft.com/office/drawing/2014/main" id="{C9AFE555-A66B-E0EE-1EF0-831B635FB249}"/>
+              </a:ext>
+            </a:extLst>
+          </p:cNvPr>
+          <p:cNvSpPr/>
+          <p:nvPr/>
+        </p:nvSpPr>
+        <p:spPr>
+          <a:xfrm>
+            <a:off x="895927" y="1457931"/>
+            <a:ext cx="5948218" cy="548669"/>
+          </a:xfrm>
+          <a:prstGeom prst="rect">
+            <a:avLst/>
+          </a:prstGeom>
+          <a:solidFill>
+            <a:schemeClr val="bg1">
+              <a:lumMod val="85000"/>
+            </a:schemeClr>
+          </a:solidFill>
+          <a:ln>
+            <a:noFill/>
+          </a:ln>
+        </p:spPr>
+        <p:style>
+          <a:lnRef idx="2">
+            <a:schemeClr val="accent1">
+              <a:shade val="15000"/>
+            </a:schemeClr>
+          </a:lnRef>
+          <a:fillRef idx="1">
+            <a:schemeClr val="accent1"/>
+          </a:fillRef>
+          <a:effectRef idx="0">
+            <a:schemeClr val="accent1"/>
+          </a:effectRef>
+          <a:fontRef idx="minor">
+            <a:schemeClr val="lt1"/>
+          </a:fontRef>
+        </p:style>
+        <p:txBody>
+          <a:bodyPr rtlCol="0" anchor="ctr"/>
+          <a:lstStyle/>
+          <a:p>
+            <a:pPr algn="ctr"/>
+            <a:endParaRPr lang="ko-KR" altLang="en-US" dirty="0"/>
+          </a:p>
+        </p:txBody>
+      </p:sp>
+      <p:sp>
+        <p:nvSpPr>
+          <p:cNvPr id="8" name="제목 7">
+            <a:extLst>
+              <a:ext uri="{FF2B5EF4-FFF2-40B4-BE49-F238E27FC236}">
+                <a16:creationId xmlns:a16="http://schemas.microsoft.com/office/drawing/2014/main" id="{E41AB3BA-A98A-DDCE-D6EA-2DF42D6CE40B}"/>
+              </a:ext>
+            </a:extLst>
+          </p:cNvPr>
+          <p:cNvSpPr>
+            <a:spLocks noGrp="1"/>
+          </p:cNvSpPr>
+          <p:nvPr>
+            <p:ph type="title"/>
+          </p:nvPr>
+        </p:nvSpPr>
+        <p:spPr>
+          <a:xfrm>
+            <a:off x="521207" y="448056"/>
+            <a:ext cx="8135613" cy="640080"/>
+          </a:xfrm>
+        </p:spPr>
+        <p:txBody>
+          <a:bodyPr rtlCol="0">
+            <a:noAutofit/>
+          </a:bodyPr>
+          <a:lstStyle/>
+          <a:p>
+            <a:pPr rtl="0"/>
+            <a:r>
+              <a:rPr lang="en-US" altLang="ko-KR" dirty="0">
+                <a:cs typeface="Segoe UI Light" panose="020B0502040204020203" pitchFamily="34" charset="0"/>
+              </a:rPr>
+              <a:t>Contents</a:t>
+            </a:r>
+            <a:endParaRPr lang="ko-KR" altLang="en-US" dirty="0">
+              <a:cs typeface="Segoe UI Light" panose="020B0502040204020203" pitchFamily="34" charset="0"/>
+            </a:endParaRPr>
+          </a:p>
+        </p:txBody>
+      </p:sp>
+      <p:sp>
+        <p:nvSpPr>
+          <p:cNvPr id="12" name="슬라이드 번호 개체 틀 11">
+            <a:extLst>
+              <a:ext uri="{FF2B5EF4-FFF2-40B4-BE49-F238E27FC236}">
+                <a16:creationId xmlns:a16="http://schemas.microsoft.com/office/drawing/2014/main" id="{FBA6C3AD-7EE6-C223-FA76-995C4A40A54C}"/>
+              </a:ext>
+            </a:extLst>
+          </p:cNvPr>
+          <p:cNvSpPr>
+            <a:spLocks noGrp="1"/>
+          </p:cNvSpPr>
+          <p:nvPr>
+            <p:ph type="sldNum" sz="quarter" idx="4"/>
+          </p:nvPr>
+        </p:nvSpPr>
+        <p:spPr/>
+        <p:txBody>
+          <a:bodyPr/>
+          <a:lstStyle/>
+          <a:p>
+            <a:fld id="{9860EDB8-5305-433F-BE41-D7A86D811DB3}" type="slidenum">
+              <a:rPr lang="en-US" altLang="ko-KR" noProof="0" smtClean="0"/>
+              <a:pPr/>
+              <a:t>5</a:t>
+            </a:fld>
+            <a:endParaRPr lang="ko-KR" altLang="en-US" noProof="0"/>
+          </a:p>
+        </p:txBody>
+      </p:sp>
+      <p:sp>
+        <p:nvSpPr>
+          <p:cNvPr id="2" name="TextBox 1">
+            <a:extLst>
+              <a:ext uri="{FF2B5EF4-FFF2-40B4-BE49-F238E27FC236}">
+                <a16:creationId xmlns:a16="http://schemas.microsoft.com/office/drawing/2014/main" id="{52C5C255-490D-636C-8D95-CEBDAA0AD5B9}"/>
+              </a:ext>
+            </a:extLst>
+          </p:cNvPr>
+          <p:cNvSpPr txBox="1"/>
+          <p:nvPr/>
+        </p:nvSpPr>
+        <p:spPr>
+          <a:xfrm>
+            <a:off x="1764145" y="1384043"/>
+            <a:ext cx="7250546" cy="5006948"/>
+          </a:xfrm>
+          <a:prstGeom prst="rect">
+            <a:avLst/>
+          </a:prstGeom>
+          <a:noFill/>
+        </p:spPr>
+        <p:txBody>
+          <a:bodyPr wrap="square" rtlCol="0">
+            <a:spAutoFit/>
+          </a:bodyPr>
+          <a:lstStyle/>
+          <a:p>
+            <a:pPr marL="457200" indent="-457200">
+              <a:lnSpc>
+                <a:spcPct val="150000"/>
+              </a:lnSpc>
+              <a:buFont typeface="+mj-lt"/>
+              <a:buAutoNum type="arabicPeriod"/>
+            </a:pPr>
+            <a:r>
+              <a:rPr lang="en-US" altLang="ko-KR" sz="2400" b="1" dirty="0">
+                <a:latin typeface="맑은 고딕 Semilight" panose="020B0502040204020203" pitchFamily="50" charset="-127"/>
+                <a:ea typeface="맑은 고딕 Semilight" panose="020B0502040204020203" pitchFamily="50" charset="-127"/>
+                <a:cs typeface="맑은 고딕 Semilight" panose="020B0502040204020203" pitchFamily="50" charset="-127"/>
+              </a:rPr>
+              <a:t>Vectors and their properties</a:t>
+            </a:r>
+          </a:p>
+          <a:p>
+            <a:pPr marL="457200" indent="-457200">
+              <a:lnSpc>
+                <a:spcPct val="150000"/>
+              </a:lnSpc>
+              <a:buFont typeface="+mj-lt"/>
+              <a:buAutoNum type="arabicPeriod"/>
+            </a:pPr>
+            <a:r>
+              <a:rPr lang="en-US" altLang="ko-KR" sz="2400" b="1" dirty="0">
+                <a:latin typeface="맑은 고딕 Semilight" panose="020B0502040204020203" pitchFamily="50" charset="-127"/>
+                <a:ea typeface="맑은 고딕 Semilight" panose="020B0502040204020203" pitchFamily="50" charset="-127"/>
+                <a:cs typeface="맑은 고딕 Semilight" panose="020B0502040204020203" pitchFamily="50" charset="-127"/>
+              </a:rPr>
+              <a:t>Sum and difference of vectors</a:t>
+            </a:r>
+          </a:p>
+          <a:p>
+            <a:pPr marL="457200" indent="-457200">
+              <a:lnSpc>
+                <a:spcPct val="150000"/>
+              </a:lnSpc>
+              <a:buFont typeface="+mj-lt"/>
+              <a:buAutoNum type="arabicPeriod"/>
+            </a:pPr>
+            <a:r>
+              <a:rPr lang="en-US" altLang="ko-KR" sz="2400" b="1" dirty="0">
+                <a:latin typeface="맑은 고딕 Semilight" panose="020B0502040204020203" pitchFamily="50" charset="-127"/>
+                <a:ea typeface="맑은 고딕 Semilight" panose="020B0502040204020203" pitchFamily="50" charset="-127"/>
+                <a:cs typeface="맑은 고딕 Semilight" panose="020B0502040204020203" pitchFamily="50" charset="-127"/>
+              </a:rPr>
+              <a:t>Distance between vectors</a:t>
+            </a:r>
+          </a:p>
+          <a:p>
+            <a:pPr marL="457200" indent="-457200">
+              <a:lnSpc>
+                <a:spcPct val="150000"/>
+              </a:lnSpc>
+              <a:buFont typeface="+mj-lt"/>
+              <a:buAutoNum type="arabicPeriod"/>
+            </a:pPr>
+            <a:r>
+              <a:rPr lang="en-US" altLang="ko-KR" sz="2400" b="1" dirty="0">
+                <a:latin typeface="맑은 고딕 Semilight" panose="020B0502040204020203" pitchFamily="50" charset="-127"/>
+                <a:ea typeface="맑은 고딕 Semilight" panose="020B0502040204020203" pitchFamily="50" charset="-127"/>
+                <a:cs typeface="맑은 고딕 Semilight" panose="020B0502040204020203" pitchFamily="50" charset="-127"/>
+              </a:rPr>
+              <a:t>Multiplying a vector by a scalar</a:t>
+            </a:r>
+          </a:p>
+          <a:p>
+            <a:pPr marL="457200" indent="-457200">
+              <a:lnSpc>
+                <a:spcPct val="150000"/>
+              </a:lnSpc>
+              <a:buFont typeface="+mj-lt"/>
+              <a:buAutoNum type="arabicPeriod"/>
+            </a:pPr>
+            <a:r>
+              <a:rPr lang="en-US" altLang="ko-KR" sz="2400" b="1" dirty="0">
+                <a:latin typeface="맑은 고딕 Semilight" panose="020B0502040204020203" pitchFamily="50" charset="-127"/>
+                <a:ea typeface="맑은 고딕 Semilight" panose="020B0502040204020203" pitchFamily="50" charset="-127"/>
+                <a:cs typeface="맑은 고딕 Semilight" panose="020B0502040204020203" pitchFamily="50" charset="-127"/>
+              </a:rPr>
+              <a:t>The dot product</a:t>
+            </a:r>
+          </a:p>
+          <a:p>
+            <a:pPr marL="457200" indent="-457200">
+              <a:lnSpc>
+                <a:spcPct val="150000"/>
+              </a:lnSpc>
+              <a:buFont typeface="+mj-lt"/>
+              <a:buAutoNum type="arabicPeriod"/>
+            </a:pPr>
+            <a:r>
+              <a:rPr lang="en-US" altLang="ko-KR" sz="2400" b="1" dirty="0">
+                <a:latin typeface="맑은 고딕 Semilight" panose="020B0502040204020203" pitchFamily="50" charset="-127"/>
+                <a:ea typeface="맑은 고딕 Semilight" panose="020B0502040204020203" pitchFamily="50" charset="-127"/>
+                <a:cs typeface="맑은 고딕 Semilight" panose="020B0502040204020203" pitchFamily="50" charset="-127"/>
+              </a:rPr>
+              <a:t>Geometric dot product</a:t>
+            </a:r>
+          </a:p>
+          <a:p>
+            <a:pPr marL="457200" indent="-457200">
+              <a:lnSpc>
+                <a:spcPct val="150000"/>
+              </a:lnSpc>
+              <a:buFont typeface="+mj-lt"/>
+              <a:buAutoNum type="arabicPeriod"/>
+            </a:pPr>
+            <a:r>
+              <a:rPr lang="en-US" altLang="ko-KR" sz="2400" b="1" dirty="0">
+                <a:latin typeface="맑은 고딕 Semilight" panose="020B0502040204020203" pitchFamily="50" charset="-127"/>
+                <a:ea typeface="맑은 고딕 Semilight" panose="020B0502040204020203" pitchFamily="50" charset="-127"/>
+                <a:cs typeface="맑은 고딕 Semilight" panose="020B0502040204020203" pitchFamily="50" charset="-127"/>
+              </a:rPr>
+              <a:t>Multiplying a matrix by a vector</a:t>
+            </a:r>
+          </a:p>
+          <a:p>
+            <a:pPr marL="457200" indent="-457200">
+              <a:lnSpc>
+                <a:spcPct val="150000"/>
+              </a:lnSpc>
+              <a:buFont typeface="+mj-lt"/>
+              <a:buAutoNum type="arabicPeriod"/>
+            </a:pPr>
+            <a:r>
+              <a:rPr lang="en-US" altLang="ko-KR" sz="2400" b="1" dirty="0">
+                <a:latin typeface="맑은 고딕 Semilight" panose="020B0502040204020203" pitchFamily="50" charset="-127"/>
+                <a:ea typeface="맑은 고딕 Semilight" panose="020B0502040204020203" pitchFamily="50" charset="-127"/>
+                <a:cs typeface="맑은 고딕 Semilight" panose="020B0502040204020203" pitchFamily="50" charset="-127"/>
+              </a:rPr>
+              <a:t>Matrices as linear transformations</a:t>
+            </a:r>
+          </a:p>
+          <a:p>
+            <a:pPr marL="457200" indent="-457200">
+              <a:lnSpc>
+                <a:spcPct val="150000"/>
+              </a:lnSpc>
+              <a:buFont typeface="+mj-lt"/>
+              <a:buAutoNum type="arabicPeriod"/>
+            </a:pPr>
+            <a:r>
+              <a:rPr lang="en-US" altLang="ko-KR" sz="2400" b="1" dirty="0">
+                <a:latin typeface="맑은 고딕 Semilight" panose="020B0502040204020203" pitchFamily="50" charset="-127"/>
+                <a:ea typeface="맑은 고딕 Semilight" panose="020B0502040204020203" pitchFamily="50" charset="-127"/>
+                <a:cs typeface="맑은 고딕 Semilight" panose="020B0502040204020203" pitchFamily="50" charset="-127"/>
+              </a:rPr>
+              <a:t>Matrix multiplication</a:t>
+            </a:r>
+          </a:p>
+        </p:txBody>
+      </p:sp>
+    </p:spTree>
+    <p:extLst>
+      <p:ext uri="{BB962C8B-B14F-4D97-AF65-F5344CB8AC3E}">
+        <p14:creationId xmlns:p14="http://schemas.microsoft.com/office/powerpoint/2010/main" val="2867243791"/>
+      </p:ext>
+    </p:extLst>
+  </p:cSld>
+  <p:clrMapOvr>
+    <a:masterClrMapping/>
+  </p:clrMapOvr>
+  <mc:AlternateContent xmlns:mc="http://schemas.openxmlformats.org/markup-compatibility/2006" xmlns:p14="http://schemas.microsoft.com/office/powerpoint/2010/main">
+    <mc:Choice Requires="p14">
+      <p:transition p14:dur="10"/>
+    </mc:Choice>
+    <mc:Fallback xmlns="">
+      <p:transition/>
+    </mc:Fallback>
+  </mc:AlternateContent>
+</p:sld>
+</file>
+
+<file path=ppt/slides/slide50.xml><?xml version="1.0" encoding="utf-8"?>
 <p:sld xmlns:a="http://schemas.openxmlformats.org/drawingml/2006/main" xmlns:r="http://schemas.openxmlformats.org/officeDocument/2006/relationships" xmlns:p="http://schemas.openxmlformats.org/presentationml/2006/main">
   <p:cSld>
     <p:spTree>
@@ -21863,7 +22673,7 @@
             <a:fld id="{9860EDB8-5305-433F-BE41-D7A86D811DB3}" type="slidenum">
               <a:rPr lang="en-US" altLang="ko-KR" noProof="0" smtClean="0"/>
               <a:pPr/>
-              <a:t>49</a:t>
+              <a:t>50</a:t>
             </a:fld>
             <a:endParaRPr lang="ko-KR" altLang="en-US" noProof="0"/>
           </a:p>
@@ -21920,358 +22730,7 @@
 </p:sld>
 </file>
 
-<file path=ppt/slides/slide5.xml><?xml version="1.0" encoding="utf-8"?>
-<p:sld xmlns:a="http://schemas.openxmlformats.org/drawingml/2006/main" xmlns:r="http://schemas.openxmlformats.org/officeDocument/2006/relationships" xmlns:p="http://schemas.openxmlformats.org/presentationml/2006/main">
-  <p:cSld>
-    <p:spTree>
-      <p:nvGrpSpPr>
-        <p:cNvPr id="1" name="">
-          <a:extLst>
-            <a:ext uri="{FF2B5EF4-FFF2-40B4-BE49-F238E27FC236}">
-              <a16:creationId xmlns:a16="http://schemas.microsoft.com/office/drawing/2014/main" id="{FD0D3AE7-002F-94A0-DA15-81A1CE310A3F}"/>
-            </a:ext>
-          </a:extLst>
-        </p:cNvPr>
-        <p:cNvGrpSpPr/>
-        <p:nvPr/>
-      </p:nvGrpSpPr>
-      <p:grpSpPr>
-        <a:xfrm>
-          <a:off x="0" y="0"/>
-          <a:ext cx="0" cy="0"/>
-          <a:chOff x="0" y="0"/>
-          <a:chExt cx="0" cy="0"/>
-        </a:xfrm>
-      </p:grpSpPr>
-      <p:sp>
-        <p:nvSpPr>
-          <p:cNvPr id="3" name="직사각형 2">
-            <a:extLst>
-              <a:ext uri="{FF2B5EF4-FFF2-40B4-BE49-F238E27FC236}">
-                <a16:creationId xmlns:a16="http://schemas.microsoft.com/office/drawing/2014/main" id="{C9AFE555-A66B-E0EE-1EF0-831B635FB249}"/>
-              </a:ext>
-            </a:extLst>
-          </p:cNvPr>
-          <p:cNvSpPr/>
-          <p:nvPr/>
-        </p:nvSpPr>
-        <p:spPr>
-          <a:xfrm>
-            <a:off x="895927" y="1457931"/>
-            <a:ext cx="5948218" cy="548669"/>
-          </a:xfrm>
-          <a:prstGeom prst="rect">
-            <a:avLst/>
-          </a:prstGeom>
-          <a:solidFill>
-            <a:schemeClr val="bg1">
-              <a:lumMod val="85000"/>
-            </a:schemeClr>
-          </a:solidFill>
-          <a:ln>
-            <a:noFill/>
-          </a:ln>
-        </p:spPr>
-        <p:style>
-          <a:lnRef idx="2">
-            <a:schemeClr val="accent1">
-              <a:shade val="15000"/>
-            </a:schemeClr>
-          </a:lnRef>
-          <a:fillRef idx="1">
-            <a:schemeClr val="accent1"/>
-          </a:fillRef>
-          <a:effectRef idx="0">
-            <a:schemeClr val="accent1"/>
-          </a:effectRef>
-          <a:fontRef idx="minor">
-            <a:schemeClr val="lt1"/>
-          </a:fontRef>
-        </p:style>
-        <p:txBody>
-          <a:bodyPr rtlCol="0" anchor="ctr"/>
-          <a:lstStyle/>
-          <a:p>
-            <a:pPr algn="ctr"/>
-            <a:endParaRPr lang="ko-KR" altLang="en-US" dirty="0"/>
-          </a:p>
-        </p:txBody>
-      </p:sp>
-      <p:sp>
-        <p:nvSpPr>
-          <p:cNvPr id="8" name="제목 7">
-            <a:extLst>
-              <a:ext uri="{FF2B5EF4-FFF2-40B4-BE49-F238E27FC236}">
-                <a16:creationId xmlns:a16="http://schemas.microsoft.com/office/drawing/2014/main" id="{E41AB3BA-A98A-DDCE-D6EA-2DF42D6CE40B}"/>
-              </a:ext>
-            </a:extLst>
-          </p:cNvPr>
-          <p:cNvSpPr>
-            <a:spLocks noGrp="1"/>
-          </p:cNvSpPr>
-          <p:nvPr>
-            <p:ph type="title"/>
-          </p:nvPr>
-        </p:nvSpPr>
-        <p:spPr>
-          <a:xfrm>
-            <a:off x="521207" y="448056"/>
-            <a:ext cx="8135613" cy="640080"/>
-          </a:xfrm>
-        </p:spPr>
-        <p:txBody>
-          <a:bodyPr rtlCol="0">
-            <a:noAutofit/>
-          </a:bodyPr>
-          <a:lstStyle/>
-          <a:p>
-            <a:pPr rtl="0"/>
-            <a:r>
-              <a:rPr lang="en-US" altLang="ko-KR" dirty="0">
-                <a:cs typeface="Segoe UI Light" panose="020B0502040204020203" pitchFamily="34" charset="0"/>
-              </a:rPr>
-              <a:t>Contents</a:t>
-            </a:r>
-            <a:endParaRPr lang="ko-KR" altLang="en-US" dirty="0">
-              <a:cs typeface="Segoe UI Light" panose="020B0502040204020203" pitchFamily="34" charset="0"/>
-            </a:endParaRPr>
-          </a:p>
-        </p:txBody>
-      </p:sp>
-      <p:sp>
-        <p:nvSpPr>
-          <p:cNvPr id="12" name="슬라이드 번호 개체 틀 11">
-            <a:extLst>
-              <a:ext uri="{FF2B5EF4-FFF2-40B4-BE49-F238E27FC236}">
-                <a16:creationId xmlns:a16="http://schemas.microsoft.com/office/drawing/2014/main" id="{FBA6C3AD-7EE6-C223-FA76-995C4A40A54C}"/>
-              </a:ext>
-            </a:extLst>
-          </p:cNvPr>
-          <p:cNvSpPr>
-            <a:spLocks noGrp="1"/>
-          </p:cNvSpPr>
-          <p:nvPr>
-            <p:ph type="sldNum" sz="quarter" idx="4"/>
-          </p:nvPr>
-        </p:nvSpPr>
-        <p:spPr/>
-        <p:txBody>
-          <a:bodyPr/>
-          <a:lstStyle/>
-          <a:p>
-            <a:fld id="{9860EDB8-5305-433F-BE41-D7A86D811DB3}" type="slidenum">
-              <a:rPr lang="en-US" altLang="ko-KR" noProof="0" smtClean="0"/>
-              <a:pPr/>
-              <a:t>5</a:t>
-            </a:fld>
-            <a:endParaRPr lang="ko-KR" altLang="en-US" noProof="0"/>
-          </a:p>
-        </p:txBody>
-      </p:sp>
-      <p:sp>
-        <p:nvSpPr>
-          <p:cNvPr id="2" name="TextBox 1">
-            <a:extLst>
-              <a:ext uri="{FF2B5EF4-FFF2-40B4-BE49-F238E27FC236}">
-                <a16:creationId xmlns:a16="http://schemas.microsoft.com/office/drawing/2014/main" id="{52C5C255-490D-636C-8D95-CEBDAA0AD5B9}"/>
-              </a:ext>
-            </a:extLst>
-          </p:cNvPr>
-          <p:cNvSpPr txBox="1"/>
-          <p:nvPr/>
-        </p:nvSpPr>
-        <p:spPr>
-          <a:xfrm>
-            <a:off x="1764145" y="1384043"/>
-            <a:ext cx="7250546" cy="5006948"/>
-          </a:xfrm>
-          <a:prstGeom prst="rect">
-            <a:avLst/>
-          </a:prstGeom>
-          <a:noFill/>
-        </p:spPr>
-        <p:txBody>
-          <a:bodyPr wrap="square" rtlCol="0">
-            <a:spAutoFit/>
-          </a:bodyPr>
-          <a:lstStyle/>
-          <a:p>
-            <a:pPr marL="457200" indent="-457200">
-              <a:lnSpc>
-                <a:spcPct val="150000"/>
-              </a:lnSpc>
-              <a:buFont typeface="+mj-lt"/>
-              <a:buAutoNum type="arabicPeriod"/>
-            </a:pPr>
-            <a:r>
-              <a:rPr lang="en-US" altLang="ko-KR" sz="2400" b="1" dirty="0">
-                <a:latin typeface="맑은 고딕 Semilight" panose="020B0502040204020203" pitchFamily="50" charset="-127"/>
-                <a:ea typeface="맑은 고딕 Semilight" panose="020B0502040204020203" pitchFamily="50" charset="-127"/>
-                <a:cs typeface="맑은 고딕 Semilight" panose="020B0502040204020203" pitchFamily="50" charset="-127"/>
-              </a:rPr>
-              <a:t>Vectors and their properties</a:t>
-            </a:r>
-          </a:p>
-          <a:p>
-            <a:pPr marL="457200" indent="-457200">
-              <a:lnSpc>
-                <a:spcPct val="150000"/>
-              </a:lnSpc>
-              <a:buFont typeface="+mj-lt"/>
-              <a:buAutoNum type="arabicPeriod"/>
-            </a:pPr>
-            <a:r>
-              <a:rPr lang="en-US" altLang="ko-KR" sz="2400" b="1" dirty="0">
-                <a:latin typeface="맑은 고딕 Semilight" panose="020B0502040204020203" pitchFamily="50" charset="-127"/>
-                <a:ea typeface="맑은 고딕 Semilight" panose="020B0502040204020203" pitchFamily="50" charset="-127"/>
-                <a:cs typeface="맑은 고딕 Semilight" panose="020B0502040204020203" pitchFamily="50" charset="-127"/>
-              </a:rPr>
-              <a:t>Sum and difference of vectors</a:t>
-            </a:r>
-          </a:p>
-          <a:p>
-            <a:pPr marL="457200" indent="-457200">
-              <a:lnSpc>
-                <a:spcPct val="150000"/>
-              </a:lnSpc>
-              <a:buFont typeface="+mj-lt"/>
-              <a:buAutoNum type="arabicPeriod"/>
-            </a:pPr>
-            <a:r>
-              <a:rPr lang="en-US" altLang="ko-KR" sz="2400" b="1" dirty="0">
-                <a:latin typeface="맑은 고딕 Semilight" panose="020B0502040204020203" pitchFamily="50" charset="-127"/>
-                <a:ea typeface="맑은 고딕 Semilight" panose="020B0502040204020203" pitchFamily="50" charset="-127"/>
-                <a:cs typeface="맑은 고딕 Semilight" panose="020B0502040204020203" pitchFamily="50" charset="-127"/>
-              </a:rPr>
-              <a:t>Distance between vectors</a:t>
-            </a:r>
-          </a:p>
-          <a:p>
-            <a:pPr marL="457200" indent="-457200">
-              <a:lnSpc>
-                <a:spcPct val="150000"/>
-              </a:lnSpc>
-              <a:buFont typeface="+mj-lt"/>
-              <a:buAutoNum type="arabicPeriod"/>
-            </a:pPr>
-            <a:r>
-              <a:rPr lang="en-US" altLang="ko-KR" sz="2400" b="1" dirty="0">
-                <a:latin typeface="맑은 고딕 Semilight" panose="020B0502040204020203" pitchFamily="50" charset="-127"/>
-                <a:ea typeface="맑은 고딕 Semilight" panose="020B0502040204020203" pitchFamily="50" charset="-127"/>
-                <a:cs typeface="맑은 고딕 Semilight" panose="020B0502040204020203" pitchFamily="50" charset="-127"/>
-              </a:rPr>
-              <a:t>Multiplying a vector by a scalar</a:t>
-            </a:r>
-          </a:p>
-          <a:p>
-            <a:pPr marL="457200" indent="-457200">
-              <a:lnSpc>
-                <a:spcPct val="150000"/>
-              </a:lnSpc>
-              <a:buFont typeface="+mj-lt"/>
-              <a:buAutoNum type="arabicPeriod"/>
-            </a:pPr>
-            <a:r>
-              <a:rPr lang="en-US" altLang="ko-KR" sz="2400" b="1" dirty="0">
-                <a:latin typeface="맑은 고딕 Semilight" panose="020B0502040204020203" pitchFamily="50" charset="-127"/>
-                <a:ea typeface="맑은 고딕 Semilight" panose="020B0502040204020203" pitchFamily="50" charset="-127"/>
-                <a:cs typeface="맑은 고딕 Semilight" panose="020B0502040204020203" pitchFamily="50" charset="-127"/>
-              </a:rPr>
-              <a:t>The dot product</a:t>
-            </a:r>
-          </a:p>
-          <a:p>
-            <a:pPr marL="457200" indent="-457200">
-              <a:lnSpc>
-                <a:spcPct val="150000"/>
-              </a:lnSpc>
-              <a:buFont typeface="+mj-lt"/>
-              <a:buAutoNum type="arabicPeriod"/>
-            </a:pPr>
-            <a:r>
-              <a:rPr lang="en-US" altLang="ko-KR" sz="2400" b="1" dirty="0">
-                <a:latin typeface="맑은 고딕 Semilight" panose="020B0502040204020203" pitchFamily="50" charset="-127"/>
-                <a:ea typeface="맑은 고딕 Semilight" panose="020B0502040204020203" pitchFamily="50" charset="-127"/>
-                <a:cs typeface="맑은 고딕 Semilight" panose="020B0502040204020203" pitchFamily="50" charset="-127"/>
-              </a:rPr>
-              <a:t>Geometric dot product</a:t>
-            </a:r>
-          </a:p>
-          <a:p>
-            <a:pPr marL="457200" indent="-457200">
-              <a:lnSpc>
-                <a:spcPct val="150000"/>
-              </a:lnSpc>
-              <a:buFont typeface="+mj-lt"/>
-              <a:buAutoNum type="arabicPeriod"/>
-            </a:pPr>
-            <a:r>
-              <a:rPr lang="en-US" altLang="ko-KR" sz="2400" b="1" dirty="0">
-                <a:latin typeface="맑은 고딕 Semilight" panose="020B0502040204020203" pitchFamily="50" charset="-127"/>
-                <a:ea typeface="맑은 고딕 Semilight" panose="020B0502040204020203" pitchFamily="50" charset="-127"/>
-                <a:cs typeface="맑은 고딕 Semilight" panose="020B0502040204020203" pitchFamily="50" charset="-127"/>
-              </a:rPr>
-              <a:t>Multiplying a matrix by a vector</a:t>
-            </a:r>
-          </a:p>
-          <a:p>
-            <a:pPr marL="457200" indent="-457200">
-              <a:lnSpc>
-                <a:spcPct val="150000"/>
-              </a:lnSpc>
-              <a:buFont typeface="+mj-lt"/>
-              <a:buAutoNum type="arabicPeriod"/>
-            </a:pPr>
-            <a:r>
-              <a:rPr lang="en-US" altLang="ko-KR" sz="2400" b="1" dirty="0">
-                <a:latin typeface="맑은 고딕 Semilight" panose="020B0502040204020203" pitchFamily="50" charset="-127"/>
-                <a:ea typeface="맑은 고딕 Semilight" panose="020B0502040204020203" pitchFamily="50" charset="-127"/>
-                <a:cs typeface="맑은 고딕 Semilight" panose="020B0502040204020203" pitchFamily="50" charset="-127"/>
-              </a:rPr>
-              <a:t>Matrices as linear transformations</a:t>
-            </a:r>
-          </a:p>
-          <a:p>
-            <a:pPr marL="457200" indent="-457200">
-              <a:lnSpc>
-                <a:spcPct val="150000"/>
-              </a:lnSpc>
-              <a:buFont typeface="+mj-lt"/>
-              <a:buAutoNum type="arabicPeriod"/>
-            </a:pPr>
-            <a:r>
-              <a:rPr lang="en-US" altLang="ko-KR" sz="2400" b="1" dirty="0">
-                <a:latin typeface="맑은 고딕 Semilight" panose="020B0502040204020203" pitchFamily="50" charset="-127"/>
-                <a:ea typeface="맑은 고딕 Semilight" panose="020B0502040204020203" pitchFamily="50" charset="-127"/>
-                <a:cs typeface="맑은 고딕 Semilight" panose="020B0502040204020203" pitchFamily="50" charset="-127"/>
-              </a:rPr>
-              <a:t>Matrix multiplication</a:t>
-            </a:r>
-          </a:p>
-        </p:txBody>
-      </p:sp>
-    </p:spTree>
-    <p:extLst>
-      <p:ext uri="{BB962C8B-B14F-4D97-AF65-F5344CB8AC3E}">
-        <p14:creationId xmlns:p14="http://schemas.microsoft.com/office/powerpoint/2010/main" val="2867243791"/>
-      </p:ext>
-    </p:extLst>
-  </p:cSld>
-  <p:clrMapOvr>
-    <a:masterClrMapping/>
-  </p:clrMapOvr>
-  <mc:AlternateContent xmlns:mc="http://schemas.openxmlformats.org/markup-compatibility/2006" xmlns:p14="http://schemas.microsoft.com/office/powerpoint/2010/main">
-    <mc:Choice Requires="p14">
-      <p:transition p14:dur="10"/>
-    </mc:Choice>
-    <mc:Fallback xmlns="">
-      <p:transition/>
-    </mc:Fallback>
-  </mc:AlternateContent>
-</p:sld>
-</file>
-
-<file path=ppt/slides/slide50.xml><?xml version="1.0" encoding="utf-8"?>
+<file path=ppt/slides/slide51.xml><?xml version="1.0" encoding="utf-8"?>
 <p:sld xmlns:a="http://schemas.openxmlformats.org/drawingml/2006/main" xmlns:r="http://schemas.openxmlformats.org/officeDocument/2006/relationships" xmlns:p="http://schemas.openxmlformats.org/presentationml/2006/main">
   <p:cSld>
     <p:spTree>
@@ -22356,7 +22815,7 @@
             <a:fld id="{9860EDB8-5305-433F-BE41-D7A86D811DB3}" type="slidenum">
               <a:rPr lang="en-US" altLang="ko-KR" noProof="0" smtClean="0"/>
               <a:pPr/>
-              <a:t>50</a:t>
+              <a:t>51</a:t>
             </a:fld>
             <a:endParaRPr lang="ko-KR" altLang="en-US" noProof="0"/>
           </a:p>
@@ -22413,7 +22872,7 @@
 </p:sld>
 </file>
 
-<file path=ppt/slides/slide51.xml><?xml version="1.0" encoding="utf-8"?>
+<file path=ppt/slides/slide52.xml><?xml version="1.0" encoding="utf-8"?>
 <p:sld xmlns:a="http://schemas.openxmlformats.org/drawingml/2006/main" xmlns:r="http://schemas.openxmlformats.org/officeDocument/2006/relationships" xmlns:p="http://schemas.openxmlformats.org/presentationml/2006/main">
   <p:cSld>
     <p:spTree>
@@ -22498,7 +22957,7 @@
             <a:fld id="{9860EDB8-5305-433F-BE41-D7A86D811DB3}" type="slidenum">
               <a:rPr lang="en-US" altLang="ko-KR" noProof="0" smtClean="0"/>
               <a:pPr/>
-              <a:t>51</a:t>
+              <a:t>52</a:t>
             </a:fld>
             <a:endParaRPr lang="ko-KR" altLang="en-US" noProof="0"/>
           </a:p>
@@ -22555,7 +23014,7 @@
 </p:sld>
 </file>
 
-<file path=ppt/slides/slide52.xml><?xml version="1.0" encoding="utf-8"?>
+<file path=ppt/slides/slide53.xml><?xml version="1.0" encoding="utf-8"?>
 <p:sld xmlns:a="http://schemas.openxmlformats.org/drawingml/2006/main" xmlns:r="http://schemas.openxmlformats.org/officeDocument/2006/relationships" xmlns:p="http://schemas.openxmlformats.org/presentationml/2006/main">
   <p:cSld>
     <p:spTree>
@@ -22640,7 +23099,7 @@
             <a:fld id="{9860EDB8-5305-433F-BE41-D7A86D811DB3}" type="slidenum">
               <a:rPr lang="en-US" altLang="ko-KR" noProof="0" smtClean="0"/>
               <a:pPr/>
-              <a:t>52</a:t>
+              <a:t>53</a:t>
             </a:fld>
             <a:endParaRPr lang="ko-KR" altLang="en-US" noProof="0"/>
           </a:p>
@@ -22727,7 +23186,7 @@
 </p:sld>
 </file>
 
-<file path=ppt/slides/slide53.xml><?xml version="1.0" encoding="utf-8"?>
+<file path=ppt/slides/slide54.xml><?xml version="1.0" encoding="utf-8"?>
 <p:sld xmlns:a="http://schemas.openxmlformats.org/drawingml/2006/main" xmlns:r="http://schemas.openxmlformats.org/officeDocument/2006/relationships" xmlns:p="http://schemas.openxmlformats.org/presentationml/2006/main">
   <p:cSld>
     <p:spTree>
@@ -22812,7 +23271,7 @@
             <a:fld id="{9860EDB8-5305-433F-BE41-D7A86D811DB3}" type="slidenum">
               <a:rPr lang="en-US" altLang="ko-KR" noProof="0" smtClean="0"/>
               <a:pPr/>
-              <a:t>53</a:t>
+              <a:t>54</a:t>
             </a:fld>
             <a:endParaRPr lang="ko-KR" altLang="en-US" noProof="0"/>
           </a:p>
@@ -22976,7 +23435,7 @@
 </p:sld>
 </file>
 
-<file path=ppt/slides/slide54.xml><?xml version="1.0" encoding="utf-8"?>
+<file path=ppt/slides/slide55.xml><?xml version="1.0" encoding="utf-8"?>
 <p:sld xmlns:a="http://schemas.openxmlformats.org/drawingml/2006/main" xmlns:r="http://schemas.openxmlformats.org/officeDocument/2006/relationships" xmlns:p="http://schemas.openxmlformats.org/presentationml/2006/main">
   <p:cSld>
     <p:spTree>
@@ -23679,7 +24138,7 @@
             <a:fld id="{D57F1E4F-1CFF-5643-939E-217C01CDF565}" type="slidenum">
               <a:rPr lang="en-US" sz="2000" smtClean="0"/>
               <a:pPr/>
-              <a:t>54</a:t>
+              <a:t>55</a:t>
             </a:fld>
             <a:endParaRPr lang="en-US" sz="2000" dirty="0"/>
           </a:p>
@@ -23698,7 +24157,7 @@
 </p:sld>
 </file>
 
-<file path=ppt/slides/slide55.xml><?xml version="1.0" encoding="utf-8"?>
+<file path=ppt/slides/slide56.xml><?xml version="1.0" encoding="utf-8"?>
 <p:sld xmlns:a="http://schemas.openxmlformats.org/drawingml/2006/main" xmlns:r="http://schemas.openxmlformats.org/officeDocument/2006/relationships" xmlns:p="http://schemas.openxmlformats.org/presentationml/2006/main">
   <p:cSld>
     <p:spTree>
@@ -24502,7 +24961,7 @@
             <a:fld id="{D57F1E4F-1CFF-5643-939E-217C01CDF565}" type="slidenum">
               <a:rPr lang="en-US" sz="2000" smtClean="0"/>
               <a:pPr/>
-              <a:t>55</a:t>
+              <a:t>56</a:t>
             </a:fld>
             <a:endParaRPr lang="en-US" sz="2000" dirty="0"/>
           </a:p>
@@ -24558,7 +25017,7 @@
 </p:sld>
 </file>
 
-<file path=ppt/slides/slide56.xml><?xml version="1.0" encoding="utf-8"?>
+<file path=ppt/slides/slide57.xml><?xml version="1.0" encoding="utf-8"?>
 <p:sld xmlns:a="http://schemas.openxmlformats.org/drawingml/2006/main" xmlns:r="http://schemas.openxmlformats.org/officeDocument/2006/relationships" xmlns:p="http://schemas.openxmlformats.org/presentationml/2006/main">
   <p:cSld>
     <p:spTree>
@@ -25365,7 +25824,7 @@
 </p:sld>
 </file>
 
-<file path=ppt/slides/slide57.xml><?xml version="1.0" encoding="utf-8"?>
+<file path=ppt/slides/slide58.xml><?xml version="1.0" encoding="utf-8"?>
 <p:sld xmlns:a="http://schemas.openxmlformats.org/drawingml/2006/main" xmlns:r="http://schemas.openxmlformats.org/officeDocument/2006/relationships" xmlns:p="http://schemas.openxmlformats.org/presentationml/2006/main">
   <p:cSld>
     <p:spTree>
@@ -26287,7 +26746,7 @@
 </p:sld>
 </file>
 
-<file path=ppt/slides/slide58.xml><?xml version="1.0" encoding="utf-8"?>
+<file path=ppt/slides/slide59.xml><?xml version="1.0" encoding="utf-8"?>
 <p:sld xmlns:a="http://schemas.openxmlformats.org/drawingml/2006/main" xmlns:r="http://schemas.openxmlformats.org/officeDocument/2006/relationships" xmlns:p="http://schemas.openxmlformats.org/presentationml/2006/main">
   <p:cSld>
     <p:spTree>
@@ -26478,7 +26937,228 @@
 </p:sld>
 </file>
 
-<file path=ppt/slides/slide59.xml><?xml version="1.0" encoding="utf-8"?>
+<file path=ppt/slides/slide6.xml><?xml version="1.0" encoding="utf-8"?>
+<p:sld xmlns:a="http://schemas.openxmlformats.org/drawingml/2006/main" xmlns:r="http://schemas.openxmlformats.org/officeDocument/2006/relationships" xmlns:p="http://schemas.openxmlformats.org/presentationml/2006/main">
+  <p:cSld>
+    <p:spTree>
+      <p:nvGrpSpPr>
+        <p:cNvPr id="1" name="">
+          <a:extLst>
+            <a:ext uri="{FF2B5EF4-FFF2-40B4-BE49-F238E27FC236}">
+              <a16:creationId xmlns:a16="http://schemas.microsoft.com/office/drawing/2014/main" id="{8F177369-1E15-5F94-FD6C-4893AFE87888}"/>
+            </a:ext>
+          </a:extLst>
+        </p:cNvPr>
+        <p:cNvGrpSpPr/>
+        <p:nvPr/>
+      </p:nvGrpSpPr>
+      <p:grpSpPr>
+        <a:xfrm>
+          <a:off x="0" y="0"/>
+          <a:ext cx="0" cy="0"/>
+          <a:chOff x="0" y="0"/>
+          <a:chExt cx="0" cy="0"/>
+        </a:xfrm>
+      </p:grpSpPr>
+      <p:sp>
+        <p:nvSpPr>
+          <p:cNvPr id="8" name="제목 7">
+            <a:extLst>
+              <a:ext uri="{FF2B5EF4-FFF2-40B4-BE49-F238E27FC236}">
+                <a16:creationId xmlns:a16="http://schemas.microsoft.com/office/drawing/2014/main" id="{26F4CC8A-A34F-E8DB-36C1-488614982C81}"/>
+              </a:ext>
+            </a:extLst>
+          </p:cNvPr>
+          <p:cNvSpPr>
+            <a:spLocks noGrp="1"/>
+          </p:cNvSpPr>
+          <p:nvPr>
+            <p:ph type="title"/>
+          </p:nvPr>
+        </p:nvSpPr>
+        <p:spPr>
+          <a:xfrm>
+            <a:off x="521207" y="448056"/>
+            <a:ext cx="8135613" cy="640080"/>
+          </a:xfrm>
+        </p:spPr>
+        <p:txBody>
+          <a:bodyPr rtlCol="0">
+            <a:noAutofit/>
+          </a:bodyPr>
+          <a:lstStyle/>
+          <a:p>
+            <a:pPr rtl="0"/>
+            <a:r>
+              <a:rPr lang="en-US" altLang="ko-KR" dirty="0">
+                <a:cs typeface="Segoe UI Light" panose="020B0502040204020203" pitchFamily="34" charset="0"/>
+              </a:rPr>
+              <a:t>Vectors</a:t>
+            </a:r>
+            <a:endParaRPr lang="ko-KR" altLang="en-US" dirty="0">
+              <a:cs typeface="Segoe UI Light" panose="020B0502040204020203" pitchFamily="34" charset="0"/>
+            </a:endParaRPr>
+          </a:p>
+        </p:txBody>
+      </p:sp>
+      <p:sp>
+        <p:nvSpPr>
+          <p:cNvPr id="12" name="슬라이드 번호 개체 틀 11">
+            <a:extLst>
+              <a:ext uri="{FF2B5EF4-FFF2-40B4-BE49-F238E27FC236}">
+                <a16:creationId xmlns:a16="http://schemas.microsoft.com/office/drawing/2014/main" id="{5750F1BC-B3A2-4A2B-32AC-7F76AD12B5DA}"/>
+              </a:ext>
+            </a:extLst>
+          </p:cNvPr>
+          <p:cNvSpPr>
+            <a:spLocks noGrp="1"/>
+          </p:cNvSpPr>
+          <p:nvPr>
+            <p:ph type="sldNum" sz="quarter" idx="4"/>
+          </p:nvPr>
+        </p:nvSpPr>
+        <p:spPr/>
+        <p:txBody>
+          <a:bodyPr/>
+          <a:lstStyle/>
+          <a:p>
+            <a:fld id="{9860EDB8-5305-433F-BE41-D7A86D811DB3}" type="slidenum">
+              <a:rPr lang="en-US" altLang="ko-KR" noProof="0" smtClean="0"/>
+              <a:pPr/>
+              <a:t>6</a:t>
+            </a:fld>
+            <a:endParaRPr lang="ko-KR" altLang="en-US" noProof="0"/>
+          </a:p>
+        </p:txBody>
+      </p:sp>
+      <p:pic>
+        <p:nvPicPr>
+          <p:cNvPr id="4" name="그림 3">
+            <a:extLst>
+              <a:ext uri="{FF2B5EF4-FFF2-40B4-BE49-F238E27FC236}">
+                <a16:creationId xmlns:a16="http://schemas.microsoft.com/office/drawing/2014/main" id="{2E1AD8E8-F92C-B59E-E547-66C8AC4227A4}"/>
+              </a:ext>
+            </a:extLst>
+          </p:cNvPr>
+          <p:cNvPicPr>
+            <a:picLocks noChangeAspect="1"/>
+          </p:cNvPicPr>
+          <p:nvPr/>
+        </p:nvPicPr>
+        <p:blipFill>
+          <a:blip r:embed="rId3"/>
+          <a:stretch>
+            <a:fillRect/>
+          </a:stretch>
+        </p:blipFill>
+        <p:spPr>
+          <a:xfrm>
+            <a:off x="1403927" y="1852703"/>
+            <a:ext cx="8891077" cy="4145671"/>
+          </a:xfrm>
+          <a:prstGeom prst="rect">
+            <a:avLst/>
+          </a:prstGeom>
+        </p:spPr>
+      </p:pic>
+      <p:sp>
+        <p:nvSpPr>
+          <p:cNvPr id="6" name="TextBox 5">
+            <a:extLst>
+              <a:ext uri="{FF2B5EF4-FFF2-40B4-BE49-F238E27FC236}">
+                <a16:creationId xmlns:a16="http://schemas.microsoft.com/office/drawing/2014/main" id="{1F0BE70D-4CA4-2CB0-BEC0-19211FCF4328}"/>
+              </a:ext>
+            </a:extLst>
+          </p:cNvPr>
+          <p:cNvSpPr txBox="1"/>
+          <p:nvPr/>
+        </p:nvSpPr>
+        <p:spPr>
+          <a:xfrm>
+            <a:off x="4491719" y="1483371"/>
+            <a:ext cx="1847273" cy="369332"/>
+          </a:xfrm>
+          <a:prstGeom prst="rect">
+            <a:avLst/>
+          </a:prstGeom>
+          <a:noFill/>
+        </p:spPr>
+        <p:txBody>
+          <a:bodyPr wrap="square">
+            <a:spAutoFit/>
+          </a:bodyPr>
+          <a:lstStyle/>
+          <a:p>
+            <a:r>
+              <a:rPr lang="en-US" altLang="ko-KR" dirty="0">
+                <a:cs typeface="Segoe UI Light" panose="020B0502040204020203" pitchFamily="34" charset="0"/>
+              </a:rPr>
+              <a:t>Magnitude</a:t>
+            </a:r>
+            <a:endParaRPr lang="ko-KR" altLang="en-US" dirty="0"/>
+          </a:p>
+        </p:txBody>
+      </p:sp>
+      <p:sp>
+        <p:nvSpPr>
+          <p:cNvPr id="9" name="TextBox 8">
+            <a:extLst>
+              <a:ext uri="{FF2B5EF4-FFF2-40B4-BE49-F238E27FC236}">
+                <a16:creationId xmlns:a16="http://schemas.microsoft.com/office/drawing/2014/main" id="{62B40E43-D0F1-86C6-26CC-845A42FD372C}"/>
+              </a:ext>
+            </a:extLst>
+          </p:cNvPr>
+          <p:cNvSpPr txBox="1"/>
+          <p:nvPr/>
+        </p:nvSpPr>
+        <p:spPr>
+          <a:xfrm>
+            <a:off x="6964218" y="1483371"/>
+            <a:ext cx="1293091" cy="369332"/>
+          </a:xfrm>
+          <a:prstGeom prst="rect">
+            <a:avLst/>
+          </a:prstGeom>
+          <a:noFill/>
+        </p:spPr>
+        <p:txBody>
+          <a:bodyPr wrap="square">
+            <a:spAutoFit/>
+          </a:bodyPr>
+          <a:lstStyle/>
+          <a:p>
+            <a:r>
+              <a:rPr lang="en-US" altLang="ko-KR" dirty="0">
+                <a:cs typeface="Segoe UI Light" panose="020B0502040204020203" pitchFamily="34" charset="0"/>
+              </a:rPr>
+              <a:t>Directions</a:t>
+            </a:r>
+            <a:endParaRPr lang="ko-KR" altLang="en-US" dirty="0"/>
+          </a:p>
+        </p:txBody>
+      </p:sp>
+    </p:spTree>
+    <p:extLst>
+      <p:ext uri="{BB962C8B-B14F-4D97-AF65-F5344CB8AC3E}">
+        <p14:creationId xmlns:p14="http://schemas.microsoft.com/office/powerpoint/2010/main" val="3865646897"/>
+      </p:ext>
+    </p:extLst>
+  </p:cSld>
+  <p:clrMapOvr>
+    <a:masterClrMapping/>
+  </p:clrMapOvr>
+  <mc:AlternateContent xmlns:mc="http://schemas.openxmlformats.org/markup-compatibility/2006" xmlns:p14="http://schemas.microsoft.com/office/powerpoint/2010/main">
+    <mc:Choice Requires="p14">
+      <p:transition p14:dur="10"/>
+    </mc:Choice>
+    <mc:Fallback xmlns="">
+      <p:transition/>
+    </mc:Fallback>
+  </mc:AlternateContent>
+</p:sld>
+</file>
+
+<file path=ppt/slides/slide60.xml><?xml version="1.0" encoding="utf-8"?>
 <p:sld xmlns:a="http://schemas.openxmlformats.org/drawingml/2006/main" xmlns:r="http://schemas.openxmlformats.org/officeDocument/2006/relationships" xmlns:p="http://schemas.openxmlformats.org/presentationml/2006/main">
   <p:cSld>
     <p:spTree>
@@ -26683,228 +27363,7 @@
 </p:sld>
 </file>
 
-<file path=ppt/slides/slide6.xml><?xml version="1.0" encoding="utf-8"?>
-<p:sld xmlns:a="http://schemas.openxmlformats.org/drawingml/2006/main" xmlns:r="http://schemas.openxmlformats.org/officeDocument/2006/relationships" xmlns:p="http://schemas.openxmlformats.org/presentationml/2006/main">
-  <p:cSld>
-    <p:spTree>
-      <p:nvGrpSpPr>
-        <p:cNvPr id="1" name="">
-          <a:extLst>
-            <a:ext uri="{FF2B5EF4-FFF2-40B4-BE49-F238E27FC236}">
-              <a16:creationId xmlns:a16="http://schemas.microsoft.com/office/drawing/2014/main" id="{8F177369-1E15-5F94-FD6C-4893AFE87888}"/>
-            </a:ext>
-          </a:extLst>
-        </p:cNvPr>
-        <p:cNvGrpSpPr/>
-        <p:nvPr/>
-      </p:nvGrpSpPr>
-      <p:grpSpPr>
-        <a:xfrm>
-          <a:off x="0" y="0"/>
-          <a:ext cx="0" cy="0"/>
-          <a:chOff x="0" y="0"/>
-          <a:chExt cx="0" cy="0"/>
-        </a:xfrm>
-      </p:grpSpPr>
-      <p:sp>
-        <p:nvSpPr>
-          <p:cNvPr id="8" name="제목 7">
-            <a:extLst>
-              <a:ext uri="{FF2B5EF4-FFF2-40B4-BE49-F238E27FC236}">
-                <a16:creationId xmlns:a16="http://schemas.microsoft.com/office/drawing/2014/main" id="{26F4CC8A-A34F-E8DB-36C1-488614982C81}"/>
-              </a:ext>
-            </a:extLst>
-          </p:cNvPr>
-          <p:cNvSpPr>
-            <a:spLocks noGrp="1"/>
-          </p:cNvSpPr>
-          <p:nvPr>
-            <p:ph type="title"/>
-          </p:nvPr>
-        </p:nvSpPr>
-        <p:spPr>
-          <a:xfrm>
-            <a:off x="521207" y="448056"/>
-            <a:ext cx="8135613" cy="640080"/>
-          </a:xfrm>
-        </p:spPr>
-        <p:txBody>
-          <a:bodyPr rtlCol="0">
-            <a:noAutofit/>
-          </a:bodyPr>
-          <a:lstStyle/>
-          <a:p>
-            <a:pPr rtl="0"/>
-            <a:r>
-              <a:rPr lang="en-US" altLang="ko-KR" dirty="0">
-                <a:cs typeface="Segoe UI Light" panose="020B0502040204020203" pitchFamily="34" charset="0"/>
-              </a:rPr>
-              <a:t>Vectors</a:t>
-            </a:r>
-            <a:endParaRPr lang="ko-KR" altLang="en-US" dirty="0">
-              <a:cs typeface="Segoe UI Light" panose="020B0502040204020203" pitchFamily="34" charset="0"/>
-            </a:endParaRPr>
-          </a:p>
-        </p:txBody>
-      </p:sp>
-      <p:sp>
-        <p:nvSpPr>
-          <p:cNvPr id="12" name="슬라이드 번호 개체 틀 11">
-            <a:extLst>
-              <a:ext uri="{FF2B5EF4-FFF2-40B4-BE49-F238E27FC236}">
-                <a16:creationId xmlns:a16="http://schemas.microsoft.com/office/drawing/2014/main" id="{5750F1BC-B3A2-4A2B-32AC-7F76AD12B5DA}"/>
-              </a:ext>
-            </a:extLst>
-          </p:cNvPr>
-          <p:cNvSpPr>
-            <a:spLocks noGrp="1"/>
-          </p:cNvSpPr>
-          <p:nvPr>
-            <p:ph type="sldNum" sz="quarter" idx="4"/>
-          </p:nvPr>
-        </p:nvSpPr>
-        <p:spPr/>
-        <p:txBody>
-          <a:bodyPr/>
-          <a:lstStyle/>
-          <a:p>
-            <a:fld id="{9860EDB8-5305-433F-BE41-D7A86D811DB3}" type="slidenum">
-              <a:rPr lang="en-US" altLang="ko-KR" noProof="0" smtClean="0"/>
-              <a:pPr/>
-              <a:t>6</a:t>
-            </a:fld>
-            <a:endParaRPr lang="ko-KR" altLang="en-US" noProof="0"/>
-          </a:p>
-        </p:txBody>
-      </p:sp>
-      <p:pic>
-        <p:nvPicPr>
-          <p:cNvPr id="4" name="그림 3">
-            <a:extLst>
-              <a:ext uri="{FF2B5EF4-FFF2-40B4-BE49-F238E27FC236}">
-                <a16:creationId xmlns:a16="http://schemas.microsoft.com/office/drawing/2014/main" id="{2E1AD8E8-F92C-B59E-E547-66C8AC4227A4}"/>
-              </a:ext>
-            </a:extLst>
-          </p:cNvPr>
-          <p:cNvPicPr>
-            <a:picLocks noChangeAspect="1"/>
-          </p:cNvPicPr>
-          <p:nvPr/>
-        </p:nvPicPr>
-        <p:blipFill>
-          <a:blip r:embed="rId3"/>
-          <a:stretch>
-            <a:fillRect/>
-          </a:stretch>
-        </p:blipFill>
-        <p:spPr>
-          <a:xfrm>
-            <a:off x="1403927" y="1852703"/>
-            <a:ext cx="8891077" cy="4145671"/>
-          </a:xfrm>
-          <a:prstGeom prst="rect">
-            <a:avLst/>
-          </a:prstGeom>
-        </p:spPr>
-      </p:pic>
-      <p:sp>
-        <p:nvSpPr>
-          <p:cNvPr id="6" name="TextBox 5">
-            <a:extLst>
-              <a:ext uri="{FF2B5EF4-FFF2-40B4-BE49-F238E27FC236}">
-                <a16:creationId xmlns:a16="http://schemas.microsoft.com/office/drawing/2014/main" id="{1F0BE70D-4CA4-2CB0-BEC0-19211FCF4328}"/>
-              </a:ext>
-            </a:extLst>
-          </p:cNvPr>
-          <p:cNvSpPr txBox="1"/>
-          <p:nvPr/>
-        </p:nvSpPr>
-        <p:spPr>
-          <a:xfrm>
-            <a:off x="4491719" y="1483371"/>
-            <a:ext cx="1847273" cy="369332"/>
-          </a:xfrm>
-          <a:prstGeom prst="rect">
-            <a:avLst/>
-          </a:prstGeom>
-          <a:noFill/>
-        </p:spPr>
-        <p:txBody>
-          <a:bodyPr wrap="square">
-            <a:spAutoFit/>
-          </a:bodyPr>
-          <a:lstStyle/>
-          <a:p>
-            <a:r>
-              <a:rPr lang="en-US" altLang="ko-KR" dirty="0">
-                <a:cs typeface="Segoe UI Light" panose="020B0502040204020203" pitchFamily="34" charset="0"/>
-              </a:rPr>
-              <a:t>Magnitude</a:t>
-            </a:r>
-            <a:endParaRPr lang="ko-KR" altLang="en-US" dirty="0"/>
-          </a:p>
-        </p:txBody>
-      </p:sp>
-      <p:sp>
-        <p:nvSpPr>
-          <p:cNvPr id="9" name="TextBox 8">
-            <a:extLst>
-              <a:ext uri="{FF2B5EF4-FFF2-40B4-BE49-F238E27FC236}">
-                <a16:creationId xmlns:a16="http://schemas.microsoft.com/office/drawing/2014/main" id="{62B40E43-D0F1-86C6-26CC-845A42FD372C}"/>
-              </a:ext>
-            </a:extLst>
-          </p:cNvPr>
-          <p:cNvSpPr txBox="1"/>
-          <p:nvPr/>
-        </p:nvSpPr>
-        <p:spPr>
-          <a:xfrm>
-            <a:off x="6964218" y="1483371"/>
-            <a:ext cx="1293091" cy="369332"/>
-          </a:xfrm>
-          <a:prstGeom prst="rect">
-            <a:avLst/>
-          </a:prstGeom>
-          <a:noFill/>
-        </p:spPr>
-        <p:txBody>
-          <a:bodyPr wrap="square">
-            <a:spAutoFit/>
-          </a:bodyPr>
-          <a:lstStyle/>
-          <a:p>
-            <a:r>
-              <a:rPr lang="en-US" altLang="ko-KR" dirty="0">
-                <a:cs typeface="Segoe UI Light" panose="020B0502040204020203" pitchFamily="34" charset="0"/>
-              </a:rPr>
-              <a:t>Directions</a:t>
-            </a:r>
-            <a:endParaRPr lang="ko-KR" altLang="en-US" dirty="0"/>
-          </a:p>
-        </p:txBody>
-      </p:sp>
-    </p:spTree>
-    <p:extLst>
-      <p:ext uri="{BB962C8B-B14F-4D97-AF65-F5344CB8AC3E}">
-        <p14:creationId xmlns:p14="http://schemas.microsoft.com/office/powerpoint/2010/main" val="3865646897"/>
-      </p:ext>
-    </p:extLst>
-  </p:cSld>
-  <p:clrMapOvr>
-    <a:masterClrMapping/>
-  </p:clrMapOvr>
-  <mc:AlternateContent xmlns:mc="http://schemas.openxmlformats.org/markup-compatibility/2006" xmlns:p14="http://schemas.microsoft.com/office/powerpoint/2010/main">
-    <mc:Choice Requires="p14">
-      <p:transition p14:dur="10"/>
-    </mc:Choice>
-    <mc:Fallback xmlns="">
-      <p:transition/>
-    </mc:Fallback>
-  </mc:AlternateContent>
-</p:sld>
-</file>
-
-<file path=ppt/slides/slide60.xml><?xml version="1.0" encoding="utf-8"?>
+<file path=ppt/slides/slide61.xml><?xml version="1.0" encoding="utf-8"?>
 <p:sld xmlns:a="http://schemas.openxmlformats.org/drawingml/2006/main" xmlns:r="http://schemas.openxmlformats.org/officeDocument/2006/relationships" xmlns:p="http://schemas.openxmlformats.org/presentationml/2006/main">
   <p:cSld>
     <p:spTree>
@@ -27008,7 +27467,7 @@
             <a:fld id="{D57F1E4F-1CFF-5643-939E-217C01CDF565}" type="slidenum">
               <a:rPr lang="en-US" smtClean="0"/>
               <a:pPr/>
-              <a:t>60</a:t>
+              <a:t>61</a:t>
             </a:fld>
             <a:endParaRPr lang="en-US" dirty="0"/>
           </a:p>
@@ -28205,7 +28664,7 @@
 </p:sld>
 </file>
 
-<file path=ppt/slides/slide61.xml><?xml version="1.0" encoding="utf-8"?>
+<file path=ppt/slides/slide62.xml><?xml version="1.0" encoding="utf-8"?>
 <p:sld xmlns:a="http://schemas.openxmlformats.org/drawingml/2006/main" xmlns:r="http://schemas.openxmlformats.org/officeDocument/2006/relationships" xmlns:p="http://schemas.openxmlformats.org/presentationml/2006/main">
   <p:cSld>
     <p:spTree>
@@ -28276,7 +28735,7 @@
             <a:fld id="{D57F1E4F-1CFF-5643-939E-217C01CDF565}" type="slidenum">
               <a:rPr lang="en-US" smtClean="0"/>
               <a:pPr/>
-              <a:t>61</a:t>
+              <a:t>62</a:t>
             </a:fld>
             <a:endParaRPr lang="en-US" dirty="0"/>
           </a:p>
@@ -30268,7 +30727,7 @@
 </p:sld>
 </file>
 
-<file path=ppt/slides/slide62.xml><?xml version="1.0" encoding="utf-8"?>
+<file path=ppt/slides/slide63.xml><?xml version="1.0" encoding="utf-8"?>
 <p:sld xmlns:a="http://schemas.openxmlformats.org/drawingml/2006/main" xmlns:r="http://schemas.openxmlformats.org/officeDocument/2006/relationships" xmlns:p="http://schemas.openxmlformats.org/presentationml/2006/main">
   <p:cSld>
     <p:spTree>
@@ -30357,7 +30816,7 @@
             <a:fld id="{D57F1E4F-1CFF-5643-939E-217C01CDF565}" type="slidenum">
               <a:rPr lang="en-US" smtClean="0"/>
               <a:pPr/>
-              <a:t>62</a:t>
+              <a:t>63</a:t>
             </a:fld>
             <a:endParaRPr lang="en-US" dirty="0"/>
           </a:p>
@@ -31542,7 +32001,7 @@
 </p:sld>
 </file>
 
-<file path=ppt/slides/slide63.xml><?xml version="1.0" encoding="utf-8"?>
+<file path=ppt/slides/slide64.xml><?xml version="1.0" encoding="utf-8"?>
 <p:sld xmlns:a="http://schemas.openxmlformats.org/drawingml/2006/main" xmlns:r="http://schemas.openxmlformats.org/officeDocument/2006/relationships" xmlns:p="http://schemas.openxmlformats.org/presentationml/2006/main">
   <p:cSld>
     <p:spTree>

--- a/w3_Vectors_and_Linear_Transformations.pptx
+++ b/w3_Vectors_and_Linear_Transformations.pptx
@@ -5,10 +5,10 @@
     <p:sldMasterId id="2147483660" r:id="rId1"/>
   </p:sldMasterIdLst>
   <p:notesMasterIdLst>
-    <p:notesMasterId r:id="rId66"/>
+    <p:notesMasterId r:id="rId64"/>
   </p:notesMasterIdLst>
   <p:handoutMasterIdLst>
-    <p:handoutMasterId r:id="rId67"/>
+    <p:handoutMasterId r:id="rId65"/>
   </p:handoutMasterIdLst>
   <p:sldIdLst>
     <p:sldId id="256" r:id="rId2"/>
@@ -36,45 +36,43 @@
     <p:sldId id="931" r:id="rId24"/>
     <p:sldId id="300" r:id="rId25"/>
     <p:sldId id="932" r:id="rId26"/>
-    <p:sldId id="310" r:id="rId27"/>
-    <p:sldId id="311" r:id="rId28"/>
-    <p:sldId id="312" r:id="rId29"/>
-    <p:sldId id="313" r:id="rId30"/>
-    <p:sldId id="917" r:id="rId31"/>
-    <p:sldId id="352" r:id="rId32"/>
-    <p:sldId id="318" r:id="rId33"/>
-    <p:sldId id="319" r:id="rId34"/>
-    <p:sldId id="325" r:id="rId35"/>
-    <p:sldId id="933" r:id="rId36"/>
-    <p:sldId id="320" r:id="rId37"/>
-    <p:sldId id="326" r:id="rId38"/>
-    <p:sldId id="321" r:id="rId39"/>
-    <p:sldId id="354" r:id="rId40"/>
-    <p:sldId id="322" r:id="rId41"/>
-    <p:sldId id="323" r:id="rId42"/>
-    <p:sldId id="355" r:id="rId43"/>
-    <p:sldId id="345" r:id="rId44"/>
-    <p:sldId id="337" r:id="rId45"/>
-    <p:sldId id="344" r:id="rId46"/>
-    <p:sldId id="343" r:id="rId47"/>
-    <p:sldId id="356" r:id="rId48"/>
-    <p:sldId id="338" r:id="rId49"/>
-    <p:sldId id="339" r:id="rId50"/>
-    <p:sldId id="340" r:id="rId51"/>
-    <p:sldId id="341" r:id="rId52"/>
-    <p:sldId id="342" r:id="rId53"/>
-    <p:sldId id="347" r:id="rId54"/>
-    <p:sldId id="348" r:id="rId55"/>
-    <p:sldId id="263" r:id="rId56"/>
-    <p:sldId id="815" r:id="rId57"/>
-    <p:sldId id="816" r:id="rId58"/>
-    <p:sldId id="817" r:id="rId59"/>
-    <p:sldId id="821" r:id="rId60"/>
-    <p:sldId id="357" r:id="rId61"/>
-    <p:sldId id="811" r:id="rId62"/>
-    <p:sldId id="812" r:id="rId63"/>
-    <p:sldId id="909" r:id="rId64"/>
-    <p:sldId id="930" r:id="rId65"/>
+    <p:sldId id="313" r:id="rId27"/>
+    <p:sldId id="917" r:id="rId28"/>
+    <p:sldId id="352" r:id="rId29"/>
+    <p:sldId id="319" r:id="rId30"/>
+    <p:sldId id="318" r:id="rId31"/>
+    <p:sldId id="325" r:id="rId32"/>
+    <p:sldId id="934" r:id="rId33"/>
+    <p:sldId id="933" r:id="rId34"/>
+    <p:sldId id="320" r:id="rId35"/>
+    <p:sldId id="326" r:id="rId36"/>
+    <p:sldId id="321" r:id="rId37"/>
+    <p:sldId id="354" r:id="rId38"/>
+    <p:sldId id="322" r:id="rId39"/>
+    <p:sldId id="323" r:id="rId40"/>
+    <p:sldId id="355" r:id="rId41"/>
+    <p:sldId id="345" r:id="rId42"/>
+    <p:sldId id="337" r:id="rId43"/>
+    <p:sldId id="344" r:id="rId44"/>
+    <p:sldId id="343" r:id="rId45"/>
+    <p:sldId id="356" r:id="rId46"/>
+    <p:sldId id="338" r:id="rId47"/>
+    <p:sldId id="339" r:id="rId48"/>
+    <p:sldId id="340" r:id="rId49"/>
+    <p:sldId id="341" r:id="rId50"/>
+    <p:sldId id="342" r:id="rId51"/>
+    <p:sldId id="347" r:id="rId52"/>
+    <p:sldId id="348" r:id="rId53"/>
+    <p:sldId id="263" r:id="rId54"/>
+    <p:sldId id="815" r:id="rId55"/>
+    <p:sldId id="816" r:id="rId56"/>
+    <p:sldId id="817" r:id="rId57"/>
+    <p:sldId id="821" r:id="rId58"/>
+    <p:sldId id="357" r:id="rId59"/>
+    <p:sldId id="811" r:id="rId60"/>
+    <p:sldId id="812" r:id="rId61"/>
+    <p:sldId id="909" r:id="rId62"/>
+    <p:sldId id="930" r:id="rId63"/>
   </p:sldIdLst>
   <p:sldSz cx="12192000" cy="6858000"/>
   <p:notesSz cx="6858000" cy="9144000"/>
@@ -207,15 +205,13 @@
             <p14:sldId id="931"/>
             <p14:sldId id="300"/>
             <p14:sldId id="932"/>
-            <p14:sldId id="310"/>
-            <p14:sldId id="311"/>
-            <p14:sldId id="312"/>
             <p14:sldId id="313"/>
             <p14:sldId id="917"/>
             <p14:sldId id="352"/>
+            <p14:sldId id="319"/>
             <p14:sldId id="318"/>
-            <p14:sldId id="319"/>
             <p14:sldId id="325"/>
+            <p14:sldId id="934"/>
             <p14:sldId id="933"/>
             <p14:sldId id="320"/>
             <p14:sldId id="326"/>
@@ -370,7 +366,7 @@
                 <a:latin typeface="맑은 고딕" panose="020B0503020000020004" pitchFamily="50" charset="-127"/>
                 <a:ea typeface="맑은 고딕" panose="020B0503020000020004" pitchFamily="50" charset="-127"/>
               </a:rPr>
-              <a:t>2026-04-11</a:t>
+              <a:t>2026-04-16</a:t>
             </a:fld>
             <a:endParaRPr lang="ko-KR" altLang="en-US">
               <a:latin typeface="맑은 고딕" panose="020B0503020000020004" pitchFamily="50" charset="-127"/>
@@ -556,7 +552,7 @@
           <a:p>
             <a:fld id="{43E1C3DD-4A19-441D-907C-380838DB51C4}" type="datetime1">
               <a:rPr lang="ko-KR" altLang="en-US" noProof="0" smtClean="0"/>
-              <a:t>2026-04-11</a:t>
+              <a:t>2026-04-16</a:t>
             </a:fld>
             <a:endParaRPr lang="ko-KR" altLang="en-US" noProof="0"/>
           </a:p>
@@ -2926,7 +2922,7 @@
         <p:cNvPr id="1" name="">
           <a:extLst>
             <a:ext uri="{FF2B5EF4-FFF2-40B4-BE49-F238E27FC236}">
-              <a16:creationId xmlns:a16="http://schemas.microsoft.com/office/drawing/2014/main" id="{DCA19E00-385F-C548-A639-09BD678BE762}"/>
+              <a16:creationId xmlns:a16="http://schemas.microsoft.com/office/drawing/2014/main" id="{C1969FD2-B22E-D51E-B3C9-703533F465B7}"/>
             </a:ext>
           </a:extLst>
         </p:cNvPr>
@@ -2946,7 +2942,7 @@
           <p:cNvPr id="2" name="슬라이드 이미지 개체 틀 1">
             <a:extLst>
               <a:ext uri="{FF2B5EF4-FFF2-40B4-BE49-F238E27FC236}">
-                <a16:creationId xmlns:a16="http://schemas.microsoft.com/office/drawing/2014/main" id="{62000ADD-627A-B389-945C-75CB35F34576}"/>
+                <a16:creationId xmlns:a16="http://schemas.microsoft.com/office/drawing/2014/main" id="{A9B1CF2B-D339-776F-6B66-62BABA33D839}"/>
               </a:ext>
             </a:extLst>
           </p:cNvPr>
@@ -2964,7 +2960,7 @@
           <p:cNvPr id="3" name="슬라이드 노트 개체 틀 2">
             <a:extLst>
               <a:ext uri="{FF2B5EF4-FFF2-40B4-BE49-F238E27FC236}">
-                <a16:creationId xmlns:a16="http://schemas.microsoft.com/office/drawing/2014/main" id="{71423518-AC90-3328-B05C-3AFD680E0EEB}"/>
+                <a16:creationId xmlns:a16="http://schemas.microsoft.com/office/drawing/2014/main" id="{781394E1-1A3D-CDED-BF6A-A6E865752A89}"/>
               </a:ext>
             </a:extLst>
           </p:cNvPr>
@@ -2992,7 +2988,7 @@
           <p:cNvPr id="4" name="슬라이드 번호 개체 틀 3">
             <a:extLst>
               <a:ext uri="{FF2B5EF4-FFF2-40B4-BE49-F238E27FC236}">
-                <a16:creationId xmlns:a16="http://schemas.microsoft.com/office/drawing/2014/main" id="{66247027-7661-E86F-18E7-B3216EEF6265}"/>
+                <a16:creationId xmlns:a16="http://schemas.microsoft.com/office/drawing/2014/main" id="{78945542-3144-C023-128A-2E3B8A574965}"/>
               </a:ext>
             </a:extLst>
           </p:cNvPr>
@@ -3026,7 +3022,7 @@
     </p:spTree>
     <p:extLst>
       <p:ext uri="{BB962C8B-B14F-4D97-AF65-F5344CB8AC3E}">
-        <p14:creationId xmlns:p14="http://schemas.microsoft.com/office/powerpoint/2010/main" val="3941685560"/>
+        <p14:creationId xmlns:p14="http://schemas.microsoft.com/office/powerpoint/2010/main" val="4261954696"/>
       </p:ext>
     </p:extLst>
   </p:cSld>
@@ -3044,7 +3040,7 @@
         <p:cNvPr id="1" name="">
           <a:extLst>
             <a:ext uri="{FF2B5EF4-FFF2-40B4-BE49-F238E27FC236}">
-              <a16:creationId xmlns:a16="http://schemas.microsoft.com/office/drawing/2014/main" id="{1091B505-D2ED-8112-43E6-4185241B904E}"/>
+              <a16:creationId xmlns:a16="http://schemas.microsoft.com/office/drawing/2014/main" id="{DF62D742-CF84-AF57-950F-50DC42719B1F}"/>
             </a:ext>
           </a:extLst>
         </p:cNvPr>
@@ -3064,7 +3060,7 @@
           <p:cNvPr id="2" name="슬라이드 이미지 개체 틀 1">
             <a:extLst>
               <a:ext uri="{FF2B5EF4-FFF2-40B4-BE49-F238E27FC236}">
-                <a16:creationId xmlns:a16="http://schemas.microsoft.com/office/drawing/2014/main" id="{177C415E-7741-7FB7-B3C6-256CEC62128D}"/>
+                <a16:creationId xmlns:a16="http://schemas.microsoft.com/office/drawing/2014/main" id="{E40343F8-0353-09FC-8465-60311FD97B6E}"/>
               </a:ext>
             </a:extLst>
           </p:cNvPr>
@@ -3082,7 +3078,7 @@
           <p:cNvPr id="3" name="슬라이드 노트 개체 틀 2">
             <a:extLst>
               <a:ext uri="{FF2B5EF4-FFF2-40B4-BE49-F238E27FC236}">
-                <a16:creationId xmlns:a16="http://schemas.microsoft.com/office/drawing/2014/main" id="{907B7459-BC49-0183-3829-3DF18027142C}"/>
+                <a16:creationId xmlns:a16="http://schemas.microsoft.com/office/drawing/2014/main" id="{400B8D2E-5EDE-BEA6-20AF-7A330993DC45}"/>
               </a:ext>
             </a:extLst>
           </p:cNvPr>
@@ -3110,7 +3106,7 @@
           <p:cNvPr id="4" name="슬라이드 번호 개체 틀 3">
             <a:extLst>
               <a:ext uri="{FF2B5EF4-FFF2-40B4-BE49-F238E27FC236}">
-                <a16:creationId xmlns:a16="http://schemas.microsoft.com/office/drawing/2014/main" id="{7A04A672-7E2C-D8DE-1048-E7169F77B578}"/>
+                <a16:creationId xmlns:a16="http://schemas.microsoft.com/office/drawing/2014/main" id="{15968D1D-6DA0-39EE-38AB-0894C8BA14A5}"/>
               </a:ext>
             </a:extLst>
           </p:cNvPr>
@@ -3132,7 +3128,7 @@
                 <a:latin typeface="맑은 고딕" panose="020B0503020000020004" pitchFamily="50" charset="-127"/>
                 <a:ea typeface="맑은 고딕" panose="020B0503020000020004" pitchFamily="50" charset="-127"/>
               </a:rPr>
-              <a:t>27</a:t>
+              <a:t>28</a:t>
             </a:fld>
             <a:endParaRPr lang="ko-KR" altLang="en-US">
               <a:latin typeface="맑은 고딕" panose="020B0503020000020004" pitchFamily="50" charset="-127"/>
@@ -3144,7 +3140,7 @@
     </p:spTree>
     <p:extLst>
       <p:ext uri="{BB962C8B-B14F-4D97-AF65-F5344CB8AC3E}">
-        <p14:creationId xmlns:p14="http://schemas.microsoft.com/office/powerpoint/2010/main" val="3696633953"/>
+        <p14:creationId xmlns:p14="http://schemas.microsoft.com/office/powerpoint/2010/main" val="1552192722"/>
       </p:ext>
     </p:extLst>
   </p:cSld>
@@ -3162,7 +3158,7 @@
         <p:cNvPr id="1" name="">
           <a:extLst>
             <a:ext uri="{FF2B5EF4-FFF2-40B4-BE49-F238E27FC236}">
-              <a16:creationId xmlns:a16="http://schemas.microsoft.com/office/drawing/2014/main" id="{173BC6A3-5C5E-BB5A-A120-E0C782F1ECB1}"/>
+              <a16:creationId xmlns:a16="http://schemas.microsoft.com/office/drawing/2014/main" id="{22778621-8FB5-5903-96F4-A3ED9B065FB7}"/>
             </a:ext>
           </a:extLst>
         </p:cNvPr>
@@ -3182,7 +3178,7 @@
           <p:cNvPr id="2" name="슬라이드 이미지 개체 틀 1">
             <a:extLst>
               <a:ext uri="{FF2B5EF4-FFF2-40B4-BE49-F238E27FC236}">
-                <a16:creationId xmlns:a16="http://schemas.microsoft.com/office/drawing/2014/main" id="{9BD0F2D0-D404-0258-E930-642EA99BD90A}"/>
+                <a16:creationId xmlns:a16="http://schemas.microsoft.com/office/drawing/2014/main" id="{03D63619-67C2-6EE1-258E-B374DDE7FBCC}"/>
               </a:ext>
             </a:extLst>
           </p:cNvPr>
@@ -3200,7 +3196,7 @@
           <p:cNvPr id="3" name="슬라이드 노트 개체 틀 2">
             <a:extLst>
               <a:ext uri="{FF2B5EF4-FFF2-40B4-BE49-F238E27FC236}">
-                <a16:creationId xmlns:a16="http://schemas.microsoft.com/office/drawing/2014/main" id="{3442E2A1-03BD-51ED-1010-CEC0A18979B0}"/>
+                <a16:creationId xmlns:a16="http://schemas.microsoft.com/office/drawing/2014/main" id="{7B09C356-8423-8F10-2129-10834E7316A6}"/>
               </a:ext>
             </a:extLst>
           </p:cNvPr>
@@ -3228,7 +3224,7 @@
           <p:cNvPr id="4" name="슬라이드 번호 개체 틀 3">
             <a:extLst>
               <a:ext uri="{FF2B5EF4-FFF2-40B4-BE49-F238E27FC236}">
-                <a16:creationId xmlns:a16="http://schemas.microsoft.com/office/drawing/2014/main" id="{BB97A2AE-4D51-EF43-F3C4-ED38C42536B0}"/>
+                <a16:creationId xmlns:a16="http://schemas.microsoft.com/office/drawing/2014/main" id="{FE3AF1EB-1D1F-AF1A-46B6-7D73F2098751}"/>
               </a:ext>
             </a:extLst>
           </p:cNvPr>
@@ -3250,7 +3246,7 @@
                 <a:latin typeface="맑은 고딕" panose="020B0503020000020004" pitchFamily="50" charset="-127"/>
                 <a:ea typeface="맑은 고딕" panose="020B0503020000020004" pitchFamily="50" charset="-127"/>
               </a:rPr>
-              <a:t>28</a:t>
+              <a:t>29</a:t>
             </a:fld>
             <a:endParaRPr lang="ko-KR" altLang="en-US">
               <a:latin typeface="맑은 고딕" panose="020B0503020000020004" pitchFamily="50" charset="-127"/>
@@ -3262,7 +3258,7 @@
     </p:spTree>
     <p:extLst>
       <p:ext uri="{BB962C8B-B14F-4D97-AF65-F5344CB8AC3E}">
-        <p14:creationId xmlns:p14="http://schemas.microsoft.com/office/powerpoint/2010/main" val="1006576173"/>
+        <p14:creationId xmlns:p14="http://schemas.microsoft.com/office/powerpoint/2010/main" val="291207204"/>
       </p:ext>
     </p:extLst>
   </p:cSld>
@@ -3280,7 +3276,7 @@
         <p:cNvPr id="1" name="">
           <a:extLst>
             <a:ext uri="{FF2B5EF4-FFF2-40B4-BE49-F238E27FC236}">
-              <a16:creationId xmlns:a16="http://schemas.microsoft.com/office/drawing/2014/main" id="{C1969FD2-B22E-D51E-B3C9-703533F465B7}"/>
+              <a16:creationId xmlns:a16="http://schemas.microsoft.com/office/drawing/2014/main" id="{D2765589-C6D5-1849-9709-7A00C4318BFE}"/>
             </a:ext>
           </a:extLst>
         </p:cNvPr>
@@ -3300,7 +3296,7 @@
           <p:cNvPr id="2" name="슬라이드 이미지 개체 틀 1">
             <a:extLst>
               <a:ext uri="{FF2B5EF4-FFF2-40B4-BE49-F238E27FC236}">
-                <a16:creationId xmlns:a16="http://schemas.microsoft.com/office/drawing/2014/main" id="{A9B1CF2B-D339-776F-6B66-62BABA33D839}"/>
+                <a16:creationId xmlns:a16="http://schemas.microsoft.com/office/drawing/2014/main" id="{12F31494-F81E-52D0-3F07-CCCF12333020}"/>
               </a:ext>
             </a:extLst>
           </p:cNvPr>
@@ -3318,7 +3314,7 @@
           <p:cNvPr id="3" name="슬라이드 노트 개체 틀 2">
             <a:extLst>
               <a:ext uri="{FF2B5EF4-FFF2-40B4-BE49-F238E27FC236}">
-                <a16:creationId xmlns:a16="http://schemas.microsoft.com/office/drawing/2014/main" id="{781394E1-1A3D-CDED-BF6A-A6E865752A89}"/>
+                <a16:creationId xmlns:a16="http://schemas.microsoft.com/office/drawing/2014/main" id="{E2BEA719-0C3A-0973-9C2A-16E982E9825C}"/>
               </a:ext>
             </a:extLst>
           </p:cNvPr>
@@ -3346,7 +3342,7 @@
           <p:cNvPr id="4" name="슬라이드 번호 개체 틀 3">
             <a:extLst>
               <a:ext uri="{FF2B5EF4-FFF2-40B4-BE49-F238E27FC236}">
-                <a16:creationId xmlns:a16="http://schemas.microsoft.com/office/drawing/2014/main" id="{78945542-3144-C023-128A-2E3B8A574965}"/>
+                <a16:creationId xmlns:a16="http://schemas.microsoft.com/office/drawing/2014/main" id="{4286915D-F369-8E37-AA3C-ED9CF3BB55ED}"/>
               </a:ext>
             </a:extLst>
           </p:cNvPr>
@@ -3368,7 +3364,7 @@
                 <a:latin typeface="맑은 고딕" panose="020B0503020000020004" pitchFamily="50" charset="-127"/>
                 <a:ea typeface="맑은 고딕" panose="020B0503020000020004" pitchFamily="50" charset="-127"/>
               </a:rPr>
-              <a:t>29</a:t>
+              <a:t>30</a:t>
             </a:fld>
             <a:endParaRPr lang="ko-KR" altLang="en-US">
               <a:latin typeface="맑은 고딕" panose="020B0503020000020004" pitchFamily="50" charset="-127"/>
@@ -3380,7 +3376,7 @@
     </p:spTree>
     <p:extLst>
       <p:ext uri="{BB962C8B-B14F-4D97-AF65-F5344CB8AC3E}">
-        <p14:creationId xmlns:p14="http://schemas.microsoft.com/office/powerpoint/2010/main" val="4261954696"/>
+        <p14:creationId xmlns:p14="http://schemas.microsoft.com/office/powerpoint/2010/main" val="3504627984"/>
       </p:ext>
     </p:extLst>
   </p:cSld>
@@ -3516,7 +3512,7 @@
         <p:cNvPr id="1" name="">
           <a:extLst>
             <a:ext uri="{FF2B5EF4-FFF2-40B4-BE49-F238E27FC236}">
-              <a16:creationId xmlns:a16="http://schemas.microsoft.com/office/drawing/2014/main" id="{DF62D742-CF84-AF57-950F-50DC42719B1F}"/>
+              <a16:creationId xmlns:a16="http://schemas.microsoft.com/office/drawing/2014/main" id="{4723CFFE-5149-5B6F-C1BA-78631B9040C9}"/>
             </a:ext>
           </a:extLst>
         </p:cNvPr>
@@ -3536,7 +3532,7 @@
           <p:cNvPr id="2" name="슬라이드 이미지 개체 틀 1">
             <a:extLst>
               <a:ext uri="{FF2B5EF4-FFF2-40B4-BE49-F238E27FC236}">
-                <a16:creationId xmlns:a16="http://schemas.microsoft.com/office/drawing/2014/main" id="{E40343F8-0353-09FC-8465-60311FD97B6E}"/>
+                <a16:creationId xmlns:a16="http://schemas.microsoft.com/office/drawing/2014/main" id="{89C8FDB1-2815-4DCD-10E1-84823BC92CD5}"/>
               </a:ext>
             </a:extLst>
           </p:cNvPr>
@@ -3554,7 +3550,7 @@
           <p:cNvPr id="3" name="슬라이드 노트 개체 틀 2">
             <a:extLst>
               <a:ext uri="{FF2B5EF4-FFF2-40B4-BE49-F238E27FC236}">
-                <a16:creationId xmlns:a16="http://schemas.microsoft.com/office/drawing/2014/main" id="{400B8D2E-5EDE-BEA6-20AF-7A330993DC45}"/>
+                <a16:creationId xmlns:a16="http://schemas.microsoft.com/office/drawing/2014/main" id="{90652802-8077-0432-63C2-E516471D0D0F}"/>
               </a:ext>
             </a:extLst>
           </p:cNvPr>
@@ -3582,7 +3578,7 @@
           <p:cNvPr id="4" name="슬라이드 번호 개체 틀 3">
             <a:extLst>
               <a:ext uri="{FF2B5EF4-FFF2-40B4-BE49-F238E27FC236}">
-                <a16:creationId xmlns:a16="http://schemas.microsoft.com/office/drawing/2014/main" id="{15968D1D-6DA0-39EE-38AB-0894C8BA14A5}"/>
+                <a16:creationId xmlns:a16="http://schemas.microsoft.com/office/drawing/2014/main" id="{C79A5C57-638B-2D56-842E-971FF0C9DBA8}"/>
               </a:ext>
             </a:extLst>
           </p:cNvPr>
@@ -3616,7 +3612,7 @@
     </p:spTree>
     <p:extLst>
       <p:ext uri="{BB962C8B-B14F-4D97-AF65-F5344CB8AC3E}">
-        <p14:creationId xmlns:p14="http://schemas.microsoft.com/office/powerpoint/2010/main" val="1552192722"/>
+        <p14:creationId xmlns:p14="http://schemas.microsoft.com/office/powerpoint/2010/main" val="4243564436"/>
       </p:ext>
     </p:extLst>
   </p:cSld>
@@ -3634,7 +3630,7 @@
         <p:cNvPr id="1" name="">
           <a:extLst>
             <a:ext uri="{FF2B5EF4-FFF2-40B4-BE49-F238E27FC236}">
-              <a16:creationId xmlns:a16="http://schemas.microsoft.com/office/drawing/2014/main" id="{D2765589-C6D5-1849-9709-7A00C4318BFE}"/>
+              <a16:creationId xmlns:a16="http://schemas.microsoft.com/office/drawing/2014/main" id="{9193AE2D-C15E-EF1F-3E72-3D6A414729E2}"/>
             </a:ext>
           </a:extLst>
         </p:cNvPr>
@@ -3654,7 +3650,7 @@
           <p:cNvPr id="2" name="슬라이드 이미지 개체 틀 1">
             <a:extLst>
               <a:ext uri="{FF2B5EF4-FFF2-40B4-BE49-F238E27FC236}">
-                <a16:creationId xmlns:a16="http://schemas.microsoft.com/office/drawing/2014/main" id="{12F31494-F81E-52D0-3F07-CCCF12333020}"/>
+                <a16:creationId xmlns:a16="http://schemas.microsoft.com/office/drawing/2014/main" id="{4780BF1A-0460-E016-1817-466B61459AA5}"/>
               </a:ext>
             </a:extLst>
           </p:cNvPr>
@@ -3672,7 +3668,7 @@
           <p:cNvPr id="3" name="슬라이드 노트 개체 틀 2">
             <a:extLst>
               <a:ext uri="{FF2B5EF4-FFF2-40B4-BE49-F238E27FC236}">
-                <a16:creationId xmlns:a16="http://schemas.microsoft.com/office/drawing/2014/main" id="{E2BEA719-0C3A-0973-9C2A-16E982E9825C}"/>
+                <a16:creationId xmlns:a16="http://schemas.microsoft.com/office/drawing/2014/main" id="{6208FFA4-1A83-29FF-20A9-582685773029}"/>
               </a:ext>
             </a:extLst>
           </p:cNvPr>
@@ -3700,7 +3696,7 @@
           <p:cNvPr id="4" name="슬라이드 번호 개체 틀 3">
             <a:extLst>
               <a:ext uri="{FF2B5EF4-FFF2-40B4-BE49-F238E27FC236}">
-                <a16:creationId xmlns:a16="http://schemas.microsoft.com/office/drawing/2014/main" id="{4286915D-F369-8E37-AA3C-ED9CF3BB55ED}"/>
+                <a16:creationId xmlns:a16="http://schemas.microsoft.com/office/drawing/2014/main" id="{41734904-2EE2-A6FD-EE5B-B4FF37979609}"/>
               </a:ext>
             </a:extLst>
           </p:cNvPr>
@@ -3734,7 +3730,7 @@
     </p:spTree>
     <p:extLst>
       <p:ext uri="{BB962C8B-B14F-4D97-AF65-F5344CB8AC3E}">
-        <p14:creationId xmlns:p14="http://schemas.microsoft.com/office/powerpoint/2010/main" val="3504627984"/>
+        <p14:creationId xmlns:p14="http://schemas.microsoft.com/office/powerpoint/2010/main" val="2240364067"/>
       </p:ext>
     </p:extLst>
   </p:cSld>
@@ -3745,242 +3741,6 @@
 </file>
 
 <file path=ppt/notesSlides/notesSlide32.xml><?xml version="1.0" encoding="utf-8"?>
-<p:notes xmlns:a="http://schemas.openxmlformats.org/drawingml/2006/main" xmlns:r="http://schemas.openxmlformats.org/officeDocument/2006/relationships" xmlns:p="http://schemas.openxmlformats.org/presentationml/2006/main">
-  <p:cSld>
-    <p:spTree>
-      <p:nvGrpSpPr>
-        <p:cNvPr id="1" name="">
-          <a:extLst>
-            <a:ext uri="{FF2B5EF4-FFF2-40B4-BE49-F238E27FC236}">
-              <a16:creationId xmlns:a16="http://schemas.microsoft.com/office/drawing/2014/main" id="{22778621-8FB5-5903-96F4-A3ED9B065FB7}"/>
-            </a:ext>
-          </a:extLst>
-        </p:cNvPr>
-        <p:cNvGrpSpPr/>
-        <p:nvPr/>
-      </p:nvGrpSpPr>
-      <p:grpSpPr>
-        <a:xfrm>
-          <a:off x="0" y="0"/>
-          <a:ext cx="0" cy="0"/>
-          <a:chOff x="0" y="0"/>
-          <a:chExt cx="0" cy="0"/>
-        </a:xfrm>
-      </p:grpSpPr>
-      <p:sp>
-        <p:nvSpPr>
-          <p:cNvPr id="2" name="슬라이드 이미지 개체 틀 1">
-            <a:extLst>
-              <a:ext uri="{FF2B5EF4-FFF2-40B4-BE49-F238E27FC236}">
-                <a16:creationId xmlns:a16="http://schemas.microsoft.com/office/drawing/2014/main" id="{03D63619-67C2-6EE1-258E-B374DDE7FBCC}"/>
-              </a:ext>
-            </a:extLst>
-          </p:cNvPr>
-          <p:cNvSpPr>
-            <a:spLocks noGrp="1" noRot="1" noChangeAspect="1"/>
-          </p:cNvSpPr>
-          <p:nvPr>
-            <p:ph type="sldImg"/>
-          </p:nvPr>
-        </p:nvSpPr>
-        <p:spPr/>
-      </p:sp>
-      <p:sp>
-        <p:nvSpPr>
-          <p:cNvPr id="3" name="슬라이드 노트 개체 틀 2">
-            <a:extLst>
-              <a:ext uri="{FF2B5EF4-FFF2-40B4-BE49-F238E27FC236}">
-                <a16:creationId xmlns:a16="http://schemas.microsoft.com/office/drawing/2014/main" id="{7B09C356-8423-8F10-2129-10834E7316A6}"/>
-              </a:ext>
-            </a:extLst>
-          </p:cNvPr>
-          <p:cNvSpPr>
-            <a:spLocks noGrp="1"/>
-          </p:cNvSpPr>
-          <p:nvPr>
-            <p:ph type="body" idx="1"/>
-          </p:nvPr>
-        </p:nvSpPr>
-        <p:spPr/>
-        <p:txBody>
-          <a:bodyPr/>
-          <a:lstStyle/>
-          <a:p>
-            <a:endParaRPr lang="ko-KR" altLang="en-US">
-              <a:latin typeface="맑은 고딕" panose="020B0503020000020004" pitchFamily="50" charset="-127"/>
-              <a:ea typeface="맑은 고딕" panose="020B0503020000020004" pitchFamily="50" charset="-127"/>
-            </a:endParaRPr>
-          </a:p>
-        </p:txBody>
-      </p:sp>
-      <p:sp>
-        <p:nvSpPr>
-          <p:cNvPr id="4" name="슬라이드 번호 개체 틀 3">
-            <a:extLst>
-              <a:ext uri="{FF2B5EF4-FFF2-40B4-BE49-F238E27FC236}">
-                <a16:creationId xmlns:a16="http://schemas.microsoft.com/office/drawing/2014/main" id="{FE3AF1EB-1D1F-AF1A-46B6-7D73F2098751}"/>
-              </a:ext>
-            </a:extLst>
-          </p:cNvPr>
-          <p:cNvSpPr>
-            <a:spLocks noGrp="1"/>
-          </p:cNvSpPr>
-          <p:nvPr>
-            <p:ph type="sldNum" sz="quarter" idx="5"/>
-          </p:nvPr>
-        </p:nvSpPr>
-        <p:spPr/>
-        <p:txBody>
-          <a:bodyPr/>
-          <a:lstStyle/>
-          <a:p>
-            <a:pPr rtl="0"/>
-            <a:fld id="{DF61EA0F-A667-4B49-8422-0062BC55E249}" type="slidenum">
-              <a:rPr lang="en-US" altLang="ko-KR" smtClean="0">
-                <a:latin typeface="맑은 고딕" panose="020B0503020000020004" pitchFamily="50" charset="-127"/>
-                <a:ea typeface="맑은 고딕" panose="020B0503020000020004" pitchFamily="50" charset="-127"/>
-              </a:rPr>
-              <a:t>33</a:t>
-            </a:fld>
-            <a:endParaRPr lang="ko-KR" altLang="en-US">
-              <a:latin typeface="맑은 고딕" panose="020B0503020000020004" pitchFamily="50" charset="-127"/>
-              <a:ea typeface="맑은 고딕" panose="020B0503020000020004" pitchFamily="50" charset="-127"/>
-            </a:endParaRPr>
-          </a:p>
-        </p:txBody>
-      </p:sp>
-    </p:spTree>
-    <p:extLst>
-      <p:ext uri="{BB962C8B-B14F-4D97-AF65-F5344CB8AC3E}">
-        <p14:creationId xmlns:p14="http://schemas.microsoft.com/office/powerpoint/2010/main" val="291207204"/>
-      </p:ext>
-    </p:extLst>
-  </p:cSld>
-  <p:clrMapOvr>
-    <a:masterClrMapping/>
-  </p:clrMapOvr>
-</p:notes>
-</file>
-
-<file path=ppt/notesSlides/notesSlide33.xml><?xml version="1.0" encoding="utf-8"?>
-<p:notes xmlns:a="http://schemas.openxmlformats.org/drawingml/2006/main" xmlns:r="http://schemas.openxmlformats.org/officeDocument/2006/relationships" xmlns:p="http://schemas.openxmlformats.org/presentationml/2006/main">
-  <p:cSld>
-    <p:spTree>
-      <p:nvGrpSpPr>
-        <p:cNvPr id="1" name="">
-          <a:extLst>
-            <a:ext uri="{FF2B5EF4-FFF2-40B4-BE49-F238E27FC236}">
-              <a16:creationId xmlns:a16="http://schemas.microsoft.com/office/drawing/2014/main" id="{4723CFFE-5149-5B6F-C1BA-78631B9040C9}"/>
-            </a:ext>
-          </a:extLst>
-        </p:cNvPr>
-        <p:cNvGrpSpPr/>
-        <p:nvPr/>
-      </p:nvGrpSpPr>
-      <p:grpSpPr>
-        <a:xfrm>
-          <a:off x="0" y="0"/>
-          <a:ext cx="0" cy="0"/>
-          <a:chOff x="0" y="0"/>
-          <a:chExt cx="0" cy="0"/>
-        </a:xfrm>
-      </p:grpSpPr>
-      <p:sp>
-        <p:nvSpPr>
-          <p:cNvPr id="2" name="슬라이드 이미지 개체 틀 1">
-            <a:extLst>
-              <a:ext uri="{FF2B5EF4-FFF2-40B4-BE49-F238E27FC236}">
-                <a16:creationId xmlns:a16="http://schemas.microsoft.com/office/drawing/2014/main" id="{89C8FDB1-2815-4DCD-10E1-84823BC92CD5}"/>
-              </a:ext>
-            </a:extLst>
-          </p:cNvPr>
-          <p:cNvSpPr>
-            <a:spLocks noGrp="1" noRot="1" noChangeAspect="1"/>
-          </p:cNvSpPr>
-          <p:nvPr>
-            <p:ph type="sldImg"/>
-          </p:nvPr>
-        </p:nvSpPr>
-        <p:spPr/>
-      </p:sp>
-      <p:sp>
-        <p:nvSpPr>
-          <p:cNvPr id="3" name="슬라이드 노트 개체 틀 2">
-            <a:extLst>
-              <a:ext uri="{FF2B5EF4-FFF2-40B4-BE49-F238E27FC236}">
-                <a16:creationId xmlns:a16="http://schemas.microsoft.com/office/drawing/2014/main" id="{90652802-8077-0432-63C2-E516471D0D0F}"/>
-              </a:ext>
-            </a:extLst>
-          </p:cNvPr>
-          <p:cNvSpPr>
-            <a:spLocks noGrp="1"/>
-          </p:cNvSpPr>
-          <p:nvPr>
-            <p:ph type="body" idx="1"/>
-          </p:nvPr>
-        </p:nvSpPr>
-        <p:spPr/>
-        <p:txBody>
-          <a:bodyPr/>
-          <a:lstStyle/>
-          <a:p>
-            <a:endParaRPr lang="ko-KR" altLang="en-US">
-              <a:latin typeface="맑은 고딕" panose="020B0503020000020004" pitchFamily="50" charset="-127"/>
-              <a:ea typeface="맑은 고딕" panose="020B0503020000020004" pitchFamily="50" charset="-127"/>
-            </a:endParaRPr>
-          </a:p>
-        </p:txBody>
-      </p:sp>
-      <p:sp>
-        <p:nvSpPr>
-          <p:cNvPr id="4" name="슬라이드 번호 개체 틀 3">
-            <a:extLst>
-              <a:ext uri="{FF2B5EF4-FFF2-40B4-BE49-F238E27FC236}">
-                <a16:creationId xmlns:a16="http://schemas.microsoft.com/office/drawing/2014/main" id="{C79A5C57-638B-2D56-842E-971FF0C9DBA8}"/>
-              </a:ext>
-            </a:extLst>
-          </p:cNvPr>
-          <p:cNvSpPr>
-            <a:spLocks noGrp="1"/>
-          </p:cNvSpPr>
-          <p:nvPr>
-            <p:ph type="sldNum" sz="quarter" idx="5"/>
-          </p:nvPr>
-        </p:nvSpPr>
-        <p:spPr/>
-        <p:txBody>
-          <a:bodyPr/>
-          <a:lstStyle/>
-          <a:p>
-            <a:pPr rtl="0"/>
-            <a:fld id="{DF61EA0F-A667-4B49-8422-0062BC55E249}" type="slidenum">
-              <a:rPr lang="en-US" altLang="ko-KR" smtClean="0">
-                <a:latin typeface="맑은 고딕" panose="020B0503020000020004" pitchFamily="50" charset="-127"/>
-                <a:ea typeface="맑은 고딕" panose="020B0503020000020004" pitchFamily="50" charset="-127"/>
-              </a:rPr>
-              <a:t>34</a:t>
-            </a:fld>
-            <a:endParaRPr lang="ko-KR" altLang="en-US">
-              <a:latin typeface="맑은 고딕" panose="020B0503020000020004" pitchFamily="50" charset="-127"/>
-              <a:ea typeface="맑은 고딕" panose="020B0503020000020004" pitchFamily="50" charset="-127"/>
-            </a:endParaRPr>
-          </a:p>
-        </p:txBody>
-      </p:sp>
-    </p:spTree>
-    <p:extLst>
-      <p:ext uri="{BB962C8B-B14F-4D97-AF65-F5344CB8AC3E}">
-        <p14:creationId xmlns:p14="http://schemas.microsoft.com/office/powerpoint/2010/main" val="4243564436"/>
-      </p:ext>
-    </p:extLst>
-  </p:cSld>
-  <p:clrMapOvr>
-    <a:masterClrMapping/>
-  </p:clrMapOvr>
-</p:notes>
-</file>
-
-<file path=ppt/notesSlides/notesSlide34.xml><?xml version="1.0" encoding="utf-8"?>
 <p:notes xmlns:a="http://schemas.openxmlformats.org/drawingml/2006/main" xmlns:r="http://schemas.openxmlformats.org/officeDocument/2006/relationships" xmlns:p="http://schemas.openxmlformats.org/presentationml/2006/main">
   <p:cSld>
     <p:spTree>
@@ -4076,7 +3836,7 @@
                 <a:latin typeface="맑은 고딕" panose="020B0503020000020004" pitchFamily="50" charset="-127"/>
                 <a:ea typeface="맑은 고딕" panose="020B0503020000020004" pitchFamily="50" charset="-127"/>
               </a:rPr>
-              <a:t>35</a:t>
+              <a:t>33</a:t>
             </a:fld>
             <a:endParaRPr lang="ko-KR" altLang="en-US">
               <a:latin typeface="맑은 고딕" panose="020B0503020000020004" pitchFamily="50" charset="-127"/>
@@ -4098,7 +3858,7 @@
 </p:notes>
 </file>
 
-<file path=ppt/notesSlides/notesSlide35.xml><?xml version="1.0" encoding="utf-8"?>
+<file path=ppt/notesSlides/notesSlide33.xml><?xml version="1.0" encoding="utf-8"?>
 <p:notes xmlns:a="http://schemas.openxmlformats.org/drawingml/2006/main" xmlns:r="http://schemas.openxmlformats.org/officeDocument/2006/relationships" xmlns:p="http://schemas.openxmlformats.org/presentationml/2006/main">
   <p:cSld>
     <p:spTree>
@@ -4194,7 +3954,7 @@
                 <a:latin typeface="맑은 고딕" panose="020B0503020000020004" pitchFamily="50" charset="-127"/>
                 <a:ea typeface="맑은 고딕" panose="020B0503020000020004" pitchFamily="50" charset="-127"/>
               </a:rPr>
-              <a:t>36</a:t>
+              <a:t>34</a:t>
             </a:fld>
             <a:endParaRPr lang="ko-KR" altLang="en-US">
               <a:latin typeface="맑은 고딕" panose="020B0503020000020004" pitchFamily="50" charset="-127"/>
@@ -4216,7 +3976,7 @@
 </p:notes>
 </file>
 
-<file path=ppt/notesSlides/notesSlide36.xml><?xml version="1.0" encoding="utf-8"?>
+<file path=ppt/notesSlides/notesSlide34.xml><?xml version="1.0" encoding="utf-8"?>
 <p:notes xmlns:a="http://schemas.openxmlformats.org/drawingml/2006/main" xmlns:r="http://schemas.openxmlformats.org/officeDocument/2006/relationships" xmlns:p="http://schemas.openxmlformats.org/presentationml/2006/main">
   <p:cSld>
     <p:spTree>
@@ -4312,7 +4072,7 @@
                 <a:latin typeface="맑은 고딕" panose="020B0503020000020004" pitchFamily="50" charset="-127"/>
                 <a:ea typeface="맑은 고딕" panose="020B0503020000020004" pitchFamily="50" charset="-127"/>
               </a:rPr>
-              <a:t>37</a:t>
+              <a:t>35</a:t>
             </a:fld>
             <a:endParaRPr lang="ko-KR" altLang="en-US">
               <a:latin typeface="맑은 고딕" panose="020B0503020000020004" pitchFamily="50" charset="-127"/>
@@ -4334,7 +4094,7 @@
 </p:notes>
 </file>
 
-<file path=ppt/notesSlides/notesSlide37.xml><?xml version="1.0" encoding="utf-8"?>
+<file path=ppt/notesSlides/notesSlide35.xml><?xml version="1.0" encoding="utf-8"?>
 <p:notes xmlns:a="http://schemas.openxmlformats.org/drawingml/2006/main" xmlns:r="http://schemas.openxmlformats.org/officeDocument/2006/relationships" xmlns:p="http://schemas.openxmlformats.org/presentationml/2006/main">
   <p:cSld>
     <p:spTree>
@@ -4430,7 +4190,7 @@
                 <a:latin typeface="맑은 고딕" panose="020B0503020000020004" pitchFamily="50" charset="-127"/>
                 <a:ea typeface="맑은 고딕" panose="020B0503020000020004" pitchFamily="50" charset="-127"/>
               </a:rPr>
-              <a:t>38</a:t>
+              <a:t>36</a:t>
             </a:fld>
             <a:endParaRPr lang="ko-KR" altLang="en-US">
               <a:latin typeface="맑은 고딕" panose="020B0503020000020004" pitchFamily="50" charset="-127"/>
@@ -4452,7 +4212,7 @@
 </p:notes>
 </file>
 
-<file path=ppt/notesSlides/notesSlide38.xml><?xml version="1.0" encoding="utf-8"?>
+<file path=ppt/notesSlides/notesSlide36.xml><?xml version="1.0" encoding="utf-8"?>
 <p:notes xmlns:a="http://schemas.openxmlformats.org/drawingml/2006/main" xmlns:r="http://schemas.openxmlformats.org/officeDocument/2006/relationships" xmlns:p="http://schemas.openxmlformats.org/presentationml/2006/main">
   <p:cSld>
     <p:spTree>
@@ -4548,7 +4308,7 @@
                 <a:latin typeface="맑은 고딕" panose="020B0503020000020004" pitchFamily="50" charset="-127"/>
                 <a:ea typeface="맑은 고딕" panose="020B0503020000020004" pitchFamily="50" charset="-127"/>
               </a:rPr>
-              <a:t>39</a:t>
+              <a:t>37</a:t>
             </a:fld>
             <a:endParaRPr lang="ko-KR" altLang="en-US">
               <a:latin typeface="맑은 고딕" panose="020B0503020000020004" pitchFamily="50" charset="-127"/>
@@ -4570,7 +4330,7 @@
 </p:notes>
 </file>
 
-<file path=ppt/notesSlides/notesSlide39.xml><?xml version="1.0" encoding="utf-8"?>
+<file path=ppt/notesSlides/notesSlide37.xml><?xml version="1.0" encoding="utf-8"?>
 <p:notes xmlns:a="http://schemas.openxmlformats.org/drawingml/2006/main" xmlns:r="http://schemas.openxmlformats.org/officeDocument/2006/relationships" xmlns:p="http://schemas.openxmlformats.org/presentationml/2006/main">
   <p:cSld>
     <p:spTree>
@@ -4666,6 +4426,242 @@
                 <a:latin typeface="맑은 고딕" panose="020B0503020000020004" pitchFamily="50" charset="-127"/>
                 <a:ea typeface="맑은 고딕" panose="020B0503020000020004" pitchFamily="50" charset="-127"/>
               </a:rPr>
+              <a:t>38</a:t>
+            </a:fld>
+            <a:endParaRPr lang="ko-KR" altLang="en-US">
+              <a:latin typeface="맑은 고딕" panose="020B0503020000020004" pitchFamily="50" charset="-127"/>
+              <a:ea typeface="맑은 고딕" panose="020B0503020000020004" pitchFamily="50" charset="-127"/>
+            </a:endParaRPr>
+          </a:p>
+        </p:txBody>
+      </p:sp>
+    </p:spTree>
+    <p:extLst>
+      <p:ext uri="{BB962C8B-B14F-4D97-AF65-F5344CB8AC3E}">
+        <p14:creationId xmlns:p14="http://schemas.microsoft.com/office/powerpoint/2010/main" val="2205682149"/>
+      </p:ext>
+    </p:extLst>
+  </p:cSld>
+  <p:clrMapOvr>
+    <a:masterClrMapping/>
+  </p:clrMapOvr>
+</p:notes>
+</file>
+
+<file path=ppt/notesSlides/notesSlide38.xml><?xml version="1.0" encoding="utf-8"?>
+<p:notes xmlns:a="http://schemas.openxmlformats.org/drawingml/2006/main" xmlns:r="http://schemas.openxmlformats.org/officeDocument/2006/relationships" xmlns:p="http://schemas.openxmlformats.org/presentationml/2006/main">
+  <p:cSld>
+    <p:spTree>
+      <p:nvGrpSpPr>
+        <p:cNvPr id="1" name="">
+          <a:extLst>
+            <a:ext uri="{FF2B5EF4-FFF2-40B4-BE49-F238E27FC236}">
+              <a16:creationId xmlns:a16="http://schemas.microsoft.com/office/drawing/2014/main" id="{A27D267D-D1AA-7B15-29CB-A528135C5A21}"/>
+            </a:ext>
+          </a:extLst>
+        </p:cNvPr>
+        <p:cNvGrpSpPr/>
+        <p:nvPr/>
+      </p:nvGrpSpPr>
+      <p:grpSpPr>
+        <a:xfrm>
+          <a:off x="0" y="0"/>
+          <a:ext cx="0" cy="0"/>
+          <a:chOff x="0" y="0"/>
+          <a:chExt cx="0" cy="0"/>
+        </a:xfrm>
+      </p:grpSpPr>
+      <p:sp>
+        <p:nvSpPr>
+          <p:cNvPr id="2" name="슬라이드 이미지 개체 틀 1">
+            <a:extLst>
+              <a:ext uri="{FF2B5EF4-FFF2-40B4-BE49-F238E27FC236}">
+                <a16:creationId xmlns:a16="http://schemas.microsoft.com/office/drawing/2014/main" id="{85B3A805-AC9C-F0E6-2FA5-18A1F24D4820}"/>
+              </a:ext>
+            </a:extLst>
+          </p:cNvPr>
+          <p:cNvSpPr>
+            <a:spLocks noGrp="1" noRot="1" noChangeAspect="1"/>
+          </p:cNvSpPr>
+          <p:nvPr>
+            <p:ph type="sldImg"/>
+          </p:nvPr>
+        </p:nvSpPr>
+        <p:spPr/>
+      </p:sp>
+      <p:sp>
+        <p:nvSpPr>
+          <p:cNvPr id="3" name="슬라이드 노트 개체 틀 2">
+            <a:extLst>
+              <a:ext uri="{FF2B5EF4-FFF2-40B4-BE49-F238E27FC236}">
+                <a16:creationId xmlns:a16="http://schemas.microsoft.com/office/drawing/2014/main" id="{569C4B9E-9785-1051-2EAC-630608D7C033}"/>
+              </a:ext>
+            </a:extLst>
+          </p:cNvPr>
+          <p:cNvSpPr>
+            <a:spLocks noGrp="1"/>
+          </p:cNvSpPr>
+          <p:nvPr>
+            <p:ph type="body" idx="1"/>
+          </p:nvPr>
+        </p:nvSpPr>
+        <p:spPr/>
+        <p:txBody>
+          <a:bodyPr/>
+          <a:lstStyle/>
+          <a:p>
+            <a:endParaRPr lang="ko-KR" altLang="en-US">
+              <a:latin typeface="맑은 고딕" panose="020B0503020000020004" pitchFamily="50" charset="-127"/>
+              <a:ea typeface="맑은 고딕" panose="020B0503020000020004" pitchFamily="50" charset="-127"/>
+            </a:endParaRPr>
+          </a:p>
+        </p:txBody>
+      </p:sp>
+      <p:sp>
+        <p:nvSpPr>
+          <p:cNvPr id="4" name="슬라이드 번호 개체 틀 3">
+            <a:extLst>
+              <a:ext uri="{FF2B5EF4-FFF2-40B4-BE49-F238E27FC236}">
+                <a16:creationId xmlns:a16="http://schemas.microsoft.com/office/drawing/2014/main" id="{E0E122CF-88C7-84DE-EBC0-6A4A52F3501E}"/>
+              </a:ext>
+            </a:extLst>
+          </p:cNvPr>
+          <p:cNvSpPr>
+            <a:spLocks noGrp="1"/>
+          </p:cNvSpPr>
+          <p:nvPr>
+            <p:ph type="sldNum" sz="quarter" idx="5"/>
+          </p:nvPr>
+        </p:nvSpPr>
+        <p:spPr/>
+        <p:txBody>
+          <a:bodyPr/>
+          <a:lstStyle/>
+          <a:p>
+            <a:pPr rtl="0"/>
+            <a:fld id="{DF61EA0F-A667-4B49-8422-0062BC55E249}" type="slidenum">
+              <a:rPr lang="en-US" altLang="ko-KR" smtClean="0">
+                <a:latin typeface="맑은 고딕" panose="020B0503020000020004" pitchFamily="50" charset="-127"/>
+                <a:ea typeface="맑은 고딕" panose="020B0503020000020004" pitchFamily="50" charset="-127"/>
+              </a:rPr>
+              <a:t>39</a:t>
+            </a:fld>
+            <a:endParaRPr lang="ko-KR" altLang="en-US">
+              <a:latin typeface="맑은 고딕" panose="020B0503020000020004" pitchFamily="50" charset="-127"/>
+              <a:ea typeface="맑은 고딕" panose="020B0503020000020004" pitchFamily="50" charset="-127"/>
+            </a:endParaRPr>
+          </a:p>
+        </p:txBody>
+      </p:sp>
+    </p:spTree>
+    <p:extLst>
+      <p:ext uri="{BB962C8B-B14F-4D97-AF65-F5344CB8AC3E}">
+        <p14:creationId xmlns:p14="http://schemas.microsoft.com/office/powerpoint/2010/main" val="2224729383"/>
+      </p:ext>
+    </p:extLst>
+  </p:cSld>
+  <p:clrMapOvr>
+    <a:masterClrMapping/>
+  </p:clrMapOvr>
+</p:notes>
+</file>
+
+<file path=ppt/notesSlides/notesSlide39.xml><?xml version="1.0" encoding="utf-8"?>
+<p:notes xmlns:a="http://schemas.openxmlformats.org/drawingml/2006/main" xmlns:r="http://schemas.openxmlformats.org/officeDocument/2006/relationships" xmlns:p="http://schemas.openxmlformats.org/presentationml/2006/main">
+  <p:cSld>
+    <p:spTree>
+      <p:nvGrpSpPr>
+        <p:cNvPr id="1" name="">
+          <a:extLst>
+            <a:ext uri="{FF2B5EF4-FFF2-40B4-BE49-F238E27FC236}">
+              <a16:creationId xmlns:a16="http://schemas.microsoft.com/office/drawing/2014/main" id="{04EC7A59-E5AC-B1ED-DE55-A1BA264B7C0E}"/>
+            </a:ext>
+          </a:extLst>
+        </p:cNvPr>
+        <p:cNvGrpSpPr/>
+        <p:nvPr/>
+      </p:nvGrpSpPr>
+      <p:grpSpPr>
+        <a:xfrm>
+          <a:off x="0" y="0"/>
+          <a:ext cx="0" cy="0"/>
+          <a:chOff x="0" y="0"/>
+          <a:chExt cx="0" cy="0"/>
+        </a:xfrm>
+      </p:grpSpPr>
+      <p:sp>
+        <p:nvSpPr>
+          <p:cNvPr id="2" name="슬라이드 이미지 개체 틀 1">
+            <a:extLst>
+              <a:ext uri="{FF2B5EF4-FFF2-40B4-BE49-F238E27FC236}">
+                <a16:creationId xmlns:a16="http://schemas.microsoft.com/office/drawing/2014/main" id="{BB2D7C13-2961-18D4-1CD0-B19FAFF547A7}"/>
+              </a:ext>
+            </a:extLst>
+          </p:cNvPr>
+          <p:cNvSpPr>
+            <a:spLocks noGrp="1" noRot="1" noChangeAspect="1"/>
+          </p:cNvSpPr>
+          <p:nvPr>
+            <p:ph type="sldImg"/>
+          </p:nvPr>
+        </p:nvSpPr>
+        <p:spPr/>
+      </p:sp>
+      <p:sp>
+        <p:nvSpPr>
+          <p:cNvPr id="3" name="슬라이드 노트 개체 틀 2">
+            <a:extLst>
+              <a:ext uri="{FF2B5EF4-FFF2-40B4-BE49-F238E27FC236}">
+                <a16:creationId xmlns:a16="http://schemas.microsoft.com/office/drawing/2014/main" id="{A2A29A1D-2C0B-048A-B0BB-649A2053588C}"/>
+              </a:ext>
+            </a:extLst>
+          </p:cNvPr>
+          <p:cNvSpPr>
+            <a:spLocks noGrp="1"/>
+          </p:cNvSpPr>
+          <p:nvPr>
+            <p:ph type="body" idx="1"/>
+          </p:nvPr>
+        </p:nvSpPr>
+        <p:spPr/>
+        <p:txBody>
+          <a:bodyPr/>
+          <a:lstStyle/>
+          <a:p>
+            <a:endParaRPr lang="ko-KR" altLang="en-US">
+              <a:latin typeface="맑은 고딕" panose="020B0503020000020004" pitchFamily="50" charset="-127"/>
+              <a:ea typeface="맑은 고딕" panose="020B0503020000020004" pitchFamily="50" charset="-127"/>
+            </a:endParaRPr>
+          </a:p>
+        </p:txBody>
+      </p:sp>
+      <p:sp>
+        <p:nvSpPr>
+          <p:cNvPr id="4" name="슬라이드 번호 개체 틀 3">
+            <a:extLst>
+              <a:ext uri="{FF2B5EF4-FFF2-40B4-BE49-F238E27FC236}">
+                <a16:creationId xmlns:a16="http://schemas.microsoft.com/office/drawing/2014/main" id="{56EA4E76-C07C-A9A8-FD9B-58607D36AE05}"/>
+              </a:ext>
+            </a:extLst>
+          </p:cNvPr>
+          <p:cNvSpPr>
+            <a:spLocks noGrp="1"/>
+          </p:cNvSpPr>
+          <p:nvPr>
+            <p:ph type="sldNum" sz="quarter" idx="5"/>
+          </p:nvPr>
+        </p:nvSpPr>
+        <p:spPr/>
+        <p:txBody>
+          <a:bodyPr/>
+          <a:lstStyle/>
+          <a:p>
+            <a:pPr rtl="0"/>
+            <a:fld id="{DF61EA0F-A667-4B49-8422-0062BC55E249}" type="slidenum">
+              <a:rPr lang="en-US" altLang="ko-KR" smtClean="0">
+                <a:latin typeface="맑은 고딕" panose="020B0503020000020004" pitchFamily="50" charset="-127"/>
+                <a:ea typeface="맑은 고딕" panose="020B0503020000020004" pitchFamily="50" charset="-127"/>
+              </a:rPr>
               <a:t>40</a:t>
             </a:fld>
             <a:endParaRPr lang="ko-KR" altLang="en-US">
@@ -4678,7 +4674,7 @@
     </p:spTree>
     <p:extLst>
       <p:ext uri="{BB962C8B-B14F-4D97-AF65-F5344CB8AC3E}">
-        <p14:creationId xmlns:p14="http://schemas.microsoft.com/office/powerpoint/2010/main" val="2205682149"/>
+        <p14:creationId xmlns:p14="http://schemas.microsoft.com/office/powerpoint/2010/main" val="159102650"/>
       </p:ext>
     </p:extLst>
   </p:cSld>
@@ -4814,242 +4810,6 @@
         <p:cNvPr id="1" name="">
           <a:extLst>
             <a:ext uri="{FF2B5EF4-FFF2-40B4-BE49-F238E27FC236}">
-              <a16:creationId xmlns:a16="http://schemas.microsoft.com/office/drawing/2014/main" id="{A27D267D-D1AA-7B15-29CB-A528135C5A21}"/>
-            </a:ext>
-          </a:extLst>
-        </p:cNvPr>
-        <p:cNvGrpSpPr/>
-        <p:nvPr/>
-      </p:nvGrpSpPr>
-      <p:grpSpPr>
-        <a:xfrm>
-          <a:off x="0" y="0"/>
-          <a:ext cx="0" cy="0"/>
-          <a:chOff x="0" y="0"/>
-          <a:chExt cx="0" cy="0"/>
-        </a:xfrm>
-      </p:grpSpPr>
-      <p:sp>
-        <p:nvSpPr>
-          <p:cNvPr id="2" name="슬라이드 이미지 개체 틀 1">
-            <a:extLst>
-              <a:ext uri="{FF2B5EF4-FFF2-40B4-BE49-F238E27FC236}">
-                <a16:creationId xmlns:a16="http://schemas.microsoft.com/office/drawing/2014/main" id="{85B3A805-AC9C-F0E6-2FA5-18A1F24D4820}"/>
-              </a:ext>
-            </a:extLst>
-          </p:cNvPr>
-          <p:cNvSpPr>
-            <a:spLocks noGrp="1" noRot="1" noChangeAspect="1"/>
-          </p:cNvSpPr>
-          <p:nvPr>
-            <p:ph type="sldImg"/>
-          </p:nvPr>
-        </p:nvSpPr>
-        <p:spPr/>
-      </p:sp>
-      <p:sp>
-        <p:nvSpPr>
-          <p:cNvPr id="3" name="슬라이드 노트 개체 틀 2">
-            <a:extLst>
-              <a:ext uri="{FF2B5EF4-FFF2-40B4-BE49-F238E27FC236}">
-                <a16:creationId xmlns:a16="http://schemas.microsoft.com/office/drawing/2014/main" id="{569C4B9E-9785-1051-2EAC-630608D7C033}"/>
-              </a:ext>
-            </a:extLst>
-          </p:cNvPr>
-          <p:cNvSpPr>
-            <a:spLocks noGrp="1"/>
-          </p:cNvSpPr>
-          <p:nvPr>
-            <p:ph type="body" idx="1"/>
-          </p:nvPr>
-        </p:nvSpPr>
-        <p:spPr/>
-        <p:txBody>
-          <a:bodyPr/>
-          <a:lstStyle/>
-          <a:p>
-            <a:endParaRPr lang="ko-KR" altLang="en-US">
-              <a:latin typeface="맑은 고딕" panose="020B0503020000020004" pitchFamily="50" charset="-127"/>
-              <a:ea typeface="맑은 고딕" panose="020B0503020000020004" pitchFamily="50" charset="-127"/>
-            </a:endParaRPr>
-          </a:p>
-        </p:txBody>
-      </p:sp>
-      <p:sp>
-        <p:nvSpPr>
-          <p:cNvPr id="4" name="슬라이드 번호 개체 틀 3">
-            <a:extLst>
-              <a:ext uri="{FF2B5EF4-FFF2-40B4-BE49-F238E27FC236}">
-                <a16:creationId xmlns:a16="http://schemas.microsoft.com/office/drawing/2014/main" id="{E0E122CF-88C7-84DE-EBC0-6A4A52F3501E}"/>
-              </a:ext>
-            </a:extLst>
-          </p:cNvPr>
-          <p:cNvSpPr>
-            <a:spLocks noGrp="1"/>
-          </p:cNvSpPr>
-          <p:nvPr>
-            <p:ph type="sldNum" sz="quarter" idx="5"/>
-          </p:nvPr>
-        </p:nvSpPr>
-        <p:spPr/>
-        <p:txBody>
-          <a:bodyPr/>
-          <a:lstStyle/>
-          <a:p>
-            <a:pPr rtl="0"/>
-            <a:fld id="{DF61EA0F-A667-4B49-8422-0062BC55E249}" type="slidenum">
-              <a:rPr lang="en-US" altLang="ko-KR" smtClean="0">
-                <a:latin typeface="맑은 고딕" panose="020B0503020000020004" pitchFamily="50" charset="-127"/>
-                <a:ea typeface="맑은 고딕" panose="020B0503020000020004" pitchFamily="50" charset="-127"/>
-              </a:rPr>
-              <a:t>41</a:t>
-            </a:fld>
-            <a:endParaRPr lang="ko-KR" altLang="en-US">
-              <a:latin typeface="맑은 고딕" panose="020B0503020000020004" pitchFamily="50" charset="-127"/>
-              <a:ea typeface="맑은 고딕" panose="020B0503020000020004" pitchFamily="50" charset="-127"/>
-            </a:endParaRPr>
-          </a:p>
-        </p:txBody>
-      </p:sp>
-    </p:spTree>
-    <p:extLst>
-      <p:ext uri="{BB962C8B-B14F-4D97-AF65-F5344CB8AC3E}">
-        <p14:creationId xmlns:p14="http://schemas.microsoft.com/office/powerpoint/2010/main" val="2224729383"/>
-      </p:ext>
-    </p:extLst>
-  </p:cSld>
-  <p:clrMapOvr>
-    <a:masterClrMapping/>
-  </p:clrMapOvr>
-</p:notes>
-</file>
-
-<file path=ppt/notesSlides/notesSlide41.xml><?xml version="1.0" encoding="utf-8"?>
-<p:notes xmlns:a="http://schemas.openxmlformats.org/drawingml/2006/main" xmlns:r="http://schemas.openxmlformats.org/officeDocument/2006/relationships" xmlns:p="http://schemas.openxmlformats.org/presentationml/2006/main">
-  <p:cSld>
-    <p:spTree>
-      <p:nvGrpSpPr>
-        <p:cNvPr id="1" name="">
-          <a:extLst>
-            <a:ext uri="{FF2B5EF4-FFF2-40B4-BE49-F238E27FC236}">
-              <a16:creationId xmlns:a16="http://schemas.microsoft.com/office/drawing/2014/main" id="{04EC7A59-E5AC-B1ED-DE55-A1BA264B7C0E}"/>
-            </a:ext>
-          </a:extLst>
-        </p:cNvPr>
-        <p:cNvGrpSpPr/>
-        <p:nvPr/>
-      </p:nvGrpSpPr>
-      <p:grpSpPr>
-        <a:xfrm>
-          <a:off x="0" y="0"/>
-          <a:ext cx="0" cy="0"/>
-          <a:chOff x="0" y="0"/>
-          <a:chExt cx="0" cy="0"/>
-        </a:xfrm>
-      </p:grpSpPr>
-      <p:sp>
-        <p:nvSpPr>
-          <p:cNvPr id="2" name="슬라이드 이미지 개체 틀 1">
-            <a:extLst>
-              <a:ext uri="{FF2B5EF4-FFF2-40B4-BE49-F238E27FC236}">
-                <a16:creationId xmlns:a16="http://schemas.microsoft.com/office/drawing/2014/main" id="{BB2D7C13-2961-18D4-1CD0-B19FAFF547A7}"/>
-              </a:ext>
-            </a:extLst>
-          </p:cNvPr>
-          <p:cNvSpPr>
-            <a:spLocks noGrp="1" noRot="1" noChangeAspect="1"/>
-          </p:cNvSpPr>
-          <p:nvPr>
-            <p:ph type="sldImg"/>
-          </p:nvPr>
-        </p:nvSpPr>
-        <p:spPr/>
-      </p:sp>
-      <p:sp>
-        <p:nvSpPr>
-          <p:cNvPr id="3" name="슬라이드 노트 개체 틀 2">
-            <a:extLst>
-              <a:ext uri="{FF2B5EF4-FFF2-40B4-BE49-F238E27FC236}">
-                <a16:creationId xmlns:a16="http://schemas.microsoft.com/office/drawing/2014/main" id="{A2A29A1D-2C0B-048A-B0BB-649A2053588C}"/>
-              </a:ext>
-            </a:extLst>
-          </p:cNvPr>
-          <p:cNvSpPr>
-            <a:spLocks noGrp="1"/>
-          </p:cNvSpPr>
-          <p:nvPr>
-            <p:ph type="body" idx="1"/>
-          </p:nvPr>
-        </p:nvSpPr>
-        <p:spPr/>
-        <p:txBody>
-          <a:bodyPr/>
-          <a:lstStyle/>
-          <a:p>
-            <a:endParaRPr lang="ko-KR" altLang="en-US">
-              <a:latin typeface="맑은 고딕" panose="020B0503020000020004" pitchFamily="50" charset="-127"/>
-              <a:ea typeface="맑은 고딕" panose="020B0503020000020004" pitchFamily="50" charset="-127"/>
-            </a:endParaRPr>
-          </a:p>
-        </p:txBody>
-      </p:sp>
-      <p:sp>
-        <p:nvSpPr>
-          <p:cNvPr id="4" name="슬라이드 번호 개체 틀 3">
-            <a:extLst>
-              <a:ext uri="{FF2B5EF4-FFF2-40B4-BE49-F238E27FC236}">
-                <a16:creationId xmlns:a16="http://schemas.microsoft.com/office/drawing/2014/main" id="{56EA4E76-C07C-A9A8-FD9B-58607D36AE05}"/>
-              </a:ext>
-            </a:extLst>
-          </p:cNvPr>
-          <p:cNvSpPr>
-            <a:spLocks noGrp="1"/>
-          </p:cNvSpPr>
-          <p:nvPr>
-            <p:ph type="sldNum" sz="quarter" idx="5"/>
-          </p:nvPr>
-        </p:nvSpPr>
-        <p:spPr/>
-        <p:txBody>
-          <a:bodyPr/>
-          <a:lstStyle/>
-          <a:p>
-            <a:pPr rtl="0"/>
-            <a:fld id="{DF61EA0F-A667-4B49-8422-0062BC55E249}" type="slidenum">
-              <a:rPr lang="en-US" altLang="ko-KR" smtClean="0">
-                <a:latin typeface="맑은 고딕" panose="020B0503020000020004" pitchFamily="50" charset="-127"/>
-                <a:ea typeface="맑은 고딕" panose="020B0503020000020004" pitchFamily="50" charset="-127"/>
-              </a:rPr>
-              <a:t>42</a:t>
-            </a:fld>
-            <a:endParaRPr lang="ko-KR" altLang="en-US">
-              <a:latin typeface="맑은 고딕" panose="020B0503020000020004" pitchFamily="50" charset="-127"/>
-              <a:ea typeface="맑은 고딕" panose="020B0503020000020004" pitchFamily="50" charset="-127"/>
-            </a:endParaRPr>
-          </a:p>
-        </p:txBody>
-      </p:sp>
-    </p:spTree>
-    <p:extLst>
-      <p:ext uri="{BB962C8B-B14F-4D97-AF65-F5344CB8AC3E}">
-        <p14:creationId xmlns:p14="http://schemas.microsoft.com/office/powerpoint/2010/main" val="159102650"/>
-      </p:ext>
-    </p:extLst>
-  </p:cSld>
-  <p:clrMapOvr>
-    <a:masterClrMapping/>
-  </p:clrMapOvr>
-</p:notes>
-</file>
-
-<file path=ppt/notesSlides/notesSlide42.xml><?xml version="1.0" encoding="utf-8"?>
-<p:notes xmlns:a="http://schemas.openxmlformats.org/drawingml/2006/main" xmlns:r="http://schemas.openxmlformats.org/officeDocument/2006/relationships" xmlns:p="http://schemas.openxmlformats.org/presentationml/2006/main">
-  <p:cSld>
-    <p:spTree>
-      <p:nvGrpSpPr>
-        <p:cNvPr id="1" name="">
-          <a:extLst>
-            <a:ext uri="{FF2B5EF4-FFF2-40B4-BE49-F238E27FC236}">
               <a16:creationId xmlns:a16="http://schemas.microsoft.com/office/drawing/2014/main" id="{838D4029-41C4-F0DF-9167-C90D2D86C115}"/>
             </a:ext>
           </a:extLst>
@@ -5138,7 +4898,7 @@
                 <a:latin typeface="맑은 고딕" panose="020B0503020000020004" pitchFamily="50" charset="-127"/>
                 <a:ea typeface="맑은 고딕" panose="020B0503020000020004" pitchFamily="50" charset="-127"/>
               </a:rPr>
-              <a:t>43</a:t>
+              <a:t>41</a:t>
             </a:fld>
             <a:endParaRPr lang="ko-KR" altLang="en-US">
               <a:latin typeface="맑은 고딕" panose="020B0503020000020004" pitchFamily="50" charset="-127"/>
@@ -5160,7 +4920,7 @@
 </p:notes>
 </file>
 
-<file path=ppt/notesSlides/notesSlide43.xml><?xml version="1.0" encoding="utf-8"?>
+<file path=ppt/notesSlides/notesSlide41.xml><?xml version="1.0" encoding="utf-8"?>
 <p:notes xmlns:a="http://schemas.openxmlformats.org/drawingml/2006/main" xmlns:r="http://schemas.openxmlformats.org/officeDocument/2006/relationships" xmlns:p="http://schemas.openxmlformats.org/presentationml/2006/main">
   <p:cSld>
     <p:spTree>
@@ -5256,7 +5016,7 @@
                 <a:latin typeface="맑은 고딕" panose="020B0503020000020004" pitchFamily="50" charset="-127"/>
                 <a:ea typeface="맑은 고딕" panose="020B0503020000020004" pitchFamily="50" charset="-127"/>
               </a:rPr>
-              <a:t>44</a:t>
+              <a:t>42</a:t>
             </a:fld>
             <a:endParaRPr lang="ko-KR" altLang="en-US">
               <a:latin typeface="맑은 고딕" panose="020B0503020000020004" pitchFamily="50" charset="-127"/>
@@ -5278,7 +5038,7 @@
 </p:notes>
 </file>
 
-<file path=ppt/notesSlides/notesSlide44.xml><?xml version="1.0" encoding="utf-8"?>
+<file path=ppt/notesSlides/notesSlide42.xml><?xml version="1.0" encoding="utf-8"?>
 <p:notes xmlns:a="http://schemas.openxmlformats.org/drawingml/2006/main" xmlns:r="http://schemas.openxmlformats.org/officeDocument/2006/relationships" xmlns:p="http://schemas.openxmlformats.org/presentationml/2006/main">
   <p:cSld>
     <p:spTree>
@@ -5374,7 +5134,7 @@
                 <a:latin typeface="맑은 고딕" panose="020B0503020000020004" pitchFamily="50" charset="-127"/>
                 <a:ea typeface="맑은 고딕" panose="020B0503020000020004" pitchFamily="50" charset="-127"/>
               </a:rPr>
-              <a:t>45</a:t>
+              <a:t>43</a:t>
             </a:fld>
             <a:endParaRPr lang="ko-KR" altLang="en-US">
               <a:latin typeface="맑은 고딕" panose="020B0503020000020004" pitchFamily="50" charset="-127"/>
@@ -5396,7 +5156,7 @@
 </p:notes>
 </file>
 
-<file path=ppt/notesSlides/notesSlide45.xml><?xml version="1.0" encoding="utf-8"?>
+<file path=ppt/notesSlides/notesSlide43.xml><?xml version="1.0" encoding="utf-8"?>
 <p:notes xmlns:a="http://schemas.openxmlformats.org/drawingml/2006/main" xmlns:r="http://schemas.openxmlformats.org/officeDocument/2006/relationships" xmlns:p="http://schemas.openxmlformats.org/presentationml/2006/main">
   <p:cSld>
     <p:spTree>
@@ -5492,7 +5252,7 @@
                 <a:latin typeface="맑은 고딕" panose="020B0503020000020004" pitchFamily="50" charset="-127"/>
                 <a:ea typeface="맑은 고딕" panose="020B0503020000020004" pitchFamily="50" charset="-127"/>
               </a:rPr>
-              <a:t>46</a:t>
+              <a:t>44</a:t>
             </a:fld>
             <a:endParaRPr lang="ko-KR" altLang="en-US">
               <a:latin typeface="맑은 고딕" panose="020B0503020000020004" pitchFamily="50" charset="-127"/>
@@ -5514,7 +5274,7 @@
 </p:notes>
 </file>
 
-<file path=ppt/notesSlides/notesSlide46.xml><?xml version="1.0" encoding="utf-8"?>
+<file path=ppt/notesSlides/notesSlide44.xml><?xml version="1.0" encoding="utf-8"?>
 <p:notes xmlns:a="http://schemas.openxmlformats.org/drawingml/2006/main" xmlns:r="http://schemas.openxmlformats.org/officeDocument/2006/relationships" xmlns:p="http://schemas.openxmlformats.org/presentationml/2006/main">
   <p:cSld>
     <p:spTree>
@@ -5610,7 +5370,7 @@
                 <a:latin typeface="맑은 고딕" panose="020B0503020000020004" pitchFamily="50" charset="-127"/>
                 <a:ea typeface="맑은 고딕" panose="020B0503020000020004" pitchFamily="50" charset="-127"/>
               </a:rPr>
-              <a:t>47</a:t>
+              <a:t>45</a:t>
             </a:fld>
             <a:endParaRPr lang="ko-KR" altLang="en-US">
               <a:latin typeface="맑은 고딕" panose="020B0503020000020004" pitchFamily="50" charset="-127"/>
@@ -5632,7 +5392,7 @@
 </p:notes>
 </file>
 
-<file path=ppt/notesSlides/notesSlide47.xml><?xml version="1.0" encoding="utf-8"?>
+<file path=ppt/notesSlides/notesSlide45.xml><?xml version="1.0" encoding="utf-8"?>
 <p:notes xmlns:a="http://schemas.openxmlformats.org/drawingml/2006/main" xmlns:r="http://schemas.openxmlformats.org/officeDocument/2006/relationships" xmlns:p="http://schemas.openxmlformats.org/presentationml/2006/main">
   <p:cSld>
     <p:spTree>
@@ -5728,7 +5488,7 @@
                 <a:latin typeface="맑은 고딕" panose="020B0503020000020004" pitchFamily="50" charset="-127"/>
                 <a:ea typeface="맑은 고딕" panose="020B0503020000020004" pitchFamily="50" charset="-127"/>
               </a:rPr>
-              <a:t>48</a:t>
+              <a:t>46</a:t>
             </a:fld>
             <a:endParaRPr lang="ko-KR" altLang="en-US">
               <a:latin typeface="맑은 고딕" panose="020B0503020000020004" pitchFamily="50" charset="-127"/>
@@ -5750,7 +5510,7 @@
 </p:notes>
 </file>
 
-<file path=ppt/notesSlides/notesSlide48.xml><?xml version="1.0" encoding="utf-8"?>
+<file path=ppt/notesSlides/notesSlide46.xml><?xml version="1.0" encoding="utf-8"?>
 <p:notes xmlns:a="http://schemas.openxmlformats.org/drawingml/2006/main" xmlns:r="http://schemas.openxmlformats.org/officeDocument/2006/relationships" xmlns:p="http://schemas.openxmlformats.org/presentationml/2006/main">
   <p:cSld>
     <p:spTree>
@@ -5846,7 +5606,7 @@
                 <a:latin typeface="맑은 고딕" panose="020B0503020000020004" pitchFamily="50" charset="-127"/>
                 <a:ea typeface="맑은 고딕" panose="020B0503020000020004" pitchFamily="50" charset="-127"/>
               </a:rPr>
-              <a:t>49</a:t>
+              <a:t>47</a:t>
             </a:fld>
             <a:endParaRPr lang="ko-KR" altLang="en-US">
               <a:latin typeface="맑은 고딕" panose="020B0503020000020004" pitchFamily="50" charset="-127"/>
@@ -5868,7 +5628,7 @@
 </p:notes>
 </file>
 
-<file path=ppt/notesSlides/notesSlide49.xml><?xml version="1.0" encoding="utf-8"?>
+<file path=ppt/notesSlides/notesSlide47.xml><?xml version="1.0" encoding="utf-8"?>
 <p:notes xmlns:a="http://schemas.openxmlformats.org/drawingml/2006/main" xmlns:r="http://schemas.openxmlformats.org/officeDocument/2006/relationships" xmlns:p="http://schemas.openxmlformats.org/presentationml/2006/main">
   <p:cSld>
     <p:spTree>
@@ -5964,6 +5724,242 @@
                 <a:latin typeface="맑은 고딕" panose="020B0503020000020004" pitchFamily="50" charset="-127"/>
                 <a:ea typeface="맑은 고딕" panose="020B0503020000020004" pitchFamily="50" charset="-127"/>
               </a:rPr>
+              <a:t>48</a:t>
+            </a:fld>
+            <a:endParaRPr lang="ko-KR" altLang="en-US">
+              <a:latin typeface="맑은 고딕" panose="020B0503020000020004" pitchFamily="50" charset="-127"/>
+              <a:ea typeface="맑은 고딕" panose="020B0503020000020004" pitchFamily="50" charset="-127"/>
+            </a:endParaRPr>
+          </a:p>
+        </p:txBody>
+      </p:sp>
+    </p:spTree>
+    <p:extLst>
+      <p:ext uri="{BB962C8B-B14F-4D97-AF65-F5344CB8AC3E}">
+        <p14:creationId xmlns:p14="http://schemas.microsoft.com/office/powerpoint/2010/main" val="2254794766"/>
+      </p:ext>
+    </p:extLst>
+  </p:cSld>
+  <p:clrMapOvr>
+    <a:masterClrMapping/>
+  </p:clrMapOvr>
+</p:notes>
+</file>
+
+<file path=ppt/notesSlides/notesSlide48.xml><?xml version="1.0" encoding="utf-8"?>
+<p:notes xmlns:a="http://schemas.openxmlformats.org/drawingml/2006/main" xmlns:r="http://schemas.openxmlformats.org/officeDocument/2006/relationships" xmlns:p="http://schemas.openxmlformats.org/presentationml/2006/main">
+  <p:cSld>
+    <p:spTree>
+      <p:nvGrpSpPr>
+        <p:cNvPr id="1" name="">
+          <a:extLst>
+            <a:ext uri="{FF2B5EF4-FFF2-40B4-BE49-F238E27FC236}">
+              <a16:creationId xmlns:a16="http://schemas.microsoft.com/office/drawing/2014/main" id="{8E93E0F1-7B21-4F57-A7A5-EE96671FAFA3}"/>
+            </a:ext>
+          </a:extLst>
+        </p:cNvPr>
+        <p:cNvGrpSpPr/>
+        <p:nvPr/>
+      </p:nvGrpSpPr>
+      <p:grpSpPr>
+        <a:xfrm>
+          <a:off x="0" y="0"/>
+          <a:ext cx="0" cy="0"/>
+          <a:chOff x="0" y="0"/>
+          <a:chExt cx="0" cy="0"/>
+        </a:xfrm>
+      </p:grpSpPr>
+      <p:sp>
+        <p:nvSpPr>
+          <p:cNvPr id="2" name="슬라이드 이미지 개체 틀 1">
+            <a:extLst>
+              <a:ext uri="{FF2B5EF4-FFF2-40B4-BE49-F238E27FC236}">
+                <a16:creationId xmlns:a16="http://schemas.microsoft.com/office/drawing/2014/main" id="{95D50521-462A-5006-3D6A-71FFDFBCFB28}"/>
+              </a:ext>
+            </a:extLst>
+          </p:cNvPr>
+          <p:cNvSpPr>
+            <a:spLocks noGrp="1" noRot="1" noChangeAspect="1"/>
+          </p:cNvSpPr>
+          <p:nvPr>
+            <p:ph type="sldImg"/>
+          </p:nvPr>
+        </p:nvSpPr>
+        <p:spPr/>
+      </p:sp>
+      <p:sp>
+        <p:nvSpPr>
+          <p:cNvPr id="3" name="슬라이드 노트 개체 틀 2">
+            <a:extLst>
+              <a:ext uri="{FF2B5EF4-FFF2-40B4-BE49-F238E27FC236}">
+                <a16:creationId xmlns:a16="http://schemas.microsoft.com/office/drawing/2014/main" id="{751330A3-44E3-428E-90AC-317DF55861DF}"/>
+              </a:ext>
+            </a:extLst>
+          </p:cNvPr>
+          <p:cNvSpPr>
+            <a:spLocks noGrp="1"/>
+          </p:cNvSpPr>
+          <p:nvPr>
+            <p:ph type="body" idx="1"/>
+          </p:nvPr>
+        </p:nvSpPr>
+        <p:spPr/>
+        <p:txBody>
+          <a:bodyPr/>
+          <a:lstStyle/>
+          <a:p>
+            <a:endParaRPr lang="ko-KR" altLang="en-US">
+              <a:latin typeface="맑은 고딕" panose="020B0503020000020004" pitchFamily="50" charset="-127"/>
+              <a:ea typeface="맑은 고딕" panose="020B0503020000020004" pitchFamily="50" charset="-127"/>
+            </a:endParaRPr>
+          </a:p>
+        </p:txBody>
+      </p:sp>
+      <p:sp>
+        <p:nvSpPr>
+          <p:cNvPr id="4" name="슬라이드 번호 개체 틀 3">
+            <a:extLst>
+              <a:ext uri="{FF2B5EF4-FFF2-40B4-BE49-F238E27FC236}">
+                <a16:creationId xmlns:a16="http://schemas.microsoft.com/office/drawing/2014/main" id="{DA636BAB-9F39-1449-C6DC-B9C57EBDFF6C}"/>
+              </a:ext>
+            </a:extLst>
+          </p:cNvPr>
+          <p:cNvSpPr>
+            <a:spLocks noGrp="1"/>
+          </p:cNvSpPr>
+          <p:nvPr>
+            <p:ph type="sldNum" sz="quarter" idx="5"/>
+          </p:nvPr>
+        </p:nvSpPr>
+        <p:spPr/>
+        <p:txBody>
+          <a:bodyPr/>
+          <a:lstStyle/>
+          <a:p>
+            <a:pPr rtl="0"/>
+            <a:fld id="{DF61EA0F-A667-4B49-8422-0062BC55E249}" type="slidenum">
+              <a:rPr lang="en-US" altLang="ko-KR" smtClean="0">
+                <a:latin typeface="맑은 고딕" panose="020B0503020000020004" pitchFamily="50" charset="-127"/>
+                <a:ea typeface="맑은 고딕" panose="020B0503020000020004" pitchFamily="50" charset="-127"/>
+              </a:rPr>
+              <a:t>49</a:t>
+            </a:fld>
+            <a:endParaRPr lang="ko-KR" altLang="en-US">
+              <a:latin typeface="맑은 고딕" panose="020B0503020000020004" pitchFamily="50" charset="-127"/>
+              <a:ea typeface="맑은 고딕" panose="020B0503020000020004" pitchFamily="50" charset="-127"/>
+            </a:endParaRPr>
+          </a:p>
+        </p:txBody>
+      </p:sp>
+    </p:spTree>
+    <p:extLst>
+      <p:ext uri="{BB962C8B-B14F-4D97-AF65-F5344CB8AC3E}">
+        <p14:creationId xmlns:p14="http://schemas.microsoft.com/office/powerpoint/2010/main" val="2946124820"/>
+      </p:ext>
+    </p:extLst>
+  </p:cSld>
+  <p:clrMapOvr>
+    <a:masterClrMapping/>
+  </p:clrMapOvr>
+</p:notes>
+</file>
+
+<file path=ppt/notesSlides/notesSlide49.xml><?xml version="1.0" encoding="utf-8"?>
+<p:notes xmlns:a="http://schemas.openxmlformats.org/drawingml/2006/main" xmlns:r="http://schemas.openxmlformats.org/officeDocument/2006/relationships" xmlns:p="http://schemas.openxmlformats.org/presentationml/2006/main">
+  <p:cSld>
+    <p:spTree>
+      <p:nvGrpSpPr>
+        <p:cNvPr id="1" name="">
+          <a:extLst>
+            <a:ext uri="{FF2B5EF4-FFF2-40B4-BE49-F238E27FC236}">
+              <a16:creationId xmlns:a16="http://schemas.microsoft.com/office/drawing/2014/main" id="{072F6BBD-4AD6-43BC-1332-8649FA0F265C}"/>
+            </a:ext>
+          </a:extLst>
+        </p:cNvPr>
+        <p:cNvGrpSpPr/>
+        <p:nvPr/>
+      </p:nvGrpSpPr>
+      <p:grpSpPr>
+        <a:xfrm>
+          <a:off x="0" y="0"/>
+          <a:ext cx="0" cy="0"/>
+          <a:chOff x="0" y="0"/>
+          <a:chExt cx="0" cy="0"/>
+        </a:xfrm>
+      </p:grpSpPr>
+      <p:sp>
+        <p:nvSpPr>
+          <p:cNvPr id="2" name="슬라이드 이미지 개체 틀 1">
+            <a:extLst>
+              <a:ext uri="{FF2B5EF4-FFF2-40B4-BE49-F238E27FC236}">
+                <a16:creationId xmlns:a16="http://schemas.microsoft.com/office/drawing/2014/main" id="{722FFEC0-339A-C35A-B0D8-C7842147B429}"/>
+              </a:ext>
+            </a:extLst>
+          </p:cNvPr>
+          <p:cNvSpPr>
+            <a:spLocks noGrp="1" noRot="1" noChangeAspect="1"/>
+          </p:cNvSpPr>
+          <p:nvPr>
+            <p:ph type="sldImg"/>
+          </p:nvPr>
+        </p:nvSpPr>
+        <p:spPr/>
+      </p:sp>
+      <p:sp>
+        <p:nvSpPr>
+          <p:cNvPr id="3" name="슬라이드 노트 개체 틀 2">
+            <a:extLst>
+              <a:ext uri="{FF2B5EF4-FFF2-40B4-BE49-F238E27FC236}">
+                <a16:creationId xmlns:a16="http://schemas.microsoft.com/office/drawing/2014/main" id="{F96A544E-6C05-95B3-233B-9B7289516616}"/>
+              </a:ext>
+            </a:extLst>
+          </p:cNvPr>
+          <p:cNvSpPr>
+            <a:spLocks noGrp="1"/>
+          </p:cNvSpPr>
+          <p:nvPr>
+            <p:ph type="body" idx="1"/>
+          </p:nvPr>
+        </p:nvSpPr>
+        <p:spPr/>
+        <p:txBody>
+          <a:bodyPr/>
+          <a:lstStyle/>
+          <a:p>
+            <a:endParaRPr lang="ko-KR" altLang="en-US">
+              <a:latin typeface="맑은 고딕" panose="020B0503020000020004" pitchFamily="50" charset="-127"/>
+              <a:ea typeface="맑은 고딕" panose="020B0503020000020004" pitchFamily="50" charset="-127"/>
+            </a:endParaRPr>
+          </a:p>
+        </p:txBody>
+      </p:sp>
+      <p:sp>
+        <p:nvSpPr>
+          <p:cNvPr id="4" name="슬라이드 번호 개체 틀 3">
+            <a:extLst>
+              <a:ext uri="{FF2B5EF4-FFF2-40B4-BE49-F238E27FC236}">
+                <a16:creationId xmlns:a16="http://schemas.microsoft.com/office/drawing/2014/main" id="{175D54AA-5EFD-95CB-5333-3ED1D0C9E989}"/>
+              </a:ext>
+            </a:extLst>
+          </p:cNvPr>
+          <p:cNvSpPr>
+            <a:spLocks noGrp="1"/>
+          </p:cNvSpPr>
+          <p:nvPr>
+            <p:ph type="sldNum" sz="quarter" idx="5"/>
+          </p:nvPr>
+        </p:nvSpPr>
+        <p:spPr/>
+        <p:txBody>
+          <a:bodyPr/>
+          <a:lstStyle/>
+          <a:p>
+            <a:pPr rtl="0"/>
+            <a:fld id="{DF61EA0F-A667-4B49-8422-0062BC55E249}" type="slidenum">
+              <a:rPr lang="en-US" altLang="ko-KR" smtClean="0">
+                <a:latin typeface="맑은 고딕" panose="020B0503020000020004" pitchFamily="50" charset="-127"/>
+                <a:ea typeface="맑은 고딕" panose="020B0503020000020004" pitchFamily="50" charset="-127"/>
+              </a:rPr>
               <a:t>50</a:t>
             </a:fld>
             <a:endParaRPr lang="ko-KR" altLang="en-US">
@@ -5976,7 +5972,7 @@
     </p:spTree>
     <p:extLst>
       <p:ext uri="{BB962C8B-B14F-4D97-AF65-F5344CB8AC3E}">
-        <p14:creationId xmlns:p14="http://schemas.microsoft.com/office/powerpoint/2010/main" val="2254794766"/>
+        <p14:creationId xmlns:p14="http://schemas.microsoft.com/office/powerpoint/2010/main" val="3706368107"/>
       </p:ext>
     </p:extLst>
   </p:cSld>
@@ -6112,242 +6108,6 @@
         <p:cNvPr id="1" name="">
           <a:extLst>
             <a:ext uri="{FF2B5EF4-FFF2-40B4-BE49-F238E27FC236}">
-              <a16:creationId xmlns:a16="http://schemas.microsoft.com/office/drawing/2014/main" id="{8E93E0F1-7B21-4F57-A7A5-EE96671FAFA3}"/>
-            </a:ext>
-          </a:extLst>
-        </p:cNvPr>
-        <p:cNvGrpSpPr/>
-        <p:nvPr/>
-      </p:nvGrpSpPr>
-      <p:grpSpPr>
-        <a:xfrm>
-          <a:off x="0" y="0"/>
-          <a:ext cx="0" cy="0"/>
-          <a:chOff x="0" y="0"/>
-          <a:chExt cx="0" cy="0"/>
-        </a:xfrm>
-      </p:grpSpPr>
-      <p:sp>
-        <p:nvSpPr>
-          <p:cNvPr id="2" name="슬라이드 이미지 개체 틀 1">
-            <a:extLst>
-              <a:ext uri="{FF2B5EF4-FFF2-40B4-BE49-F238E27FC236}">
-                <a16:creationId xmlns:a16="http://schemas.microsoft.com/office/drawing/2014/main" id="{95D50521-462A-5006-3D6A-71FFDFBCFB28}"/>
-              </a:ext>
-            </a:extLst>
-          </p:cNvPr>
-          <p:cNvSpPr>
-            <a:spLocks noGrp="1" noRot="1" noChangeAspect="1"/>
-          </p:cNvSpPr>
-          <p:nvPr>
-            <p:ph type="sldImg"/>
-          </p:nvPr>
-        </p:nvSpPr>
-        <p:spPr/>
-      </p:sp>
-      <p:sp>
-        <p:nvSpPr>
-          <p:cNvPr id="3" name="슬라이드 노트 개체 틀 2">
-            <a:extLst>
-              <a:ext uri="{FF2B5EF4-FFF2-40B4-BE49-F238E27FC236}">
-                <a16:creationId xmlns:a16="http://schemas.microsoft.com/office/drawing/2014/main" id="{751330A3-44E3-428E-90AC-317DF55861DF}"/>
-              </a:ext>
-            </a:extLst>
-          </p:cNvPr>
-          <p:cNvSpPr>
-            <a:spLocks noGrp="1"/>
-          </p:cNvSpPr>
-          <p:nvPr>
-            <p:ph type="body" idx="1"/>
-          </p:nvPr>
-        </p:nvSpPr>
-        <p:spPr/>
-        <p:txBody>
-          <a:bodyPr/>
-          <a:lstStyle/>
-          <a:p>
-            <a:endParaRPr lang="ko-KR" altLang="en-US">
-              <a:latin typeface="맑은 고딕" panose="020B0503020000020004" pitchFamily="50" charset="-127"/>
-              <a:ea typeface="맑은 고딕" panose="020B0503020000020004" pitchFamily="50" charset="-127"/>
-            </a:endParaRPr>
-          </a:p>
-        </p:txBody>
-      </p:sp>
-      <p:sp>
-        <p:nvSpPr>
-          <p:cNvPr id="4" name="슬라이드 번호 개체 틀 3">
-            <a:extLst>
-              <a:ext uri="{FF2B5EF4-FFF2-40B4-BE49-F238E27FC236}">
-                <a16:creationId xmlns:a16="http://schemas.microsoft.com/office/drawing/2014/main" id="{DA636BAB-9F39-1449-C6DC-B9C57EBDFF6C}"/>
-              </a:ext>
-            </a:extLst>
-          </p:cNvPr>
-          <p:cNvSpPr>
-            <a:spLocks noGrp="1"/>
-          </p:cNvSpPr>
-          <p:nvPr>
-            <p:ph type="sldNum" sz="quarter" idx="5"/>
-          </p:nvPr>
-        </p:nvSpPr>
-        <p:spPr/>
-        <p:txBody>
-          <a:bodyPr/>
-          <a:lstStyle/>
-          <a:p>
-            <a:pPr rtl="0"/>
-            <a:fld id="{DF61EA0F-A667-4B49-8422-0062BC55E249}" type="slidenum">
-              <a:rPr lang="en-US" altLang="ko-KR" smtClean="0">
-                <a:latin typeface="맑은 고딕" panose="020B0503020000020004" pitchFamily="50" charset="-127"/>
-                <a:ea typeface="맑은 고딕" panose="020B0503020000020004" pitchFamily="50" charset="-127"/>
-              </a:rPr>
-              <a:t>51</a:t>
-            </a:fld>
-            <a:endParaRPr lang="ko-KR" altLang="en-US">
-              <a:latin typeface="맑은 고딕" panose="020B0503020000020004" pitchFamily="50" charset="-127"/>
-              <a:ea typeface="맑은 고딕" panose="020B0503020000020004" pitchFamily="50" charset="-127"/>
-            </a:endParaRPr>
-          </a:p>
-        </p:txBody>
-      </p:sp>
-    </p:spTree>
-    <p:extLst>
-      <p:ext uri="{BB962C8B-B14F-4D97-AF65-F5344CB8AC3E}">
-        <p14:creationId xmlns:p14="http://schemas.microsoft.com/office/powerpoint/2010/main" val="2946124820"/>
-      </p:ext>
-    </p:extLst>
-  </p:cSld>
-  <p:clrMapOvr>
-    <a:masterClrMapping/>
-  </p:clrMapOvr>
-</p:notes>
-</file>
-
-<file path=ppt/notesSlides/notesSlide51.xml><?xml version="1.0" encoding="utf-8"?>
-<p:notes xmlns:a="http://schemas.openxmlformats.org/drawingml/2006/main" xmlns:r="http://schemas.openxmlformats.org/officeDocument/2006/relationships" xmlns:p="http://schemas.openxmlformats.org/presentationml/2006/main">
-  <p:cSld>
-    <p:spTree>
-      <p:nvGrpSpPr>
-        <p:cNvPr id="1" name="">
-          <a:extLst>
-            <a:ext uri="{FF2B5EF4-FFF2-40B4-BE49-F238E27FC236}">
-              <a16:creationId xmlns:a16="http://schemas.microsoft.com/office/drawing/2014/main" id="{072F6BBD-4AD6-43BC-1332-8649FA0F265C}"/>
-            </a:ext>
-          </a:extLst>
-        </p:cNvPr>
-        <p:cNvGrpSpPr/>
-        <p:nvPr/>
-      </p:nvGrpSpPr>
-      <p:grpSpPr>
-        <a:xfrm>
-          <a:off x="0" y="0"/>
-          <a:ext cx="0" cy="0"/>
-          <a:chOff x="0" y="0"/>
-          <a:chExt cx="0" cy="0"/>
-        </a:xfrm>
-      </p:grpSpPr>
-      <p:sp>
-        <p:nvSpPr>
-          <p:cNvPr id="2" name="슬라이드 이미지 개체 틀 1">
-            <a:extLst>
-              <a:ext uri="{FF2B5EF4-FFF2-40B4-BE49-F238E27FC236}">
-                <a16:creationId xmlns:a16="http://schemas.microsoft.com/office/drawing/2014/main" id="{722FFEC0-339A-C35A-B0D8-C7842147B429}"/>
-              </a:ext>
-            </a:extLst>
-          </p:cNvPr>
-          <p:cNvSpPr>
-            <a:spLocks noGrp="1" noRot="1" noChangeAspect="1"/>
-          </p:cNvSpPr>
-          <p:nvPr>
-            <p:ph type="sldImg"/>
-          </p:nvPr>
-        </p:nvSpPr>
-        <p:spPr/>
-      </p:sp>
-      <p:sp>
-        <p:nvSpPr>
-          <p:cNvPr id="3" name="슬라이드 노트 개체 틀 2">
-            <a:extLst>
-              <a:ext uri="{FF2B5EF4-FFF2-40B4-BE49-F238E27FC236}">
-                <a16:creationId xmlns:a16="http://schemas.microsoft.com/office/drawing/2014/main" id="{F96A544E-6C05-95B3-233B-9B7289516616}"/>
-              </a:ext>
-            </a:extLst>
-          </p:cNvPr>
-          <p:cNvSpPr>
-            <a:spLocks noGrp="1"/>
-          </p:cNvSpPr>
-          <p:nvPr>
-            <p:ph type="body" idx="1"/>
-          </p:nvPr>
-        </p:nvSpPr>
-        <p:spPr/>
-        <p:txBody>
-          <a:bodyPr/>
-          <a:lstStyle/>
-          <a:p>
-            <a:endParaRPr lang="ko-KR" altLang="en-US">
-              <a:latin typeface="맑은 고딕" panose="020B0503020000020004" pitchFamily="50" charset="-127"/>
-              <a:ea typeface="맑은 고딕" panose="020B0503020000020004" pitchFamily="50" charset="-127"/>
-            </a:endParaRPr>
-          </a:p>
-        </p:txBody>
-      </p:sp>
-      <p:sp>
-        <p:nvSpPr>
-          <p:cNvPr id="4" name="슬라이드 번호 개체 틀 3">
-            <a:extLst>
-              <a:ext uri="{FF2B5EF4-FFF2-40B4-BE49-F238E27FC236}">
-                <a16:creationId xmlns:a16="http://schemas.microsoft.com/office/drawing/2014/main" id="{175D54AA-5EFD-95CB-5333-3ED1D0C9E989}"/>
-              </a:ext>
-            </a:extLst>
-          </p:cNvPr>
-          <p:cNvSpPr>
-            <a:spLocks noGrp="1"/>
-          </p:cNvSpPr>
-          <p:nvPr>
-            <p:ph type="sldNum" sz="quarter" idx="5"/>
-          </p:nvPr>
-        </p:nvSpPr>
-        <p:spPr/>
-        <p:txBody>
-          <a:bodyPr/>
-          <a:lstStyle/>
-          <a:p>
-            <a:pPr rtl="0"/>
-            <a:fld id="{DF61EA0F-A667-4B49-8422-0062BC55E249}" type="slidenum">
-              <a:rPr lang="en-US" altLang="ko-KR" smtClean="0">
-                <a:latin typeface="맑은 고딕" panose="020B0503020000020004" pitchFamily="50" charset="-127"/>
-                <a:ea typeface="맑은 고딕" panose="020B0503020000020004" pitchFamily="50" charset="-127"/>
-              </a:rPr>
-              <a:t>52</a:t>
-            </a:fld>
-            <a:endParaRPr lang="ko-KR" altLang="en-US">
-              <a:latin typeface="맑은 고딕" panose="020B0503020000020004" pitchFamily="50" charset="-127"/>
-              <a:ea typeface="맑은 고딕" panose="020B0503020000020004" pitchFamily="50" charset="-127"/>
-            </a:endParaRPr>
-          </a:p>
-        </p:txBody>
-      </p:sp>
-    </p:spTree>
-    <p:extLst>
-      <p:ext uri="{BB962C8B-B14F-4D97-AF65-F5344CB8AC3E}">
-        <p14:creationId xmlns:p14="http://schemas.microsoft.com/office/powerpoint/2010/main" val="3706368107"/>
-      </p:ext>
-    </p:extLst>
-  </p:cSld>
-  <p:clrMapOvr>
-    <a:masterClrMapping/>
-  </p:clrMapOvr>
-</p:notes>
-</file>
-
-<file path=ppt/notesSlides/notesSlide52.xml><?xml version="1.0" encoding="utf-8"?>
-<p:notes xmlns:a="http://schemas.openxmlformats.org/drawingml/2006/main" xmlns:r="http://schemas.openxmlformats.org/officeDocument/2006/relationships" xmlns:p="http://schemas.openxmlformats.org/presentationml/2006/main">
-  <p:cSld>
-    <p:spTree>
-      <p:nvGrpSpPr>
-        <p:cNvPr id="1" name="">
-          <a:extLst>
-            <a:ext uri="{FF2B5EF4-FFF2-40B4-BE49-F238E27FC236}">
               <a16:creationId xmlns:a16="http://schemas.microsoft.com/office/drawing/2014/main" id="{4E2DE17A-73EE-6F4B-BA44-E024FC1DD2CA}"/>
             </a:ext>
           </a:extLst>
@@ -6436,7 +6196,7 @@
                 <a:latin typeface="맑은 고딕" panose="020B0503020000020004" pitchFamily="50" charset="-127"/>
                 <a:ea typeface="맑은 고딕" panose="020B0503020000020004" pitchFamily="50" charset="-127"/>
               </a:rPr>
-              <a:t>53</a:t>
+              <a:t>51</a:t>
             </a:fld>
             <a:endParaRPr lang="ko-KR" altLang="en-US">
               <a:latin typeface="맑은 고딕" panose="020B0503020000020004" pitchFamily="50" charset="-127"/>
@@ -6458,7 +6218,7 @@
 </p:notes>
 </file>
 
-<file path=ppt/notesSlides/notesSlide53.xml><?xml version="1.0" encoding="utf-8"?>
+<file path=ppt/notesSlides/notesSlide51.xml><?xml version="1.0" encoding="utf-8"?>
 <p:notes xmlns:a="http://schemas.openxmlformats.org/drawingml/2006/main" xmlns:r="http://schemas.openxmlformats.org/officeDocument/2006/relationships" xmlns:p="http://schemas.openxmlformats.org/presentationml/2006/main">
   <p:cSld>
     <p:spTree>
@@ -6554,7 +6314,7 @@
                 <a:latin typeface="맑은 고딕" panose="020B0503020000020004" pitchFamily="50" charset="-127"/>
                 <a:ea typeface="맑은 고딕" panose="020B0503020000020004" pitchFamily="50" charset="-127"/>
               </a:rPr>
-              <a:t>54</a:t>
+              <a:t>52</a:t>
             </a:fld>
             <a:endParaRPr lang="ko-KR" altLang="en-US">
               <a:latin typeface="맑은 고딕" panose="020B0503020000020004" pitchFamily="50" charset="-127"/>
@@ -7516,7 +7276,7 @@
           <a:p>
             <a:fld id="{990475B5-67CA-4281-BDCA-DA943C3C8EB3}" type="datetime1">
               <a:rPr lang="ko-KR" altLang="en-US" noProof="0" smtClean="0"/>
-              <a:t>2026-04-11</a:t>
+              <a:t>2026-04-16</a:t>
             </a:fld>
             <a:endParaRPr lang="ko-KR" altLang="en-US" noProof="0"/>
           </a:p>
@@ -8110,7 +7870,7 @@
           <a:p>
             <a:fld id="{48A87A34-81AB-432B-8DAE-1953F412C126}" type="datetimeFigureOut">
               <a:rPr lang="en-US" smtClean="0"/>
-              <a:t>4/11/2026</a:t>
+              <a:t>4/16/2026</a:t>
             </a:fld>
             <a:endParaRPr lang="en-US" dirty="0"/>
           </a:p>
@@ -8379,7 +8139,7 @@
           <a:p>
             <a:fld id="{28A3BAFB-7A40-4072-A7FD-FB0EDC55F13F}" type="datetime1">
               <a:rPr lang="ko-KR" altLang="en-US" smtClean="0"/>
-              <a:t>2026-04-11</a:t>
+              <a:t>2026-04-16</a:t>
             </a:fld>
             <a:endParaRPr lang="en-US" dirty="0"/>
           </a:p>
@@ -8684,7 +8444,7 @@
           <a:p>
             <a:fld id="{C655C81E-72E7-4D05-94B5-F45B321A525D}" type="datetime1">
               <a:rPr lang="ko-KR" altLang="en-US" noProof="0" smtClean="0"/>
-              <a:t>2026-04-11</a:t>
+              <a:t>2026-04-16</a:t>
             </a:fld>
             <a:endParaRPr lang="ko-KR" altLang="en-US" noProof="0" dirty="0">
               <a:latin typeface="맑은 고딕" panose="020B0503020000020004" pitchFamily="50" charset="-127"/>
@@ -14725,8 +14485,8 @@
         </p:blipFill>
         <p:spPr>
           <a:xfrm>
-            <a:off x="828459" y="2188515"/>
-            <a:ext cx="3086531" cy="2915057"/>
+            <a:off x="674034" y="2815782"/>
+            <a:ext cx="3440982" cy="3249816"/>
           </a:xfrm>
           <a:prstGeom prst="rect">
             <a:avLst/>
@@ -14755,8 +14515,8 @@
         </p:blipFill>
         <p:spPr>
           <a:xfrm>
-            <a:off x="4589013" y="2188515"/>
-            <a:ext cx="3038899" cy="2905530"/>
+            <a:off x="4335283" y="2816875"/>
+            <a:ext cx="3387880" cy="3239195"/>
           </a:xfrm>
           <a:prstGeom prst="rect">
             <a:avLst/>
@@ -14765,10 +14525,10 @@
       </p:pic>
       <p:pic>
         <p:nvPicPr>
-          <p:cNvPr id="10" name="그림 9">
-            <a:extLst>
-              <a:ext uri="{FF2B5EF4-FFF2-40B4-BE49-F238E27FC236}">
-                <a16:creationId xmlns:a16="http://schemas.microsoft.com/office/drawing/2014/main" id="{6B37AA08-CE70-8335-48BE-9554C7952DD8}"/>
+          <p:cNvPr id="13" name="그림 12">
+            <a:extLst>
+              <a:ext uri="{FF2B5EF4-FFF2-40B4-BE49-F238E27FC236}">
+                <a16:creationId xmlns:a16="http://schemas.microsoft.com/office/drawing/2014/main" id="{CFDEAA1E-1BDE-540D-0595-B1CD0C4E5D71}"/>
               </a:ext>
             </a:extLst>
           </p:cNvPr>
@@ -14785,8 +14545,8 @@
         </p:blipFill>
         <p:spPr>
           <a:xfrm>
-            <a:off x="5579751" y="5103572"/>
-            <a:ext cx="2048161" cy="1371791"/>
+            <a:off x="8260646" y="4076700"/>
+            <a:ext cx="3387880" cy="1950915"/>
           </a:xfrm>
           <a:prstGeom prst="rect">
             <a:avLst/>
@@ -14795,10 +14555,10 @@
       </p:pic>
       <p:pic>
         <p:nvPicPr>
-          <p:cNvPr id="13" name="그림 12">
-            <a:extLst>
-              <a:ext uri="{FF2B5EF4-FFF2-40B4-BE49-F238E27FC236}">
-                <a16:creationId xmlns:a16="http://schemas.microsoft.com/office/drawing/2014/main" id="{CFDEAA1E-1BDE-540D-0595-B1CD0C4E5D71}"/>
+          <p:cNvPr id="4" name="그림 3">
+            <a:extLst>
+              <a:ext uri="{FF2B5EF4-FFF2-40B4-BE49-F238E27FC236}">
+                <a16:creationId xmlns:a16="http://schemas.microsoft.com/office/drawing/2014/main" id="{E79E48BB-CE5F-0E58-7542-8CE1DAA95DE1}"/>
               </a:ext>
             </a:extLst>
           </p:cNvPr>
@@ -14815,14 +14575,176 @@
         </p:blipFill>
         <p:spPr>
           <a:xfrm>
-            <a:off x="8656820" y="2209905"/>
-            <a:ext cx="3077004" cy="1771897"/>
+            <a:off x="8260646" y="3069747"/>
+            <a:ext cx="3387880" cy="1006953"/>
           </a:xfrm>
           <a:prstGeom prst="rect">
             <a:avLst/>
           </a:prstGeom>
         </p:spPr>
       </p:pic>
+      <p:sp>
+        <p:nvSpPr>
+          <p:cNvPr id="7" name="TextBox 6">
+            <a:extLst>
+              <a:ext uri="{FF2B5EF4-FFF2-40B4-BE49-F238E27FC236}">
+                <a16:creationId xmlns:a16="http://schemas.microsoft.com/office/drawing/2014/main" id="{E39B06D3-9680-5744-67D1-9E77C077663C}"/>
+              </a:ext>
+            </a:extLst>
+          </p:cNvPr>
+          <p:cNvSpPr txBox="1"/>
+          <p:nvPr/>
+        </p:nvSpPr>
+        <p:spPr>
+          <a:xfrm>
+            <a:off x="521206" y="1329035"/>
+            <a:ext cx="11127319" cy="1198854"/>
+          </a:xfrm>
+          <a:prstGeom prst="rect">
+            <a:avLst/>
+          </a:prstGeom>
+          <a:noFill/>
+        </p:spPr>
+        <p:txBody>
+          <a:bodyPr wrap="square">
+            <a:spAutoFit/>
+          </a:bodyPr>
+          <a:lstStyle/>
+          <a:p>
+            <a:pPr marL="285750" indent="-285750">
+              <a:lnSpc>
+                <a:spcPct val="150000"/>
+              </a:lnSpc>
+              <a:buFont typeface="Wingdings" panose="05000000000000000000" pitchFamily="2" charset="2"/>
+              <a:buChar char="v"/>
+            </a:pPr>
+            <a:r>
+              <a:rPr lang="ko-KR" altLang="en-US" dirty="0">
+                <a:latin typeface="맑은 고딕 Semilight" panose="020B0502040204020203" pitchFamily="50" charset="-127"/>
+                <a:ea typeface="맑은 고딕 Semilight" panose="020B0502040204020203" pitchFamily="50" charset="-127"/>
+                <a:cs typeface="맑은 고딕 Semilight" panose="020B0502040204020203" pitchFamily="50" charset="-127"/>
+              </a:rPr>
+              <a:t>벡터의 </a:t>
+            </a:r>
+            <a:r>
+              <a:rPr lang="en-US" altLang="ko-KR" dirty="0">
+                <a:latin typeface="맑은 고딕 Semilight" panose="020B0502040204020203" pitchFamily="50" charset="-127"/>
+                <a:ea typeface="맑은 고딕 Semilight" panose="020B0502040204020203" pitchFamily="50" charset="-127"/>
+                <a:cs typeface="맑은 고딕 Semilight" panose="020B0502040204020203" pitchFamily="50" charset="-127"/>
+              </a:rPr>
+              <a:t>Norm</a:t>
+            </a:r>
+            <a:r>
+              <a:rPr lang="ko-KR" altLang="en-US" dirty="0">
+                <a:latin typeface="맑은 고딕 Semilight" panose="020B0502040204020203" pitchFamily="50" charset="-127"/>
+                <a:ea typeface="맑은 고딕 Semilight" panose="020B0502040204020203" pitchFamily="50" charset="-127"/>
+                <a:cs typeface="맑은 고딕 Semilight" panose="020B0502040204020203" pitchFamily="50" charset="-127"/>
+              </a:rPr>
+              <a:t>을 이해하는 두 가지 관점</a:t>
+            </a:r>
+            <a:endParaRPr lang="en-US" altLang="ko-KR" dirty="0">
+              <a:latin typeface="맑은 고딕 Semilight" panose="020B0502040204020203" pitchFamily="50" charset="-127"/>
+              <a:ea typeface="맑은 고딕 Semilight" panose="020B0502040204020203" pitchFamily="50" charset="-127"/>
+              <a:cs typeface="맑은 고딕 Semilight" panose="020B0502040204020203" pitchFamily="50" charset="-127"/>
+            </a:endParaRPr>
+          </a:p>
+          <a:p>
+            <a:pPr marL="742950" lvl="1" indent="-285750">
+              <a:lnSpc>
+                <a:spcPct val="150000"/>
+              </a:lnSpc>
+              <a:buFont typeface="Wingdings" panose="05000000000000000000" pitchFamily="2" charset="2"/>
+              <a:buChar char="v"/>
+            </a:pPr>
+            <a:r>
+              <a:rPr lang="ko-KR" altLang="en-US" sz="1600" dirty="0">
+                <a:latin typeface="맑은 고딕 Semilight" panose="020B0502040204020203" pitchFamily="50" charset="-127"/>
+                <a:ea typeface="맑은 고딕 Semilight" panose="020B0502040204020203" pitchFamily="50" charset="-127"/>
+                <a:cs typeface="맑은 고딕 Semilight" panose="020B0502040204020203" pitchFamily="50" charset="-127"/>
+              </a:rPr>
+              <a:t>기하학적 관점</a:t>
+            </a:r>
+            <a:r>
+              <a:rPr lang="en-US" altLang="ko-KR" sz="1600" dirty="0">
+                <a:latin typeface="맑은 고딕 Semilight" panose="020B0502040204020203" pitchFamily="50" charset="-127"/>
+                <a:ea typeface="맑은 고딕 Semilight" panose="020B0502040204020203" pitchFamily="50" charset="-127"/>
+                <a:cs typeface="맑은 고딕 Semilight" panose="020B0502040204020203" pitchFamily="50" charset="-127"/>
+              </a:rPr>
+              <a:t>: </a:t>
+            </a:r>
+            <a:r>
+              <a:rPr lang="ko-KR" altLang="en-US" sz="1600" dirty="0">
+                <a:latin typeface="맑은 고딕 Semilight" panose="020B0502040204020203" pitchFamily="50" charset="-127"/>
+                <a:ea typeface="맑은 고딕 Semilight" panose="020B0502040204020203" pitchFamily="50" charset="-127"/>
+                <a:cs typeface="맑은 고딕 Semilight" panose="020B0502040204020203" pitchFamily="50" charset="-127"/>
+              </a:rPr>
+              <a:t>피타고라스 정리를 이용한 빗변의 길이</a:t>
+            </a:r>
+            <a:r>
+              <a:rPr lang="en-US" altLang="ko-KR" sz="1600" dirty="0">
+                <a:latin typeface="맑은 고딕 Semilight" panose="020B0502040204020203" pitchFamily="50" charset="-127"/>
+                <a:ea typeface="맑은 고딕 Semilight" panose="020B0502040204020203" pitchFamily="50" charset="-127"/>
+                <a:cs typeface="맑은 고딕 Semilight" panose="020B0502040204020203" pitchFamily="50" charset="-127"/>
+              </a:rPr>
+              <a:t>, </a:t>
+            </a:r>
+            <a:r>
+              <a:rPr lang="ko-KR" altLang="en-US" sz="1600" dirty="0">
+                <a:latin typeface="맑은 고딕 Semilight" panose="020B0502040204020203" pitchFamily="50" charset="-127"/>
+                <a:ea typeface="맑은 고딕 Semilight" panose="020B0502040204020203" pitchFamily="50" charset="-127"/>
+                <a:cs typeface="맑은 고딕 Semilight" panose="020B0502040204020203" pitchFamily="50" charset="-127"/>
+              </a:rPr>
+              <a:t>즉 </a:t>
+            </a:r>
+            <a:r>
+              <a:rPr lang="en-US" altLang="ko-KR" sz="1600" dirty="0">
+                <a:latin typeface="맑은 고딕 Semilight" panose="020B0502040204020203" pitchFamily="50" charset="-127"/>
+                <a:ea typeface="맑은 고딕 Semilight" panose="020B0502040204020203" pitchFamily="50" charset="-127"/>
+                <a:cs typeface="맑은 고딕 Semilight" panose="020B0502040204020203" pitchFamily="50" charset="-127"/>
+              </a:rPr>
+              <a:t>L2 Norm</a:t>
+            </a:r>
+          </a:p>
+          <a:p>
+            <a:pPr marL="742950" lvl="1" indent="-285750">
+              <a:lnSpc>
+                <a:spcPct val="150000"/>
+              </a:lnSpc>
+              <a:buFont typeface="Wingdings" panose="05000000000000000000" pitchFamily="2" charset="2"/>
+              <a:buChar char="v"/>
+            </a:pPr>
+            <a:r>
+              <a:rPr lang="ko-KR" altLang="en-US" sz="1600" dirty="0">
+                <a:latin typeface="맑은 고딕 Semilight" panose="020B0502040204020203" pitchFamily="50" charset="-127"/>
+                <a:ea typeface="맑은 고딕 Semilight" panose="020B0502040204020203" pitchFamily="50" charset="-127"/>
+                <a:cs typeface="맑은 고딕 Semilight" panose="020B0502040204020203" pitchFamily="50" charset="-127"/>
+              </a:rPr>
+              <a:t>대수적 관점</a:t>
+            </a:r>
+            <a:r>
+              <a:rPr lang="en-US" altLang="ko-KR" sz="1600" dirty="0">
+                <a:latin typeface="맑은 고딕 Semilight" panose="020B0502040204020203" pitchFamily="50" charset="-127"/>
+                <a:ea typeface="맑은 고딕 Semilight" panose="020B0502040204020203" pitchFamily="50" charset="-127"/>
+                <a:cs typeface="맑은 고딕 Semilight" panose="020B0502040204020203" pitchFamily="50" charset="-127"/>
+              </a:rPr>
+              <a:t>: </a:t>
+            </a:r>
+            <a:r>
+              <a:rPr lang="ko-KR" altLang="en-US" sz="1600" dirty="0">
+                <a:latin typeface="맑은 고딕 Semilight" panose="020B0502040204020203" pitchFamily="50" charset="-127"/>
+                <a:ea typeface="맑은 고딕 Semilight" panose="020B0502040204020203" pitchFamily="50" charset="-127"/>
+                <a:cs typeface="맑은 고딕 Semilight" panose="020B0502040204020203" pitchFamily="50" charset="-127"/>
+              </a:rPr>
+              <a:t>자기 자신과의 내적에 루트를 씌운 값</a:t>
+            </a:r>
+            <a:endParaRPr lang="en-US" altLang="ko-KR" dirty="0">
+              <a:latin typeface="맑은 고딕 Semilight" panose="020B0502040204020203" pitchFamily="50" charset="-127"/>
+              <a:ea typeface="맑은 고딕 Semilight" panose="020B0502040204020203" pitchFamily="50" charset="-127"/>
+              <a:cs typeface="맑은 고딕 Semilight" panose="020B0502040204020203" pitchFamily="50" charset="-127"/>
+            </a:endParaRPr>
+          </a:p>
+        </p:txBody>
+      </p:sp>
     </p:spTree>
     <p:extLst>
       <p:ext uri="{BB962C8B-B14F-4D97-AF65-F5344CB8AC3E}">
@@ -14888,33 +14810,6 @@
                                   </p:childTnLst>
                                 </p:cTn>
                               </p:par>
-                              <p:par>
-                                <p:cTn id="7" presetID="1" presetClass="entr" presetSubtype="0" fill="hold" nodeType="withEffect">
-                                  <p:stCondLst>
-                                    <p:cond delay="0"/>
-                                  </p:stCondLst>
-                                  <p:childTnLst>
-                                    <p:set>
-                                      <p:cBhvr>
-                                        <p:cTn id="8" dur="1" fill="hold">
-                                          <p:stCondLst>
-                                            <p:cond delay="0"/>
-                                          </p:stCondLst>
-                                        </p:cTn>
-                                        <p:tgtEl>
-                                          <p:spTgt spid="10"/>
-                                        </p:tgtEl>
-                                        <p:attrNameLst>
-                                          <p:attrName>style.visibility</p:attrName>
-                                        </p:attrNameLst>
-                                      </p:cBhvr>
-                                      <p:to>
-                                        <p:strVal val="visible"/>
-                                      </p:to>
-                                    </p:set>
-                                  </p:childTnLst>
-                                </p:cTn>
-                              </p:par>
                             </p:childTnLst>
                           </p:cTn>
                         </p:par>
@@ -14922,26 +14817,26 @@
                     </p:cTn>
                   </p:par>
                   <p:par>
-                    <p:cTn id="9" fill="hold">
+                    <p:cTn id="7" fill="hold">
                       <p:stCondLst>
                         <p:cond delay="indefinite"/>
                       </p:stCondLst>
                       <p:childTnLst>
                         <p:par>
-                          <p:cTn id="10" fill="hold">
+                          <p:cTn id="8" fill="hold">
                             <p:stCondLst>
                               <p:cond delay="0"/>
                             </p:stCondLst>
                             <p:childTnLst>
                               <p:par>
-                                <p:cTn id="11" presetID="1" presetClass="entr" presetSubtype="0" fill="hold" nodeType="clickEffect">
+                                <p:cTn id="9" presetID="1" presetClass="entr" presetSubtype="0" fill="hold" nodeType="clickEffect">
                                   <p:stCondLst>
                                     <p:cond delay="0"/>
                                   </p:stCondLst>
                                   <p:childTnLst>
                                     <p:set>
                                       <p:cBhvr>
-                                        <p:cTn id="12" dur="1" fill="hold">
+                                        <p:cTn id="10" dur="1" fill="hold">
                                           <p:stCondLst>
                                             <p:cond delay="0"/>
                                           </p:stCondLst>
@@ -14999,441 +14894,6 @@
         <p:cNvPr id="1" name="">
           <a:extLst>
             <a:ext uri="{FF2B5EF4-FFF2-40B4-BE49-F238E27FC236}">
-              <a16:creationId xmlns:a16="http://schemas.microsoft.com/office/drawing/2014/main" id="{7F2534A9-645B-3BD1-F42A-1E5AE05B2C65}"/>
-            </a:ext>
-          </a:extLst>
-        </p:cNvPr>
-        <p:cNvGrpSpPr/>
-        <p:nvPr/>
-      </p:nvGrpSpPr>
-      <p:grpSpPr>
-        <a:xfrm>
-          <a:off x="0" y="0"/>
-          <a:ext cx="0" cy="0"/>
-          <a:chOff x="0" y="0"/>
-          <a:chExt cx="0" cy="0"/>
-        </a:xfrm>
-      </p:grpSpPr>
-      <p:sp>
-        <p:nvSpPr>
-          <p:cNvPr id="8" name="제목 7">
-            <a:extLst>
-              <a:ext uri="{FF2B5EF4-FFF2-40B4-BE49-F238E27FC236}">
-                <a16:creationId xmlns:a16="http://schemas.microsoft.com/office/drawing/2014/main" id="{94761283-1E4C-D69C-5CB6-3B2DD2CFD642}"/>
-              </a:ext>
-            </a:extLst>
-          </p:cNvPr>
-          <p:cNvSpPr>
-            <a:spLocks noGrp="1"/>
-          </p:cNvSpPr>
-          <p:nvPr>
-            <p:ph type="title"/>
-          </p:nvPr>
-        </p:nvSpPr>
-        <p:spPr>
-          <a:xfrm>
-            <a:off x="521207" y="448056"/>
-            <a:ext cx="8135613" cy="640080"/>
-          </a:xfrm>
-        </p:spPr>
-        <p:txBody>
-          <a:bodyPr rtlCol="0">
-            <a:noAutofit/>
-          </a:bodyPr>
-          <a:lstStyle/>
-          <a:p>
-            <a:pPr rtl="0"/>
-            <a:r>
-              <a:rPr lang="en-US" altLang="ko-KR" dirty="0">
-                <a:cs typeface="Segoe UI Light" panose="020B0502040204020203" pitchFamily="34" charset="0"/>
-              </a:rPr>
-              <a:t>Norm of a vector using dot product</a:t>
-            </a:r>
-            <a:endParaRPr lang="ko-KR" altLang="en-US" dirty="0">
-              <a:cs typeface="Segoe UI Light" panose="020B0502040204020203" pitchFamily="34" charset="0"/>
-            </a:endParaRPr>
-          </a:p>
-        </p:txBody>
-      </p:sp>
-      <p:sp>
-        <p:nvSpPr>
-          <p:cNvPr id="12" name="슬라이드 번호 개체 틀 11">
-            <a:extLst>
-              <a:ext uri="{FF2B5EF4-FFF2-40B4-BE49-F238E27FC236}">
-                <a16:creationId xmlns:a16="http://schemas.microsoft.com/office/drawing/2014/main" id="{D8384D31-59C7-BA2C-B280-F701BCC02929}"/>
-              </a:ext>
-            </a:extLst>
-          </p:cNvPr>
-          <p:cNvSpPr>
-            <a:spLocks noGrp="1"/>
-          </p:cNvSpPr>
-          <p:nvPr>
-            <p:ph type="sldNum" sz="quarter" idx="4"/>
-          </p:nvPr>
-        </p:nvSpPr>
-        <p:spPr/>
-        <p:txBody>
-          <a:bodyPr/>
-          <a:lstStyle/>
-          <a:p>
-            <a:fld id="{9860EDB8-5305-433F-BE41-D7A86D811DB3}" type="slidenum">
-              <a:rPr lang="en-US" altLang="ko-KR" noProof="0" smtClean="0"/>
-              <a:pPr/>
-              <a:t>26</a:t>
-            </a:fld>
-            <a:endParaRPr lang="ko-KR" altLang="en-US" noProof="0"/>
-          </a:p>
-        </p:txBody>
-      </p:sp>
-      <p:pic>
-        <p:nvPicPr>
-          <p:cNvPr id="4" name="그림 3">
-            <a:extLst>
-              <a:ext uri="{FF2B5EF4-FFF2-40B4-BE49-F238E27FC236}">
-                <a16:creationId xmlns:a16="http://schemas.microsoft.com/office/drawing/2014/main" id="{229E2EF6-251A-A88C-161F-F6BB6CA99640}"/>
-              </a:ext>
-            </a:extLst>
-          </p:cNvPr>
-          <p:cNvPicPr>
-            <a:picLocks noChangeAspect="1"/>
-          </p:cNvPicPr>
-          <p:nvPr/>
-        </p:nvPicPr>
-        <p:blipFill>
-          <a:blip r:embed="rId3"/>
-          <a:stretch>
-            <a:fillRect/>
-          </a:stretch>
-        </p:blipFill>
-        <p:spPr>
-          <a:xfrm>
-            <a:off x="2136136" y="1866689"/>
-            <a:ext cx="7919728" cy="3514935"/>
-          </a:xfrm>
-          <a:prstGeom prst="rect">
-            <a:avLst/>
-          </a:prstGeom>
-        </p:spPr>
-      </p:pic>
-    </p:spTree>
-    <p:extLst>
-      <p:ext uri="{BB962C8B-B14F-4D97-AF65-F5344CB8AC3E}">
-        <p14:creationId xmlns:p14="http://schemas.microsoft.com/office/powerpoint/2010/main" val="235647301"/>
-      </p:ext>
-    </p:extLst>
-  </p:cSld>
-  <p:clrMapOvr>
-    <a:masterClrMapping/>
-  </p:clrMapOvr>
-  <mc:AlternateContent xmlns:mc="http://schemas.openxmlformats.org/markup-compatibility/2006" xmlns:p14="http://schemas.microsoft.com/office/powerpoint/2010/main">
-    <mc:Choice Requires="p14">
-      <p:transition p14:dur="10"/>
-    </mc:Choice>
-    <mc:Fallback xmlns="">
-      <p:transition/>
-    </mc:Fallback>
-  </mc:AlternateContent>
-</p:sld>
-</file>
-
-<file path=ppt/slides/slide27.xml><?xml version="1.0" encoding="utf-8"?>
-<p:sld xmlns:a="http://schemas.openxmlformats.org/drawingml/2006/main" xmlns:r="http://schemas.openxmlformats.org/officeDocument/2006/relationships" xmlns:p="http://schemas.openxmlformats.org/presentationml/2006/main">
-  <p:cSld>
-    <p:spTree>
-      <p:nvGrpSpPr>
-        <p:cNvPr id="1" name="">
-          <a:extLst>
-            <a:ext uri="{FF2B5EF4-FFF2-40B4-BE49-F238E27FC236}">
-              <a16:creationId xmlns:a16="http://schemas.microsoft.com/office/drawing/2014/main" id="{DDF7A4E6-6E91-37AB-D0BE-14117C766EC9}"/>
-            </a:ext>
-          </a:extLst>
-        </p:cNvPr>
-        <p:cNvGrpSpPr/>
-        <p:nvPr/>
-      </p:nvGrpSpPr>
-      <p:grpSpPr>
-        <a:xfrm>
-          <a:off x="0" y="0"/>
-          <a:ext cx="0" cy="0"/>
-          <a:chOff x="0" y="0"/>
-          <a:chExt cx="0" cy="0"/>
-        </a:xfrm>
-      </p:grpSpPr>
-      <p:sp>
-        <p:nvSpPr>
-          <p:cNvPr id="8" name="제목 7">
-            <a:extLst>
-              <a:ext uri="{FF2B5EF4-FFF2-40B4-BE49-F238E27FC236}">
-                <a16:creationId xmlns:a16="http://schemas.microsoft.com/office/drawing/2014/main" id="{1C3E5FE9-7FF9-2A57-C0B7-FDF3FDB29671}"/>
-              </a:ext>
-            </a:extLst>
-          </p:cNvPr>
-          <p:cNvSpPr>
-            <a:spLocks noGrp="1"/>
-          </p:cNvSpPr>
-          <p:nvPr>
-            <p:ph type="title"/>
-          </p:nvPr>
-        </p:nvSpPr>
-        <p:spPr>
-          <a:xfrm>
-            <a:off x="521207" y="448056"/>
-            <a:ext cx="8135613" cy="640080"/>
-          </a:xfrm>
-        </p:spPr>
-        <p:txBody>
-          <a:bodyPr rtlCol="0">
-            <a:noAutofit/>
-          </a:bodyPr>
-          <a:lstStyle/>
-          <a:p>
-            <a:pPr rtl="0"/>
-            <a:r>
-              <a:rPr lang="en-US" altLang="ko-KR" dirty="0">
-                <a:cs typeface="Segoe UI Light" panose="020B0502040204020203" pitchFamily="34" charset="0"/>
-              </a:rPr>
-              <a:t>Norm of a vector using dot product</a:t>
-            </a:r>
-            <a:endParaRPr lang="ko-KR" altLang="en-US" dirty="0">
-              <a:cs typeface="Segoe UI Light" panose="020B0502040204020203" pitchFamily="34" charset="0"/>
-            </a:endParaRPr>
-          </a:p>
-        </p:txBody>
-      </p:sp>
-      <p:sp>
-        <p:nvSpPr>
-          <p:cNvPr id="12" name="슬라이드 번호 개체 틀 11">
-            <a:extLst>
-              <a:ext uri="{FF2B5EF4-FFF2-40B4-BE49-F238E27FC236}">
-                <a16:creationId xmlns:a16="http://schemas.microsoft.com/office/drawing/2014/main" id="{C9FBFBF6-B048-CC20-FD91-C10F1587DC5A}"/>
-              </a:ext>
-            </a:extLst>
-          </p:cNvPr>
-          <p:cNvSpPr>
-            <a:spLocks noGrp="1"/>
-          </p:cNvSpPr>
-          <p:nvPr>
-            <p:ph type="sldNum" sz="quarter" idx="4"/>
-          </p:nvPr>
-        </p:nvSpPr>
-        <p:spPr/>
-        <p:txBody>
-          <a:bodyPr/>
-          <a:lstStyle/>
-          <a:p>
-            <a:fld id="{9860EDB8-5305-433F-BE41-D7A86D811DB3}" type="slidenum">
-              <a:rPr lang="en-US" altLang="ko-KR" noProof="0" smtClean="0"/>
-              <a:pPr/>
-              <a:t>27</a:t>
-            </a:fld>
-            <a:endParaRPr lang="ko-KR" altLang="en-US" noProof="0"/>
-          </a:p>
-        </p:txBody>
-      </p:sp>
-      <p:pic>
-        <p:nvPicPr>
-          <p:cNvPr id="4" name="그림 3">
-            <a:extLst>
-              <a:ext uri="{FF2B5EF4-FFF2-40B4-BE49-F238E27FC236}">
-                <a16:creationId xmlns:a16="http://schemas.microsoft.com/office/drawing/2014/main" id="{3BF5CDC1-955C-D48A-BA6E-8EBE3BFBEC23}"/>
-              </a:ext>
-            </a:extLst>
-          </p:cNvPr>
-          <p:cNvPicPr>
-            <a:picLocks noChangeAspect="1"/>
-          </p:cNvPicPr>
-          <p:nvPr/>
-        </p:nvPicPr>
-        <p:blipFill>
-          <a:blip r:embed="rId3"/>
-          <a:stretch>
-            <a:fillRect/>
-          </a:stretch>
-        </p:blipFill>
-        <p:spPr>
-          <a:xfrm>
-            <a:off x="2136136" y="1866689"/>
-            <a:ext cx="7919728" cy="3514935"/>
-          </a:xfrm>
-          <a:prstGeom prst="rect">
-            <a:avLst/>
-          </a:prstGeom>
-        </p:spPr>
-      </p:pic>
-    </p:spTree>
-    <p:extLst>
-      <p:ext uri="{BB962C8B-B14F-4D97-AF65-F5344CB8AC3E}">
-        <p14:creationId xmlns:p14="http://schemas.microsoft.com/office/powerpoint/2010/main" val="2295526759"/>
-      </p:ext>
-    </p:extLst>
-  </p:cSld>
-  <p:clrMapOvr>
-    <a:masterClrMapping/>
-  </p:clrMapOvr>
-  <mc:AlternateContent xmlns:mc="http://schemas.openxmlformats.org/markup-compatibility/2006" xmlns:p14="http://schemas.microsoft.com/office/powerpoint/2010/main">
-    <mc:Choice Requires="p14">
-      <p:transition p14:dur="10"/>
-    </mc:Choice>
-    <mc:Fallback xmlns="">
-      <p:transition/>
-    </mc:Fallback>
-  </mc:AlternateContent>
-</p:sld>
-</file>
-
-<file path=ppt/slides/slide28.xml><?xml version="1.0" encoding="utf-8"?>
-<p:sld xmlns:a="http://schemas.openxmlformats.org/drawingml/2006/main" xmlns:r="http://schemas.openxmlformats.org/officeDocument/2006/relationships" xmlns:p="http://schemas.openxmlformats.org/presentationml/2006/main">
-  <p:cSld>
-    <p:spTree>
-      <p:nvGrpSpPr>
-        <p:cNvPr id="1" name="">
-          <a:extLst>
-            <a:ext uri="{FF2B5EF4-FFF2-40B4-BE49-F238E27FC236}">
-              <a16:creationId xmlns:a16="http://schemas.microsoft.com/office/drawing/2014/main" id="{8D892FF7-0182-F249-E33C-D2C252C787AC}"/>
-            </a:ext>
-          </a:extLst>
-        </p:cNvPr>
-        <p:cNvGrpSpPr/>
-        <p:nvPr/>
-      </p:nvGrpSpPr>
-      <p:grpSpPr>
-        <a:xfrm>
-          <a:off x="0" y="0"/>
-          <a:ext cx="0" cy="0"/>
-          <a:chOff x="0" y="0"/>
-          <a:chExt cx="0" cy="0"/>
-        </a:xfrm>
-      </p:grpSpPr>
-      <p:sp>
-        <p:nvSpPr>
-          <p:cNvPr id="8" name="제목 7">
-            <a:extLst>
-              <a:ext uri="{FF2B5EF4-FFF2-40B4-BE49-F238E27FC236}">
-                <a16:creationId xmlns:a16="http://schemas.microsoft.com/office/drawing/2014/main" id="{FF1F397B-EC60-363F-6EFE-41E0B0721525}"/>
-              </a:ext>
-            </a:extLst>
-          </p:cNvPr>
-          <p:cNvSpPr>
-            <a:spLocks noGrp="1"/>
-          </p:cNvSpPr>
-          <p:nvPr>
-            <p:ph type="title"/>
-          </p:nvPr>
-        </p:nvSpPr>
-        <p:spPr>
-          <a:xfrm>
-            <a:off x="521207" y="448056"/>
-            <a:ext cx="8135613" cy="640080"/>
-          </a:xfrm>
-        </p:spPr>
-        <p:txBody>
-          <a:bodyPr rtlCol="0">
-            <a:noAutofit/>
-          </a:bodyPr>
-          <a:lstStyle/>
-          <a:p>
-            <a:pPr rtl="0"/>
-            <a:r>
-              <a:rPr lang="en-US" altLang="ko-KR" dirty="0">
-                <a:cs typeface="Segoe UI Light" panose="020B0502040204020203" pitchFamily="34" charset="0"/>
-              </a:rPr>
-              <a:t>Norm of a vector using dot product</a:t>
-            </a:r>
-            <a:endParaRPr lang="ko-KR" altLang="en-US" dirty="0">
-              <a:cs typeface="Segoe UI Light" panose="020B0502040204020203" pitchFamily="34" charset="0"/>
-            </a:endParaRPr>
-          </a:p>
-        </p:txBody>
-      </p:sp>
-      <p:sp>
-        <p:nvSpPr>
-          <p:cNvPr id="12" name="슬라이드 번호 개체 틀 11">
-            <a:extLst>
-              <a:ext uri="{FF2B5EF4-FFF2-40B4-BE49-F238E27FC236}">
-                <a16:creationId xmlns:a16="http://schemas.microsoft.com/office/drawing/2014/main" id="{53FC1FC6-378E-15A1-36CF-57E2BC3EBF6D}"/>
-              </a:ext>
-            </a:extLst>
-          </p:cNvPr>
-          <p:cNvSpPr>
-            <a:spLocks noGrp="1"/>
-          </p:cNvSpPr>
-          <p:nvPr>
-            <p:ph type="sldNum" sz="quarter" idx="4"/>
-          </p:nvPr>
-        </p:nvSpPr>
-        <p:spPr/>
-        <p:txBody>
-          <a:bodyPr/>
-          <a:lstStyle/>
-          <a:p>
-            <a:fld id="{9860EDB8-5305-433F-BE41-D7A86D811DB3}" type="slidenum">
-              <a:rPr lang="en-US" altLang="ko-KR" noProof="0" smtClean="0"/>
-              <a:pPr/>
-              <a:t>28</a:t>
-            </a:fld>
-            <a:endParaRPr lang="ko-KR" altLang="en-US" noProof="0"/>
-          </a:p>
-        </p:txBody>
-      </p:sp>
-      <p:pic>
-        <p:nvPicPr>
-          <p:cNvPr id="4" name="그림 3">
-            <a:extLst>
-              <a:ext uri="{FF2B5EF4-FFF2-40B4-BE49-F238E27FC236}">
-                <a16:creationId xmlns:a16="http://schemas.microsoft.com/office/drawing/2014/main" id="{228D29D3-F406-4CB7-E33E-63D0FBC7BBEC}"/>
-              </a:ext>
-            </a:extLst>
-          </p:cNvPr>
-          <p:cNvPicPr>
-            <a:picLocks noChangeAspect="1"/>
-          </p:cNvPicPr>
-          <p:nvPr/>
-        </p:nvPicPr>
-        <p:blipFill>
-          <a:blip r:embed="rId3"/>
-          <a:stretch>
-            <a:fillRect/>
-          </a:stretch>
-        </p:blipFill>
-        <p:spPr>
-          <a:xfrm>
-            <a:off x="2136136" y="1866689"/>
-            <a:ext cx="7919728" cy="3514935"/>
-          </a:xfrm>
-          <a:prstGeom prst="rect">
-            <a:avLst/>
-          </a:prstGeom>
-        </p:spPr>
-      </p:pic>
-    </p:spTree>
-    <p:extLst>
-      <p:ext uri="{BB962C8B-B14F-4D97-AF65-F5344CB8AC3E}">
-        <p14:creationId xmlns:p14="http://schemas.microsoft.com/office/powerpoint/2010/main" val="2009717873"/>
-      </p:ext>
-    </p:extLst>
-  </p:cSld>
-  <p:clrMapOvr>
-    <a:masterClrMapping/>
-  </p:clrMapOvr>
-  <mc:AlternateContent xmlns:mc="http://schemas.openxmlformats.org/markup-compatibility/2006" xmlns:p14="http://schemas.microsoft.com/office/powerpoint/2010/main">
-    <mc:Choice Requires="p14">
-      <p:transition p14:dur="10"/>
-    </mc:Choice>
-    <mc:Fallback xmlns="">
-      <p:transition/>
-    </mc:Fallback>
-  </mc:AlternateContent>
-</p:sld>
-</file>
-
-<file path=ppt/slides/slide29.xml><?xml version="1.0" encoding="utf-8"?>
-<p:sld xmlns:a="http://schemas.openxmlformats.org/drawingml/2006/main" xmlns:r="http://schemas.openxmlformats.org/officeDocument/2006/relationships" xmlns:p="http://schemas.openxmlformats.org/presentationml/2006/main">
-  <p:cSld>
-    <p:spTree>
-      <p:nvGrpSpPr>
-        <p:cNvPr id="1" name="">
-          <a:extLst>
-            <a:ext uri="{FF2B5EF4-FFF2-40B4-BE49-F238E27FC236}">
               <a16:creationId xmlns:a16="http://schemas.microsoft.com/office/drawing/2014/main" id="{853F4690-6086-A2ED-6913-DE7CDB33C2C6}"/>
             </a:ext>
           </a:extLst>
@@ -15513,7 +14973,7 @@
             <a:fld id="{9860EDB8-5305-433F-BE41-D7A86D811DB3}" type="slidenum">
               <a:rPr lang="en-US" altLang="ko-KR" noProof="0" smtClean="0"/>
               <a:pPr/>
-              <a:t>29</a:t>
+              <a:t>26</a:t>
             </a:fld>
             <a:endParaRPr lang="ko-KR" altLang="en-US" noProof="0"/>
           </a:p>
@@ -15825,152 +15285,7 @@
 </p:sld>
 </file>
 
-<file path=ppt/slides/slide3.xml><?xml version="1.0" encoding="utf-8"?>
-<p:sld xmlns:a="http://schemas.openxmlformats.org/drawingml/2006/main" xmlns:r="http://schemas.openxmlformats.org/officeDocument/2006/relationships" xmlns:p="http://schemas.openxmlformats.org/presentationml/2006/main">
-  <p:cSld>
-    <p:spTree>
-      <p:nvGrpSpPr>
-        <p:cNvPr id="1" name="">
-          <a:extLst>
-            <a:ext uri="{FF2B5EF4-FFF2-40B4-BE49-F238E27FC236}">
-              <a16:creationId xmlns:a16="http://schemas.microsoft.com/office/drawing/2014/main" id="{999FCFFE-6975-DA76-4E99-6540340A5B6F}"/>
-            </a:ext>
-          </a:extLst>
-        </p:cNvPr>
-        <p:cNvGrpSpPr/>
-        <p:nvPr/>
-      </p:nvGrpSpPr>
-      <p:grpSpPr>
-        <a:xfrm>
-          <a:off x="0" y="0"/>
-          <a:ext cx="0" cy="0"/>
-          <a:chOff x="0" y="0"/>
-          <a:chExt cx="0" cy="0"/>
-        </a:xfrm>
-      </p:grpSpPr>
-      <p:sp>
-        <p:nvSpPr>
-          <p:cNvPr id="8" name="제목 7">
-            <a:extLst>
-              <a:ext uri="{FF2B5EF4-FFF2-40B4-BE49-F238E27FC236}">
-                <a16:creationId xmlns:a16="http://schemas.microsoft.com/office/drawing/2014/main" id="{97625F92-9C55-6C9A-AC80-15BAFDDC0820}"/>
-              </a:ext>
-            </a:extLst>
-          </p:cNvPr>
-          <p:cNvSpPr>
-            <a:spLocks noGrp="1"/>
-          </p:cNvSpPr>
-          <p:nvPr>
-            <p:ph type="title"/>
-          </p:nvPr>
-        </p:nvSpPr>
-        <p:spPr>
-          <a:xfrm>
-            <a:off x="521207" y="448056"/>
-            <a:ext cx="8135613" cy="640080"/>
-          </a:xfrm>
-        </p:spPr>
-        <p:txBody>
-          <a:bodyPr rtlCol="0">
-            <a:noAutofit/>
-          </a:bodyPr>
-          <a:lstStyle/>
-          <a:p>
-            <a:pPr rtl="0"/>
-            <a:r>
-              <a:rPr lang="en-US" altLang="ko-KR" dirty="0">
-                <a:cs typeface="Segoe UI Light" panose="020B0502040204020203" pitchFamily="34" charset="0"/>
-              </a:rPr>
-              <a:t>Text-to-image and image-to-text generation</a:t>
-            </a:r>
-            <a:endParaRPr lang="ko-KR" altLang="en-US" dirty="0">
-              <a:cs typeface="Segoe UI Light" panose="020B0502040204020203" pitchFamily="34" charset="0"/>
-            </a:endParaRPr>
-          </a:p>
-        </p:txBody>
-      </p:sp>
-      <p:sp>
-        <p:nvSpPr>
-          <p:cNvPr id="12" name="슬라이드 번호 개체 틀 11">
-            <a:extLst>
-              <a:ext uri="{FF2B5EF4-FFF2-40B4-BE49-F238E27FC236}">
-                <a16:creationId xmlns:a16="http://schemas.microsoft.com/office/drawing/2014/main" id="{A3A65B66-9782-F220-82C1-E983A63C1F25}"/>
-              </a:ext>
-            </a:extLst>
-          </p:cNvPr>
-          <p:cNvSpPr>
-            <a:spLocks noGrp="1"/>
-          </p:cNvSpPr>
-          <p:nvPr>
-            <p:ph type="sldNum" sz="quarter" idx="4"/>
-          </p:nvPr>
-        </p:nvSpPr>
-        <p:spPr/>
-        <p:txBody>
-          <a:bodyPr/>
-          <a:lstStyle/>
-          <a:p>
-            <a:fld id="{9860EDB8-5305-433F-BE41-D7A86D811DB3}" type="slidenum">
-              <a:rPr lang="en-US" altLang="ko-KR" noProof="0" smtClean="0"/>
-              <a:pPr/>
-              <a:t>3</a:t>
-            </a:fld>
-            <a:endParaRPr lang="ko-KR" altLang="en-US" noProof="0"/>
-          </a:p>
-        </p:txBody>
-      </p:sp>
-      <p:pic>
-        <p:nvPicPr>
-          <p:cNvPr id="3" name="그림 2">
-            <a:extLst>
-              <a:ext uri="{FF2B5EF4-FFF2-40B4-BE49-F238E27FC236}">
-                <a16:creationId xmlns:a16="http://schemas.microsoft.com/office/drawing/2014/main" id="{53F4E135-3091-70F4-1409-97816D386A1B}"/>
-              </a:ext>
-            </a:extLst>
-          </p:cNvPr>
-          <p:cNvPicPr>
-            <a:picLocks noChangeAspect="1"/>
-          </p:cNvPicPr>
-          <p:nvPr/>
-        </p:nvPicPr>
-        <p:blipFill>
-          <a:blip r:embed="rId3"/>
-          <a:stretch>
-            <a:fillRect/>
-          </a:stretch>
-        </p:blipFill>
-        <p:spPr>
-          <a:xfrm>
-            <a:off x="663753" y="1540297"/>
-            <a:ext cx="10864493" cy="4663655"/>
-          </a:xfrm>
-          <a:prstGeom prst="rect">
-            <a:avLst/>
-          </a:prstGeom>
-        </p:spPr>
-      </p:pic>
-    </p:spTree>
-    <p:extLst>
-      <p:ext uri="{BB962C8B-B14F-4D97-AF65-F5344CB8AC3E}">
-        <p14:creationId xmlns:p14="http://schemas.microsoft.com/office/powerpoint/2010/main" val="2881214249"/>
-      </p:ext>
-    </p:extLst>
-  </p:cSld>
-  <p:clrMapOvr>
-    <a:masterClrMapping/>
-  </p:clrMapOvr>
-  <mc:AlternateContent xmlns:mc="http://schemas.openxmlformats.org/markup-compatibility/2006" xmlns:p14="http://schemas.microsoft.com/office/powerpoint/2010/main">
-    <mc:Choice Requires="p14">
-      <p:transition p14:dur="10"/>
-    </mc:Choice>
-    <mc:Fallback xmlns="">
-      <p:transition/>
-    </mc:Fallback>
-  </mc:AlternateContent>
-</p:sld>
-</file>
-
-<file path=ppt/slides/slide30.xml><?xml version="1.0" encoding="utf-8"?>
+<file path=ppt/slides/slide27.xml><?xml version="1.0" encoding="utf-8"?>
 <p:sld xmlns:a="http://schemas.openxmlformats.org/drawingml/2006/main" xmlns:r="http://schemas.openxmlformats.org/officeDocument/2006/relationships" xmlns:p="http://schemas.openxmlformats.org/presentationml/2006/main">
   <p:cSld>
     <p:spTree>
@@ -16022,7 +15337,7 @@
             <a:fld id="{D57F1E4F-1CFF-5643-939E-217C01CDF565}" type="slidenum">
               <a:rPr lang="en-US" sz="2000" smtClean="0"/>
               <a:pPr/>
-              <a:t>30</a:t>
+              <a:t>27</a:t>
             </a:fld>
             <a:endParaRPr lang="en-US" sz="2000" dirty="0"/>
           </a:p>
@@ -16427,7 +15742,7 @@
 </p:sld>
 </file>
 
-<file path=ppt/slides/slide31.xml><?xml version="1.0" encoding="utf-8"?>
+<file path=ppt/slides/slide28.xml><?xml version="1.0" encoding="utf-8"?>
 <p:sld xmlns:a="http://schemas.openxmlformats.org/drawingml/2006/main" xmlns:r="http://schemas.openxmlformats.org/officeDocument/2006/relationships" xmlns:p="http://schemas.openxmlformats.org/presentationml/2006/main">
   <p:cSld>
     <p:spTree>
@@ -16569,7 +15884,7 @@
             <a:fld id="{9860EDB8-5305-433F-BE41-D7A86D811DB3}" type="slidenum">
               <a:rPr lang="en-US" altLang="ko-KR" noProof="0" smtClean="0"/>
               <a:pPr/>
-              <a:t>31</a:t>
+              <a:t>28</a:t>
             </a:fld>
             <a:endParaRPr lang="ko-KR" altLang="en-US" noProof="0"/>
           </a:p>
@@ -16778,7 +16093,443 @@
 </p:sld>
 </file>
 
-<file path=ppt/slides/slide32.xml><?xml version="1.0" encoding="utf-8"?>
+<file path=ppt/slides/slide29.xml><?xml version="1.0" encoding="utf-8"?>
+<p:sld xmlns:a="http://schemas.openxmlformats.org/drawingml/2006/main" xmlns:r="http://schemas.openxmlformats.org/officeDocument/2006/relationships" xmlns:p="http://schemas.openxmlformats.org/presentationml/2006/main">
+  <p:cSld>
+    <p:spTree>
+      <p:nvGrpSpPr>
+        <p:cNvPr id="1" name="">
+          <a:extLst>
+            <a:ext uri="{FF2B5EF4-FFF2-40B4-BE49-F238E27FC236}">
+              <a16:creationId xmlns:a16="http://schemas.microsoft.com/office/drawing/2014/main" id="{481E384D-1BCA-4A59-E959-AE78A2D9BD90}"/>
+            </a:ext>
+          </a:extLst>
+        </p:cNvPr>
+        <p:cNvGrpSpPr/>
+        <p:nvPr/>
+      </p:nvGrpSpPr>
+      <p:grpSpPr>
+        <a:xfrm>
+          <a:off x="0" y="0"/>
+          <a:ext cx="0" cy="0"/>
+          <a:chOff x="0" y="0"/>
+          <a:chExt cx="0" cy="0"/>
+        </a:xfrm>
+      </p:grpSpPr>
+      <p:sp>
+        <p:nvSpPr>
+          <p:cNvPr id="8" name="제목 7">
+            <a:extLst>
+              <a:ext uri="{FF2B5EF4-FFF2-40B4-BE49-F238E27FC236}">
+                <a16:creationId xmlns:a16="http://schemas.microsoft.com/office/drawing/2014/main" id="{BB59542F-3FB0-23B0-727C-182A5B558EC3}"/>
+              </a:ext>
+            </a:extLst>
+          </p:cNvPr>
+          <p:cNvSpPr>
+            <a:spLocks noGrp="1"/>
+          </p:cNvSpPr>
+          <p:nvPr>
+            <p:ph type="title"/>
+          </p:nvPr>
+        </p:nvSpPr>
+        <p:spPr>
+          <a:xfrm>
+            <a:off x="521207" y="448056"/>
+            <a:ext cx="8135613" cy="640080"/>
+          </a:xfrm>
+        </p:spPr>
+        <p:txBody>
+          <a:bodyPr rtlCol="0">
+            <a:noAutofit/>
+          </a:bodyPr>
+          <a:lstStyle/>
+          <a:p>
+            <a:r>
+              <a:rPr lang="en-US" altLang="ko-KR" dirty="0"/>
+              <a:t>The dot product</a:t>
+            </a:r>
+            <a:endParaRPr lang="ko-KR" altLang="en-US" dirty="0">
+              <a:cs typeface="Segoe UI Light" panose="020B0502040204020203" pitchFamily="34" charset="0"/>
+            </a:endParaRPr>
+          </a:p>
+        </p:txBody>
+      </p:sp>
+      <p:sp>
+        <p:nvSpPr>
+          <p:cNvPr id="12" name="슬라이드 번호 개체 틀 11">
+            <a:extLst>
+              <a:ext uri="{FF2B5EF4-FFF2-40B4-BE49-F238E27FC236}">
+                <a16:creationId xmlns:a16="http://schemas.microsoft.com/office/drawing/2014/main" id="{08E79E82-A920-AD9B-45C8-AD9129F0F352}"/>
+              </a:ext>
+            </a:extLst>
+          </p:cNvPr>
+          <p:cNvSpPr>
+            <a:spLocks noGrp="1"/>
+          </p:cNvSpPr>
+          <p:nvPr>
+            <p:ph type="sldNum" sz="quarter" idx="4"/>
+          </p:nvPr>
+        </p:nvSpPr>
+        <p:spPr/>
+        <p:txBody>
+          <a:bodyPr/>
+          <a:lstStyle/>
+          <a:p>
+            <a:fld id="{9860EDB8-5305-433F-BE41-D7A86D811DB3}" type="slidenum">
+              <a:rPr lang="en-US" altLang="ko-KR" noProof="0" smtClean="0"/>
+              <a:pPr/>
+              <a:t>29</a:t>
+            </a:fld>
+            <a:endParaRPr lang="ko-KR" altLang="en-US" noProof="0"/>
+          </a:p>
+        </p:txBody>
+      </p:sp>
+      <p:pic>
+        <p:nvPicPr>
+          <p:cNvPr id="4" name="그림 3">
+            <a:extLst>
+              <a:ext uri="{FF2B5EF4-FFF2-40B4-BE49-F238E27FC236}">
+                <a16:creationId xmlns:a16="http://schemas.microsoft.com/office/drawing/2014/main" id="{7CA95B7F-A55C-7CA4-9772-E369FB2CB63C}"/>
+              </a:ext>
+            </a:extLst>
+          </p:cNvPr>
+          <p:cNvPicPr>
+            <a:picLocks noChangeAspect="1"/>
+          </p:cNvPicPr>
+          <p:nvPr/>
+        </p:nvPicPr>
+        <p:blipFill>
+          <a:blip r:embed="rId3"/>
+          <a:stretch>
+            <a:fillRect/>
+          </a:stretch>
+        </p:blipFill>
+        <p:spPr>
+          <a:xfrm>
+            <a:off x="693133" y="2507568"/>
+            <a:ext cx="5639587" cy="3419952"/>
+          </a:xfrm>
+          <a:prstGeom prst="rect">
+            <a:avLst/>
+          </a:prstGeom>
+        </p:spPr>
+      </p:pic>
+      <p:sp>
+        <p:nvSpPr>
+          <p:cNvPr id="5" name="TextBox 4">
+            <a:extLst>
+              <a:ext uri="{FF2B5EF4-FFF2-40B4-BE49-F238E27FC236}">
+                <a16:creationId xmlns:a16="http://schemas.microsoft.com/office/drawing/2014/main" id="{EC0747BF-D994-93A2-8BC7-760B244DAAB8}"/>
+              </a:ext>
+            </a:extLst>
+          </p:cNvPr>
+          <p:cNvSpPr txBox="1"/>
+          <p:nvPr/>
+        </p:nvSpPr>
+        <p:spPr>
+          <a:xfrm>
+            <a:off x="521206" y="1335903"/>
+            <a:ext cx="11042143" cy="494494"/>
+          </a:xfrm>
+          <a:prstGeom prst="rect">
+            <a:avLst/>
+          </a:prstGeom>
+          <a:noFill/>
+        </p:spPr>
+        <p:txBody>
+          <a:bodyPr wrap="square">
+            <a:spAutoFit/>
+          </a:bodyPr>
+          <a:lstStyle/>
+          <a:p>
+            <a:pPr>
+              <a:lnSpc>
+                <a:spcPct val="150000"/>
+              </a:lnSpc>
+            </a:pPr>
+            <a:r>
+              <a:rPr lang="ko-KR" altLang="en-US" sz="2000" dirty="0">
+                <a:latin typeface="맑은 고딕 Semilight" panose="020B0502040204020203" pitchFamily="50" charset="-127"/>
+                <a:ea typeface="맑은 고딕 Semilight" panose="020B0502040204020203" pitchFamily="50" charset="-127"/>
+                <a:cs typeface="맑은 고딕 Semilight" panose="020B0502040204020203" pitchFamily="50" charset="-127"/>
+              </a:rPr>
+              <a:t>내적은 </a:t>
+            </a:r>
+            <a:r>
+              <a:rPr lang="en-US" altLang="ko-KR" sz="2000" dirty="0">
+                <a:latin typeface="맑은 고딕 Semilight" panose="020B0502040204020203" pitchFamily="50" charset="-127"/>
+                <a:ea typeface="맑은 고딕 Semilight" panose="020B0502040204020203" pitchFamily="50" charset="-127"/>
+                <a:cs typeface="맑은 고딕 Semilight" panose="020B0502040204020203" pitchFamily="50" charset="-127"/>
+              </a:rPr>
+              <a:t>“</a:t>
+            </a:r>
+            <a:r>
+              <a:rPr lang="ko-KR" altLang="en-US" sz="2000" dirty="0">
+                <a:latin typeface="맑은 고딕 Semilight" panose="020B0502040204020203" pitchFamily="50" charset="-127"/>
+                <a:ea typeface="맑은 고딕 Semilight" panose="020B0502040204020203" pitchFamily="50" charset="-127"/>
+                <a:cs typeface="맑은 고딕 Semilight" panose="020B0502040204020203" pitchFamily="50" charset="-127"/>
+              </a:rPr>
+              <a:t>한 벡터가 다른 벡터의 방향으로 얼마나 힘을 보태고 있는가"를 수치화한 것</a:t>
+            </a:r>
+          </a:p>
+        </p:txBody>
+      </p:sp>
+      <p:sp>
+        <p:nvSpPr>
+          <p:cNvPr id="15" name="TextBox 14">
+            <a:extLst>
+              <a:ext uri="{FF2B5EF4-FFF2-40B4-BE49-F238E27FC236}">
+                <a16:creationId xmlns:a16="http://schemas.microsoft.com/office/drawing/2014/main" id="{22F22B95-EB19-38C7-C50E-7CF9D1486C96}"/>
+              </a:ext>
+            </a:extLst>
+          </p:cNvPr>
+          <p:cNvSpPr txBox="1"/>
+          <p:nvPr/>
+        </p:nvSpPr>
+        <p:spPr>
+          <a:xfrm>
+            <a:off x="7810500" y="2811423"/>
+            <a:ext cx="3543300" cy="400110"/>
+          </a:xfrm>
+          <a:prstGeom prst="rect">
+            <a:avLst/>
+          </a:prstGeom>
+          <a:noFill/>
+        </p:spPr>
+        <p:txBody>
+          <a:bodyPr wrap="square" rtlCol="0">
+            <a:spAutoFit/>
+          </a:bodyPr>
+          <a:lstStyle/>
+          <a:p>
+            <a:r>
+              <a:rPr lang="en-US" altLang="ko-KR" sz="2000" dirty="0">
+                <a:latin typeface="맑은 고딕 Semilight" panose="020B0502040204020203" pitchFamily="50" charset="-127"/>
+                <a:ea typeface="맑은 고딕 Semilight" panose="020B0502040204020203" pitchFamily="50" charset="-127"/>
+                <a:cs typeface="맑은 고딕 Semilight" panose="020B0502040204020203" pitchFamily="50" charset="-127"/>
+              </a:rPr>
+              <a:t>L2 Norm</a:t>
+            </a:r>
+            <a:r>
+              <a:rPr lang="ko-KR" altLang="en-US" sz="2000" dirty="0">
+                <a:latin typeface="맑은 고딕 Semilight" panose="020B0502040204020203" pitchFamily="50" charset="-127"/>
+                <a:ea typeface="맑은 고딕 Semilight" panose="020B0502040204020203" pitchFamily="50" charset="-127"/>
+                <a:cs typeface="맑은 고딕 Semilight" panose="020B0502040204020203" pitchFamily="50" charset="-127"/>
+              </a:rPr>
+              <a:t>의 제곱 값</a:t>
+            </a:r>
+          </a:p>
+        </p:txBody>
+      </p:sp>
+      <p:cxnSp>
+        <p:nvCxnSpPr>
+          <p:cNvPr id="17" name="직선 화살표 연결선 16">
+            <a:extLst>
+              <a:ext uri="{FF2B5EF4-FFF2-40B4-BE49-F238E27FC236}">
+                <a16:creationId xmlns:a16="http://schemas.microsoft.com/office/drawing/2014/main" id="{3D1DA78A-7423-A102-F2FB-399F191AF1B7}"/>
+              </a:ext>
+            </a:extLst>
+          </p:cNvPr>
+          <p:cNvCxnSpPr/>
+          <p:nvPr/>
+        </p:nvCxnSpPr>
+        <p:spPr>
+          <a:xfrm>
+            <a:off x="6496050" y="3011478"/>
+            <a:ext cx="971550" cy="0"/>
+          </a:xfrm>
+          <a:prstGeom prst="straightConnector1">
+            <a:avLst/>
+          </a:prstGeom>
+          <a:ln w="28575">
+            <a:solidFill>
+              <a:schemeClr val="tx1"/>
+            </a:solidFill>
+            <a:tailEnd type="triangle"/>
+          </a:ln>
+        </p:spPr>
+        <p:style>
+          <a:lnRef idx="1">
+            <a:schemeClr val="accent1"/>
+          </a:lnRef>
+          <a:fillRef idx="0">
+            <a:schemeClr val="accent1"/>
+          </a:fillRef>
+          <a:effectRef idx="0">
+            <a:schemeClr val="accent1"/>
+          </a:effectRef>
+          <a:fontRef idx="minor">
+            <a:schemeClr val="tx1"/>
+          </a:fontRef>
+        </p:style>
+      </p:cxnSp>
+    </p:spTree>
+    <p:extLst>
+      <p:ext uri="{BB962C8B-B14F-4D97-AF65-F5344CB8AC3E}">
+        <p14:creationId xmlns:p14="http://schemas.microsoft.com/office/powerpoint/2010/main" val="1600973623"/>
+      </p:ext>
+    </p:extLst>
+  </p:cSld>
+  <p:clrMapOvr>
+    <a:masterClrMapping/>
+  </p:clrMapOvr>
+  <mc:AlternateContent xmlns:mc="http://schemas.openxmlformats.org/markup-compatibility/2006" xmlns:p14="http://schemas.microsoft.com/office/powerpoint/2010/main">
+    <mc:Choice Requires="p14">
+      <p:transition p14:dur="10"/>
+    </mc:Choice>
+    <mc:Fallback xmlns="">
+      <p:transition/>
+    </mc:Fallback>
+  </mc:AlternateContent>
+</p:sld>
+</file>
+
+<file path=ppt/slides/slide3.xml><?xml version="1.0" encoding="utf-8"?>
+<p:sld xmlns:a="http://schemas.openxmlformats.org/drawingml/2006/main" xmlns:r="http://schemas.openxmlformats.org/officeDocument/2006/relationships" xmlns:p="http://schemas.openxmlformats.org/presentationml/2006/main">
+  <p:cSld>
+    <p:spTree>
+      <p:nvGrpSpPr>
+        <p:cNvPr id="1" name="">
+          <a:extLst>
+            <a:ext uri="{FF2B5EF4-FFF2-40B4-BE49-F238E27FC236}">
+              <a16:creationId xmlns:a16="http://schemas.microsoft.com/office/drawing/2014/main" id="{999FCFFE-6975-DA76-4E99-6540340A5B6F}"/>
+            </a:ext>
+          </a:extLst>
+        </p:cNvPr>
+        <p:cNvGrpSpPr/>
+        <p:nvPr/>
+      </p:nvGrpSpPr>
+      <p:grpSpPr>
+        <a:xfrm>
+          <a:off x="0" y="0"/>
+          <a:ext cx="0" cy="0"/>
+          <a:chOff x="0" y="0"/>
+          <a:chExt cx="0" cy="0"/>
+        </a:xfrm>
+      </p:grpSpPr>
+      <p:sp>
+        <p:nvSpPr>
+          <p:cNvPr id="8" name="제목 7">
+            <a:extLst>
+              <a:ext uri="{FF2B5EF4-FFF2-40B4-BE49-F238E27FC236}">
+                <a16:creationId xmlns:a16="http://schemas.microsoft.com/office/drawing/2014/main" id="{97625F92-9C55-6C9A-AC80-15BAFDDC0820}"/>
+              </a:ext>
+            </a:extLst>
+          </p:cNvPr>
+          <p:cNvSpPr>
+            <a:spLocks noGrp="1"/>
+          </p:cNvSpPr>
+          <p:nvPr>
+            <p:ph type="title"/>
+          </p:nvPr>
+        </p:nvSpPr>
+        <p:spPr>
+          <a:xfrm>
+            <a:off x="521207" y="448056"/>
+            <a:ext cx="8135613" cy="640080"/>
+          </a:xfrm>
+        </p:spPr>
+        <p:txBody>
+          <a:bodyPr rtlCol="0">
+            <a:noAutofit/>
+          </a:bodyPr>
+          <a:lstStyle/>
+          <a:p>
+            <a:pPr rtl="0"/>
+            <a:r>
+              <a:rPr lang="en-US" altLang="ko-KR" dirty="0">
+                <a:cs typeface="Segoe UI Light" panose="020B0502040204020203" pitchFamily="34" charset="0"/>
+              </a:rPr>
+              <a:t>Text-to-image and image-to-text generation</a:t>
+            </a:r>
+            <a:endParaRPr lang="ko-KR" altLang="en-US" dirty="0">
+              <a:cs typeface="Segoe UI Light" panose="020B0502040204020203" pitchFamily="34" charset="0"/>
+            </a:endParaRPr>
+          </a:p>
+        </p:txBody>
+      </p:sp>
+      <p:sp>
+        <p:nvSpPr>
+          <p:cNvPr id="12" name="슬라이드 번호 개체 틀 11">
+            <a:extLst>
+              <a:ext uri="{FF2B5EF4-FFF2-40B4-BE49-F238E27FC236}">
+                <a16:creationId xmlns:a16="http://schemas.microsoft.com/office/drawing/2014/main" id="{A3A65B66-9782-F220-82C1-E983A63C1F25}"/>
+              </a:ext>
+            </a:extLst>
+          </p:cNvPr>
+          <p:cNvSpPr>
+            <a:spLocks noGrp="1"/>
+          </p:cNvSpPr>
+          <p:nvPr>
+            <p:ph type="sldNum" sz="quarter" idx="4"/>
+          </p:nvPr>
+        </p:nvSpPr>
+        <p:spPr/>
+        <p:txBody>
+          <a:bodyPr/>
+          <a:lstStyle/>
+          <a:p>
+            <a:fld id="{9860EDB8-5305-433F-BE41-D7A86D811DB3}" type="slidenum">
+              <a:rPr lang="en-US" altLang="ko-KR" noProof="0" smtClean="0"/>
+              <a:pPr/>
+              <a:t>3</a:t>
+            </a:fld>
+            <a:endParaRPr lang="ko-KR" altLang="en-US" noProof="0"/>
+          </a:p>
+        </p:txBody>
+      </p:sp>
+      <p:pic>
+        <p:nvPicPr>
+          <p:cNvPr id="3" name="그림 2">
+            <a:extLst>
+              <a:ext uri="{FF2B5EF4-FFF2-40B4-BE49-F238E27FC236}">
+                <a16:creationId xmlns:a16="http://schemas.microsoft.com/office/drawing/2014/main" id="{53F4E135-3091-70F4-1409-97816D386A1B}"/>
+              </a:ext>
+            </a:extLst>
+          </p:cNvPr>
+          <p:cNvPicPr>
+            <a:picLocks noChangeAspect="1"/>
+          </p:cNvPicPr>
+          <p:nvPr/>
+        </p:nvPicPr>
+        <p:blipFill>
+          <a:blip r:embed="rId3"/>
+          <a:stretch>
+            <a:fillRect/>
+          </a:stretch>
+        </p:blipFill>
+        <p:spPr>
+          <a:xfrm>
+            <a:off x="663753" y="1540297"/>
+            <a:ext cx="10864493" cy="4663655"/>
+          </a:xfrm>
+          <a:prstGeom prst="rect">
+            <a:avLst/>
+          </a:prstGeom>
+        </p:spPr>
+      </p:pic>
+    </p:spTree>
+    <p:extLst>
+      <p:ext uri="{BB962C8B-B14F-4D97-AF65-F5344CB8AC3E}">
+        <p14:creationId xmlns:p14="http://schemas.microsoft.com/office/powerpoint/2010/main" val="2881214249"/>
+      </p:ext>
+    </p:extLst>
+  </p:cSld>
+  <p:clrMapOvr>
+    <a:masterClrMapping/>
+  </p:clrMapOvr>
+  <mc:AlternateContent xmlns:mc="http://schemas.openxmlformats.org/markup-compatibility/2006" xmlns:p14="http://schemas.microsoft.com/office/powerpoint/2010/main">
+    <mc:Choice Requires="p14">
+      <p:transition p14:dur="10"/>
+    </mc:Choice>
+    <mc:Fallback xmlns="">
+      <p:transition/>
+    </mc:Fallback>
+  </mc:AlternateContent>
+</p:sld>
+</file>
+
+<file path=ppt/slides/slide30.xml><?xml version="1.0" encoding="utf-8"?>
 <p:sld xmlns:a="http://schemas.openxmlformats.org/drawingml/2006/main" xmlns:r="http://schemas.openxmlformats.org/officeDocument/2006/relationships" xmlns:p="http://schemas.openxmlformats.org/presentationml/2006/main">
   <p:cSld>
     <p:spTree>
@@ -16863,7 +16614,7 @@
             <a:fld id="{9860EDB8-5305-433F-BE41-D7A86D811DB3}" type="slidenum">
               <a:rPr lang="en-US" altLang="ko-KR" noProof="0" smtClean="0"/>
               <a:pPr/>
-              <a:t>32</a:t>
+              <a:t>30</a:t>
             </a:fld>
             <a:endParaRPr lang="ko-KR" altLang="en-US" noProof="0"/>
           </a:p>
@@ -17025,149 +16776,7 @@
 </p:sld>
 </file>
 
-<file path=ppt/slides/slide33.xml><?xml version="1.0" encoding="utf-8"?>
-<p:sld xmlns:a="http://schemas.openxmlformats.org/drawingml/2006/main" xmlns:r="http://schemas.openxmlformats.org/officeDocument/2006/relationships" xmlns:p="http://schemas.openxmlformats.org/presentationml/2006/main">
-  <p:cSld>
-    <p:spTree>
-      <p:nvGrpSpPr>
-        <p:cNvPr id="1" name="">
-          <a:extLst>
-            <a:ext uri="{FF2B5EF4-FFF2-40B4-BE49-F238E27FC236}">
-              <a16:creationId xmlns:a16="http://schemas.microsoft.com/office/drawing/2014/main" id="{481E384D-1BCA-4A59-E959-AE78A2D9BD90}"/>
-            </a:ext>
-          </a:extLst>
-        </p:cNvPr>
-        <p:cNvGrpSpPr/>
-        <p:nvPr/>
-      </p:nvGrpSpPr>
-      <p:grpSpPr>
-        <a:xfrm>
-          <a:off x="0" y="0"/>
-          <a:ext cx="0" cy="0"/>
-          <a:chOff x="0" y="0"/>
-          <a:chExt cx="0" cy="0"/>
-        </a:xfrm>
-      </p:grpSpPr>
-      <p:sp>
-        <p:nvSpPr>
-          <p:cNvPr id="8" name="제목 7">
-            <a:extLst>
-              <a:ext uri="{FF2B5EF4-FFF2-40B4-BE49-F238E27FC236}">
-                <a16:creationId xmlns:a16="http://schemas.microsoft.com/office/drawing/2014/main" id="{BB59542F-3FB0-23B0-727C-182A5B558EC3}"/>
-              </a:ext>
-            </a:extLst>
-          </p:cNvPr>
-          <p:cNvSpPr>
-            <a:spLocks noGrp="1"/>
-          </p:cNvSpPr>
-          <p:nvPr>
-            <p:ph type="title"/>
-          </p:nvPr>
-        </p:nvSpPr>
-        <p:spPr>
-          <a:xfrm>
-            <a:off x="521207" y="448056"/>
-            <a:ext cx="8135613" cy="640080"/>
-          </a:xfrm>
-        </p:spPr>
-        <p:txBody>
-          <a:bodyPr rtlCol="0">
-            <a:noAutofit/>
-          </a:bodyPr>
-          <a:lstStyle/>
-          <a:p>
-            <a:r>
-              <a:rPr lang="en-US" altLang="ko-KR" dirty="0"/>
-              <a:t>The dot product</a:t>
-            </a:r>
-            <a:endParaRPr lang="ko-KR" altLang="en-US" dirty="0">
-              <a:cs typeface="Segoe UI Light" panose="020B0502040204020203" pitchFamily="34" charset="0"/>
-            </a:endParaRPr>
-          </a:p>
-        </p:txBody>
-      </p:sp>
-      <p:sp>
-        <p:nvSpPr>
-          <p:cNvPr id="12" name="슬라이드 번호 개체 틀 11">
-            <a:extLst>
-              <a:ext uri="{FF2B5EF4-FFF2-40B4-BE49-F238E27FC236}">
-                <a16:creationId xmlns:a16="http://schemas.microsoft.com/office/drawing/2014/main" id="{08E79E82-A920-AD9B-45C8-AD9129F0F352}"/>
-              </a:ext>
-            </a:extLst>
-          </p:cNvPr>
-          <p:cNvSpPr>
-            <a:spLocks noGrp="1"/>
-          </p:cNvSpPr>
-          <p:nvPr>
-            <p:ph type="sldNum" sz="quarter" idx="4"/>
-          </p:nvPr>
-        </p:nvSpPr>
-        <p:spPr/>
-        <p:txBody>
-          <a:bodyPr/>
-          <a:lstStyle/>
-          <a:p>
-            <a:fld id="{9860EDB8-5305-433F-BE41-D7A86D811DB3}" type="slidenum">
-              <a:rPr lang="en-US" altLang="ko-KR" noProof="0" smtClean="0"/>
-              <a:pPr/>
-              <a:t>33</a:t>
-            </a:fld>
-            <a:endParaRPr lang="ko-KR" altLang="en-US" noProof="0"/>
-          </a:p>
-        </p:txBody>
-      </p:sp>
-      <p:pic>
-        <p:nvPicPr>
-          <p:cNvPr id="4" name="그림 3">
-            <a:extLst>
-              <a:ext uri="{FF2B5EF4-FFF2-40B4-BE49-F238E27FC236}">
-                <a16:creationId xmlns:a16="http://schemas.microsoft.com/office/drawing/2014/main" id="{7CA95B7F-A55C-7CA4-9772-E369FB2CB63C}"/>
-              </a:ext>
-            </a:extLst>
-          </p:cNvPr>
-          <p:cNvPicPr>
-            <a:picLocks noChangeAspect="1"/>
-          </p:cNvPicPr>
-          <p:nvPr/>
-        </p:nvPicPr>
-        <p:blipFill>
-          <a:blip r:embed="rId3"/>
-          <a:stretch>
-            <a:fillRect/>
-          </a:stretch>
-        </p:blipFill>
-        <p:spPr>
-          <a:xfrm>
-            <a:off x="3017233" y="1936068"/>
-            <a:ext cx="5639587" cy="3419952"/>
-          </a:xfrm>
-          <a:prstGeom prst="rect">
-            <a:avLst/>
-          </a:prstGeom>
-        </p:spPr>
-      </p:pic>
-    </p:spTree>
-    <p:extLst>
-      <p:ext uri="{BB962C8B-B14F-4D97-AF65-F5344CB8AC3E}">
-        <p14:creationId xmlns:p14="http://schemas.microsoft.com/office/powerpoint/2010/main" val="1600973623"/>
-      </p:ext>
-    </p:extLst>
-  </p:cSld>
-  <p:clrMapOvr>
-    <a:masterClrMapping/>
-  </p:clrMapOvr>
-  <mc:AlternateContent xmlns:mc="http://schemas.openxmlformats.org/markup-compatibility/2006" xmlns:p14="http://schemas.microsoft.com/office/powerpoint/2010/main">
-    <mc:Choice Requires="p14">
-      <p:transition p14:dur="10"/>
-    </mc:Choice>
-    <mc:Fallback xmlns="">
-      <p:transition/>
-    </mc:Fallback>
-  </mc:AlternateContent>
-</p:sld>
-</file>
-
-<file path=ppt/slides/slide34.xml><?xml version="1.0" encoding="utf-8"?>
+<file path=ppt/slides/slide31.xml><?xml version="1.0" encoding="utf-8"?>
 <p:sld xmlns:a="http://schemas.openxmlformats.org/drawingml/2006/main" xmlns:r="http://schemas.openxmlformats.org/officeDocument/2006/relationships" xmlns:p="http://schemas.openxmlformats.org/presentationml/2006/main">
   <p:cSld>
     <p:spTree>
@@ -17252,113 +16861,95 @@
             <a:fld id="{9860EDB8-5305-433F-BE41-D7A86D811DB3}" type="slidenum">
               <a:rPr lang="en-US" altLang="ko-KR" noProof="0" smtClean="0"/>
               <a:pPr/>
-              <a:t>34</a:t>
+              <a:t>31</a:t>
             </a:fld>
             <a:endParaRPr lang="ko-KR" altLang="en-US" noProof="0"/>
           </a:p>
         </p:txBody>
       </p:sp>
-      <p:pic>
-        <p:nvPicPr>
-          <p:cNvPr id="3" name="그림 2">
-            <a:extLst>
-              <a:ext uri="{FF2B5EF4-FFF2-40B4-BE49-F238E27FC236}">
-                <a16:creationId xmlns:a16="http://schemas.microsoft.com/office/drawing/2014/main" id="{E7254D18-31A2-88D1-0BF3-746EDC9DD729}"/>
-              </a:ext>
-            </a:extLst>
-          </p:cNvPr>
-          <p:cNvPicPr>
-            <a:picLocks noChangeAspect="1"/>
-          </p:cNvPicPr>
+      <p:grpSp>
+        <p:nvGrpSpPr>
+          <p:cNvPr id="5" name="그룹 4">
+            <a:extLst>
+              <a:ext uri="{FF2B5EF4-FFF2-40B4-BE49-F238E27FC236}">
+                <a16:creationId xmlns:a16="http://schemas.microsoft.com/office/drawing/2014/main" id="{BE993BB2-7D33-053E-5D6C-955BA59F0393}"/>
+              </a:ext>
+            </a:extLst>
+          </p:cNvPr>
+          <p:cNvGrpSpPr/>
           <p:nvPr/>
-        </p:nvPicPr>
-        <p:blipFill>
-          <a:blip r:embed="rId3"/>
-          <a:stretch>
-            <a:fillRect/>
-          </a:stretch>
-        </p:blipFill>
-        <p:spPr>
+        </p:nvGrpSpPr>
+        <p:grpSpPr>
           <a:xfrm>
-            <a:off x="780631" y="2217825"/>
-            <a:ext cx="6001588" cy="3781953"/>
+            <a:off x="780631" y="1800226"/>
+            <a:ext cx="6469323" cy="4076700"/>
+            <a:chOff x="780631" y="2446425"/>
+            <a:chExt cx="6001588" cy="3781953"/>
           </a:xfrm>
-          <a:prstGeom prst="rect">
-            <a:avLst/>
-          </a:prstGeom>
-        </p:spPr>
-      </p:pic>
-      <p:pic>
-        <p:nvPicPr>
-          <p:cNvPr id="9" name="그림 8">
-            <a:extLst>
-              <a:ext uri="{FF2B5EF4-FFF2-40B4-BE49-F238E27FC236}">
-                <a16:creationId xmlns:a16="http://schemas.microsoft.com/office/drawing/2014/main" id="{07A30F9F-1156-708A-94F4-04C1539F7CFA}"/>
-              </a:ext>
-            </a:extLst>
-          </p:cNvPr>
-          <p:cNvPicPr>
-            <a:picLocks noChangeAspect="1"/>
-          </p:cNvPicPr>
-          <p:nvPr/>
-        </p:nvPicPr>
-        <p:blipFill>
-          <a:blip r:embed="rId4"/>
-          <a:stretch>
-            <a:fillRect/>
-          </a:stretch>
-        </p:blipFill>
-        <p:spPr>
-          <a:xfrm>
-            <a:off x="6295645" y="4218354"/>
-            <a:ext cx="5449060" cy="1781424"/>
-          </a:xfrm>
-          <a:prstGeom prst="rect">
-            <a:avLst/>
-          </a:prstGeom>
-        </p:spPr>
-      </p:pic>
-      <p:cxnSp>
-        <p:nvCxnSpPr>
-          <p:cNvPr id="11" name="직선 화살표 연결선 10">
-            <a:extLst>
-              <a:ext uri="{FF2B5EF4-FFF2-40B4-BE49-F238E27FC236}">
-                <a16:creationId xmlns:a16="http://schemas.microsoft.com/office/drawing/2014/main" id="{5B8B17BB-60E6-7F14-D6CE-A31ECE5C53D4}"/>
-              </a:ext>
-            </a:extLst>
-          </p:cNvPr>
-          <p:cNvCxnSpPr/>
-          <p:nvPr/>
-        </p:nvCxnSpPr>
-        <p:spPr>
-          <a:xfrm>
-            <a:off x="5695950" y="4779659"/>
-            <a:ext cx="685420" cy="0"/>
-          </a:xfrm>
-          <a:prstGeom prst="straightConnector1">
-            <a:avLst/>
-          </a:prstGeom>
-          <a:ln>
-            <a:tailEnd type="triangle"/>
-          </a:ln>
-        </p:spPr>
-        <p:style>
-          <a:lnRef idx="1">
-            <a:schemeClr val="dk1"/>
-          </a:lnRef>
-          <a:fillRef idx="0">
-            <a:schemeClr val="dk1"/>
-          </a:fillRef>
-          <a:effectRef idx="0">
-            <a:schemeClr val="dk1"/>
-          </a:effectRef>
-          <a:fontRef idx="minor">
-            <a:schemeClr val="tx1"/>
-          </a:fontRef>
-        </p:style>
-      </p:cxnSp>
-      <mc:AlternateContent xmlns:mc="http://schemas.openxmlformats.org/markup-compatibility/2006" xmlns:a14="http://schemas.microsoft.com/office/drawing/2010/main">
-        <mc:Choice Requires="a14">
+        </p:grpSpPr>
+        <p:pic>
+          <p:nvPicPr>
+            <p:cNvPr id="3" name="그림 2">
+              <a:extLst>
+                <a:ext uri="{FF2B5EF4-FFF2-40B4-BE49-F238E27FC236}">
+                  <a16:creationId xmlns:a16="http://schemas.microsoft.com/office/drawing/2014/main" id="{E7254D18-31A2-88D1-0BF3-746EDC9DD729}"/>
+                </a:ext>
+              </a:extLst>
+            </p:cNvPr>
+            <p:cNvPicPr>
+              <a:picLocks noChangeAspect="1"/>
+            </p:cNvPicPr>
+            <p:nvPr/>
+          </p:nvPicPr>
+          <p:blipFill>
+            <a:blip r:embed="rId3"/>
+            <a:stretch>
+              <a:fillRect/>
+            </a:stretch>
+          </p:blipFill>
+          <p:spPr>
+            <a:xfrm>
+              <a:off x="780631" y="2446425"/>
+              <a:ext cx="6001588" cy="3781953"/>
+            </a:xfrm>
+            <a:prstGeom prst="rect">
+              <a:avLst/>
+            </a:prstGeom>
+          </p:spPr>
+        </p:pic>
+        <p:pic>
+          <p:nvPicPr>
+            <p:cNvPr id="9" name="그림 8">
+              <a:extLst>
+                <a:ext uri="{FF2B5EF4-FFF2-40B4-BE49-F238E27FC236}">
+                  <a16:creationId xmlns:a16="http://schemas.microsoft.com/office/drawing/2014/main" id="{07A30F9F-1156-708A-94F4-04C1539F7CFA}"/>
+                </a:ext>
+              </a:extLst>
+            </p:cNvPr>
+            <p:cNvPicPr>
+              <a:picLocks noChangeAspect="1"/>
+            </p:cNvPicPr>
+            <p:nvPr/>
+          </p:nvPicPr>
+          <p:blipFill>
+            <a:blip r:embed="rId4"/>
+            <a:stretch>
+              <a:fillRect/>
+            </a:stretch>
+          </p:blipFill>
+          <p:spPr>
+            <a:xfrm>
+              <a:off x="961645" y="4446954"/>
+              <a:ext cx="5449060" cy="1781424"/>
+            </a:xfrm>
+            <a:prstGeom prst="rect">
+              <a:avLst/>
+            </a:prstGeom>
+          </p:spPr>
+        </p:pic>
+      </p:grpSp>
+      <mc:AlternateContent xmlns:mc="http://schemas.openxmlformats.org/markup-compatibility/2006">
+        <mc:Choice xmlns:a14="http://schemas.microsoft.com/office/drawing/2010/main" Requires="a14">
           <p:sp>
             <p:nvSpPr>
               <p:cNvPr id="13" name="TextBox 12">
@@ -17373,8 +16964,8 @@
             </p:nvSpPr>
             <p:spPr>
               <a:xfrm>
-                <a:off x="600075" y="1498140"/>
-                <a:ext cx="8806385" cy="400110"/>
+                <a:off x="7620000" y="1796758"/>
+                <a:ext cx="4031311" cy="2116285"/>
               </a:xfrm>
               <a:prstGeom prst="rect">
                 <a:avLst/>
@@ -17382,21 +16973,66 @@
               <a:noFill/>
             </p:spPr>
             <p:txBody>
-              <a:bodyPr wrap="none" rtlCol="0">
+              <a:bodyPr wrap="square" rtlCol="0">
                 <a:spAutoFit/>
               </a:bodyPr>
               <a:lstStyle/>
               <a:p>
+                <a:pPr>
+                  <a:lnSpc>
+                    <a:spcPct val="150000"/>
+                  </a:lnSpc>
+                </a:pPr>
                 <a:r>
-                  <a:rPr lang="ko-KR" altLang="en-US" sz="2000" dirty="0">
+                  <a:rPr lang="ko-KR" altLang="en-US" dirty="0">
                     <a:latin typeface="맑은 고딕 Semilight" panose="020B0502040204020203" pitchFamily="50" charset="-127"/>
                     <a:ea typeface="맑은 고딕 Semilight" panose="020B0502040204020203" pitchFamily="50" charset="-127"/>
                     <a:cs typeface="맑은 고딕 Semilight" panose="020B0502040204020203" pitchFamily="50" charset="-127"/>
                   </a:rPr>
-                  <a:t>벡터</a:t>
+                  <a:t>세번째 그림처럼 두 벡터가 벌어져 있다면, 그 각도(</a:t>
+                </a:r>
+                <a14:m>
+                  <m:oMath xmlns:m="http://schemas.openxmlformats.org/officeDocument/2006/math">
+                    <m:func>
+                      <m:funcPr>
+                        <m:ctrlPr>
+                          <a:rPr lang="ko-KR" altLang="en-US" smtClean="0">
+                            <a:latin typeface="Cambria Math" panose="02040503050406030204" pitchFamily="18" charset="0"/>
+                          </a:rPr>
+                        </m:ctrlPr>
+                      </m:funcPr>
+                      <m:fName>
+                        <m:r>
+                          <m:rPr>
+                            <m:sty m:val="p"/>
+                          </m:rPr>
+                          <a:rPr lang="ko-KR" altLang="en-US" smtClean="0">
+                            <a:latin typeface="Cambria Math" panose="02040503050406030204" pitchFamily="18" charset="0"/>
+                          </a:rPr>
+                          <m:t>cos</m:t>
+                        </m:r>
+                      </m:fName>
+                      <m:e>
+                        <m:r>
+                          <a:rPr lang="ko-KR" altLang="en-US" i="1" smtClean="0">
+                            <a:latin typeface="Cambria Math" panose="02040503050406030204" pitchFamily="18" charset="0"/>
+                          </a:rPr>
+                          <m:t>𝜃</m:t>
+                        </m:r>
+                      </m:e>
+                    </m:func>
+                  </m:oMath>
+                </a14:m>
+                <a:r>
+                  <a:rPr lang="ko-KR" altLang="en-US" dirty="0">
+                    <a:latin typeface="맑은 고딕 Semilight" panose="020B0502040204020203" pitchFamily="50" charset="-127"/>
+                    <a:ea typeface="맑은 고딕 Semilight" panose="020B0502040204020203" pitchFamily="50" charset="-127"/>
+                    <a:cs typeface="맑은 고딕 Semilight" panose="020B0502040204020203" pitchFamily="50" charset="-127"/>
+                  </a:rPr>
+                  <a:t>)만큼을 보정해서 곱해주는 것으로 벡터</a:t>
                 </a:r>
                 <a:r>
-                  <a:rPr lang="en-US" altLang="ko-KR" sz="2000" dirty="0">
+                  <a:rPr lang="en-US" altLang="ko-KR" dirty="0">
                     <a:latin typeface="맑은 고딕 Semilight" panose="020B0502040204020203" pitchFamily="50" charset="-127"/>
                     <a:ea typeface="맑은 고딕 Semilight" panose="020B0502040204020203" pitchFamily="50" charset="-127"/>
                     <a:cs typeface="맑은 고딕 Semilight" panose="020B0502040204020203" pitchFamily="50" charset="-127"/>
@@ -17406,7 +17042,7 @@
                 <a14:m>
                   <m:oMath xmlns:m="http://schemas.openxmlformats.org/officeDocument/2006/math">
                     <m:r>
-                      <a:rPr lang="en-US" altLang="ko-KR" sz="2000" i="1" smtClean="0">
+                      <a:rPr lang="en-US" altLang="ko-KR" i="1" smtClean="0">
                         <a:latin typeface="Cambria Math" panose="02040503050406030204" pitchFamily="18" charset="0"/>
                       </a:rPr>
                       <m:t>𝑢</m:t>
@@ -17414,7 +17050,7 @@
                   </m:oMath>
                 </a14:m>
                 <a:r>
-                  <a:rPr lang="en-US" altLang="ko-KR" sz="2000" dirty="0">
+                  <a:rPr lang="en-US" altLang="ko-KR" dirty="0">
                     <a:latin typeface="맑은 고딕 Semilight" panose="020B0502040204020203" pitchFamily="50" charset="-127"/>
                     <a:ea typeface="맑은 고딕 Semilight" panose="020B0502040204020203" pitchFamily="50" charset="-127"/>
                     <a:cs typeface="맑은 고딕 Semilight" panose="020B0502040204020203" pitchFamily="50" charset="-127"/>
@@ -17422,7 +17058,7 @@
                   <a:t> </a:t>
                 </a:r>
                 <a:r>
-                  <a:rPr lang="ko-KR" altLang="en-US" sz="2000" dirty="0">
+                  <a:rPr lang="ko-KR" altLang="en-US" dirty="0">
                     <a:latin typeface="맑은 고딕 Semilight" panose="020B0502040204020203" pitchFamily="50" charset="-127"/>
                     <a:ea typeface="맑은 고딕 Semilight" panose="020B0502040204020203" pitchFamily="50" charset="-127"/>
                     <a:cs typeface="맑은 고딕 Semilight" panose="020B0502040204020203" pitchFamily="50" charset="-127"/>
@@ -17434,20 +17070,20 @@
                     <m:sSup>
                       <m:sSupPr>
                         <m:ctrlPr>
-                          <a:rPr lang="en-US" altLang="ko-KR" sz="2000" i="1">
+                          <a:rPr lang="en-US" altLang="ko-KR" i="1">
                             <a:latin typeface="Cambria Math" panose="02040503050406030204" pitchFamily="18" charset="0"/>
                           </a:rPr>
                         </m:ctrlPr>
                       </m:sSupPr>
                       <m:e>
                         <m:r>
-                          <a:rPr lang="en-US" altLang="ko-KR" sz="2000" i="1">
+                          <a:rPr lang="en-US" altLang="ko-KR" i="1">
                             <a:latin typeface="Cambria Math" panose="02040503050406030204" pitchFamily="18" charset="0"/>
                           </a:rPr>
                           <m:t> </m:t>
                         </m:r>
                         <m:r>
-                          <a:rPr lang="en-US" altLang="ko-KR" sz="2000" i="1">
+                          <a:rPr lang="en-US" altLang="ko-KR" i="1">
                             <a:latin typeface="Cambria Math" panose="02040503050406030204" pitchFamily="18" charset="0"/>
                           </a:rPr>
                           <m:t>𝑢</m:t>
@@ -17455,7 +17091,7 @@
                       </m:e>
                       <m:sup>
                         <m:r>
-                          <a:rPr lang="en-US" altLang="ko-KR" sz="2000">
+                          <a:rPr lang="en-US" altLang="ko-KR">
                             <a:latin typeface="Cambria Math" panose="02040503050406030204" pitchFamily="18" charset="0"/>
                           </a:rPr>
                           <m:t>′</m:t>
@@ -17463,7 +17099,7 @@
                       </m:sup>
                     </m:sSup>
                     <m:r>
-                      <a:rPr lang="en-US" altLang="ko-KR" sz="2000" i="1">
+                      <a:rPr lang="en-US" altLang="ko-KR" i="1">
                         <a:latin typeface="Cambria Math" panose="02040503050406030204" pitchFamily="18" charset="0"/>
                       </a:rPr>
                       <m:t> </m:t>
@@ -17471,7 +17107,7 @@
                   </m:oMath>
                 </a14:m>
                 <a:r>
-                  <a:rPr lang="ko-KR" altLang="en-US" sz="2000" dirty="0">
+                  <a:rPr lang="ko-KR" altLang="en-US" dirty="0">
                     <a:latin typeface="맑은 고딕 Semilight" panose="020B0502040204020203" pitchFamily="50" charset="-127"/>
                     <a:ea typeface="맑은 고딕 Semilight" panose="020B0502040204020203" pitchFamily="50" charset="-127"/>
                     <a:cs typeface="맑은 고딕 Semilight" panose="020B0502040204020203" pitchFamily="50" charset="-127"/>
@@ -17479,7 +17115,7 @@
                   <a:t>의 벡터</a:t>
                 </a:r>
                 <a:r>
-                  <a:rPr lang="en-US" altLang="ko-KR" sz="2000" dirty="0">
+                  <a:rPr lang="en-US" altLang="ko-KR" dirty="0">
                     <a:latin typeface="맑은 고딕 Semilight" panose="020B0502040204020203" pitchFamily="50" charset="-127"/>
                     <a:ea typeface="맑은 고딕 Semilight" panose="020B0502040204020203" pitchFamily="50" charset="-127"/>
                     <a:cs typeface="맑은 고딕 Semilight" panose="020B0502040204020203" pitchFamily="50" charset="-127"/>
@@ -17487,7 +17123,7 @@
                   <a:t>(</a:t>
                 </a:r>
                 <a:r>
-                  <a:rPr lang="ko-KR" altLang="en-US" sz="2000" dirty="0">
+                  <a:rPr lang="ko-KR" altLang="en-US" dirty="0">
                     <a:latin typeface="맑은 고딕 Semilight" panose="020B0502040204020203" pitchFamily="50" charset="-127"/>
                     <a:ea typeface="맑은 고딕 Semilight" panose="020B0502040204020203" pitchFamily="50" charset="-127"/>
                     <a:cs typeface="맑은 고딕 Semilight" panose="020B0502040204020203" pitchFamily="50" charset="-127"/>
@@ -17495,7 +17131,7 @@
                   <a:t>크기와 방향이 변함</a:t>
                 </a:r>
                 <a:r>
-                  <a:rPr lang="en-US" altLang="ko-KR" sz="2000" dirty="0">
+                  <a:rPr lang="en-US" altLang="ko-KR" dirty="0">
                     <a:latin typeface="맑은 고딕 Semilight" panose="020B0502040204020203" pitchFamily="50" charset="-127"/>
                     <a:ea typeface="맑은 고딕 Semilight" panose="020B0502040204020203" pitchFamily="50" charset="-127"/>
                     <a:cs typeface="맑은 고딕 Semilight" panose="020B0502040204020203" pitchFamily="50" charset="-127"/>
@@ -17503,7 +17139,7 @@
                   <a:t>)</a:t>
                 </a:r>
                 <a:r>
-                  <a:rPr lang="ko-KR" altLang="en-US" sz="2000" dirty="0">
+                  <a:rPr lang="ko-KR" altLang="en-US" dirty="0">
                     <a:latin typeface="맑은 고딕 Semilight" panose="020B0502040204020203" pitchFamily="50" charset="-127"/>
                     <a:ea typeface="맑은 고딕 Semilight" panose="020B0502040204020203" pitchFamily="50" charset="-127"/>
                     <a:cs typeface="맑은 고딕 Semilight" panose="020B0502040204020203" pitchFamily="50" charset="-127"/>
@@ -17513,13 +17149,13 @@
                 <a14:m>
                   <m:oMath xmlns:m="http://schemas.openxmlformats.org/officeDocument/2006/math">
                     <m:r>
-                      <a:rPr lang="en-US" altLang="ko-KR" sz="2000" b="0" i="0" smtClean="0">
+                      <a:rPr lang="en-US" altLang="ko-KR" b="0" i="0" smtClean="0">
                         <a:latin typeface="Cambria Math" panose="02040503050406030204" pitchFamily="18" charset="0"/>
                       </a:rPr>
                       <m:t> </m:t>
                     </m:r>
                     <m:r>
-                      <a:rPr lang="en-US" altLang="ko-KR" sz="2000" i="1">
+                      <a:rPr lang="en-US" altLang="ko-KR" i="1">
                         <a:latin typeface="Cambria Math" panose="02040503050406030204" pitchFamily="18" charset="0"/>
                       </a:rPr>
                       <m:t>𝑣</m:t>
@@ -17527,7 +17163,7 @@
                   </m:oMath>
                 </a14:m>
                 <a:r>
-                  <a:rPr lang="ko-KR" altLang="en-US" sz="2000" dirty="0">
+                  <a:rPr lang="ko-KR" altLang="en-US" dirty="0">
                     <a:latin typeface="맑은 고딕 Semilight" panose="020B0502040204020203" pitchFamily="50" charset="-127"/>
                     <a:ea typeface="맑은 고딕 Semilight" panose="020B0502040204020203" pitchFamily="50" charset="-127"/>
                     <a:cs typeface="맑은 고딕 Semilight" panose="020B0502040204020203" pitchFamily="50" charset="-127"/>
@@ -17535,7 +17171,7 @@
                   <a:t>에 투영</a:t>
                 </a:r>
                 <a:r>
-                  <a:rPr lang="en-US" altLang="ko-KR" sz="2000" dirty="0">
+                  <a:rPr lang="en-US" altLang="ko-KR" dirty="0">
                     <a:latin typeface="맑은 고딕 Semilight" panose="020B0502040204020203" pitchFamily="50" charset="-127"/>
                     <a:ea typeface="맑은 고딕 Semilight" panose="020B0502040204020203" pitchFamily="50" charset="-127"/>
                     <a:cs typeface="맑은 고딕 Semilight" panose="020B0502040204020203" pitchFamily="50" charset="-127"/>
@@ -17543,31 +17179,18 @@
                   <a:t>(projection)</a:t>
                 </a:r>
                 <a:r>
-                  <a:rPr lang="ko-KR" altLang="en-US" sz="2000" dirty="0">
+                  <a:rPr lang="ko-KR" altLang="en-US" dirty="0">
                     <a:latin typeface="맑은 고딕 Semilight" panose="020B0502040204020203" pitchFamily="50" charset="-127"/>
                     <a:ea typeface="맑은 고딕 Semilight" panose="020B0502040204020203" pitchFamily="50" charset="-127"/>
                     <a:cs typeface="맑은 고딕 Semilight" panose="020B0502040204020203" pitchFamily="50" charset="-127"/>
                   </a:rPr>
-                  <a:t>되었다</a:t>
+                  <a:t>된 것임</a:t>
                 </a:r>
-                <a:r>
-                  <a:rPr lang="en-US" altLang="ko-KR" sz="2000" dirty="0">
-                    <a:latin typeface="맑은 고딕 Semilight" panose="020B0502040204020203" pitchFamily="50" charset="-127"/>
-                    <a:ea typeface="맑은 고딕 Semilight" panose="020B0502040204020203" pitchFamily="50" charset="-127"/>
-                    <a:cs typeface="맑은 고딕 Semilight" panose="020B0502040204020203" pitchFamily="50" charset="-127"/>
-                  </a:rPr>
-                  <a:t>.</a:t>
-                </a:r>
-                <a:endParaRPr lang="ko-KR" altLang="en-US" sz="2000" dirty="0">
-                  <a:latin typeface="맑은 고딕 Semilight" panose="020B0502040204020203" pitchFamily="50" charset="-127"/>
-                  <a:ea typeface="맑은 고딕 Semilight" panose="020B0502040204020203" pitchFamily="50" charset="-127"/>
-                  <a:cs typeface="맑은 고딕 Semilight" panose="020B0502040204020203" pitchFamily="50" charset="-127"/>
-                </a:endParaRPr>
               </a:p>
             </p:txBody>
           </p:sp>
         </mc:Choice>
-        <mc:Fallback xmlns="">
+        <mc:Fallback>
           <p:sp>
             <p:nvSpPr>
               <p:cNvPr id="13" name="TextBox 12">
@@ -17584,8 +17207,8 @@
             </p:nvSpPr>
             <p:spPr>
               <a:xfrm>
-                <a:off x="600075" y="1498140"/>
-                <a:ext cx="8806385" cy="400110"/>
+                <a:off x="7620000" y="1796758"/>
+                <a:ext cx="4031311" cy="2116285"/>
               </a:xfrm>
               <a:prstGeom prst="rect">
                 <a:avLst/>
@@ -17593,7 +17216,7 @@
               <a:blipFill>
                 <a:blip r:embed="rId5"/>
                 <a:stretch>
-                  <a:fillRect l="-692" t="-9231" r="-484" b="-27692"/>
+                  <a:fillRect l="-1210" r="-1210" b="-3746"/>
                 </a:stretch>
               </a:blipFill>
             </p:spPr>
@@ -17633,7 +17256,166 @@
 </p:sld>
 </file>
 
-<file path=ppt/slides/slide35.xml><?xml version="1.0" encoding="utf-8"?>
+<file path=ppt/slides/slide32.xml><?xml version="1.0" encoding="utf-8"?>
+<p:sld xmlns:a="http://schemas.openxmlformats.org/drawingml/2006/main" xmlns:r="http://schemas.openxmlformats.org/officeDocument/2006/relationships" xmlns:p="http://schemas.openxmlformats.org/presentationml/2006/main">
+  <p:cSld>
+    <p:spTree>
+      <p:nvGrpSpPr>
+        <p:cNvPr id="1" name="">
+          <a:extLst>
+            <a:ext uri="{FF2B5EF4-FFF2-40B4-BE49-F238E27FC236}">
+              <a16:creationId xmlns:a16="http://schemas.microsoft.com/office/drawing/2014/main" id="{C9E021DA-6203-69D3-C910-70D5CF55FE25}"/>
+            </a:ext>
+          </a:extLst>
+        </p:cNvPr>
+        <p:cNvGrpSpPr/>
+        <p:nvPr/>
+      </p:nvGrpSpPr>
+      <p:grpSpPr>
+        <a:xfrm>
+          <a:off x="0" y="0"/>
+          <a:ext cx="0" cy="0"/>
+          <a:chOff x="0" y="0"/>
+          <a:chExt cx="0" cy="0"/>
+        </a:xfrm>
+      </p:grpSpPr>
+      <p:sp>
+        <p:nvSpPr>
+          <p:cNvPr id="8" name="제목 7">
+            <a:extLst>
+              <a:ext uri="{FF2B5EF4-FFF2-40B4-BE49-F238E27FC236}">
+                <a16:creationId xmlns:a16="http://schemas.microsoft.com/office/drawing/2014/main" id="{4B239653-EF5D-516E-54F8-717E088DA1E8}"/>
+              </a:ext>
+            </a:extLst>
+          </p:cNvPr>
+          <p:cNvSpPr>
+            <a:spLocks noGrp="1"/>
+          </p:cNvSpPr>
+          <p:nvPr>
+            <p:ph type="title"/>
+          </p:nvPr>
+        </p:nvSpPr>
+        <p:spPr>
+          <a:xfrm>
+            <a:off x="521207" y="448056"/>
+            <a:ext cx="8135613" cy="640080"/>
+          </a:xfrm>
+        </p:spPr>
+        <p:txBody>
+          <a:bodyPr rtlCol="0">
+            <a:noAutofit/>
+          </a:bodyPr>
+          <a:lstStyle/>
+          <a:p>
+            <a:r>
+              <a:rPr lang="en-US" altLang="ko-KR" dirty="0"/>
+              <a:t>The dot product of two vectors</a:t>
+            </a:r>
+            <a:endParaRPr lang="ko-KR" altLang="en-US" dirty="0">
+              <a:cs typeface="Segoe UI Light" panose="020B0502040204020203" pitchFamily="34" charset="0"/>
+            </a:endParaRPr>
+          </a:p>
+        </p:txBody>
+      </p:sp>
+      <p:sp>
+        <p:nvSpPr>
+          <p:cNvPr id="12" name="슬라이드 번호 개체 틀 11">
+            <a:extLst>
+              <a:ext uri="{FF2B5EF4-FFF2-40B4-BE49-F238E27FC236}">
+                <a16:creationId xmlns:a16="http://schemas.microsoft.com/office/drawing/2014/main" id="{6A646686-0FD5-B0C0-2511-5E496D7C3AC7}"/>
+              </a:ext>
+            </a:extLst>
+          </p:cNvPr>
+          <p:cNvSpPr>
+            <a:spLocks noGrp="1"/>
+          </p:cNvSpPr>
+          <p:nvPr>
+            <p:ph type="sldNum" sz="quarter" idx="4"/>
+          </p:nvPr>
+        </p:nvSpPr>
+        <p:spPr/>
+        <p:txBody>
+          <a:bodyPr/>
+          <a:lstStyle/>
+          <a:p>
+            <a:fld id="{9860EDB8-5305-433F-BE41-D7A86D811DB3}" type="slidenum">
+              <a:rPr lang="en-US" altLang="ko-KR" noProof="0" smtClean="0"/>
+              <a:pPr/>
+              <a:t>32</a:t>
+            </a:fld>
+            <a:endParaRPr lang="ko-KR" altLang="en-US" noProof="0"/>
+          </a:p>
+        </p:txBody>
+      </p:sp>
+      <p:pic>
+        <p:nvPicPr>
+          <p:cNvPr id="2052" name="Picture 4">
+            <a:extLst>
+              <a:ext uri="{FF2B5EF4-FFF2-40B4-BE49-F238E27FC236}">
+                <a16:creationId xmlns:a16="http://schemas.microsoft.com/office/drawing/2014/main" id="{CD87AA43-1FD1-2E4C-AAD4-8C8E385EE5F8}"/>
+              </a:ext>
+            </a:extLst>
+          </p:cNvPr>
+          <p:cNvPicPr>
+            <a:picLocks noChangeAspect="1" noChangeArrowheads="1"/>
+          </p:cNvPicPr>
+          <p:nvPr/>
+        </p:nvPicPr>
+        <p:blipFill>
+          <a:blip r:embed="rId3">
+            <a:extLst>
+              <a:ext uri="{28A0092B-C50C-407E-A947-70E740481C1C}">
+                <a14:useLocalDpi xmlns:a14="http://schemas.microsoft.com/office/drawing/2010/main" val="0"/>
+              </a:ext>
+            </a:extLst>
+          </a:blip>
+          <a:srcRect/>
+          <a:stretch>
+            <a:fillRect/>
+          </a:stretch>
+        </p:blipFill>
+        <p:spPr bwMode="auto">
+          <a:xfrm>
+            <a:off x="2619375" y="1490664"/>
+            <a:ext cx="6564189" cy="4779963"/>
+          </a:xfrm>
+          <a:prstGeom prst="rect">
+            <a:avLst/>
+          </a:prstGeom>
+          <a:noFill/>
+          <a:extLst>
+            <a:ext uri="{909E8E84-426E-40DD-AFC4-6F175D3DCCD1}">
+              <a14:hiddenFill xmlns:a14="http://schemas.microsoft.com/office/drawing/2010/main">
+                <a:solidFill>
+                  <a:srgbClr val="FFFFFF"/>
+                </a:solidFill>
+              </a14:hiddenFill>
+            </a:ext>
+          </a:extLst>
+        </p:spPr>
+      </p:pic>
+    </p:spTree>
+    <p:extLst>
+      <p:ext uri="{BB962C8B-B14F-4D97-AF65-F5344CB8AC3E}">
+        <p14:creationId xmlns:p14="http://schemas.microsoft.com/office/powerpoint/2010/main" val="3226701330"/>
+      </p:ext>
+    </p:extLst>
+  </p:cSld>
+  <p:clrMapOvr>
+    <a:masterClrMapping/>
+  </p:clrMapOvr>
+  <mc:AlternateContent xmlns:mc="http://schemas.openxmlformats.org/markup-compatibility/2006" xmlns:p14="http://schemas.microsoft.com/office/powerpoint/2010/main">
+    <mc:Choice Requires="p14">
+      <p:transition p14:dur="10"/>
+    </mc:Choice>
+    <mc:Fallback xmlns="">
+      <p:transition/>
+    </mc:Fallback>
+  </mc:AlternateContent>
+</p:sld>
+</file>
+
+<file path=ppt/slides/slide33.xml><?xml version="1.0" encoding="utf-8"?>
 <p:sld xmlns:a="http://schemas.openxmlformats.org/drawingml/2006/main" xmlns:r="http://schemas.openxmlformats.org/officeDocument/2006/relationships" xmlns:p="http://schemas.openxmlformats.org/presentationml/2006/main">
   <p:cSld>
     <p:spTree>
@@ -17718,7 +17500,7 @@
             <a:fld id="{9860EDB8-5305-433F-BE41-D7A86D811DB3}" type="slidenum">
               <a:rPr lang="en-US" altLang="ko-KR" noProof="0" smtClean="0"/>
               <a:pPr/>
-              <a:t>35</a:t>
+              <a:t>33</a:t>
             </a:fld>
             <a:endParaRPr lang="ko-KR" altLang="en-US" noProof="0"/>
           </a:p>
@@ -18625,7 +18407,7 @@
 </p:sld>
 </file>
 
-<file path=ppt/slides/slide36.xml><?xml version="1.0" encoding="utf-8"?>
+<file path=ppt/slides/slide34.xml><?xml version="1.0" encoding="utf-8"?>
 <p:sld xmlns:a="http://schemas.openxmlformats.org/drawingml/2006/main" xmlns:r="http://schemas.openxmlformats.org/officeDocument/2006/relationships" xmlns:p="http://schemas.openxmlformats.org/presentationml/2006/main">
   <p:cSld>
     <p:spTree>
@@ -18710,7 +18492,7 @@
             <a:fld id="{9860EDB8-5305-433F-BE41-D7A86D811DB3}" type="slidenum">
               <a:rPr lang="en-US" altLang="ko-KR" noProof="0" smtClean="0"/>
               <a:pPr/>
-              <a:t>36</a:t>
+              <a:t>34</a:t>
             </a:fld>
             <a:endParaRPr lang="ko-KR" altLang="en-US" noProof="0"/>
           </a:p>
@@ -18767,7 +18549,7 @@
 </p:sld>
 </file>
 
-<file path=ppt/slides/slide37.xml><?xml version="1.0" encoding="utf-8"?>
+<file path=ppt/slides/slide35.xml><?xml version="1.0" encoding="utf-8"?>
 <p:sld xmlns:a="http://schemas.openxmlformats.org/drawingml/2006/main" xmlns:r="http://schemas.openxmlformats.org/officeDocument/2006/relationships" xmlns:p="http://schemas.openxmlformats.org/presentationml/2006/main">
   <p:cSld>
     <p:spTree>
@@ -18852,7 +18634,7 @@
             <a:fld id="{9860EDB8-5305-433F-BE41-D7A86D811DB3}" type="slidenum">
               <a:rPr lang="en-US" altLang="ko-KR" noProof="0" smtClean="0"/>
               <a:pPr/>
-              <a:t>37</a:t>
+              <a:t>35</a:t>
             </a:fld>
             <a:endParaRPr lang="ko-KR" altLang="en-US" noProof="0"/>
           </a:p>
@@ -18968,7 +18750,7 @@
 </p:sld>
 </file>
 
-<file path=ppt/slides/slide38.xml><?xml version="1.0" encoding="utf-8"?>
+<file path=ppt/slides/slide36.xml><?xml version="1.0" encoding="utf-8"?>
 <p:sld xmlns:a="http://schemas.openxmlformats.org/drawingml/2006/main" xmlns:r="http://schemas.openxmlformats.org/officeDocument/2006/relationships" xmlns:p="http://schemas.openxmlformats.org/presentationml/2006/main">
   <p:cSld>
     <p:spTree>
@@ -19053,7 +18835,7 @@
             <a:fld id="{9860EDB8-5305-433F-BE41-D7A86D811DB3}" type="slidenum">
               <a:rPr lang="en-US" altLang="ko-KR" noProof="0" smtClean="0"/>
               <a:pPr/>
-              <a:t>38</a:t>
+              <a:t>36</a:t>
             </a:fld>
             <a:endParaRPr lang="ko-KR" altLang="en-US" noProof="0"/>
           </a:p>
@@ -19204,7 +18986,7 @@
 </p:sld>
 </file>
 
-<file path=ppt/slides/slide39.xml><?xml version="1.0" encoding="utf-8"?>
+<file path=ppt/slides/slide37.xml><?xml version="1.0" encoding="utf-8"?>
 <p:sld xmlns:a="http://schemas.openxmlformats.org/drawingml/2006/main" xmlns:r="http://schemas.openxmlformats.org/officeDocument/2006/relationships" xmlns:p="http://schemas.openxmlformats.org/presentationml/2006/main">
   <p:cSld>
     <p:spTree>
@@ -19346,7 +19128,7 @@
             <a:fld id="{9860EDB8-5305-433F-BE41-D7A86D811DB3}" type="slidenum">
               <a:rPr lang="en-US" altLang="ko-KR" noProof="0" smtClean="0"/>
               <a:pPr/>
-              <a:t>39</a:t>
+              <a:t>37</a:t>
             </a:fld>
             <a:endParaRPr lang="ko-KR" altLang="en-US" noProof="0"/>
           </a:p>
@@ -19555,236 +19337,7 @@
 </p:sld>
 </file>
 
-<file path=ppt/slides/slide4.xml><?xml version="1.0" encoding="utf-8"?>
-<p:sld xmlns:a="http://schemas.openxmlformats.org/drawingml/2006/main" xmlns:r="http://schemas.openxmlformats.org/officeDocument/2006/relationships" xmlns:p="http://schemas.openxmlformats.org/presentationml/2006/main">
-  <p:cSld>
-    <p:spTree>
-      <p:nvGrpSpPr>
-        <p:cNvPr id="1" name="">
-          <a:extLst>
-            <a:ext uri="{FF2B5EF4-FFF2-40B4-BE49-F238E27FC236}">
-              <a16:creationId xmlns:a16="http://schemas.microsoft.com/office/drawing/2014/main" id="{7D5DC8FC-1345-873F-A6C3-D2B0CCFB6086}"/>
-            </a:ext>
-          </a:extLst>
-        </p:cNvPr>
-        <p:cNvGrpSpPr/>
-        <p:nvPr/>
-      </p:nvGrpSpPr>
-      <p:grpSpPr>
-        <a:xfrm>
-          <a:off x="0" y="0"/>
-          <a:ext cx="0" cy="0"/>
-          <a:chOff x="0" y="0"/>
-          <a:chExt cx="0" cy="0"/>
-        </a:xfrm>
-      </p:grpSpPr>
-      <p:sp>
-        <p:nvSpPr>
-          <p:cNvPr id="8" name="제목 7">
-            <a:extLst>
-              <a:ext uri="{FF2B5EF4-FFF2-40B4-BE49-F238E27FC236}">
-                <a16:creationId xmlns:a16="http://schemas.microsoft.com/office/drawing/2014/main" id="{22FC3679-5A6F-B565-1054-5E0280FB97D2}"/>
-              </a:ext>
-            </a:extLst>
-          </p:cNvPr>
-          <p:cNvSpPr>
-            <a:spLocks noGrp="1"/>
-          </p:cNvSpPr>
-          <p:nvPr>
-            <p:ph type="title"/>
-          </p:nvPr>
-        </p:nvSpPr>
-        <p:spPr>
-          <a:xfrm>
-            <a:off x="521207" y="448056"/>
-            <a:ext cx="8135613" cy="640080"/>
-          </a:xfrm>
-        </p:spPr>
-        <p:txBody>
-          <a:bodyPr rtlCol="0">
-            <a:noAutofit/>
-          </a:bodyPr>
-          <a:lstStyle/>
-          <a:p>
-            <a:pPr rtl="0"/>
-            <a:r>
-              <a:rPr lang="en-US" altLang="ko-KR" dirty="0">
-                <a:cs typeface="Segoe UI Light" panose="020B0502040204020203" pitchFamily="34" charset="0"/>
-              </a:rPr>
-              <a:t>Math for Machine Learning</a:t>
-            </a:r>
-            <a:endParaRPr lang="ko-KR" altLang="en-US" dirty="0">
-              <a:cs typeface="Segoe UI Light" panose="020B0502040204020203" pitchFamily="34" charset="0"/>
-            </a:endParaRPr>
-          </a:p>
-        </p:txBody>
-      </p:sp>
-      <p:sp>
-        <p:nvSpPr>
-          <p:cNvPr id="12" name="슬라이드 번호 개체 틀 11">
-            <a:extLst>
-              <a:ext uri="{FF2B5EF4-FFF2-40B4-BE49-F238E27FC236}">
-                <a16:creationId xmlns:a16="http://schemas.microsoft.com/office/drawing/2014/main" id="{841241FB-BBA8-80A9-657D-4E4C0970905D}"/>
-              </a:ext>
-            </a:extLst>
-          </p:cNvPr>
-          <p:cNvSpPr>
-            <a:spLocks noGrp="1"/>
-          </p:cNvSpPr>
-          <p:nvPr>
-            <p:ph type="sldNum" sz="quarter" idx="4"/>
-          </p:nvPr>
-        </p:nvSpPr>
-        <p:spPr/>
-        <p:txBody>
-          <a:bodyPr/>
-          <a:lstStyle/>
-          <a:p>
-            <a:fld id="{9860EDB8-5305-433F-BE41-D7A86D811DB3}" type="slidenum">
-              <a:rPr lang="en-US" altLang="ko-KR" noProof="0" smtClean="0"/>
-              <a:pPr/>
-              <a:t>4</a:t>
-            </a:fld>
-            <a:endParaRPr lang="ko-KR" altLang="en-US" noProof="0"/>
-          </a:p>
-        </p:txBody>
-      </p:sp>
-      <p:sp>
-        <p:nvSpPr>
-          <p:cNvPr id="5" name="TextBox 4">
-            <a:extLst>
-              <a:ext uri="{FF2B5EF4-FFF2-40B4-BE49-F238E27FC236}">
-                <a16:creationId xmlns:a16="http://schemas.microsoft.com/office/drawing/2014/main" id="{68758DD3-2217-BA8B-05B1-F405206F1A26}"/>
-              </a:ext>
-            </a:extLst>
-          </p:cNvPr>
-          <p:cNvSpPr txBox="1"/>
-          <p:nvPr/>
-        </p:nvSpPr>
-        <p:spPr>
-          <a:xfrm>
-            <a:off x="2530763" y="2023997"/>
-            <a:ext cx="6126057" cy="3244093"/>
-          </a:xfrm>
-          <a:prstGeom prst="rect">
-            <a:avLst/>
-          </a:prstGeom>
-          <a:noFill/>
-        </p:spPr>
-        <p:txBody>
-          <a:bodyPr wrap="square">
-            <a:spAutoFit/>
-          </a:bodyPr>
-          <a:lstStyle/>
-          <a:p>
-            <a:pPr algn="ctr">
-              <a:lnSpc>
-                <a:spcPct val="150000"/>
-              </a:lnSpc>
-            </a:pPr>
-            <a:r>
-              <a:rPr lang="en-US" altLang="ko-KR" sz="2800" b="0" i="0" u="none" strike="noStrike" baseline="0" dirty="0">
-                <a:solidFill>
-                  <a:srgbClr val="595959"/>
-                </a:solidFill>
-                <a:latin typeface="Helvetica" panose="020B0604020202020204" pitchFamily="34" charset="0"/>
-              </a:rPr>
-              <a:t>Vectors</a:t>
-            </a:r>
-          </a:p>
-          <a:p>
-            <a:pPr algn="ctr">
-              <a:lnSpc>
-                <a:spcPct val="150000"/>
-              </a:lnSpc>
-            </a:pPr>
-            <a:r>
-              <a:rPr lang="en-US" altLang="ko-KR" sz="2800" b="0" i="0" u="none" strike="noStrike" baseline="0" dirty="0">
-                <a:solidFill>
-                  <a:srgbClr val="595959"/>
-                </a:solidFill>
-                <a:latin typeface="Helvetica" panose="020B0604020202020204" pitchFamily="34" charset="0"/>
-              </a:rPr>
-              <a:t>Matrices</a:t>
-            </a:r>
-          </a:p>
-          <a:p>
-            <a:pPr algn="ctr">
-              <a:lnSpc>
-                <a:spcPct val="150000"/>
-              </a:lnSpc>
-            </a:pPr>
-            <a:r>
-              <a:rPr lang="en-US" altLang="ko-KR" sz="2800" b="0" i="0" u="none" strike="noStrike" baseline="0" dirty="0">
-                <a:solidFill>
-                  <a:srgbClr val="595959"/>
-                </a:solidFill>
-                <a:latin typeface="Helvetica" panose="020B0604020202020204" pitchFamily="34" charset="0"/>
-              </a:rPr>
-              <a:t>Dot product</a:t>
-            </a:r>
-          </a:p>
-          <a:p>
-            <a:pPr algn="ctr">
-              <a:lnSpc>
-                <a:spcPct val="150000"/>
-              </a:lnSpc>
-            </a:pPr>
-            <a:r>
-              <a:rPr lang="en-US" altLang="ko-KR" sz="2800" b="0" i="0" u="none" strike="noStrike" baseline="0" dirty="0">
-                <a:solidFill>
-                  <a:srgbClr val="595959"/>
-                </a:solidFill>
-                <a:latin typeface="Helvetica" panose="020B0604020202020204" pitchFamily="34" charset="0"/>
-              </a:rPr>
-              <a:t>Matrix multiplication</a:t>
-            </a:r>
-          </a:p>
-          <a:p>
-            <a:pPr algn="ctr">
-              <a:lnSpc>
-                <a:spcPct val="150000"/>
-              </a:lnSpc>
-            </a:pPr>
-            <a:r>
-              <a:rPr lang="en-US" altLang="ko-KR" sz="2800" b="0" i="0" u="none" strike="noStrike" baseline="0" dirty="0">
-                <a:solidFill>
-                  <a:srgbClr val="595959"/>
-                </a:solidFill>
-                <a:latin typeface="Helvetica" panose="020B0604020202020204" pitchFamily="34" charset="0"/>
-              </a:rPr>
-              <a:t>Linear transformations</a:t>
-            </a:r>
-            <a:endParaRPr lang="ko-KR" altLang="en-US" sz="2800" dirty="0"/>
-          </a:p>
-        </p:txBody>
-      </p:sp>
-    </p:spTree>
-    <p:extLst>
-      <p:ext uri="{BB962C8B-B14F-4D97-AF65-F5344CB8AC3E}">
-        <p14:creationId xmlns:p14="http://schemas.microsoft.com/office/powerpoint/2010/main" val="936156201"/>
-      </p:ext>
-    </p:extLst>
-  </p:cSld>
-  <p:clrMapOvr>
-    <a:masterClrMapping/>
-  </p:clrMapOvr>
-  <mc:AlternateContent xmlns:mc="http://schemas.openxmlformats.org/markup-compatibility/2006" xmlns:p159="http://schemas.microsoft.com/office/powerpoint/2015/09/main">
-    <mc:Choice Requires="p159">
-      <p:transition xmlns:p14="http://schemas.microsoft.com/office/powerpoint/2010/main" spd="slow" p14:dur="2000">
-        <p159:morph option="byObject"/>
-      </p:transition>
-    </mc:Choice>
-    <mc:Fallback xmlns="">
-      <p:transition spd="slow">
-        <p:fade/>
-      </p:transition>
-    </mc:Fallback>
-  </mc:AlternateContent>
-</p:sld>
-</file>
-
-<file path=ppt/slides/slide40.xml><?xml version="1.0" encoding="utf-8"?>
+<file path=ppt/slides/slide38.xml><?xml version="1.0" encoding="utf-8"?>
 <p:sld xmlns:a="http://schemas.openxmlformats.org/drawingml/2006/main" xmlns:r="http://schemas.openxmlformats.org/officeDocument/2006/relationships" xmlns:p="http://schemas.openxmlformats.org/presentationml/2006/main">
   <p:cSld>
     <p:spTree>
@@ -19869,7 +19422,7 @@
             <a:fld id="{9860EDB8-5305-433F-BE41-D7A86D811DB3}" type="slidenum">
               <a:rPr lang="en-US" altLang="ko-KR" noProof="0" smtClean="0"/>
               <a:pPr/>
-              <a:t>40</a:t>
+              <a:t>38</a:t>
             </a:fld>
             <a:endParaRPr lang="ko-KR" altLang="en-US" noProof="0"/>
           </a:p>
@@ -19926,7 +19479,7 @@
 </p:sld>
 </file>
 
-<file path=ppt/slides/slide41.xml><?xml version="1.0" encoding="utf-8"?>
+<file path=ppt/slides/slide39.xml><?xml version="1.0" encoding="utf-8"?>
 <p:sld xmlns:a="http://schemas.openxmlformats.org/drawingml/2006/main" xmlns:r="http://schemas.openxmlformats.org/officeDocument/2006/relationships" xmlns:p="http://schemas.openxmlformats.org/presentationml/2006/main">
   <p:cSld>
     <p:spTree>
@@ -20011,7 +19564,7 @@
             <a:fld id="{9860EDB8-5305-433F-BE41-D7A86D811DB3}" type="slidenum">
               <a:rPr lang="en-US" altLang="ko-KR" noProof="0" smtClean="0"/>
               <a:pPr/>
-              <a:t>41</a:t>
+              <a:t>39</a:t>
             </a:fld>
             <a:endParaRPr lang="ko-KR" altLang="en-US" noProof="0"/>
           </a:p>
@@ -20173,7 +19726,236 @@
 </p:sld>
 </file>
 
-<file path=ppt/slides/slide42.xml><?xml version="1.0" encoding="utf-8"?>
+<file path=ppt/slides/slide4.xml><?xml version="1.0" encoding="utf-8"?>
+<p:sld xmlns:a="http://schemas.openxmlformats.org/drawingml/2006/main" xmlns:r="http://schemas.openxmlformats.org/officeDocument/2006/relationships" xmlns:p="http://schemas.openxmlformats.org/presentationml/2006/main">
+  <p:cSld>
+    <p:spTree>
+      <p:nvGrpSpPr>
+        <p:cNvPr id="1" name="">
+          <a:extLst>
+            <a:ext uri="{FF2B5EF4-FFF2-40B4-BE49-F238E27FC236}">
+              <a16:creationId xmlns:a16="http://schemas.microsoft.com/office/drawing/2014/main" id="{7D5DC8FC-1345-873F-A6C3-D2B0CCFB6086}"/>
+            </a:ext>
+          </a:extLst>
+        </p:cNvPr>
+        <p:cNvGrpSpPr/>
+        <p:nvPr/>
+      </p:nvGrpSpPr>
+      <p:grpSpPr>
+        <a:xfrm>
+          <a:off x="0" y="0"/>
+          <a:ext cx="0" cy="0"/>
+          <a:chOff x="0" y="0"/>
+          <a:chExt cx="0" cy="0"/>
+        </a:xfrm>
+      </p:grpSpPr>
+      <p:sp>
+        <p:nvSpPr>
+          <p:cNvPr id="8" name="제목 7">
+            <a:extLst>
+              <a:ext uri="{FF2B5EF4-FFF2-40B4-BE49-F238E27FC236}">
+                <a16:creationId xmlns:a16="http://schemas.microsoft.com/office/drawing/2014/main" id="{22FC3679-5A6F-B565-1054-5E0280FB97D2}"/>
+              </a:ext>
+            </a:extLst>
+          </p:cNvPr>
+          <p:cNvSpPr>
+            <a:spLocks noGrp="1"/>
+          </p:cNvSpPr>
+          <p:nvPr>
+            <p:ph type="title"/>
+          </p:nvPr>
+        </p:nvSpPr>
+        <p:spPr>
+          <a:xfrm>
+            <a:off x="521207" y="448056"/>
+            <a:ext cx="8135613" cy="640080"/>
+          </a:xfrm>
+        </p:spPr>
+        <p:txBody>
+          <a:bodyPr rtlCol="0">
+            <a:noAutofit/>
+          </a:bodyPr>
+          <a:lstStyle/>
+          <a:p>
+            <a:pPr rtl="0"/>
+            <a:r>
+              <a:rPr lang="en-US" altLang="ko-KR" dirty="0">
+                <a:cs typeface="Segoe UI Light" panose="020B0502040204020203" pitchFamily="34" charset="0"/>
+              </a:rPr>
+              <a:t>Math for Machine Learning</a:t>
+            </a:r>
+            <a:endParaRPr lang="ko-KR" altLang="en-US" dirty="0">
+              <a:cs typeface="Segoe UI Light" panose="020B0502040204020203" pitchFamily="34" charset="0"/>
+            </a:endParaRPr>
+          </a:p>
+        </p:txBody>
+      </p:sp>
+      <p:sp>
+        <p:nvSpPr>
+          <p:cNvPr id="12" name="슬라이드 번호 개체 틀 11">
+            <a:extLst>
+              <a:ext uri="{FF2B5EF4-FFF2-40B4-BE49-F238E27FC236}">
+                <a16:creationId xmlns:a16="http://schemas.microsoft.com/office/drawing/2014/main" id="{841241FB-BBA8-80A9-657D-4E4C0970905D}"/>
+              </a:ext>
+            </a:extLst>
+          </p:cNvPr>
+          <p:cNvSpPr>
+            <a:spLocks noGrp="1"/>
+          </p:cNvSpPr>
+          <p:nvPr>
+            <p:ph type="sldNum" sz="quarter" idx="4"/>
+          </p:nvPr>
+        </p:nvSpPr>
+        <p:spPr/>
+        <p:txBody>
+          <a:bodyPr/>
+          <a:lstStyle/>
+          <a:p>
+            <a:fld id="{9860EDB8-5305-433F-BE41-D7A86D811DB3}" type="slidenum">
+              <a:rPr lang="en-US" altLang="ko-KR" noProof="0" smtClean="0"/>
+              <a:pPr/>
+              <a:t>4</a:t>
+            </a:fld>
+            <a:endParaRPr lang="ko-KR" altLang="en-US" noProof="0"/>
+          </a:p>
+        </p:txBody>
+      </p:sp>
+      <p:sp>
+        <p:nvSpPr>
+          <p:cNvPr id="5" name="TextBox 4">
+            <a:extLst>
+              <a:ext uri="{FF2B5EF4-FFF2-40B4-BE49-F238E27FC236}">
+                <a16:creationId xmlns:a16="http://schemas.microsoft.com/office/drawing/2014/main" id="{68758DD3-2217-BA8B-05B1-F405206F1A26}"/>
+              </a:ext>
+            </a:extLst>
+          </p:cNvPr>
+          <p:cNvSpPr txBox="1"/>
+          <p:nvPr/>
+        </p:nvSpPr>
+        <p:spPr>
+          <a:xfrm>
+            <a:off x="2530763" y="2023997"/>
+            <a:ext cx="6126057" cy="3244093"/>
+          </a:xfrm>
+          <a:prstGeom prst="rect">
+            <a:avLst/>
+          </a:prstGeom>
+          <a:noFill/>
+        </p:spPr>
+        <p:txBody>
+          <a:bodyPr wrap="square">
+            <a:spAutoFit/>
+          </a:bodyPr>
+          <a:lstStyle/>
+          <a:p>
+            <a:pPr algn="ctr">
+              <a:lnSpc>
+                <a:spcPct val="150000"/>
+              </a:lnSpc>
+            </a:pPr>
+            <a:r>
+              <a:rPr lang="en-US" altLang="ko-KR" sz="2800" b="0" i="0" u="none" strike="noStrike" baseline="0" dirty="0">
+                <a:solidFill>
+                  <a:srgbClr val="595959"/>
+                </a:solidFill>
+                <a:latin typeface="Helvetica" panose="020B0604020202020204" pitchFamily="34" charset="0"/>
+              </a:rPr>
+              <a:t>Vectors</a:t>
+            </a:r>
+          </a:p>
+          <a:p>
+            <a:pPr algn="ctr">
+              <a:lnSpc>
+                <a:spcPct val="150000"/>
+              </a:lnSpc>
+            </a:pPr>
+            <a:r>
+              <a:rPr lang="en-US" altLang="ko-KR" sz="2800" b="0" i="0" u="none" strike="noStrike" baseline="0" dirty="0">
+                <a:solidFill>
+                  <a:srgbClr val="595959"/>
+                </a:solidFill>
+                <a:latin typeface="Helvetica" panose="020B0604020202020204" pitchFamily="34" charset="0"/>
+              </a:rPr>
+              <a:t>Matrices</a:t>
+            </a:r>
+          </a:p>
+          <a:p>
+            <a:pPr algn="ctr">
+              <a:lnSpc>
+                <a:spcPct val="150000"/>
+              </a:lnSpc>
+            </a:pPr>
+            <a:r>
+              <a:rPr lang="en-US" altLang="ko-KR" sz="2800" b="0" i="0" u="none" strike="noStrike" baseline="0" dirty="0">
+                <a:solidFill>
+                  <a:srgbClr val="595959"/>
+                </a:solidFill>
+                <a:latin typeface="Helvetica" panose="020B0604020202020204" pitchFamily="34" charset="0"/>
+              </a:rPr>
+              <a:t>Dot product</a:t>
+            </a:r>
+          </a:p>
+          <a:p>
+            <a:pPr algn="ctr">
+              <a:lnSpc>
+                <a:spcPct val="150000"/>
+              </a:lnSpc>
+            </a:pPr>
+            <a:r>
+              <a:rPr lang="en-US" altLang="ko-KR" sz="2800" b="0" i="0" u="none" strike="noStrike" baseline="0" dirty="0">
+                <a:solidFill>
+                  <a:srgbClr val="595959"/>
+                </a:solidFill>
+                <a:latin typeface="Helvetica" panose="020B0604020202020204" pitchFamily="34" charset="0"/>
+              </a:rPr>
+              <a:t>Matrix multiplication</a:t>
+            </a:r>
+          </a:p>
+          <a:p>
+            <a:pPr algn="ctr">
+              <a:lnSpc>
+                <a:spcPct val="150000"/>
+              </a:lnSpc>
+            </a:pPr>
+            <a:r>
+              <a:rPr lang="en-US" altLang="ko-KR" sz="2800" b="0" i="0" u="none" strike="noStrike" baseline="0" dirty="0">
+                <a:solidFill>
+                  <a:srgbClr val="595959"/>
+                </a:solidFill>
+                <a:latin typeface="Helvetica" panose="020B0604020202020204" pitchFamily="34" charset="0"/>
+              </a:rPr>
+              <a:t>Linear transformations</a:t>
+            </a:r>
+            <a:endParaRPr lang="ko-KR" altLang="en-US" sz="2800" dirty="0"/>
+          </a:p>
+        </p:txBody>
+      </p:sp>
+    </p:spTree>
+    <p:extLst>
+      <p:ext uri="{BB962C8B-B14F-4D97-AF65-F5344CB8AC3E}">
+        <p14:creationId xmlns:p14="http://schemas.microsoft.com/office/powerpoint/2010/main" val="936156201"/>
+      </p:ext>
+    </p:extLst>
+  </p:cSld>
+  <p:clrMapOvr>
+    <a:masterClrMapping/>
+  </p:clrMapOvr>
+  <mc:AlternateContent xmlns:mc="http://schemas.openxmlformats.org/markup-compatibility/2006" xmlns:p159="http://schemas.microsoft.com/office/powerpoint/2015/09/main">
+    <mc:Choice Requires="p159">
+      <p:transition xmlns:p14="http://schemas.microsoft.com/office/powerpoint/2010/main" spd="slow" p14:dur="2000">
+        <p159:morph option="byObject"/>
+      </p:transition>
+    </mc:Choice>
+    <mc:Fallback xmlns="">
+      <p:transition spd="slow">
+        <p:fade/>
+      </p:transition>
+    </mc:Fallback>
+  </mc:AlternateContent>
+</p:sld>
+</file>
+
+<file path=ppt/slides/slide40.xml><?xml version="1.0" encoding="utf-8"?>
 <p:sld xmlns:a="http://schemas.openxmlformats.org/drawingml/2006/main" xmlns:r="http://schemas.openxmlformats.org/officeDocument/2006/relationships" xmlns:p="http://schemas.openxmlformats.org/presentationml/2006/main">
   <p:cSld>
     <p:spTree>
@@ -20315,7 +20097,7 @@
             <a:fld id="{9860EDB8-5305-433F-BE41-D7A86D811DB3}" type="slidenum">
               <a:rPr lang="en-US" altLang="ko-KR" noProof="0" smtClean="0"/>
               <a:pPr/>
-              <a:t>42</a:t>
+              <a:t>40</a:t>
             </a:fld>
             <a:endParaRPr lang="ko-KR" altLang="en-US" noProof="0"/>
           </a:p>
@@ -20524,7 +20306,7 @@
 </p:sld>
 </file>
 
-<file path=ppt/slides/slide43.xml><?xml version="1.0" encoding="utf-8"?>
+<file path=ppt/slides/slide41.xml><?xml version="1.0" encoding="utf-8"?>
 <p:sld xmlns:a="http://schemas.openxmlformats.org/drawingml/2006/main" xmlns:r="http://schemas.openxmlformats.org/officeDocument/2006/relationships" xmlns:p="http://schemas.openxmlformats.org/presentationml/2006/main">
   <p:cSld>
     <p:spTree>
@@ -20669,7 +20451,7 @@
             <a:fld id="{9860EDB8-5305-433F-BE41-D7A86D811DB3}" type="slidenum">
               <a:rPr lang="en-US" altLang="ko-KR" noProof="0" smtClean="0"/>
               <a:pPr/>
-              <a:t>43</a:t>
+              <a:t>41</a:t>
             </a:fld>
             <a:endParaRPr lang="ko-KR" altLang="en-US" noProof="0"/>
           </a:p>
@@ -21071,7 +20853,7 @@
 </p:sld>
 </file>
 
-<file path=ppt/slides/slide44.xml><?xml version="1.0" encoding="utf-8"?>
+<file path=ppt/slides/slide42.xml><?xml version="1.0" encoding="utf-8"?>
 <p:sld xmlns:a="http://schemas.openxmlformats.org/drawingml/2006/main" xmlns:r="http://schemas.openxmlformats.org/officeDocument/2006/relationships" xmlns:p="http://schemas.openxmlformats.org/presentationml/2006/main">
   <p:cSld>
     <p:spTree>
@@ -21156,7 +20938,7 @@
             <a:fld id="{9860EDB8-5305-433F-BE41-D7A86D811DB3}" type="slidenum">
               <a:rPr lang="en-US" altLang="ko-KR" noProof="0" smtClean="0"/>
               <a:pPr/>
-              <a:t>44</a:t>
+              <a:t>42</a:t>
             </a:fld>
             <a:endParaRPr lang="ko-KR" altLang="en-US" noProof="0"/>
           </a:p>
@@ -21318,7 +21100,7 @@
 </p:sld>
 </file>
 
-<file path=ppt/slides/slide45.xml><?xml version="1.0" encoding="utf-8"?>
+<file path=ppt/slides/slide43.xml><?xml version="1.0" encoding="utf-8"?>
 <p:sld xmlns:a="http://schemas.openxmlformats.org/drawingml/2006/main" xmlns:r="http://schemas.openxmlformats.org/officeDocument/2006/relationships" xmlns:p="http://schemas.openxmlformats.org/presentationml/2006/main">
   <p:cSld>
     <p:spTree>
@@ -21403,7 +21185,7 @@
             <a:fld id="{9860EDB8-5305-433F-BE41-D7A86D811DB3}" type="slidenum">
               <a:rPr lang="en-US" altLang="ko-KR" noProof="0" smtClean="0"/>
               <a:pPr/>
-              <a:t>45</a:t>
+              <a:t>43</a:t>
             </a:fld>
             <a:endParaRPr lang="ko-KR" altLang="en-US" noProof="0"/>
           </a:p>
@@ -21460,7 +21242,7 @@
 </p:sld>
 </file>
 
-<file path=ppt/slides/slide46.xml><?xml version="1.0" encoding="utf-8"?>
+<file path=ppt/slides/slide44.xml><?xml version="1.0" encoding="utf-8"?>
 <p:sld xmlns:a="http://schemas.openxmlformats.org/drawingml/2006/main" xmlns:r="http://schemas.openxmlformats.org/officeDocument/2006/relationships" xmlns:p="http://schemas.openxmlformats.org/presentationml/2006/main">
   <p:cSld>
     <p:spTree>
@@ -21545,7 +21327,7 @@
             <a:fld id="{9860EDB8-5305-433F-BE41-D7A86D811DB3}" type="slidenum">
               <a:rPr lang="en-US" altLang="ko-KR" noProof="0" smtClean="0"/>
               <a:pPr/>
-              <a:t>46</a:t>
+              <a:t>44</a:t>
             </a:fld>
             <a:endParaRPr lang="ko-KR" altLang="en-US" noProof="0"/>
           </a:p>
@@ -21602,7 +21384,7 @@
 </p:sld>
 </file>
 
-<file path=ppt/slides/slide47.xml><?xml version="1.0" encoding="utf-8"?>
+<file path=ppt/slides/slide45.xml><?xml version="1.0" encoding="utf-8"?>
 <p:sld xmlns:a="http://schemas.openxmlformats.org/drawingml/2006/main" xmlns:r="http://schemas.openxmlformats.org/officeDocument/2006/relationships" xmlns:p="http://schemas.openxmlformats.org/presentationml/2006/main">
   <p:cSld>
     <p:spTree>
@@ -21744,7 +21526,7 @@
             <a:fld id="{9860EDB8-5305-433F-BE41-D7A86D811DB3}" type="slidenum">
               <a:rPr lang="en-US" altLang="ko-KR" noProof="0" smtClean="0"/>
               <a:pPr/>
-              <a:t>47</a:t>
+              <a:t>45</a:t>
             </a:fld>
             <a:endParaRPr lang="ko-KR" altLang="en-US" noProof="0"/>
           </a:p>
@@ -21953,7 +21735,7 @@
 </p:sld>
 </file>
 
-<file path=ppt/slides/slide48.xml><?xml version="1.0" encoding="utf-8"?>
+<file path=ppt/slides/slide46.xml><?xml version="1.0" encoding="utf-8"?>
 <p:sld xmlns:a="http://schemas.openxmlformats.org/drawingml/2006/main" xmlns:r="http://schemas.openxmlformats.org/officeDocument/2006/relationships" xmlns:p="http://schemas.openxmlformats.org/presentationml/2006/main">
   <p:cSld>
     <p:spTree>
@@ -22038,7 +21820,7 @@
             <a:fld id="{9860EDB8-5305-433F-BE41-D7A86D811DB3}" type="slidenum">
               <a:rPr lang="en-US" altLang="ko-KR" noProof="0" smtClean="0"/>
               <a:pPr/>
-              <a:t>48</a:t>
+              <a:t>46</a:t>
             </a:fld>
             <a:endParaRPr lang="ko-KR" altLang="en-US" noProof="0"/>
           </a:p>
@@ -22095,7 +21877,7 @@
 </p:sld>
 </file>
 
-<file path=ppt/slides/slide49.xml><?xml version="1.0" encoding="utf-8"?>
+<file path=ppt/slides/slide47.xml><?xml version="1.0" encoding="utf-8"?>
 <p:sld xmlns:a="http://schemas.openxmlformats.org/drawingml/2006/main" xmlns:r="http://schemas.openxmlformats.org/officeDocument/2006/relationships" xmlns:p="http://schemas.openxmlformats.org/presentationml/2006/main">
   <p:cSld>
     <p:spTree>
@@ -22180,7 +21962,7 @@
             <a:fld id="{9860EDB8-5305-433F-BE41-D7A86D811DB3}" type="slidenum">
               <a:rPr lang="en-US" altLang="ko-KR" noProof="0" smtClean="0"/>
               <a:pPr/>
-              <a:t>49</a:t>
+              <a:t>47</a:t>
             </a:fld>
             <a:endParaRPr lang="ko-KR" altLang="en-US" noProof="0"/>
           </a:p>
@@ -22237,358 +22019,7 @@
 </p:sld>
 </file>
 
-<file path=ppt/slides/slide5.xml><?xml version="1.0" encoding="utf-8"?>
-<p:sld xmlns:a="http://schemas.openxmlformats.org/drawingml/2006/main" xmlns:r="http://schemas.openxmlformats.org/officeDocument/2006/relationships" xmlns:p="http://schemas.openxmlformats.org/presentationml/2006/main">
-  <p:cSld>
-    <p:spTree>
-      <p:nvGrpSpPr>
-        <p:cNvPr id="1" name="">
-          <a:extLst>
-            <a:ext uri="{FF2B5EF4-FFF2-40B4-BE49-F238E27FC236}">
-              <a16:creationId xmlns:a16="http://schemas.microsoft.com/office/drawing/2014/main" id="{FD0D3AE7-002F-94A0-DA15-81A1CE310A3F}"/>
-            </a:ext>
-          </a:extLst>
-        </p:cNvPr>
-        <p:cNvGrpSpPr/>
-        <p:nvPr/>
-      </p:nvGrpSpPr>
-      <p:grpSpPr>
-        <a:xfrm>
-          <a:off x="0" y="0"/>
-          <a:ext cx="0" cy="0"/>
-          <a:chOff x="0" y="0"/>
-          <a:chExt cx="0" cy="0"/>
-        </a:xfrm>
-      </p:grpSpPr>
-      <p:sp>
-        <p:nvSpPr>
-          <p:cNvPr id="3" name="직사각형 2">
-            <a:extLst>
-              <a:ext uri="{FF2B5EF4-FFF2-40B4-BE49-F238E27FC236}">
-                <a16:creationId xmlns:a16="http://schemas.microsoft.com/office/drawing/2014/main" id="{C9AFE555-A66B-E0EE-1EF0-831B635FB249}"/>
-              </a:ext>
-            </a:extLst>
-          </p:cNvPr>
-          <p:cNvSpPr/>
-          <p:nvPr/>
-        </p:nvSpPr>
-        <p:spPr>
-          <a:xfrm>
-            <a:off x="895927" y="1457931"/>
-            <a:ext cx="5948218" cy="548669"/>
-          </a:xfrm>
-          <a:prstGeom prst="rect">
-            <a:avLst/>
-          </a:prstGeom>
-          <a:solidFill>
-            <a:schemeClr val="bg1">
-              <a:lumMod val="85000"/>
-            </a:schemeClr>
-          </a:solidFill>
-          <a:ln>
-            <a:noFill/>
-          </a:ln>
-        </p:spPr>
-        <p:style>
-          <a:lnRef idx="2">
-            <a:schemeClr val="accent1">
-              <a:shade val="15000"/>
-            </a:schemeClr>
-          </a:lnRef>
-          <a:fillRef idx="1">
-            <a:schemeClr val="accent1"/>
-          </a:fillRef>
-          <a:effectRef idx="0">
-            <a:schemeClr val="accent1"/>
-          </a:effectRef>
-          <a:fontRef idx="minor">
-            <a:schemeClr val="lt1"/>
-          </a:fontRef>
-        </p:style>
-        <p:txBody>
-          <a:bodyPr rtlCol="0" anchor="ctr"/>
-          <a:lstStyle/>
-          <a:p>
-            <a:pPr algn="ctr"/>
-            <a:endParaRPr lang="ko-KR" altLang="en-US" dirty="0"/>
-          </a:p>
-        </p:txBody>
-      </p:sp>
-      <p:sp>
-        <p:nvSpPr>
-          <p:cNvPr id="8" name="제목 7">
-            <a:extLst>
-              <a:ext uri="{FF2B5EF4-FFF2-40B4-BE49-F238E27FC236}">
-                <a16:creationId xmlns:a16="http://schemas.microsoft.com/office/drawing/2014/main" id="{E41AB3BA-A98A-DDCE-D6EA-2DF42D6CE40B}"/>
-              </a:ext>
-            </a:extLst>
-          </p:cNvPr>
-          <p:cNvSpPr>
-            <a:spLocks noGrp="1"/>
-          </p:cNvSpPr>
-          <p:nvPr>
-            <p:ph type="title"/>
-          </p:nvPr>
-        </p:nvSpPr>
-        <p:spPr>
-          <a:xfrm>
-            <a:off x="521207" y="448056"/>
-            <a:ext cx="8135613" cy="640080"/>
-          </a:xfrm>
-        </p:spPr>
-        <p:txBody>
-          <a:bodyPr rtlCol="0">
-            <a:noAutofit/>
-          </a:bodyPr>
-          <a:lstStyle/>
-          <a:p>
-            <a:pPr rtl="0"/>
-            <a:r>
-              <a:rPr lang="en-US" altLang="ko-KR" dirty="0">
-                <a:cs typeface="Segoe UI Light" panose="020B0502040204020203" pitchFamily="34" charset="0"/>
-              </a:rPr>
-              <a:t>Contents</a:t>
-            </a:r>
-            <a:endParaRPr lang="ko-KR" altLang="en-US" dirty="0">
-              <a:cs typeface="Segoe UI Light" panose="020B0502040204020203" pitchFamily="34" charset="0"/>
-            </a:endParaRPr>
-          </a:p>
-        </p:txBody>
-      </p:sp>
-      <p:sp>
-        <p:nvSpPr>
-          <p:cNvPr id="12" name="슬라이드 번호 개체 틀 11">
-            <a:extLst>
-              <a:ext uri="{FF2B5EF4-FFF2-40B4-BE49-F238E27FC236}">
-                <a16:creationId xmlns:a16="http://schemas.microsoft.com/office/drawing/2014/main" id="{FBA6C3AD-7EE6-C223-FA76-995C4A40A54C}"/>
-              </a:ext>
-            </a:extLst>
-          </p:cNvPr>
-          <p:cNvSpPr>
-            <a:spLocks noGrp="1"/>
-          </p:cNvSpPr>
-          <p:nvPr>
-            <p:ph type="sldNum" sz="quarter" idx="4"/>
-          </p:nvPr>
-        </p:nvSpPr>
-        <p:spPr/>
-        <p:txBody>
-          <a:bodyPr/>
-          <a:lstStyle/>
-          <a:p>
-            <a:fld id="{9860EDB8-5305-433F-BE41-D7A86D811DB3}" type="slidenum">
-              <a:rPr lang="en-US" altLang="ko-KR" noProof="0" smtClean="0"/>
-              <a:pPr/>
-              <a:t>5</a:t>
-            </a:fld>
-            <a:endParaRPr lang="ko-KR" altLang="en-US" noProof="0"/>
-          </a:p>
-        </p:txBody>
-      </p:sp>
-      <p:sp>
-        <p:nvSpPr>
-          <p:cNvPr id="2" name="TextBox 1">
-            <a:extLst>
-              <a:ext uri="{FF2B5EF4-FFF2-40B4-BE49-F238E27FC236}">
-                <a16:creationId xmlns:a16="http://schemas.microsoft.com/office/drawing/2014/main" id="{52C5C255-490D-636C-8D95-CEBDAA0AD5B9}"/>
-              </a:ext>
-            </a:extLst>
-          </p:cNvPr>
-          <p:cNvSpPr txBox="1"/>
-          <p:nvPr/>
-        </p:nvSpPr>
-        <p:spPr>
-          <a:xfrm>
-            <a:off x="1764145" y="1384043"/>
-            <a:ext cx="7250546" cy="5006948"/>
-          </a:xfrm>
-          <a:prstGeom prst="rect">
-            <a:avLst/>
-          </a:prstGeom>
-          <a:noFill/>
-        </p:spPr>
-        <p:txBody>
-          <a:bodyPr wrap="square" rtlCol="0">
-            <a:spAutoFit/>
-          </a:bodyPr>
-          <a:lstStyle/>
-          <a:p>
-            <a:pPr marL="457200" indent="-457200">
-              <a:lnSpc>
-                <a:spcPct val="150000"/>
-              </a:lnSpc>
-              <a:buFont typeface="+mj-lt"/>
-              <a:buAutoNum type="arabicPeriod"/>
-            </a:pPr>
-            <a:r>
-              <a:rPr lang="en-US" altLang="ko-KR" sz="2400" b="1" dirty="0">
-                <a:latin typeface="맑은 고딕 Semilight" panose="020B0502040204020203" pitchFamily="50" charset="-127"/>
-                <a:ea typeface="맑은 고딕 Semilight" panose="020B0502040204020203" pitchFamily="50" charset="-127"/>
-                <a:cs typeface="맑은 고딕 Semilight" panose="020B0502040204020203" pitchFamily="50" charset="-127"/>
-              </a:rPr>
-              <a:t>Vectors and their properties</a:t>
-            </a:r>
-          </a:p>
-          <a:p>
-            <a:pPr marL="457200" indent="-457200">
-              <a:lnSpc>
-                <a:spcPct val="150000"/>
-              </a:lnSpc>
-              <a:buFont typeface="+mj-lt"/>
-              <a:buAutoNum type="arabicPeriod"/>
-            </a:pPr>
-            <a:r>
-              <a:rPr lang="en-US" altLang="ko-KR" sz="2400" b="1" dirty="0">
-                <a:latin typeface="맑은 고딕 Semilight" panose="020B0502040204020203" pitchFamily="50" charset="-127"/>
-                <a:ea typeface="맑은 고딕 Semilight" panose="020B0502040204020203" pitchFamily="50" charset="-127"/>
-                <a:cs typeface="맑은 고딕 Semilight" panose="020B0502040204020203" pitchFamily="50" charset="-127"/>
-              </a:rPr>
-              <a:t>Sum and difference of vectors</a:t>
-            </a:r>
-          </a:p>
-          <a:p>
-            <a:pPr marL="457200" indent="-457200">
-              <a:lnSpc>
-                <a:spcPct val="150000"/>
-              </a:lnSpc>
-              <a:buFont typeface="+mj-lt"/>
-              <a:buAutoNum type="arabicPeriod"/>
-            </a:pPr>
-            <a:r>
-              <a:rPr lang="en-US" altLang="ko-KR" sz="2400" b="1" dirty="0">
-                <a:latin typeface="맑은 고딕 Semilight" panose="020B0502040204020203" pitchFamily="50" charset="-127"/>
-                <a:ea typeface="맑은 고딕 Semilight" panose="020B0502040204020203" pitchFamily="50" charset="-127"/>
-                <a:cs typeface="맑은 고딕 Semilight" panose="020B0502040204020203" pitchFamily="50" charset="-127"/>
-              </a:rPr>
-              <a:t>Distance between vectors</a:t>
-            </a:r>
-          </a:p>
-          <a:p>
-            <a:pPr marL="457200" indent="-457200">
-              <a:lnSpc>
-                <a:spcPct val="150000"/>
-              </a:lnSpc>
-              <a:buFont typeface="+mj-lt"/>
-              <a:buAutoNum type="arabicPeriod"/>
-            </a:pPr>
-            <a:r>
-              <a:rPr lang="en-US" altLang="ko-KR" sz="2400" b="1" dirty="0">
-                <a:latin typeface="맑은 고딕 Semilight" panose="020B0502040204020203" pitchFamily="50" charset="-127"/>
-                <a:ea typeface="맑은 고딕 Semilight" panose="020B0502040204020203" pitchFamily="50" charset="-127"/>
-                <a:cs typeface="맑은 고딕 Semilight" panose="020B0502040204020203" pitchFamily="50" charset="-127"/>
-              </a:rPr>
-              <a:t>Multiplying a vector by a scalar</a:t>
-            </a:r>
-          </a:p>
-          <a:p>
-            <a:pPr marL="457200" indent="-457200">
-              <a:lnSpc>
-                <a:spcPct val="150000"/>
-              </a:lnSpc>
-              <a:buFont typeface="+mj-lt"/>
-              <a:buAutoNum type="arabicPeriod"/>
-            </a:pPr>
-            <a:r>
-              <a:rPr lang="en-US" altLang="ko-KR" sz="2400" b="1" dirty="0">
-                <a:latin typeface="맑은 고딕 Semilight" panose="020B0502040204020203" pitchFamily="50" charset="-127"/>
-                <a:ea typeface="맑은 고딕 Semilight" panose="020B0502040204020203" pitchFamily="50" charset="-127"/>
-                <a:cs typeface="맑은 고딕 Semilight" panose="020B0502040204020203" pitchFamily="50" charset="-127"/>
-              </a:rPr>
-              <a:t>The dot product</a:t>
-            </a:r>
-          </a:p>
-          <a:p>
-            <a:pPr marL="457200" indent="-457200">
-              <a:lnSpc>
-                <a:spcPct val="150000"/>
-              </a:lnSpc>
-              <a:buFont typeface="+mj-lt"/>
-              <a:buAutoNum type="arabicPeriod"/>
-            </a:pPr>
-            <a:r>
-              <a:rPr lang="en-US" altLang="ko-KR" sz="2400" b="1" dirty="0">
-                <a:latin typeface="맑은 고딕 Semilight" panose="020B0502040204020203" pitchFamily="50" charset="-127"/>
-                <a:ea typeface="맑은 고딕 Semilight" panose="020B0502040204020203" pitchFamily="50" charset="-127"/>
-                <a:cs typeface="맑은 고딕 Semilight" panose="020B0502040204020203" pitchFamily="50" charset="-127"/>
-              </a:rPr>
-              <a:t>Geometric dot product</a:t>
-            </a:r>
-          </a:p>
-          <a:p>
-            <a:pPr marL="457200" indent="-457200">
-              <a:lnSpc>
-                <a:spcPct val="150000"/>
-              </a:lnSpc>
-              <a:buFont typeface="+mj-lt"/>
-              <a:buAutoNum type="arabicPeriod"/>
-            </a:pPr>
-            <a:r>
-              <a:rPr lang="en-US" altLang="ko-KR" sz="2400" b="1" dirty="0">
-                <a:latin typeface="맑은 고딕 Semilight" panose="020B0502040204020203" pitchFamily="50" charset="-127"/>
-                <a:ea typeface="맑은 고딕 Semilight" panose="020B0502040204020203" pitchFamily="50" charset="-127"/>
-                <a:cs typeface="맑은 고딕 Semilight" panose="020B0502040204020203" pitchFamily="50" charset="-127"/>
-              </a:rPr>
-              <a:t>Multiplying a matrix by a vector</a:t>
-            </a:r>
-          </a:p>
-          <a:p>
-            <a:pPr marL="457200" indent="-457200">
-              <a:lnSpc>
-                <a:spcPct val="150000"/>
-              </a:lnSpc>
-              <a:buFont typeface="+mj-lt"/>
-              <a:buAutoNum type="arabicPeriod"/>
-            </a:pPr>
-            <a:r>
-              <a:rPr lang="en-US" altLang="ko-KR" sz="2400" b="1" dirty="0">
-                <a:latin typeface="맑은 고딕 Semilight" panose="020B0502040204020203" pitchFamily="50" charset="-127"/>
-                <a:ea typeface="맑은 고딕 Semilight" panose="020B0502040204020203" pitchFamily="50" charset="-127"/>
-                <a:cs typeface="맑은 고딕 Semilight" panose="020B0502040204020203" pitchFamily="50" charset="-127"/>
-              </a:rPr>
-              <a:t>Matrices as linear transformations</a:t>
-            </a:r>
-          </a:p>
-          <a:p>
-            <a:pPr marL="457200" indent="-457200">
-              <a:lnSpc>
-                <a:spcPct val="150000"/>
-              </a:lnSpc>
-              <a:buFont typeface="+mj-lt"/>
-              <a:buAutoNum type="arabicPeriod"/>
-            </a:pPr>
-            <a:r>
-              <a:rPr lang="en-US" altLang="ko-KR" sz="2400" b="1" dirty="0">
-                <a:latin typeface="맑은 고딕 Semilight" panose="020B0502040204020203" pitchFamily="50" charset="-127"/>
-                <a:ea typeface="맑은 고딕 Semilight" panose="020B0502040204020203" pitchFamily="50" charset="-127"/>
-                <a:cs typeface="맑은 고딕 Semilight" panose="020B0502040204020203" pitchFamily="50" charset="-127"/>
-              </a:rPr>
-              <a:t>Matrix multiplication</a:t>
-            </a:r>
-          </a:p>
-        </p:txBody>
-      </p:sp>
-    </p:spTree>
-    <p:extLst>
-      <p:ext uri="{BB962C8B-B14F-4D97-AF65-F5344CB8AC3E}">
-        <p14:creationId xmlns:p14="http://schemas.microsoft.com/office/powerpoint/2010/main" val="2867243791"/>
-      </p:ext>
-    </p:extLst>
-  </p:cSld>
-  <p:clrMapOvr>
-    <a:masterClrMapping/>
-  </p:clrMapOvr>
-  <mc:AlternateContent xmlns:mc="http://schemas.openxmlformats.org/markup-compatibility/2006" xmlns:p14="http://schemas.microsoft.com/office/powerpoint/2010/main">
-    <mc:Choice Requires="p14">
-      <p:transition p14:dur="10"/>
-    </mc:Choice>
-    <mc:Fallback xmlns="">
-      <p:transition/>
-    </mc:Fallback>
-  </mc:AlternateContent>
-</p:sld>
-</file>
-
-<file path=ppt/slides/slide50.xml><?xml version="1.0" encoding="utf-8"?>
+<file path=ppt/slides/slide48.xml><?xml version="1.0" encoding="utf-8"?>
 <p:sld xmlns:a="http://schemas.openxmlformats.org/drawingml/2006/main" xmlns:r="http://schemas.openxmlformats.org/officeDocument/2006/relationships" xmlns:p="http://schemas.openxmlformats.org/presentationml/2006/main">
   <p:cSld>
     <p:spTree>
@@ -22673,7 +22104,7 @@
             <a:fld id="{9860EDB8-5305-433F-BE41-D7A86D811DB3}" type="slidenum">
               <a:rPr lang="en-US" altLang="ko-KR" noProof="0" smtClean="0"/>
               <a:pPr/>
-              <a:t>50</a:t>
+              <a:t>48</a:t>
             </a:fld>
             <a:endParaRPr lang="ko-KR" altLang="en-US" noProof="0"/>
           </a:p>
@@ -22730,7 +22161,7 @@
 </p:sld>
 </file>
 
-<file path=ppt/slides/slide51.xml><?xml version="1.0" encoding="utf-8"?>
+<file path=ppt/slides/slide49.xml><?xml version="1.0" encoding="utf-8"?>
 <p:sld xmlns:a="http://schemas.openxmlformats.org/drawingml/2006/main" xmlns:r="http://schemas.openxmlformats.org/officeDocument/2006/relationships" xmlns:p="http://schemas.openxmlformats.org/presentationml/2006/main">
   <p:cSld>
     <p:spTree>
@@ -22815,7 +22246,7 @@
             <a:fld id="{9860EDB8-5305-433F-BE41-D7A86D811DB3}" type="slidenum">
               <a:rPr lang="en-US" altLang="ko-KR" noProof="0" smtClean="0"/>
               <a:pPr/>
-              <a:t>51</a:t>
+              <a:t>49</a:t>
             </a:fld>
             <a:endParaRPr lang="ko-KR" altLang="en-US" noProof="0"/>
           </a:p>
@@ -22872,7 +22303,358 @@
 </p:sld>
 </file>
 
-<file path=ppt/slides/slide52.xml><?xml version="1.0" encoding="utf-8"?>
+<file path=ppt/slides/slide5.xml><?xml version="1.0" encoding="utf-8"?>
+<p:sld xmlns:a="http://schemas.openxmlformats.org/drawingml/2006/main" xmlns:r="http://schemas.openxmlformats.org/officeDocument/2006/relationships" xmlns:p="http://schemas.openxmlformats.org/presentationml/2006/main">
+  <p:cSld>
+    <p:spTree>
+      <p:nvGrpSpPr>
+        <p:cNvPr id="1" name="">
+          <a:extLst>
+            <a:ext uri="{FF2B5EF4-FFF2-40B4-BE49-F238E27FC236}">
+              <a16:creationId xmlns:a16="http://schemas.microsoft.com/office/drawing/2014/main" id="{FD0D3AE7-002F-94A0-DA15-81A1CE310A3F}"/>
+            </a:ext>
+          </a:extLst>
+        </p:cNvPr>
+        <p:cNvGrpSpPr/>
+        <p:nvPr/>
+      </p:nvGrpSpPr>
+      <p:grpSpPr>
+        <a:xfrm>
+          <a:off x="0" y="0"/>
+          <a:ext cx="0" cy="0"/>
+          <a:chOff x="0" y="0"/>
+          <a:chExt cx="0" cy="0"/>
+        </a:xfrm>
+      </p:grpSpPr>
+      <p:sp>
+        <p:nvSpPr>
+          <p:cNvPr id="3" name="직사각형 2">
+            <a:extLst>
+              <a:ext uri="{FF2B5EF4-FFF2-40B4-BE49-F238E27FC236}">
+                <a16:creationId xmlns:a16="http://schemas.microsoft.com/office/drawing/2014/main" id="{C9AFE555-A66B-E0EE-1EF0-831B635FB249}"/>
+              </a:ext>
+            </a:extLst>
+          </p:cNvPr>
+          <p:cNvSpPr/>
+          <p:nvPr/>
+        </p:nvSpPr>
+        <p:spPr>
+          <a:xfrm>
+            <a:off x="895927" y="1457931"/>
+            <a:ext cx="5948218" cy="548669"/>
+          </a:xfrm>
+          <a:prstGeom prst="rect">
+            <a:avLst/>
+          </a:prstGeom>
+          <a:solidFill>
+            <a:schemeClr val="bg1">
+              <a:lumMod val="85000"/>
+            </a:schemeClr>
+          </a:solidFill>
+          <a:ln>
+            <a:noFill/>
+          </a:ln>
+        </p:spPr>
+        <p:style>
+          <a:lnRef idx="2">
+            <a:schemeClr val="accent1">
+              <a:shade val="15000"/>
+            </a:schemeClr>
+          </a:lnRef>
+          <a:fillRef idx="1">
+            <a:schemeClr val="accent1"/>
+          </a:fillRef>
+          <a:effectRef idx="0">
+            <a:schemeClr val="accent1"/>
+          </a:effectRef>
+          <a:fontRef idx="minor">
+            <a:schemeClr val="lt1"/>
+          </a:fontRef>
+        </p:style>
+        <p:txBody>
+          <a:bodyPr rtlCol="0" anchor="ctr"/>
+          <a:lstStyle/>
+          <a:p>
+            <a:pPr algn="ctr"/>
+            <a:endParaRPr lang="ko-KR" altLang="en-US" dirty="0"/>
+          </a:p>
+        </p:txBody>
+      </p:sp>
+      <p:sp>
+        <p:nvSpPr>
+          <p:cNvPr id="8" name="제목 7">
+            <a:extLst>
+              <a:ext uri="{FF2B5EF4-FFF2-40B4-BE49-F238E27FC236}">
+                <a16:creationId xmlns:a16="http://schemas.microsoft.com/office/drawing/2014/main" id="{E41AB3BA-A98A-DDCE-D6EA-2DF42D6CE40B}"/>
+              </a:ext>
+            </a:extLst>
+          </p:cNvPr>
+          <p:cNvSpPr>
+            <a:spLocks noGrp="1"/>
+          </p:cNvSpPr>
+          <p:nvPr>
+            <p:ph type="title"/>
+          </p:nvPr>
+        </p:nvSpPr>
+        <p:spPr>
+          <a:xfrm>
+            <a:off x="521207" y="448056"/>
+            <a:ext cx="8135613" cy="640080"/>
+          </a:xfrm>
+        </p:spPr>
+        <p:txBody>
+          <a:bodyPr rtlCol="0">
+            <a:noAutofit/>
+          </a:bodyPr>
+          <a:lstStyle/>
+          <a:p>
+            <a:pPr rtl="0"/>
+            <a:r>
+              <a:rPr lang="en-US" altLang="ko-KR" dirty="0">
+                <a:cs typeface="Segoe UI Light" panose="020B0502040204020203" pitchFamily="34" charset="0"/>
+              </a:rPr>
+              <a:t>Contents</a:t>
+            </a:r>
+            <a:endParaRPr lang="ko-KR" altLang="en-US" dirty="0">
+              <a:cs typeface="Segoe UI Light" panose="020B0502040204020203" pitchFamily="34" charset="0"/>
+            </a:endParaRPr>
+          </a:p>
+        </p:txBody>
+      </p:sp>
+      <p:sp>
+        <p:nvSpPr>
+          <p:cNvPr id="12" name="슬라이드 번호 개체 틀 11">
+            <a:extLst>
+              <a:ext uri="{FF2B5EF4-FFF2-40B4-BE49-F238E27FC236}">
+                <a16:creationId xmlns:a16="http://schemas.microsoft.com/office/drawing/2014/main" id="{FBA6C3AD-7EE6-C223-FA76-995C4A40A54C}"/>
+              </a:ext>
+            </a:extLst>
+          </p:cNvPr>
+          <p:cNvSpPr>
+            <a:spLocks noGrp="1"/>
+          </p:cNvSpPr>
+          <p:nvPr>
+            <p:ph type="sldNum" sz="quarter" idx="4"/>
+          </p:nvPr>
+        </p:nvSpPr>
+        <p:spPr/>
+        <p:txBody>
+          <a:bodyPr/>
+          <a:lstStyle/>
+          <a:p>
+            <a:fld id="{9860EDB8-5305-433F-BE41-D7A86D811DB3}" type="slidenum">
+              <a:rPr lang="en-US" altLang="ko-KR" noProof="0" smtClean="0"/>
+              <a:pPr/>
+              <a:t>5</a:t>
+            </a:fld>
+            <a:endParaRPr lang="ko-KR" altLang="en-US" noProof="0"/>
+          </a:p>
+        </p:txBody>
+      </p:sp>
+      <p:sp>
+        <p:nvSpPr>
+          <p:cNvPr id="2" name="TextBox 1">
+            <a:extLst>
+              <a:ext uri="{FF2B5EF4-FFF2-40B4-BE49-F238E27FC236}">
+                <a16:creationId xmlns:a16="http://schemas.microsoft.com/office/drawing/2014/main" id="{52C5C255-490D-636C-8D95-CEBDAA0AD5B9}"/>
+              </a:ext>
+            </a:extLst>
+          </p:cNvPr>
+          <p:cNvSpPr txBox="1"/>
+          <p:nvPr/>
+        </p:nvSpPr>
+        <p:spPr>
+          <a:xfrm>
+            <a:off x="1764145" y="1384043"/>
+            <a:ext cx="7250546" cy="5006948"/>
+          </a:xfrm>
+          <a:prstGeom prst="rect">
+            <a:avLst/>
+          </a:prstGeom>
+          <a:noFill/>
+        </p:spPr>
+        <p:txBody>
+          <a:bodyPr wrap="square" rtlCol="0">
+            <a:spAutoFit/>
+          </a:bodyPr>
+          <a:lstStyle/>
+          <a:p>
+            <a:pPr marL="457200" indent="-457200">
+              <a:lnSpc>
+                <a:spcPct val="150000"/>
+              </a:lnSpc>
+              <a:buFont typeface="+mj-lt"/>
+              <a:buAutoNum type="arabicPeriod"/>
+            </a:pPr>
+            <a:r>
+              <a:rPr lang="en-US" altLang="ko-KR" sz="2400" b="1" dirty="0">
+                <a:latin typeface="맑은 고딕 Semilight" panose="020B0502040204020203" pitchFamily="50" charset="-127"/>
+                <a:ea typeface="맑은 고딕 Semilight" panose="020B0502040204020203" pitchFamily="50" charset="-127"/>
+                <a:cs typeface="맑은 고딕 Semilight" panose="020B0502040204020203" pitchFamily="50" charset="-127"/>
+              </a:rPr>
+              <a:t>Vectors and their properties</a:t>
+            </a:r>
+          </a:p>
+          <a:p>
+            <a:pPr marL="457200" indent="-457200">
+              <a:lnSpc>
+                <a:spcPct val="150000"/>
+              </a:lnSpc>
+              <a:buFont typeface="+mj-lt"/>
+              <a:buAutoNum type="arabicPeriod"/>
+            </a:pPr>
+            <a:r>
+              <a:rPr lang="en-US" altLang="ko-KR" sz="2400" b="1" dirty="0">
+                <a:latin typeface="맑은 고딕 Semilight" panose="020B0502040204020203" pitchFamily="50" charset="-127"/>
+                <a:ea typeface="맑은 고딕 Semilight" panose="020B0502040204020203" pitchFamily="50" charset="-127"/>
+                <a:cs typeface="맑은 고딕 Semilight" panose="020B0502040204020203" pitchFamily="50" charset="-127"/>
+              </a:rPr>
+              <a:t>Sum and difference of vectors</a:t>
+            </a:r>
+          </a:p>
+          <a:p>
+            <a:pPr marL="457200" indent="-457200">
+              <a:lnSpc>
+                <a:spcPct val="150000"/>
+              </a:lnSpc>
+              <a:buFont typeface="+mj-lt"/>
+              <a:buAutoNum type="arabicPeriod"/>
+            </a:pPr>
+            <a:r>
+              <a:rPr lang="en-US" altLang="ko-KR" sz="2400" b="1" dirty="0">
+                <a:latin typeface="맑은 고딕 Semilight" panose="020B0502040204020203" pitchFamily="50" charset="-127"/>
+                <a:ea typeface="맑은 고딕 Semilight" panose="020B0502040204020203" pitchFamily="50" charset="-127"/>
+                <a:cs typeface="맑은 고딕 Semilight" panose="020B0502040204020203" pitchFamily="50" charset="-127"/>
+              </a:rPr>
+              <a:t>Distance between vectors</a:t>
+            </a:r>
+          </a:p>
+          <a:p>
+            <a:pPr marL="457200" indent="-457200">
+              <a:lnSpc>
+                <a:spcPct val="150000"/>
+              </a:lnSpc>
+              <a:buFont typeface="+mj-lt"/>
+              <a:buAutoNum type="arabicPeriod"/>
+            </a:pPr>
+            <a:r>
+              <a:rPr lang="en-US" altLang="ko-KR" sz="2400" b="1" dirty="0">
+                <a:latin typeface="맑은 고딕 Semilight" panose="020B0502040204020203" pitchFamily="50" charset="-127"/>
+                <a:ea typeface="맑은 고딕 Semilight" panose="020B0502040204020203" pitchFamily="50" charset="-127"/>
+                <a:cs typeface="맑은 고딕 Semilight" panose="020B0502040204020203" pitchFamily="50" charset="-127"/>
+              </a:rPr>
+              <a:t>Multiplying a vector by a scalar</a:t>
+            </a:r>
+          </a:p>
+          <a:p>
+            <a:pPr marL="457200" indent="-457200">
+              <a:lnSpc>
+                <a:spcPct val="150000"/>
+              </a:lnSpc>
+              <a:buFont typeface="+mj-lt"/>
+              <a:buAutoNum type="arabicPeriod"/>
+            </a:pPr>
+            <a:r>
+              <a:rPr lang="en-US" altLang="ko-KR" sz="2400" b="1" dirty="0">
+                <a:latin typeface="맑은 고딕 Semilight" panose="020B0502040204020203" pitchFamily="50" charset="-127"/>
+                <a:ea typeface="맑은 고딕 Semilight" panose="020B0502040204020203" pitchFamily="50" charset="-127"/>
+                <a:cs typeface="맑은 고딕 Semilight" panose="020B0502040204020203" pitchFamily="50" charset="-127"/>
+              </a:rPr>
+              <a:t>The dot product</a:t>
+            </a:r>
+          </a:p>
+          <a:p>
+            <a:pPr marL="457200" indent="-457200">
+              <a:lnSpc>
+                <a:spcPct val="150000"/>
+              </a:lnSpc>
+              <a:buFont typeface="+mj-lt"/>
+              <a:buAutoNum type="arabicPeriod"/>
+            </a:pPr>
+            <a:r>
+              <a:rPr lang="en-US" altLang="ko-KR" sz="2400" b="1" dirty="0">
+                <a:latin typeface="맑은 고딕 Semilight" panose="020B0502040204020203" pitchFamily="50" charset="-127"/>
+                <a:ea typeface="맑은 고딕 Semilight" panose="020B0502040204020203" pitchFamily="50" charset="-127"/>
+                <a:cs typeface="맑은 고딕 Semilight" panose="020B0502040204020203" pitchFamily="50" charset="-127"/>
+              </a:rPr>
+              <a:t>Geometric dot product</a:t>
+            </a:r>
+          </a:p>
+          <a:p>
+            <a:pPr marL="457200" indent="-457200">
+              <a:lnSpc>
+                <a:spcPct val="150000"/>
+              </a:lnSpc>
+              <a:buFont typeface="+mj-lt"/>
+              <a:buAutoNum type="arabicPeriod"/>
+            </a:pPr>
+            <a:r>
+              <a:rPr lang="en-US" altLang="ko-KR" sz="2400" b="1" dirty="0">
+                <a:latin typeface="맑은 고딕 Semilight" panose="020B0502040204020203" pitchFamily="50" charset="-127"/>
+                <a:ea typeface="맑은 고딕 Semilight" panose="020B0502040204020203" pitchFamily="50" charset="-127"/>
+                <a:cs typeface="맑은 고딕 Semilight" panose="020B0502040204020203" pitchFamily="50" charset="-127"/>
+              </a:rPr>
+              <a:t>Multiplying a matrix by a vector</a:t>
+            </a:r>
+          </a:p>
+          <a:p>
+            <a:pPr marL="457200" indent="-457200">
+              <a:lnSpc>
+                <a:spcPct val="150000"/>
+              </a:lnSpc>
+              <a:buFont typeface="+mj-lt"/>
+              <a:buAutoNum type="arabicPeriod"/>
+            </a:pPr>
+            <a:r>
+              <a:rPr lang="en-US" altLang="ko-KR" sz="2400" b="1" dirty="0">
+                <a:latin typeface="맑은 고딕 Semilight" panose="020B0502040204020203" pitchFamily="50" charset="-127"/>
+                <a:ea typeface="맑은 고딕 Semilight" panose="020B0502040204020203" pitchFamily="50" charset="-127"/>
+                <a:cs typeface="맑은 고딕 Semilight" panose="020B0502040204020203" pitchFamily="50" charset="-127"/>
+              </a:rPr>
+              <a:t>Matrices as linear transformations</a:t>
+            </a:r>
+          </a:p>
+          <a:p>
+            <a:pPr marL="457200" indent="-457200">
+              <a:lnSpc>
+                <a:spcPct val="150000"/>
+              </a:lnSpc>
+              <a:buFont typeface="+mj-lt"/>
+              <a:buAutoNum type="arabicPeriod"/>
+            </a:pPr>
+            <a:r>
+              <a:rPr lang="en-US" altLang="ko-KR" sz="2400" b="1" dirty="0">
+                <a:latin typeface="맑은 고딕 Semilight" panose="020B0502040204020203" pitchFamily="50" charset="-127"/>
+                <a:ea typeface="맑은 고딕 Semilight" panose="020B0502040204020203" pitchFamily="50" charset="-127"/>
+                <a:cs typeface="맑은 고딕 Semilight" panose="020B0502040204020203" pitchFamily="50" charset="-127"/>
+              </a:rPr>
+              <a:t>Matrix multiplication</a:t>
+            </a:r>
+          </a:p>
+        </p:txBody>
+      </p:sp>
+    </p:spTree>
+    <p:extLst>
+      <p:ext uri="{BB962C8B-B14F-4D97-AF65-F5344CB8AC3E}">
+        <p14:creationId xmlns:p14="http://schemas.microsoft.com/office/powerpoint/2010/main" val="2867243791"/>
+      </p:ext>
+    </p:extLst>
+  </p:cSld>
+  <p:clrMapOvr>
+    <a:masterClrMapping/>
+  </p:clrMapOvr>
+  <mc:AlternateContent xmlns:mc="http://schemas.openxmlformats.org/markup-compatibility/2006" xmlns:p14="http://schemas.microsoft.com/office/powerpoint/2010/main">
+    <mc:Choice Requires="p14">
+      <p:transition p14:dur="10"/>
+    </mc:Choice>
+    <mc:Fallback xmlns="">
+      <p:transition/>
+    </mc:Fallback>
+  </mc:AlternateContent>
+</p:sld>
+</file>
+
+<file path=ppt/slides/slide50.xml><?xml version="1.0" encoding="utf-8"?>
 <p:sld xmlns:a="http://schemas.openxmlformats.org/drawingml/2006/main" xmlns:r="http://schemas.openxmlformats.org/officeDocument/2006/relationships" xmlns:p="http://schemas.openxmlformats.org/presentationml/2006/main">
   <p:cSld>
     <p:spTree>
@@ -22957,7 +22739,7 @@
             <a:fld id="{9860EDB8-5305-433F-BE41-D7A86D811DB3}" type="slidenum">
               <a:rPr lang="en-US" altLang="ko-KR" noProof="0" smtClean="0"/>
               <a:pPr/>
-              <a:t>52</a:t>
+              <a:t>50</a:t>
             </a:fld>
             <a:endParaRPr lang="ko-KR" altLang="en-US" noProof="0"/>
           </a:p>
@@ -23014,7 +22796,7 @@
 </p:sld>
 </file>
 
-<file path=ppt/slides/slide53.xml><?xml version="1.0" encoding="utf-8"?>
+<file path=ppt/slides/slide51.xml><?xml version="1.0" encoding="utf-8"?>
 <p:sld xmlns:a="http://schemas.openxmlformats.org/drawingml/2006/main" xmlns:r="http://schemas.openxmlformats.org/officeDocument/2006/relationships" xmlns:p="http://schemas.openxmlformats.org/presentationml/2006/main">
   <p:cSld>
     <p:spTree>
@@ -23099,7 +22881,7 @@
             <a:fld id="{9860EDB8-5305-433F-BE41-D7A86D811DB3}" type="slidenum">
               <a:rPr lang="en-US" altLang="ko-KR" noProof="0" smtClean="0"/>
               <a:pPr/>
-              <a:t>53</a:t>
+              <a:t>51</a:t>
             </a:fld>
             <a:endParaRPr lang="ko-KR" altLang="en-US" noProof="0"/>
           </a:p>
@@ -23186,7 +22968,7 @@
 </p:sld>
 </file>
 
-<file path=ppt/slides/slide54.xml><?xml version="1.0" encoding="utf-8"?>
+<file path=ppt/slides/slide52.xml><?xml version="1.0" encoding="utf-8"?>
 <p:sld xmlns:a="http://schemas.openxmlformats.org/drawingml/2006/main" xmlns:r="http://schemas.openxmlformats.org/officeDocument/2006/relationships" xmlns:p="http://schemas.openxmlformats.org/presentationml/2006/main">
   <p:cSld>
     <p:spTree>
@@ -23271,7 +23053,7 @@
             <a:fld id="{9860EDB8-5305-433F-BE41-D7A86D811DB3}" type="slidenum">
               <a:rPr lang="en-US" altLang="ko-KR" noProof="0" smtClean="0"/>
               <a:pPr/>
-              <a:t>54</a:t>
+              <a:t>52</a:t>
             </a:fld>
             <a:endParaRPr lang="ko-KR" altLang="en-US" noProof="0"/>
           </a:p>
@@ -23435,7 +23217,7 @@
 </p:sld>
 </file>
 
-<file path=ppt/slides/slide55.xml><?xml version="1.0" encoding="utf-8"?>
+<file path=ppt/slides/slide53.xml><?xml version="1.0" encoding="utf-8"?>
 <p:sld xmlns:a="http://schemas.openxmlformats.org/drawingml/2006/main" xmlns:r="http://schemas.openxmlformats.org/officeDocument/2006/relationships" xmlns:p="http://schemas.openxmlformats.org/presentationml/2006/main">
   <p:cSld>
     <p:spTree>
@@ -24138,7 +23920,7 @@
             <a:fld id="{D57F1E4F-1CFF-5643-939E-217C01CDF565}" type="slidenum">
               <a:rPr lang="en-US" sz="2000" smtClean="0"/>
               <a:pPr/>
-              <a:t>55</a:t>
+              <a:t>53</a:t>
             </a:fld>
             <a:endParaRPr lang="en-US" sz="2000" dirty="0"/>
           </a:p>
@@ -24157,7 +23939,7 @@
 </p:sld>
 </file>
 
-<file path=ppt/slides/slide56.xml><?xml version="1.0" encoding="utf-8"?>
+<file path=ppt/slides/slide54.xml><?xml version="1.0" encoding="utf-8"?>
 <p:sld xmlns:a="http://schemas.openxmlformats.org/drawingml/2006/main" xmlns:r="http://schemas.openxmlformats.org/officeDocument/2006/relationships" xmlns:p="http://schemas.openxmlformats.org/presentationml/2006/main">
   <p:cSld>
     <p:spTree>
@@ -24961,7 +24743,7 @@
             <a:fld id="{D57F1E4F-1CFF-5643-939E-217C01CDF565}" type="slidenum">
               <a:rPr lang="en-US" sz="2000" smtClean="0"/>
               <a:pPr/>
-              <a:t>56</a:t>
+              <a:t>54</a:t>
             </a:fld>
             <a:endParaRPr lang="en-US" sz="2000" dirty="0"/>
           </a:p>
@@ -25017,7 +24799,7 @@
 </p:sld>
 </file>
 
-<file path=ppt/slides/slide57.xml><?xml version="1.0" encoding="utf-8"?>
+<file path=ppt/slides/slide55.xml><?xml version="1.0" encoding="utf-8"?>
 <p:sld xmlns:a="http://schemas.openxmlformats.org/drawingml/2006/main" xmlns:r="http://schemas.openxmlformats.org/officeDocument/2006/relationships" xmlns:p="http://schemas.openxmlformats.org/presentationml/2006/main">
   <p:cSld>
     <p:spTree>
@@ -25824,7 +25606,7 @@
 </p:sld>
 </file>
 
-<file path=ppt/slides/slide58.xml><?xml version="1.0" encoding="utf-8"?>
+<file path=ppt/slides/slide56.xml><?xml version="1.0" encoding="utf-8"?>
 <p:sld xmlns:a="http://schemas.openxmlformats.org/drawingml/2006/main" xmlns:r="http://schemas.openxmlformats.org/officeDocument/2006/relationships" xmlns:p="http://schemas.openxmlformats.org/presentationml/2006/main">
   <p:cSld>
     <p:spTree>
@@ -26746,7 +26528,7 @@
 </p:sld>
 </file>
 
-<file path=ppt/slides/slide59.xml><?xml version="1.0" encoding="utf-8"?>
+<file path=ppt/slides/slide57.xml><?xml version="1.0" encoding="utf-8"?>
 <p:sld xmlns:a="http://schemas.openxmlformats.org/drawingml/2006/main" xmlns:r="http://schemas.openxmlformats.org/officeDocument/2006/relationships" xmlns:p="http://schemas.openxmlformats.org/presentationml/2006/main">
   <p:cSld>
     <p:spTree>
@@ -26937,228 +26719,7 @@
 </p:sld>
 </file>
 
-<file path=ppt/slides/slide6.xml><?xml version="1.0" encoding="utf-8"?>
-<p:sld xmlns:a="http://schemas.openxmlformats.org/drawingml/2006/main" xmlns:r="http://schemas.openxmlformats.org/officeDocument/2006/relationships" xmlns:p="http://schemas.openxmlformats.org/presentationml/2006/main">
-  <p:cSld>
-    <p:spTree>
-      <p:nvGrpSpPr>
-        <p:cNvPr id="1" name="">
-          <a:extLst>
-            <a:ext uri="{FF2B5EF4-FFF2-40B4-BE49-F238E27FC236}">
-              <a16:creationId xmlns:a16="http://schemas.microsoft.com/office/drawing/2014/main" id="{8F177369-1E15-5F94-FD6C-4893AFE87888}"/>
-            </a:ext>
-          </a:extLst>
-        </p:cNvPr>
-        <p:cNvGrpSpPr/>
-        <p:nvPr/>
-      </p:nvGrpSpPr>
-      <p:grpSpPr>
-        <a:xfrm>
-          <a:off x="0" y="0"/>
-          <a:ext cx="0" cy="0"/>
-          <a:chOff x="0" y="0"/>
-          <a:chExt cx="0" cy="0"/>
-        </a:xfrm>
-      </p:grpSpPr>
-      <p:sp>
-        <p:nvSpPr>
-          <p:cNvPr id="8" name="제목 7">
-            <a:extLst>
-              <a:ext uri="{FF2B5EF4-FFF2-40B4-BE49-F238E27FC236}">
-                <a16:creationId xmlns:a16="http://schemas.microsoft.com/office/drawing/2014/main" id="{26F4CC8A-A34F-E8DB-36C1-488614982C81}"/>
-              </a:ext>
-            </a:extLst>
-          </p:cNvPr>
-          <p:cNvSpPr>
-            <a:spLocks noGrp="1"/>
-          </p:cNvSpPr>
-          <p:nvPr>
-            <p:ph type="title"/>
-          </p:nvPr>
-        </p:nvSpPr>
-        <p:spPr>
-          <a:xfrm>
-            <a:off x="521207" y="448056"/>
-            <a:ext cx="8135613" cy="640080"/>
-          </a:xfrm>
-        </p:spPr>
-        <p:txBody>
-          <a:bodyPr rtlCol="0">
-            <a:noAutofit/>
-          </a:bodyPr>
-          <a:lstStyle/>
-          <a:p>
-            <a:pPr rtl="0"/>
-            <a:r>
-              <a:rPr lang="en-US" altLang="ko-KR" dirty="0">
-                <a:cs typeface="Segoe UI Light" panose="020B0502040204020203" pitchFamily="34" charset="0"/>
-              </a:rPr>
-              <a:t>Vectors</a:t>
-            </a:r>
-            <a:endParaRPr lang="ko-KR" altLang="en-US" dirty="0">
-              <a:cs typeface="Segoe UI Light" panose="020B0502040204020203" pitchFamily="34" charset="0"/>
-            </a:endParaRPr>
-          </a:p>
-        </p:txBody>
-      </p:sp>
-      <p:sp>
-        <p:nvSpPr>
-          <p:cNvPr id="12" name="슬라이드 번호 개체 틀 11">
-            <a:extLst>
-              <a:ext uri="{FF2B5EF4-FFF2-40B4-BE49-F238E27FC236}">
-                <a16:creationId xmlns:a16="http://schemas.microsoft.com/office/drawing/2014/main" id="{5750F1BC-B3A2-4A2B-32AC-7F76AD12B5DA}"/>
-              </a:ext>
-            </a:extLst>
-          </p:cNvPr>
-          <p:cNvSpPr>
-            <a:spLocks noGrp="1"/>
-          </p:cNvSpPr>
-          <p:nvPr>
-            <p:ph type="sldNum" sz="quarter" idx="4"/>
-          </p:nvPr>
-        </p:nvSpPr>
-        <p:spPr/>
-        <p:txBody>
-          <a:bodyPr/>
-          <a:lstStyle/>
-          <a:p>
-            <a:fld id="{9860EDB8-5305-433F-BE41-D7A86D811DB3}" type="slidenum">
-              <a:rPr lang="en-US" altLang="ko-KR" noProof="0" smtClean="0"/>
-              <a:pPr/>
-              <a:t>6</a:t>
-            </a:fld>
-            <a:endParaRPr lang="ko-KR" altLang="en-US" noProof="0"/>
-          </a:p>
-        </p:txBody>
-      </p:sp>
-      <p:pic>
-        <p:nvPicPr>
-          <p:cNvPr id="4" name="그림 3">
-            <a:extLst>
-              <a:ext uri="{FF2B5EF4-FFF2-40B4-BE49-F238E27FC236}">
-                <a16:creationId xmlns:a16="http://schemas.microsoft.com/office/drawing/2014/main" id="{2E1AD8E8-F92C-B59E-E547-66C8AC4227A4}"/>
-              </a:ext>
-            </a:extLst>
-          </p:cNvPr>
-          <p:cNvPicPr>
-            <a:picLocks noChangeAspect="1"/>
-          </p:cNvPicPr>
-          <p:nvPr/>
-        </p:nvPicPr>
-        <p:blipFill>
-          <a:blip r:embed="rId3"/>
-          <a:stretch>
-            <a:fillRect/>
-          </a:stretch>
-        </p:blipFill>
-        <p:spPr>
-          <a:xfrm>
-            <a:off x="1403927" y="1852703"/>
-            <a:ext cx="8891077" cy="4145671"/>
-          </a:xfrm>
-          <a:prstGeom prst="rect">
-            <a:avLst/>
-          </a:prstGeom>
-        </p:spPr>
-      </p:pic>
-      <p:sp>
-        <p:nvSpPr>
-          <p:cNvPr id="6" name="TextBox 5">
-            <a:extLst>
-              <a:ext uri="{FF2B5EF4-FFF2-40B4-BE49-F238E27FC236}">
-                <a16:creationId xmlns:a16="http://schemas.microsoft.com/office/drawing/2014/main" id="{1F0BE70D-4CA4-2CB0-BEC0-19211FCF4328}"/>
-              </a:ext>
-            </a:extLst>
-          </p:cNvPr>
-          <p:cNvSpPr txBox="1"/>
-          <p:nvPr/>
-        </p:nvSpPr>
-        <p:spPr>
-          <a:xfrm>
-            <a:off x="4491719" y="1483371"/>
-            <a:ext cx="1847273" cy="369332"/>
-          </a:xfrm>
-          <a:prstGeom prst="rect">
-            <a:avLst/>
-          </a:prstGeom>
-          <a:noFill/>
-        </p:spPr>
-        <p:txBody>
-          <a:bodyPr wrap="square">
-            <a:spAutoFit/>
-          </a:bodyPr>
-          <a:lstStyle/>
-          <a:p>
-            <a:r>
-              <a:rPr lang="en-US" altLang="ko-KR" dirty="0">
-                <a:cs typeface="Segoe UI Light" panose="020B0502040204020203" pitchFamily="34" charset="0"/>
-              </a:rPr>
-              <a:t>Magnitude</a:t>
-            </a:r>
-            <a:endParaRPr lang="ko-KR" altLang="en-US" dirty="0"/>
-          </a:p>
-        </p:txBody>
-      </p:sp>
-      <p:sp>
-        <p:nvSpPr>
-          <p:cNvPr id="9" name="TextBox 8">
-            <a:extLst>
-              <a:ext uri="{FF2B5EF4-FFF2-40B4-BE49-F238E27FC236}">
-                <a16:creationId xmlns:a16="http://schemas.microsoft.com/office/drawing/2014/main" id="{62B40E43-D0F1-86C6-26CC-845A42FD372C}"/>
-              </a:ext>
-            </a:extLst>
-          </p:cNvPr>
-          <p:cNvSpPr txBox="1"/>
-          <p:nvPr/>
-        </p:nvSpPr>
-        <p:spPr>
-          <a:xfrm>
-            <a:off x="6964218" y="1483371"/>
-            <a:ext cx="1293091" cy="369332"/>
-          </a:xfrm>
-          <a:prstGeom prst="rect">
-            <a:avLst/>
-          </a:prstGeom>
-          <a:noFill/>
-        </p:spPr>
-        <p:txBody>
-          <a:bodyPr wrap="square">
-            <a:spAutoFit/>
-          </a:bodyPr>
-          <a:lstStyle/>
-          <a:p>
-            <a:r>
-              <a:rPr lang="en-US" altLang="ko-KR" dirty="0">
-                <a:cs typeface="Segoe UI Light" panose="020B0502040204020203" pitchFamily="34" charset="0"/>
-              </a:rPr>
-              <a:t>Directions</a:t>
-            </a:r>
-            <a:endParaRPr lang="ko-KR" altLang="en-US" dirty="0"/>
-          </a:p>
-        </p:txBody>
-      </p:sp>
-    </p:spTree>
-    <p:extLst>
-      <p:ext uri="{BB962C8B-B14F-4D97-AF65-F5344CB8AC3E}">
-        <p14:creationId xmlns:p14="http://schemas.microsoft.com/office/powerpoint/2010/main" val="3865646897"/>
-      </p:ext>
-    </p:extLst>
-  </p:cSld>
-  <p:clrMapOvr>
-    <a:masterClrMapping/>
-  </p:clrMapOvr>
-  <mc:AlternateContent xmlns:mc="http://schemas.openxmlformats.org/markup-compatibility/2006" xmlns:p14="http://schemas.microsoft.com/office/powerpoint/2010/main">
-    <mc:Choice Requires="p14">
-      <p:transition p14:dur="10"/>
-    </mc:Choice>
-    <mc:Fallback xmlns="">
-      <p:transition/>
-    </mc:Fallback>
-  </mc:AlternateContent>
-</p:sld>
-</file>
-
-<file path=ppt/slides/slide60.xml><?xml version="1.0" encoding="utf-8"?>
+<file path=ppt/slides/slide58.xml><?xml version="1.0" encoding="utf-8"?>
 <p:sld xmlns:a="http://schemas.openxmlformats.org/drawingml/2006/main" xmlns:r="http://schemas.openxmlformats.org/officeDocument/2006/relationships" xmlns:p="http://schemas.openxmlformats.org/presentationml/2006/main">
   <p:cSld>
     <p:spTree>
@@ -27363,7 +26924,7 @@
 </p:sld>
 </file>
 
-<file path=ppt/slides/slide61.xml><?xml version="1.0" encoding="utf-8"?>
+<file path=ppt/slides/slide59.xml><?xml version="1.0" encoding="utf-8"?>
 <p:sld xmlns:a="http://schemas.openxmlformats.org/drawingml/2006/main" xmlns:r="http://schemas.openxmlformats.org/officeDocument/2006/relationships" xmlns:p="http://schemas.openxmlformats.org/presentationml/2006/main">
   <p:cSld>
     <p:spTree>
@@ -27467,7 +27028,7 @@
             <a:fld id="{D57F1E4F-1CFF-5643-939E-217C01CDF565}" type="slidenum">
               <a:rPr lang="en-US" smtClean="0"/>
               <a:pPr/>
-              <a:t>61</a:t>
+              <a:t>59</a:t>
             </a:fld>
             <a:endParaRPr lang="en-US" dirty="0"/>
           </a:p>
@@ -28664,7 +28225,228 @@
 </p:sld>
 </file>
 
-<file path=ppt/slides/slide62.xml><?xml version="1.0" encoding="utf-8"?>
+<file path=ppt/slides/slide6.xml><?xml version="1.0" encoding="utf-8"?>
+<p:sld xmlns:a="http://schemas.openxmlformats.org/drawingml/2006/main" xmlns:r="http://schemas.openxmlformats.org/officeDocument/2006/relationships" xmlns:p="http://schemas.openxmlformats.org/presentationml/2006/main">
+  <p:cSld>
+    <p:spTree>
+      <p:nvGrpSpPr>
+        <p:cNvPr id="1" name="">
+          <a:extLst>
+            <a:ext uri="{FF2B5EF4-FFF2-40B4-BE49-F238E27FC236}">
+              <a16:creationId xmlns:a16="http://schemas.microsoft.com/office/drawing/2014/main" id="{8F177369-1E15-5F94-FD6C-4893AFE87888}"/>
+            </a:ext>
+          </a:extLst>
+        </p:cNvPr>
+        <p:cNvGrpSpPr/>
+        <p:nvPr/>
+      </p:nvGrpSpPr>
+      <p:grpSpPr>
+        <a:xfrm>
+          <a:off x="0" y="0"/>
+          <a:ext cx="0" cy="0"/>
+          <a:chOff x="0" y="0"/>
+          <a:chExt cx="0" cy="0"/>
+        </a:xfrm>
+      </p:grpSpPr>
+      <p:sp>
+        <p:nvSpPr>
+          <p:cNvPr id="8" name="제목 7">
+            <a:extLst>
+              <a:ext uri="{FF2B5EF4-FFF2-40B4-BE49-F238E27FC236}">
+                <a16:creationId xmlns:a16="http://schemas.microsoft.com/office/drawing/2014/main" id="{26F4CC8A-A34F-E8DB-36C1-488614982C81}"/>
+              </a:ext>
+            </a:extLst>
+          </p:cNvPr>
+          <p:cNvSpPr>
+            <a:spLocks noGrp="1"/>
+          </p:cNvSpPr>
+          <p:nvPr>
+            <p:ph type="title"/>
+          </p:nvPr>
+        </p:nvSpPr>
+        <p:spPr>
+          <a:xfrm>
+            <a:off x="521207" y="448056"/>
+            <a:ext cx="8135613" cy="640080"/>
+          </a:xfrm>
+        </p:spPr>
+        <p:txBody>
+          <a:bodyPr rtlCol="0">
+            <a:noAutofit/>
+          </a:bodyPr>
+          <a:lstStyle/>
+          <a:p>
+            <a:pPr rtl="0"/>
+            <a:r>
+              <a:rPr lang="en-US" altLang="ko-KR" dirty="0">
+                <a:cs typeface="Segoe UI Light" panose="020B0502040204020203" pitchFamily="34" charset="0"/>
+              </a:rPr>
+              <a:t>Vectors</a:t>
+            </a:r>
+            <a:endParaRPr lang="ko-KR" altLang="en-US" dirty="0">
+              <a:cs typeface="Segoe UI Light" panose="020B0502040204020203" pitchFamily="34" charset="0"/>
+            </a:endParaRPr>
+          </a:p>
+        </p:txBody>
+      </p:sp>
+      <p:sp>
+        <p:nvSpPr>
+          <p:cNvPr id="12" name="슬라이드 번호 개체 틀 11">
+            <a:extLst>
+              <a:ext uri="{FF2B5EF4-FFF2-40B4-BE49-F238E27FC236}">
+                <a16:creationId xmlns:a16="http://schemas.microsoft.com/office/drawing/2014/main" id="{5750F1BC-B3A2-4A2B-32AC-7F76AD12B5DA}"/>
+              </a:ext>
+            </a:extLst>
+          </p:cNvPr>
+          <p:cNvSpPr>
+            <a:spLocks noGrp="1"/>
+          </p:cNvSpPr>
+          <p:nvPr>
+            <p:ph type="sldNum" sz="quarter" idx="4"/>
+          </p:nvPr>
+        </p:nvSpPr>
+        <p:spPr/>
+        <p:txBody>
+          <a:bodyPr/>
+          <a:lstStyle/>
+          <a:p>
+            <a:fld id="{9860EDB8-5305-433F-BE41-D7A86D811DB3}" type="slidenum">
+              <a:rPr lang="en-US" altLang="ko-KR" noProof="0" smtClean="0"/>
+              <a:pPr/>
+              <a:t>6</a:t>
+            </a:fld>
+            <a:endParaRPr lang="ko-KR" altLang="en-US" noProof="0"/>
+          </a:p>
+        </p:txBody>
+      </p:sp>
+      <p:pic>
+        <p:nvPicPr>
+          <p:cNvPr id="4" name="그림 3">
+            <a:extLst>
+              <a:ext uri="{FF2B5EF4-FFF2-40B4-BE49-F238E27FC236}">
+                <a16:creationId xmlns:a16="http://schemas.microsoft.com/office/drawing/2014/main" id="{2E1AD8E8-F92C-B59E-E547-66C8AC4227A4}"/>
+              </a:ext>
+            </a:extLst>
+          </p:cNvPr>
+          <p:cNvPicPr>
+            <a:picLocks noChangeAspect="1"/>
+          </p:cNvPicPr>
+          <p:nvPr/>
+        </p:nvPicPr>
+        <p:blipFill>
+          <a:blip r:embed="rId3"/>
+          <a:stretch>
+            <a:fillRect/>
+          </a:stretch>
+        </p:blipFill>
+        <p:spPr>
+          <a:xfrm>
+            <a:off x="1403927" y="1852703"/>
+            <a:ext cx="8891077" cy="4145671"/>
+          </a:xfrm>
+          <a:prstGeom prst="rect">
+            <a:avLst/>
+          </a:prstGeom>
+        </p:spPr>
+      </p:pic>
+      <p:sp>
+        <p:nvSpPr>
+          <p:cNvPr id="6" name="TextBox 5">
+            <a:extLst>
+              <a:ext uri="{FF2B5EF4-FFF2-40B4-BE49-F238E27FC236}">
+                <a16:creationId xmlns:a16="http://schemas.microsoft.com/office/drawing/2014/main" id="{1F0BE70D-4CA4-2CB0-BEC0-19211FCF4328}"/>
+              </a:ext>
+            </a:extLst>
+          </p:cNvPr>
+          <p:cNvSpPr txBox="1"/>
+          <p:nvPr/>
+        </p:nvSpPr>
+        <p:spPr>
+          <a:xfrm>
+            <a:off x="4491719" y="1483371"/>
+            <a:ext cx="1847273" cy="369332"/>
+          </a:xfrm>
+          <a:prstGeom prst="rect">
+            <a:avLst/>
+          </a:prstGeom>
+          <a:noFill/>
+        </p:spPr>
+        <p:txBody>
+          <a:bodyPr wrap="square">
+            <a:spAutoFit/>
+          </a:bodyPr>
+          <a:lstStyle/>
+          <a:p>
+            <a:r>
+              <a:rPr lang="en-US" altLang="ko-KR" dirty="0">
+                <a:cs typeface="Segoe UI Light" panose="020B0502040204020203" pitchFamily="34" charset="0"/>
+              </a:rPr>
+              <a:t>Magnitude</a:t>
+            </a:r>
+            <a:endParaRPr lang="ko-KR" altLang="en-US" dirty="0"/>
+          </a:p>
+        </p:txBody>
+      </p:sp>
+      <p:sp>
+        <p:nvSpPr>
+          <p:cNvPr id="9" name="TextBox 8">
+            <a:extLst>
+              <a:ext uri="{FF2B5EF4-FFF2-40B4-BE49-F238E27FC236}">
+                <a16:creationId xmlns:a16="http://schemas.microsoft.com/office/drawing/2014/main" id="{62B40E43-D0F1-86C6-26CC-845A42FD372C}"/>
+              </a:ext>
+            </a:extLst>
+          </p:cNvPr>
+          <p:cNvSpPr txBox="1"/>
+          <p:nvPr/>
+        </p:nvSpPr>
+        <p:spPr>
+          <a:xfrm>
+            <a:off x="6964218" y="1483371"/>
+            <a:ext cx="1293091" cy="369332"/>
+          </a:xfrm>
+          <a:prstGeom prst="rect">
+            <a:avLst/>
+          </a:prstGeom>
+          <a:noFill/>
+        </p:spPr>
+        <p:txBody>
+          <a:bodyPr wrap="square">
+            <a:spAutoFit/>
+          </a:bodyPr>
+          <a:lstStyle/>
+          <a:p>
+            <a:r>
+              <a:rPr lang="en-US" altLang="ko-KR" dirty="0">
+                <a:cs typeface="Segoe UI Light" panose="020B0502040204020203" pitchFamily="34" charset="0"/>
+              </a:rPr>
+              <a:t>Directions</a:t>
+            </a:r>
+            <a:endParaRPr lang="ko-KR" altLang="en-US" dirty="0"/>
+          </a:p>
+        </p:txBody>
+      </p:sp>
+    </p:spTree>
+    <p:extLst>
+      <p:ext uri="{BB962C8B-B14F-4D97-AF65-F5344CB8AC3E}">
+        <p14:creationId xmlns:p14="http://schemas.microsoft.com/office/powerpoint/2010/main" val="3865646897"/>
+      </p:ext>
+    </p:extLst>
+  </p:cSld>
+  <p:clrMapOvr>
+    <a:masterClrMapping/>
+  </p:clrMapOvr>
+  <mc:AlternateContent xmlns:mc="http://schemas.openxmlformats.org/markup-compatibility/2006" xmlns:p14="http://schemas.microsoft.com/office/powerpoint/2010/main">
+    <mc:Choice Requires="p14">
+      <p:transition p14:dur="10"/>
+    </mc:Choice>
+    <mc:Fallback xmlns="">
+      <p:transition/>
+    </mc:Fallback>
+  </mc:AlternateContent>
+</p:sld>
+</file>
+
+<file path=ppt/slides/slide60.xml><?xml version="1.0" encoding="utf-8"?>
 <p:sld xmlns:a="http://schemas.openxmlformats.org/drawingml/2006/main" xmlns:r="http://schemas.openxmlformats.org/officeDocument/2006/relationships" xmlns:p="http://schemas.openxmlformats.org/presentationml/2006/main">
   <p:cSld>
     <p:spTree>
@@ -28735,7 +28517,7 @@
             <a:fld id="{D57F1E4F-1CFF-5643-939E-217C01CDF565}" type="slidenum">
               <a:rPr lang="en-US" smtClean="0"/>
               <a:pPr/>
-              <a:t>62</a:t>
+              <a:t>60</a:t>
             </a:fld>
             <a:endParaRPr lang="en-US" dirty="0"/>
           </a:p>
@@ -30727,7 +30509,7 @@
 </p:sld>
 </file>
 
-<file path=ppt/slides/slide63.xml><?xml version="1.0" encoding="utf-8"?>
+<file path=ppt/slides/slide61.xml><?xml version="1.0" encoding="utf-8"?>
 <p:sld xmlns:a="http://schemas.openxmlformats.org/drawingml/2006/main" xmlns:r="http://schemas.openxmlformats.org/officeDocument/2006/relationships" xmlns:p="http://schemas.openxmlformats.org/presentationml/2006/main">
   <p:cSld>
     <p:spTree>
@@ -30816,7 +30598,7 @@
             <a:fld id="{D57F1E4F-1CFF-5643-939E-217C01CDF565}" type="slidenum">
               <a:rPr lang="en-US" smtClean="0"/>
               <a:pPr/>
-              <a:t>63</a:t>
+              <a:t>61</a:t>
             </a:fld>
             <a:endParaRPr lang="en-US" dirty="0"/>
           </a:p>
@@ -32001,7 +31783,7 @@
 </p:sld>
 </file>
 
-<file path=ppt/slides/slide64.xml><?xml version="1.0" encoding="utf-8"?>
+<file path=ppt/slides/slide62.xml><?xml version="1.0" encoding="utf-8"?>
 <p:sld xmlns:a="http://schemas.openxmlformats.org/drawingml/2006/main" xmlns:r="http://schemas.openxmlformats.org/officeDocument/2006/relationships" xmlns:p="http://schemas.openxmlformats.org/presentationml/2006/main">
   <p:cSld>
     <p:spTree>
